--- a/Group 3 Seizures Deep Learning Presentation.pptx
+++ b/Group 3 Seizures Deep Learning Presentation.pptx
@@ -5,31 +5,23 @@
     <p:sldMasterId id="2147483756" r:id="rId1"/>
   </p:sldMasterIdLst>
   <p:notesMasterIdLst>
-    <p:notesMasterId r:id="rId24"/>
+    <p:notesMasterId r:id="rId16"/>
   </p:notesMasterIdLst>
   <p:sldIdLst>
     <p:sldId id="256" r:id="rId2"/>
     <p:sldId id="299" r:id="rId3"/>
-    <p:sldId id="267" r:id="rId4"/>
+    <p:sldId id="304" r:id="rId4"/>
     <p:sldId id="263" r:id="rId5"/>
     <p:sldId id="277" r:id="rId6"/>
-    <p:sldId id="293" r:id="rId7"/>
-    <p:sldId id="298" r:id="rId8"/>
-    <p:sldId id="278" r:id="rId9"/>
-    <p:sldId id="282" r:id="rId10"/>
-    <p:sldId id="284" r:id="rId11"/>
-    <p:sldId id="291" r:id="rId12"/>
-    <p:sldId id="300" r:id="rId13"/>
-    <p:sldId id="271" r:id="rId14"/>
-    <p:sldId id="287" r:id="rId15"/>
-    <p:sldId id="303" r:id="rId16"/>
-    <p:sldId id="285" r:id="rId17"/>
-    <p:sldId id="302" r:id="rId18"/>
-    <p:sldId id="288" r:id="rId19"/>
-    <p:sldId id="296" r:id="rId20"/>
-    <p:sldId id="297" r:id="rId21"/>
-    <p:sldId id="301" r:id="rId22"/>
-    <p:sldId id="275" r:id="rId23"/>
+    <p:sldId id="298" r:id="rId7"/>
+    <p:sldId id="278" r:id="rId8"/>
+    <p:sldId id="305" r:id="rId9"/>
+    <p:sldId id="303" r:id="rId10"/>
+    <p:sldId id="285" r:id="rId11"/>
+    <p:sldId id="307" r:id="rId12"/>
+    <p:sldId id="306" r:id="rId13"/>
+    <p:sldId id="288" r:id="rId14"/>
+    <p:sldId id="275" r:id="rId15"/>
   </p:sldIdLst>
   <p:sldSz cx="12192000" cy="6858000"/>
   <p:notesSz cx="6858000" cy="9144000"/>
@@ -139,9 +131,718 @@
 <file path=ppt/revisionInfo.xml><?xml version="1.0" encoding="utf-8"?>
 <p1510:revInfo xmlns:a="http://schemas.openxmlformats.org/drawingml/2006/main" xmlns:r="http://schemas.openxmlformats.org/officeDocument/2006/relationships" xmlns:p1510="http://schemas.microsoft.com/office/powerpoint/2015/10/main">
   <p1510:revLst>
-    <p1510:client id="{1D27F2A1-4458-C142-8427-E414F0F59EC5}" v="19" dt="2026-03-12T17:27:36.432"/>
+    <p1510:client id="{1D27F2A1-4458-C142-8427-E414F0F59EC5}" v="88" dt="2026-03-24T21:36:18.486"/>
   </p1510:revLst>
 </p1510:revInfo>
+</file>
+
+<file path=ppt/changesInfos/changesInfo1.xml><?xml version="1.0" encoding="utf-8"?>
+<pc:chgInfo xmlns:a="http://schemas.openxmlformats.org/drawingml/2006/main" xmlns:r="http://schemas.openxmlformats.org/officeDocument/2006/relationships" xmlns:ac="http://schemas.microsoft.com/office/drawing/2013/main/command" xmlns:pc="http://schemas.microsoft.com/office/powerpoint/2013/main/command">
+  <pc:docChgLst>
+    <pc:chgData name="Enoch Shin" userId="c39a6cce-38ff-4294-b6f2-b2b8f4cccef0" providerId="ADAL" clId="{EFE24D46-2511-5DA4-B14A-5403E002676C}"/>
+    <pc:docChg chg="undo redo custSel addSld delSld modSld sldOrd">
+      <pc:chgData name="Enoch Shin" userId="c39a6cce-38ff-4294-b6f2-b2b8f4cccef0" providerId="ADAL" clId="{EFE24D46-2511-5DA4-B14A-5403E002676C}" dt="2026-03-24T21:36:18.486" v="4516"/>
+      <pc:docMkLst>
+        <pc:docMk/>
+      </pc:docMkLst>
+      <pc:sldChg chg="setBg">
+        <pc:chgData name="Enoch Shin" userId="c39a6cce-38ff-4294-b6f2-b2b8f4cccef0" providerId="ADAL" clId="{EFE24D46-2511-5DA4-B14A-5403E002676C}" dt="2026-03-24T21:36:18.486" v="4516"/>
+        <pc:sldMkLst>
+          <pc:docMk/>
+          <pc:sldMk cId="2360785336" sldId="256"/>
+        </pc:sldMkLst>
+      </pc:sldChg>
+      <pc:sldChg chg="addSp modSp mod setBg">
+        <pc:chgData name="Enoch Shin" userId="c39a6cce-38ff-4294-b6f2-b2b8f4cccef0" providerId="ADAL" clId="{EFE24D46-2511-5DA4-B14A-5403E002676C}" dt="2026-03-24T21:36:18.486" v="4516"/>
+        <pc:sldMkLst>
+          <pc:docMk/>
+          <pc:sldMk cId="1686003966" sldId="263"/>
+        </pc:sldMkLst>
+        <pc:spChg chg="mod">
+          <ac:chgData name="Enoch Shin" userId="c39a6cce-38ff-4294-b6f2-b2b8f4cccef0" providerId="ADAL" clId="{EFE24D46-2511-5DA4-B14A-5403E002676C}" dt="2026-03-24T21:13:27.483" v="2440" actId="20577"/>
+          <ac:spMkLst>
+            <pc:docMk/>
+            <pc:sldMk cId="1686003966" sldId="263"/>
+            <ac:spMk id="3" creationId="{7B696EE4-429D-F413-7A3F-AE698B1C4B37}"/>
+          </ac:spMkLst>
+        </pc:spChg>
+        <pc:spChg chg="add mod">
+          <ac:chgData name="Enoch Shin" userId="c39a6cce-38ff-4294-b6f2-b2b8f4cccef0" providerId="ADAL" clId="{EFE24D46-2511-5DA4-B14A-5403E002676C}" dt="2026-03-19T16:44:42.830" v="1242" actId="1076"/>
+          <ac:spMkLst>
+            <pc:docMk/>
+            <pc:sldMk cId="1686003966" sldId="263"/>
+            <ac:spMk id="4" creationId="{F7999505-AE91-8B1A-FC3A-3E9337785D69}"/>
+          </ac:spMkLst>
+        </pc:spChg>
+        <pc:cxnChg chg="add mod">
+          <ac:chgData name="Enoch Shin" userId="c39a6cce-38ff-4294-b6f2-b2b8f4cccef0" providerId="ADAL" clId="{EFE24D46-2511-5DA4-B14A-5403E002676C}" dt="2026-03-19T16:44:39.791" v="1241" actId="208"/>
+          <ac:cxnSpMkLst>
+            <pc:docMk/>
+            <pc:sldMk cId="1686003966" sldId="263"/>
+            <ac:cxnSpMk id="6" creationId="{54C9B681-D77E-06EA-AA3B-ABC49B67B644}"/>
+          </ac:cxnSpMkLst>
+        </pc:cxnChg>
+      </pc:sldChg>
+      <pc:sldChg chg="addSp delSp modSp del mod">
+        <pc:chgData name="Enoch Shin" userId="c39a6cce-38ff-4294-b6f2-b2b8f4cccef0" providerId="ADAL" clId="{EFE24D46-2511-5DA4-B14A-5403E002676C}" dt="2026-03-24T21:02:30.669" v="1935" actId="2696"/>
+        <pc:sldMkLst>
+          <pc:docMk/>
+          <pc:sldMk cId="893231155" sldId="271"/>
+        </pc:sldMkLst>
+        <pc:spChg chg="del">
+          <ac:chgData name="Enoch Shin" userId="c39a6cce-38ff-4294-b6f2-b2b8f4cccef0" providerId="ADAL" clId="{EFE24D46-2511-5DA4-B14A-5403E002676C}" dt="2026-03-24T21:02:03.787" v="1931" actId="478"/>
+          <ac:spMkLst>
+            <pc:docMk/>
+            <pc:sldMk cId="893231155" sldId="271"/>
+            <ac:spMk id="3" creationId="{080EB49A-E361-34FE-B214-216DB6B8B4BB}"/>
+          </ac:spMkLst>
+        </pc:spChg>
+        <pc:spChg chg="add mod">
+          <ac:chgData name="Enoch Shin" userId="c39a6cce-38ff-4294-b6f2-b2b8f4cccef0" providerId="ADAL" clId="{EFE24D46-2511-5DA4-B14A-5403E002676C}" dt="2026-03-24T21:02:03.787" v="1931" actId="478"/>
+          <ac:spMkLst>
+            <pc:docMk/>
+            <pc:sldMk cId="893231155" sldId="271"/>
+            <ac:spMk id="5" creationId="{E3A6604C-38D3-9B9F-D477-797F5008AEE1}"/>
+          </ac:spMkLst>
+        </pc:spChg>
+      </pc:sldChg>
+      <pc:sldChg chg="modSp mod setBg">
+        <pc:chgData name="Enoch Shin" userId="c39a6cce-38ff-4294-b6f2-b2b8f4cccef0" providerId="ADAL" clId="{EFE24D46-2511-5DA4-B14A-5403E002676C}" dt="2026-03-24T21:36:18.486" v="4516"/>
+        <pc:sldMkLst>
+          <pc:docMk/>
+          <pc:sldMk cId="2736603610" sldId="275"/>
+        </pc:sldMkLst>
+        <pc:spChg chg="mod">
+          <ac:chgData name="Enoch Shin" userId="c39a6cce-38ff-4294-b6f2-b2b8f4cccef0" providerId="ADAL" clId="{EFE24D46-2511-5DA4-B14A-5403E002676C}" dt="2026-03-24T21:35:58.104" v="4515" actId="255"/>
+          <ac:spMkLst>
+            <pc:docMk/>
+            <pc:sldMk cId="2736603610" sldId="275"/>
+            <ac:spMk id="3" creationId="{70762040-9254-2FCA-5342-F274ECBFDDC1}"/>
+          </ac:spMkLst>
+        </pc:spChg>
+      </pc:sldChg>
+      <pc:sldChg chg="addSp delSp modSp mod setBg">
+        <pc:chgData name="Enoch Shin" userId="c39a6cce-38ff-4294-b6f2-b2b8f4cccef0" providerId="ADAL" clId="{EFE24D46-2511-5DA4-B14A-5403E002676C}" dt="2026-03-24T21:36:18.486" v="4516"/>
+        <pc:sldMkLst>
+          <pc:docMk/>
+          <pc:sldMk cId="3206771332" sldId="277"/>
+        </pc:sldMkLst>
+        <pc:spChg chg="mod">
+          <ac:chgData name="Enoch Shin" userId="c39a6cce-38ff-4294-b6f2-b2b8f4cccef0" providerId="ADAL" clId="{EFE24D46-2511-5DA4-B14A-5403E002676C}" dt="2026-03-19T16:30:22.010" v="798" actId="20577"/>
+          <ac:spMkLst>
+            <pc:docMk/>
+            <pc:sldMk cId="3206771332" sldId="277"/>
+            <ac:spMk id="2" creationId="{919DBFE2-5B08-5F7E-9C34-4E288038744C}"/>
+          </ac:spMkLst>
+        </pc:spChg>
+        <pc:spChg chg="mod">
+          <ac:chgData name="Enoch Shin" userId="c39a6cce-38ff-4294-b6f2-b2b8f4cccef0" providerId="ADAL" clId="{EFE24D46-2511-5DA4-B14A-5403E002676C}" dt="2026-03-24T21:16:30.165" v="2590" actId="27636"/>
+          <ac:spMkLst>
+            <pc:docMk/>
+            <pc:sldMk cId="3206771332" sldId="277"/>
+            <ac:spMk id="3" creationId="{0A55E001-F8E3-3896-F178-D3FED9B70D43}"/>
+          </ac:spMkLst>
+        </pc:spChg>
+        <pc:picChg chg="add mod">
+          <ac:chgData name="Enoch Shin" userId="c39a6cce-38ff-4294-b6f2-b2b8f4cccef0" providerId="ADAL" clId="{EFE24D46-2511-5DA4-B14A-5403E002676C}" dt="2026-03-24T21:14:44.708" v="2445" actId="1076"/>
+          <ac:picMkLst>
+            <pc:docMk/>
+            <pc:sldMk cId="3206771332" sldId="277"/>
+            <ac:picMk id="5" creationId="{D093D101-6FA7-258E-639D-40383ECF4616}"/>
+          </ac:picMkLst>
+        </pc:picChg>
+      </pc:sldChg>
+      <pc:sldChg chg="addSp delSp modSp mod setBg">
+        <pc:chgData name="Enoch Shin" userId="c39a6cce-38ff-4294-b6f2-b2b8f4cccef0" providerId="ADAL" clId="{EFE24D46-2511-5DA4-B14A-5403E002676C}" dt="2026-03-24T21:36:18.486" v="4516"/>
+        <pc:sldMkLst>
+          <pc:docMk/>
+          <pc:sldMk cId="2120960596" sldId="278"/>
+        </pc:sldMkLst>
+        <pc:spChg chg="mod">
+          <ac:chgData name="Enoch Shin" userId="c39a6cce-38ff-4294-b6f2-b2b8f4cccef0" providerId="ADAL" clId="{EFE24D46-2511-5DA4-B14A-5403E002676C}" dt="2026-03-24T21:01:42.094" v="1896" actId="20577"/>
+          <ac:spMkLst>
+            <pc:docMk/>
+            <pc:sldMk cId="2120960596" sldId="278"/>
+            <ac:spMk id="2" creationId="{EE57B110-D5D4-F42D-4362-9F13761A2AC9}"/>
+          </ac:spMkLst>
+        </pc:spChg>
+        <pc:spChg chg="mod">
+          <ac:chgData name="Enoch Shin" userId="c39a6cce-38ff-4294-b6f2-b2b8f4cccef0" providerId="ADAL" clId="{EFE24D46-2511-5DA4-B14A-5403E002676C}" dt="2026-03-24T21:19:57.398" v="3089" actId="1076"/>
+          <ac:spMkLst>
+            <pc:docMk/>
+            <pc:sldMk cId="2120960596" sldId="278"/>
+            <ac:spMk id="9" creationId="{F37D45D0-81CB-7E09-4D17-7E26DC899661}"/>
+          </ac:spMkLst>
+        </pc:spChg>
+        <pc:picChg chg="del mod">
+          <ac:chgData name="Enoch Shin" userId="c39a6cce-38ff-4294-b6f2-b2b8f4cccef0" providerId="ADAL" clId="{EFE24D46-2511-5DA4-B14A-5403E002676C}" dt="2026-03-24T20:54:40.004" v="1517" actId="478"/>
+          <ac:picMkLst>
+            <pc:docMk/>
+            <pc:sldMk cId="2120960596" sldId="278"/>
+            <ac:picMk id="3" creationId="{8EB5E343-6A95-F818-8652-A4421533E362}"/>
+          </ac:picMkLst>
+        </pc:picChg>
+        <pc:picChg chg="add del mod">
+          <ac:chgData name="Enoch Shin" userId="c39a6cce-38ff-4294-b6f2-b2b8f4cccef0" providerId="ADAL" clId="{EFE24D46-2511-5DA4-B14A-5403E002676C}" dt="2026-03-24T21:01:57.101" v="1930" actId="21"/>
+          <ac:picMkLst>
+            <pc:docMk/>
+            <pc:sldMk cId="2120960596" sldId="278"/>
+            <ac:picMk id="4" creationId="{62403299-8C86-D7DD-139A-E2DA2B9B78DA}"/>
+          </ac:picMkLst>
+        </pc:picChg>
+        <pc:picChg chg="add del mod">
+          <ac:chgData name="Enoch Shin" userId="c39a6cce-38ff-4294-b6f2-b2b8f4cccef0" providerId="ADAL" clId="{EFE24D46-2511-5DA4-B14A-5403E002676C}" dt="2026-03-24T21:12:20.759" v="2428" actId="21"/>
+          <ac:picMkLst>
+            <pc:docMk/>
+            <pc:sldMk cId="2120960596" sldId="278"/>
+            <ac:picMk id="5" creationId="{F38E59E5-C9CB-5BFC-5A13-DD0A4478B4FD}"/>
+          </ac:picMkLst>
+        </pc:picChg>
+      </pc:sldChg>
+      <pc:sldChg chg="del">
+        <pc:chgData name="Enoch Shin" userId="c39a6cce-38ff-4294-b6f2-b2b8f4cccef0" providerId="ADAL" clId="{EFE24D46-2511-5DA4-B14A-5403E002676C}" dt="2026-03-24T20:53:52.466" v="1500" actId="2696"/>
+        <pc:sldMkLst>
+          <pc:docMk/>
+          <pc:sldMk cId="767452580" sldId="282"/>
+        </pc:sldMkLst>
+      </pc:sldChg>
+      <pc:sldChg chg="del">
+        <pc:chgData name="Enoch Shin" userId="c39a6cce-38ff-4294-b6f2-b2b8f4cccef0" providerId="ADAL" clId="{EFE24D46-2511-5DA4-B14A-5403E002676C}" dt="2026-03-24T20:53:52.477" v="1501" actId="2696"/>
+        <pc:sldMkLst>
+          <pc:docMk/>
+          <pc:sldMk cId="4109261465" sldId="284"/>
+        </pc:sldMkLst>
+      </pc:sldChg>
+      <pc:sldChg chg="addSp delSp modSp mod setBg modShow">
+        <pc:chgData name="Enoch Shin" userId="c39a6cce-38ff-4294-b6f2-b2b8f4cccef0" providerId="ADAL" clId="{EFE24D46-2511-5DA4-B14A-5403E002676C}" dt="2026-03-24T21:36:18.486" v="4516"/>
+        <pc:sldMkLst>
+          <pc:docMk/>
+          <pc:sldMk cId="2238264942" sldId="285"/>
+        </pc:sldMkLst>
+        <pc:spChg chg="mod">
+          <ac:chgData name="Enoch Shin" userId="c39a6cce-38ff-4294-b6f2-b2b8f4cccef0" providerId="ADAL" clId="{EFE24D46-2511-5DA4-B14A-5403E002676C}" dt="2026-03-24T21:22:32.540" v="3237" actId="20577"/>
+          <ac:spMkLst>
+            <pc:docMk/>
+            <pc:sldMk cId="2238264942" sldId="285"/>
+            <ac:spMk id="2" creationId="{312E1568-1ADF-E14C-5869-6889CFE44164}"/>
+          </ac:spMkLst>
+        </pc:spChg>
+        <pc:spChg chg="del">
+          <ac:chgData name="Enoch Shin" userId="c39a6cce-38ff-4294-b6f2-b2b8f4cccef0" providerId="ADAL" clId="{EFE24D46-2511-5DA4-B14A-5403E002676C}" dt="2026-03-24T21:22:02.625" v="3230" actId="478"/>
+          <ac:spMkLst>
+            <pc:docMk/>
+            <pc:sldMk cId="2238264942" sldId="285"/>
+            <ac:spMk id="3" creationId="{C101DA6A-6684-A24C-0F0C-07BFB9E16E78}"/>
+          </ac:spMkLst>
+        </pc:spChg>
+        <pc:spChg chg="del">
+          <ac:chgData name="Enoch Shin" userId="c39a6cce-38ff-4294-b6f2-b2b8f4cccef0" providerId="ADAL" clId="{EFE24D46-2511-5DA4-B14A-5403E002676C}" dt="2026-03-24T21:21:57.015" v="3227" actId="478"/>
+          <ac:spMkLst>
+            <pc:docMk/>
+            <pc:sldMk cId="2238264942" sldId="285"/>
+            <ac:spMk id="4" creationId="{BEEBFB18-4A43-F10F-8147-3CFC1669BE7F}"/>
+          </ac:spMkLst>
+        </pc:spChg>
+        <pc:spChg chg="del">
+          <ac:chgData name="Enoch Shin" userId="c39a6cce-38ff-4294-b6f2-b2b8f4cccef0" providerId="ADAL" clId="{EFE24D46-2511-5DA4-B14A-5403E002676C}" dt="2026-03-24T21:21:57.015" v="3227" actId="478"/>
+          <ac:spMkLst>
+            <pc:docMk/>
+            <pc:sldMk cId="2238264942" sldId="285"/>
+            <ac:spMk id="6" creationId="{D1FBE12A-1E4F-D416-5783-C1EC90A61264}"/>
+          </ac:spMkLst>
+        </pc:spChg>
+        <pc:spChg chg="add del mod">
+          <ac:chgData name="Enoch Shin" userId="c39a6cce-38ff-4294-b6f2-b2b8f4cccef0" providerId="ADAL" clId="{EFE24D46-2511-5DA4-B14A-5403E002676C}" dt="2026-03-24T21:21:58.476" v="3228" actId="478"/>
+          <ac:spMkLst>
+            <pc:docMk/>
+            <pc:sldMk cId="2238264942" sldId="285"/>
+            <ac:spMk id="9" creationId="{4992F13C-AEDB-4545-7146-096902DE92DF}"/>
+          </ac:spMkLst>
+        </pc:spChg>
+        <pc:spChg chg="del">
+          <ac:chgData name="Enoch Shin" userId="c39a6cce-38ff-4294-b6f2-b2b8f4cccef0" providerId="ADAL" clId="{EFE24D46-2511-5DA4-B14A-5403E002676C}" dt="2026-03-24T21:21:57.015" v="3227" actId="478"/>
+          <ac:spMkLst>
+            <pc:docMk/>
+            <pc:sldMk cId="2238264942" sldId="285"/>
+            <ac:spMk id="10" creationId="{187CB16B-AC01-AA01-D01F-41951B8C1D0E}"/>
+          </ac:spMkLst>
+        </pc:spChg>
+        <pc:picChg chg="del">
+          <ac:chgData name="Enoch Shin" userId="c39a6cce-38ff-4294-b6f2-b2b8f4cccef0" providerId="ADAL" clId="{EFE24D46-2511-5DA4-B14A-5403E002676C}" dt="2026-03-24T21:21:57.015" v="3227" actId="478"/>
+          <ac:picMkLst>
+            <pc:docMk/>
+            <pc:sldMk cId="2238264942" sldId="285"/>
+            <ac:picMk id="5" creationId="{92BCEE66-6E6E-2087-4D1E-EF4A9668C527}"/>
+          </ac:picMkLst>
+        </pc:picChg>
+        <pc:picChg chg="del">
+          <ac:chgData name="Enoch Shin" userId="c39a6cce-38ff-4294-b6f2-b2b8f4cccef0" providerId="ADAL" clId="{EFE24D46-2511-5DA4-B14A-5403E002676C}" dt="2026-03-24T21:21:59.296" v="3229" actId="478"/>
+          <ac:picMkLst>
+            <pc:docMk/>
+            <pc:sldMk cId="2238264942" sldId="285"/>
+            <ac:picMk id="7" creationId="{A7B8CEBF-7759-98F1-3340-BCD62BFA5EFB}"/>
+          </ac:picMkLst>
+        </pc:picChg>
+        <pc:picChg chg="del">
+          <ac:chgData name="Enoch Shin" userId="c39a6cce-38ff-4294-b6f2-b2b8f4cccef0" providerId="ADAL" clId="{EFE24D46-2511-5DA4-B14A-5403E002676C}" dt="2026-03-24T21:21:57.015" v="3227" actId="478"/>
+          <ac:picMkLst>
+            <pc:docMk/>
+            <pc:sldMk cId="2238264942" sldId="285"/>
+            <ac:picMk id="11" creationId="{98DB21B7-64A5-8F4F-E398-790AF03F5B2B}"/>
+          </ac:picMkLst>
+        </pc:picChg>
+        <pc:picChg chg="add mod">
+          <ac:chgData name="Enoch Shin" userId="c39a6cce-38ff-4294-b6f2-b2b8f4cccef0" providerId="ADAL" clId="{EFE24D46-2511-5DA4-B14A-5403E002676C}" dt="2026-03-24T21:22:36.661" v="3239" actId="1076"/>
+          <ac:picMkLst>
+            <pc:docMk/>
+            <pc:sldMk cId="2238264942" sldId="285"/>
+            <ac:picMk id="12" creationId="{ACB8BB64-728C-51D8-F705-6F15774D8C65}"/>
+          </ac:picMkLst>
+        </pc:picChg>
+      </pc:sldChg>
+      <pc:sldChg chg="del">
+        <pc:chgData name="Enoch Shin" userId="c39a6cce-38ff-4294-b6f2-b2b8f4cccef0" providerId="ADAL" clId="{EFE24D46-2511-5DA4-B14A-5403E002676C}" dt="2026-03-24T21:02:32.457" v="1936" actId="2696"/>
+        <pc:sldMkLst>
+          <pc:docMk/>
+          <pc:sldMk cId="2781030190" sldId="287"/>
+        </pc:sldMkLst>
+      </pc:sldChg>
+      <pc:sldChg chg="addSp delSp modSp mod setBg">
+        <pc:chgData name="Enoch Shin" userId="c39a6cce-38ff-4294-b6f2-b2b8f4cccef0" providerId="ADAL" clId="{EFE24D46-2511-5DA4-B14A-5403E002676C}" dt="2026-03-24T21:36:18.486" v="4516"/>
+        <pc:sldMkLst>
+          <pc:docMk/>
+          <pc:sldMk cId="1225510391" sldId="288"/>
+        </pc:sldMkLst>
+        <pc:spChg chg="mod">
+          <ac:chgData name="Enoch Shin" userId="c39a6cce-38ff-4294-b6f2-b2b8f4cccef0" providerId="ADAL" clId="{EFE24D46-2511-5DA4-B14A-5403E002676C}" dt="2026-03-24T21:23:46.671" v="3296" actId="1076"/>
+          <ac:spMkLst>
+            <pc:docMk/>
+            <pc:sldMk cId="1225510391" sldId="288"/>
+            <ac:spMk id="2" creationId="{93BA0621-7D01-3D9C-9FBD-76124A0535FB}"/>
+          </ac:spMkLst>
+        </pc:spChg>
+        <pc:picChg chg="del">
+          <ac:chgData name="Enoch Shin" userId="c39a6cce-38ff-4294-b6f2-b2b8f4cccef0" providerId="ADAL" clId="{EFE24D46-2511-5DA4-B14A-5403E002676C}" dt="2026-03-24T21:23:28.874" v="3290" actId="478"/>
+          <ac:picMkLst>
+            <pc:docMk/>
+            <pc:sldMk cId="1225510391" sldId="288"/>
+            <ac:picMk id="3" creationId="{237C5DB4-6888-6701-1857-EFD8BD5D0E3D}"/>
+          </ac:picMkLst>
+        </pc:picChg>
+        <pc:picChg chg="add del mod">
+          <ac:chgData name="Enoch Shin" userId="c39a6cce-38ff-4294-b6f2-b2b8f4cccef0" providerId="ADAL" clId="{EFE24D46-2511-5DA4-B14A-5403E002676C}" dt="2026-03-24T21:24:15.782" v="3298" actId="478"/>
+          <ac:picMkLst>
+            <pc:docMk/>
+            <pc:sldMk cId="1225510391" sldId="288"/>
+            <ac:picMk id="4" creationId="{9ACEA784-EDA9-9D44-FE72-B180062C5513}"/>
+          </ac:picMkLst>
+        </pc:picChg>
+        <pc:picChg chg="add mod">
+          <ac:chgData name="Enoch Shin" userId="c39a6cce-38ff-4294-b6f2-b2b8f4cccef0" providerId="ADAL" clId="{EFE24D46-2511-5DA4-B14A-5403E002676C}" dt="2026-03-24T21:24:20.257" v="3301" actId="1076"/>
+          <ac:picMkLst>
+            <pc:docMk/>
+            <pc:sldMk cId="1225510391" sldId="288"/>
+            <ac:picMk id="5" creationId="{569108FF-44E1-68AB-AAFB-BD969BF1DA4D}"/>
+          </ac:picMkLst>
+        </pc:picChg>
+      </pc:sldChg>
+      <pc:sldChg chg="del">
+        <pc:chgData name="Enoch Shin" userId="c39a6cce-38ff-4294-b6f2-b2b8f4cccef0" providerId="ADAL" clId="{EFE24D46-2511-5DA4-B14A-5403E002676C}" dt="2026-03-24T20:57:26.780" v="1882" actId="2696"/>
+        <pc:sldMkLst>
+          <pc:docMk/>
+          <pc:sldMk cId="545851158" sldId="291"/>
+        </pc:sldMkLst>
+      </pc:sldChg>
+      <pc:sldChg chg="del">
+        <pc:chgData name="Enoch Shin" userId="c39a6cce-38ff-4294-b6f2-b2b8f4cccef0" providerId="ADAL" clId="{EFE24D46-2511-5DA4-B14A-5403E002676C}" dt="2026-03-24T21:24:36.055" v="3302" actId="2696"/>
+        <pc:sldMkLst>
+          <pc:docMk/>
+          <pc:sldMk cId="588325595" sldId="296"/>
+        </pc:sldMkLst>
+      </pc:sldChg>
+      <pc:sldChg chg="del">
+        <pc:chgData name="Enoch Shin" userId="c39a6cce-38ff-4294-b6f2-b2b8f4cccef0" providerId="ADAL" clId="{EFE24D46-2511-5DA4-B14A-5403E002676C}" dt="2026-03-24T21:24:36.065" v="3303" actId="2696"/>
+        <pc:sldMkLst>
+          <pc:docMk/>
+          <pc:sldMk cId="3637275730" sldId="297"/>
+        </pc:sldMkLst>
+      </pc:sldChg>
+      <pc:sldChg chg="addSp delSp modSp mod setBg">
+        <pc:chgData name="Enoch Shin" userId="c39a6cce-38ff-4294-b6f2-b2b8f4cccef0" providerId="ADAL" clId="{EFE24D46-2511-5DA4-B14A-5403E002676C}" dt="2026-03-24T21:36:18.486" v="4516"/>
+        <pc:sldMkLst>
+          <pc:docMk/>
+          <pc:sldMk cId="2634110997" sldId="298"/>
+        </pc:sldMkLst>
+        <pc:spChg chg="add mod">
+          <ac:chgData name="Enoch Shin" userId="c39a6cce-38ff-4294-b6f2-b2b8f4cccef0" providerId="ADAL" clId="{EFE24D46-2511-5DA4-B14A-5403E002676C}" dt="2026-03-24T21:16:51.516" v="2626" actId="20577"/>
+          <ac:spMkLst>
+            <pc:docMk/>
+            <pc:sldMk cId="2634110997" sldId="298"/>
+            <ac:spMk id="5" creationId="{6EA17400-C680-8583-2D68-D65FB4ED4FA7}"/>
+          </ac:spMkLst>
+        </pc:spChg>
+        <pc:spChg chg="mod">
+          <ac:chgData name="Enoch Shin" userId="c39a6cce-38ff-4294-b6f2-b2b8f4cccef0" providerId="ADAL" clId="{EFE24D46-2511-5DA4-B14A-5403E002676C}" dt="2026-03-24T20:55:38.457" v="1685" actId="1076"/>
+          <ac:spMkLst>
+            <pc:docMk/>
+            <pc:sldMk cId="2634110997" sldId="298"/>
+            <ac:spMk id="11" creationId="{BB29C28C-A96F-77AF-C659-09438D1FF19A}"/>
+          </ac:spMkLst>
+        </pc:spChg>
+        <pc:spChg chg="del">
+          <ac:chgData name="Enoch Shin" userId="c39a6cce-38ff-4294-b6f2-b2b8f4cccef0" providerId="ADAL" clId="{EFE24D46-2511-5DA4-B14A-5403E002676C}" dt="2026-03-24T20:54:06.816" v="1511" actId="478"/>
+          <ac:spMkLst>
+            <pc:docMk/>
+            <pc:sldMk cId="2634110997" sldId="298"/>
+            <ac:spMk id="14" creationId="{36C38740-2ABC-26C3-F818-C13345218A2C}"/>
+          </ac:spMkLst>
+        </pc:spChg>
+        <pc:spChg chg="del">
+          <ac:chgData name="Enoch Shin" userId="c39a6cce-38ff-4294-b6f2-b2b8f4cccef0" providerId="ADAL" clId="{EFE24D46-2511-5DA4-B14A-5403E002676C}" dt="2026-03-24T20:54:06.816" v="1511" actId="478"/>
+          <ac:spMkLst>
+            <pc:docMk/>
+            <pc:sldMk cId="2634110997" sldId="298"/>
+            <ac:spMk id="15" creationId="{41732842-40C3-AB5B-F563-E596CE4E7D26}"/>
+          </ac:spMkLst>
+        </pc:spChg>
+        <pc:spChg chg="del">
+          <ac:chgData name="Enoch Shin" userId="c39a6cce-38ff-4294-b6f2-b2b8f4cccef0" providerId="ADAL" clId="{EFE24D46-2511-5DA4-B14A-5403E002676C}" dt="2026-03-24T20:54:06.816" v="1511" actId="478"/>
+          <ac:spMkLst>
+            <pc:docMk/>
+            <pc:sldMk cId="2634110997" sldId="298"/>
+            <ac:spMk id="16" creationId="{9B7782B6-A8A4-C346-DCAE-8EB0DB7DB868}"/>
+          </ac:spMkLst>
+        </pc:spChg>
+        <pc:picChg chg="add del mod">
+          <ac:chgData name="Enoch Shin" userId="c39a6cce-38ff-4294-b6f2-b2b8f4cccef0" providerId="ADAL" clId="{EFE24D46-2511-5DA4-B14A-5403E002676C}" dt="2026-03-24T20:54:52.311" v="1518" actId="478"/>
+          <ac:picMkLst>
+            <pc:docMk/>
+            <pc:sldMk cId="2634110997" sldId="298"/>
+            <ac:picMk id="2" creationId="{A5B271E7-6BEF-FD94-F7FB-455FB3353EBF}"/>
+          </ac:picMkLst>
+        </pc:picChg>
+        <pc:picChg chg="add mod">
+          <ac:chgData name="Enoch Shin" userId="c39a6cce-38ff-4294-b6f2-b2b8f4cccef0" providerId="ADAL" clId="{EFE24D46-2511-5DA4-B14A-5403E002676C}" dt="2026-03-24T20:54:55.832" v="1524"/>
+          <ac:picMkLst>
+            <pc:docMk/>
+            <pc:sldMk cId="2634110997" sldId="298"/>
+            <ac:picMk id="3" creationId="{7C9CE280-B294-464D-9FB0-1C42338E7756}"/>
+          </ac:picMkLst>
+        </pc:picChg>
+        <pc:picChg chg="add mod">
+          <ac:chgData name="Enoch Shin" userId="c39a6cce-38ff-4294-b6f2-b2b8f4cccef0" providerId="ADAL" clId="{EFE24D46-2511-5DA4-B14A-5403E002676C}" dt="2026-03-24T21:18:54.025" v="2907" actId="1076"/>
+          <ac:picMkLst>
+            <pc:docMk/>
+            <pc:sldMk cId="2634110997" sldId="298"/>
+            <ac:picMk id="4" creationId="{16BF2CBD-9212-C0FE-899F-4385F9CB363B}"/>
+          </ac:picMkLst>
+        </pc:picChg>
+        <pc:picChg chg="del">
+          <ac:chgData name="Enoch Shin" userId="c39a6cce-38ff-4294-b6f2-b2b8f4cccef0" providerId="ADAL" clId="{EFE24D46-2511-5DA4-B14A-5403E002676C}" dt="2026-03-24T20:54:06.816" v="1511" actId="478"/>
+          <ac:picMkLst>
+            <pc:docMk/>
+            <pc:sldMk cId="2634110997" sldId="298"/>
+            <ac:picMk id="12" creationId="{07245003-0A34-B229-2B21-ECD646B1F721}"/>
+          </ac:picMkLst>
+        </pc:picChg>
+        <pc:picChg chg="del">
+          <ac:chgData name="Enoch Shin" userId="c39a6cce-38ff-4294-b6f2-b2b8f4cccef0" providerId="ADAL" clId="{EFE24D46-2511-5DA4-B14A-5403E002676C}" dt="2026-03-24T20:54:06.816" v="1511" actId="478"/>
+          <ac:picMkLst>
+            <pc:docMk/>
+            <pc:sldMk cId="2634110997" sldId="298"/>
+            <ac:picMk id="13" creationId="{5F84BAAB-24A3-2221-E622-CE1EAB3A159D}"/>
+          </ac:picMkLst>
+        </pc:picChg>
+      </pc:sldChg>
+      <pc:sldChg chg="modSp setBg">
+        <pc:chgData name="Enoch Shin" userId="c39a6cce-38ff-4294-b6f2-b2b8f4cccef0" providerId="ADAL" clId="{EFE24D46-2511-5DA4-B14A-5403E002676C}" dt="2026-03-24T21:36:18.486" v="4516"/>
+        <pc:sldMkLst>
+          <pc:docMk/>
+          <pc:sldMk cId="3862204571" sldId="299"/>
+        </pc:sldMkLst>
+        <pc:picChg chg="mod">
+          <ac:chgData name="Enoch Shin" userId="c39a6cce-38ff-4294-b6f2-b2b8f4cccef0" providerId="ADAL" clId="{EFE24D46-2511-5DA4-B14A-5403E002676C}" dt="2026-03-17T14:31:04.148" v="0" actId="1076"/>
+          <ac:picMkLst>
+            <pc:docMk/>
+            <pc:sldMk cId="3862204571" sldId="299"/>
+            <ac:picMk id="1028" creationId="{5307AFAE-D857-9287-F6C4-E7991BB8ABD8}"/>
+          </ac:picMkLst>
+        </pc:picChg>
+      </pc:sldChg>
+      <pc:sldChg chg="del">
+        <pc:chgData name="Enoch Shin" userId="c39a6cce-38ff-4294-b6f2-b2b8f4cccef0" providerId="ADAL" clId="{EFE24D46-2511-5DA4-B14A-5403E002676C}" dt="2026-03-24T20:57:27.523" v="1883" actId="2696"/>
+        <pc:sldMkLst>
+          <pc:docMk/>
+          <pc:sldMk cId="1977856822" sldId="300"/>
+        </pc:sldMkLst>
+      </pc:sldChg>
+      <pc:sldChg chg="del">
+        <pc:chgData name="Enoch Shin" userId="c39a6cce-38ff-4294-b6f2-b2b8f4cccef0" providerId="ADAL" clId="{EFE24D46-2511-5DA4-B14A-5403E002676C}" dt="2026-03-24T21:24:37.249" v="3304" actId="2696"/>
+        <pc:sldMkLst>
+          <pc:docMk/>
+          <pc:sldMk cId="380703218" sldId="301"/>
+        </pc:sldMkLst>
+      </pc:sldChg>
+      <pc:sldChg chg="del">
+        <pc:chgData name="Enoch Shin" userId="c39a6cce-38ff-4294-b6f2-b2b8f4cccef0" providerId="ADAL" clId="{EFE24D46-2511-5DA4-B14A-5403E002676C}" dt="2026-03-24T21:22:44.864" v="3240" actId="2696"/>
+        <pc:sldMkLst>
+          <pc:docMk/>
+          <pc:sldMk cId="2607122922" sldId="302"/>
+        </pc:sldMkLst>
+      </pc:sldChg>
+      <pc:sldChg chg="addSp delSp modSp mod setBg">
+        <pc:chgData name="Enoch Shin" userId="c39a6cce-38ff-4294-b6f2-b2b8f4cccef0" providerId="ADAL" clId="{EFE24D46-2511-5DA4-B14A-5403E002676C}" dt="2026-03-24T21:36:18.486" v="4516"/>
+        <pc:sldMkLst>
+          <pc:docMk/>
+          <pc:sldMk cId="786601153" sldId="303"/>
+        </pc:sldMkLst>
+        <pc:spChg chg="mod">
+          <ac:chgData name="Enoch Shin" userId="c39a6cce-38ff-4294-b6f2-b2b8f4cccef0" providerId="ADAL" clId="{EFE24D46-2511-5DA4-B14A-5403E002676C}" dt="2026-03-24T21:21:29.002" v="3178" actId="255"/>
+          <ac:spMkLst>
+            <pc:docMk/>
+            <pc:sldMk cId="786601153" sldId="303"/>
+            <ac:spMk id="2" creationId="{7DD79E17-236A-6E63-F8FF-C80AD64F69E0}"/>
+          </ac:spMkLst>
+        </pc:spChg>
+        <pc:spChg chg="del">
+          <ac:chgData name="Enoch Shin" userId="c39a6cce-38ff-4294-b6f2-b2b8f4cccef0" providerId="ADAL" clId="{EFE24D46-2511-5DA4-B14A-5403E002676C}" dt="2026-03-24T21:20:42.057" v="3157" actId="478"/>
+          <ac:spMkLst>
+            <pc:docMk/>
+            <pc:sldMk cId="786601153" sldId="303"/>
+            <ac:spMk id="12" creationId="{21F6ADD1-C86E-0F38-1F4B-1FFDD58EE42E}"/>
+          </ac:spMkLst>
+        </pc:spChg>
+        <pc:spChg chg="del">
+          <ac:chgData name="Enoch Shin" userId="c39a6cce-38ff-4294-b6f2-b2b8f4cccef0" providerId="ADAL" clId="{EFE24D46-2511-5DA4-B14A-5403E002676C}" dt="2026-03-24T21:20:42.057" v="3157" actId="478"/>
+          <ac:spMkLst>
+            <pc:docMk/>
+            <pc:sldMk cId="786601153" sldId="303"/>
+            <ac:spMk id="13" creationId="{AB6F329E-E10C-5431-7B9B-517B25CB80A3}"/>
+          </ac:spMkLst>
+        </pc:spChg>
+        <pc:picChg chg="add mod">
+          <ac:chgData name="Enoch Shin" userId="c39a6cce-38ff-4294-b6f2-b2b8f4cccef0" providerId="ADAL" clId="{EFE24D46-2511-5DA4-B14A-5403E002676C}" dt="2026-03-24T21:21:31.539" v="3179" actId="1076"/>
+          <ac:picMkLst>
+            <pc:docMk/>
+            <pc:sldMk cId="786601153" sldId="303"/>
+            <ac:picMk id="3" creationId="{12963C76-D579-ED1C-E29D-CA93EDF485E0}"/>
+          </ac:picMkLst>
+        </pc:picChg>
+        <pc:picChg chg="add mod">
+          <ac:chgData name="Enoch Shin" userId="c39a6cce-38ff-4294-b6f2-b2b8f4cccef0" providerId="ADAL" clId="{EFE24D46-2511-5DA4-B14A-5403E002676C}" dt="2026-03-24T21:21:24.556" v="3176" actId="1076"/>
+          <ac:picMkLst>
+            <pc:docMk/>
+            <pc:sldMk cId="786601153" sldId="303"/>
+            <ac:picMk id="4" creationId="{B5A393D9-3AE4-E496-CA9F-E0A5A8BA966C}"/>
+          </ac:picMkLst>
+        </pc:picChg>
+        <pc:picChg chg="del">
+          <ac:chgData name="Enoch Shin" userId="c39a6cce-38ff-4294-b6f2-b2b8f4cccef0" providerId="ADAL" clId="{EFE24D46-2511-5DA4-B14A-5403E002676C}" dt="2026-03-24T21:20:42.057" v="3157" actId="478"/>
+          <ac:picMkLst>
+            <pc:docMk/>
+            <pc:sldMk cId="786601153" sldId="303"/>
+            <ac:picMk id="10" creationId="{A80C666B-356A-5D40-B090-6F3C59735D67}"/>
+          </ac:picMkLst>
+        </pc:picChg>
+        <pc:picChg chg="del">
+          <ac:chgData name="Enoch Shin" userId="c39a6cce-38ff-4294-b6f2-b2b8f4cccef0" providerId="ADAL" clId="{EFE24D46-2511-5DA4-B14A-5403E002676C}" dt="2026-03-24T21:20:40.030" v="3156" actId="478"/>
+          <ac:picMkLst>
+            <pc:docMk/>
+            <pc:sldMk cId="786601153" sldId="303"/>
+            <ac:picMk id="11" creationId="{55CF607F-ED73-D8CC-7377-1D8431669086}"/>
+          </ac:picMkLst>
+        </pc:picChg>
+      </pc:sldChg>
+      <pc:sldChg chg="addSp delSp modSp add mod setBg">
+        <pc:chgData name="Enoch Shin" userId="c39a6cce-38ff-4294-b6f2-b2b8f4cccef0" providerId="ADAL" clId="{EFE24D46-2511-5DA4-B14A-5403E002676C}" dt="2026-03-24T21:36:18.486" v="4516"/>
+        <pc:sldMkLst>
+          <pc:docMk/>
+          <pc:sldMk cId="1357844401" sldId="304"/>
+        </pc:sldMkLst>
+        <pc:spChg chg="mod">
+          <ac:chgData name="Enoch Shin" userId="c39a6cce-38ff-4294-b6f2-b2b8f4cccef0" providerId="ADAL" clId="{EFE24D46-2511-5DA4-B14A-5403E002676C}" dt="2026-03-17T14:33:08.398" v="18" actId="20577"/>
+          <ac:spMkLst>
+            <pc:docMk/>
+            <pc:sldMk cId="1357844401" sldId="304"/>
+            <ac:spMk id="2" creationId="{880F0AD4-C375-FF7C-1297-03CEE47C7AC2}"/>
+          </ac:spMkLst>
+        </pc:spChg>
+        <pc:spChg chg="mod">
+          <ac:chgData name="Enoch Shin" userId="c39a6cce-38ff-4294-b6f2-b2b8f4cccef0" providerId="ADAL" clId="{EFE24D46-2511-5DA4-B14A-5403E002676C}" dt="2026-03-17T14:43:20.841" v="151" actId="255"/>
+          <ac:spMkLst>
+            <pc:docMk/>
+            <pc:sldMk cId="1357844401" sldId="304"/>
+            <ac:spMk id="3" creationId="{9C676C20-8A22-C157-BEEB-2954CFB837EB}"/>
+          </ac:spMkLst>
+        </pc:spChg>
+        <pc:picChg chg="add mod">
+          <ac:chgData name="Enoch Shin" userId="c39a6cce-38ff-4294-b6f2-b2b8f4cccef0" providerId="ADAL" clId="{EFE24D46-2511-5DA4-B14A-5403E002676C}" dt="2026-03-17T14:42:02.293" v="146" actId="1076"/>
+          <ac:picMkLst>
+            <pc:docMk/>
+            <pc:sldMk cId="1357844401" sldId="304"/>
+            <ac:picMk id="4" creationId="{937DA4E9-1F41-E9B4-949B-0B77107D6DC2}"/>
+          </ac:picMkLst>
+        </pc:picChg>
+      </pc:sldChg>
+      <pc:sldChg chg="addSp modSp add mod setBg">
+        <pc:chgData name="Enoch Shin" userId="c39a6cce-38ff-4294-b6f2-b2b8f4cccef0" providerId="ADAL" clId="{EFE24D46-2511-5DA4-B14A-5403E002676C}" dt="2026-03-24T21:36:18.486" v="4516"/>
+        <pc:sldMkLst>
+          <pc:docMk/>
+          <pc:sldMk cId="3394601628" sldId="305"/>
+        </pc:sldMkLst>
+        <pc:spChg chg="mod">
+          <ac:chgData name="Enoch Shin" userId="c39a6cce-38ff-4294-b6f2-b2b8f4cccef0" providerId="ADAL" clId="{EFE24D46-2511-5DA4-B14A-5403E002676C}" dt="2026-03-24T21:04:37.694" v="2136" actId="1036"/>
+          <ac:spMkLst>
+            <pc:docMk/>
+            <pc:sldMk cId="3394601628" sldId="305"/>
+            <ac:spMk id="2" creationId="{E53C7165-D489-5A46-B643-5518BA348781}"/>
+          </ac:spMkLst>
+        </pc:spChg>
+        <pc:spChg chg="mod">
+          <ac:chgData name="Enoch Shin" userId="c39a6cce-38ff-4294-b6f2-b2b8f4cccef0" providerId="ADAL" clId="{EFE24D46-2511-5DA4-B14A-5403E002676C}" dt="2026-03-24T21:20:00.876" v="3090" actId="113"/>
+          <ac:spMkLst>
+            <pc:docMk/>
+            <pc:sldMk cId="3394601628" sldId="305"/>
+            <ac:spMk id="9" creationId="{4853E6AE-7496-D488-61CE-7B6ED6227727}"/>
+          </ac:spMkLst>
+        </pc:spChg>
+        <pc:picChg chg="add mod">
+          <ac:chgData name="Enoch Shin" userId="c39a6cce-38ff-4294-b6f2-b2b8f4cccef0" providerId="ADAL" clId="{EFE24D46-2511-5DA4-B14A-5403E002676C}" dt="2026-03-24T21:04:28.704" v="2130" actId="1076"/>
+          <ac:picMkLst>
+            <pc:docMk/>
+            <pc:sldMk cId="3394601628" sldId="305"/>
+            <ac:picMk id="3" creationId="{69E516BE-305B-69F1-353E-2CDE850F4018}"/>
+          </ac:picMkLst>
+        </pc:picChg>
+      </pc:sldChg>
+      <pc:sldChg chg="addSp delSp add del setBg delDesignElem">
+        <pc:chgData name="Enoch Shin" userId="c39a6cce-38ff-4294-b6f2-b2b8f4cccef0" providerId="ADAL" clId="{EFE24D46-2511-5DA4-B14A-5403E002676C}" dt="2026-03-24T21:02:27.337" v="1934"/>
+        <pc:sldMkLst>
+          <pc:docMk/>
+          <pc:sldMk cId="4011676581" sldId="305"/>
+        </pc:sldMkLst>
+        <pc:spChg chg="add del">
+          <ac:chgData name="Enoch Shin" userId="c39a6cce-38ff-4294-b6f2-b2b8f4cccef0" providerId="ADAL" clId="{EFE24D46-2511-5DA4-B14A-5403E002676C}" dt="2026-03-24T21:02:27.337" v="1934"/>
+          <ac:spMkLst>
+            <pc:docMk/>
+            <pc:sldMk cId="4011676581" sldId="305"/>
+            <ac:spMk id="2074" creationId="{29F6E152-7586-517B-31A8-0BF4626AE23E}"/>
+          </ac:spMkLst>
+        </pc:spChg>
+      </pc:sldChg>
+      <pc:sldChg chg="addSp delSp modSp add mod setBg modShow">
+        <pc:chgData name="Enoch Shin" userId="c39a6cce-38ff-4294-b6f2-b2b8f4cccef0" providerId="ADAL" clId="{EFE24D46-2511-5DA4-B14A-5403E002676C}" dt="2026-03-24T21:36:18.486" v="4516"/>
+        <pc:sldMkLst>
+          <pc:docMk/>
+          <pc:sldMk cId="2460127186" sldId="306"/>
+        </pc:sldMkLst>
+        <pc:spChg chg="mod">
+          <ac:chgData name="Enoch Shin" userId="c39a6cce-38ff-4294-b6f2-b2b8f4cccef0" providerId="ADAL" clId="{EFE24D46-2511-5DA4-B14A-5403E002676C}" dt="2026-03-24T21:22:52.275" v="3250" actId="20577"/>
+          <ac:spMkLst>
+            <pc:docMk/>
+            <pc:sldMk cId="2460127186" sldId="306"/>
+            <ac:spMk id="2" creationId="{6B0EBE99-24D5-9589-E51F-8AB318E64223}"/>
+          </ac:spMkLst>
+        </pc:spChg>
+        <pc:picChg chg="add mod">
+          <ac:chgData name="Enoch Shin" userId="c39a6cce-38ff-4294-b6f2-b2b8f4cccef0" providerId="ADAL" clId="{EFE24D46-2511-5DA4-B14A-5403E002676C}" dt="2026-03-24T21:23:01.156" v="3255" actId="14100"/>
+          <ac:picMkLst>
+            <pc:docMk/>
+            <pc:sldMk cId="2460127186" sldId="306"/>
+            <ac:picMk id="3" creationId="{B30F0460-C559-C112-4D0A-16547E261267}"/>
+          </ac:picMkLst>
+        </pc:picChg>
+        <pc:picChg chg="del">
+          <ac:chgData name="Enoch Shin" userId="c39a6cce-38ff-4294-b6f2-b2b8f4cccef0" providerId="ADAL" clId="{EFE24D46-2511-5DA4-B14A-5403E002676C}" dt="2026-03-24T21:22:56.280" v="3251" actId="478"/>
+          <ac:picMkLst>
+            <pc:docMk/>
+            <pc:sldMk cId="2460127186" sldId="306"/>
+            <ac:picMk id="12" creationId="{A28D1BC1-8B0C-8161-41C4-D18E187DE88F}"/>
+          </ac:picMkLst>
+        </pc:picChg>
+      </pc:sldChg>
+      <pc:sldChg chg="addSp delSp modSp add mod ord setBg modNotesTx">
+        <pc:chgData name="Enoch Shin" userId="c39a6cce-38ff-4294-b6f2-b2b8f4cccef0" providerId="ADAL" clId="{EFE24D46-2511-5DA4-B14A-5403E002676C}" dt="2026-03-24T21:36:18.486" v="4516"/>
+        <pc:sldMkLst>
+          <pc:docMk/>
+          <pc:sldMk cId="2807566719" sldId="307"/>
+        </pc:sldMkLst>
+        <pc:spChg chg="mod">
+          <ac:chgData name="Enoch Shin" userId="c39a6cce-38ff-4294-b6f2-b2b8f4cccef0" providerId="ADAL" clId="{EFE24D46-2511-5DA4-B14A-5403E002676C}" dt="2026-03-24T21:30:52.310" v="3744" actId="20577"/>
+          <ac:spMkLst>
+            <pc:docMk/>
+            <pc:sldMk cId="2807566719" sldId="307"/>
+            <ac:spMk id="2" creationId="{9B45C7BF-4B36-64E7-61F8-C10ABBE94294}"/>
+          </ac:spMkLst>
+        </pc:spChg>
+        <pc:spChg chg="add mod">
+          <ac:chgData name="Enoch Shin" userId="c39a6cce-38ff-4294-b6f2-b2b8f4cccef0" providerId="ADAL" clId="{EFE24D46-2511-5DA4-B14A-5403E002676C}" dt="2026-03-24T21:32:23.584" v="3905" actId="20577"/>
+          <ac:spMkLst>
+            <pc:docMk/>
+            <pc:sldMk cId="2807566719" sldId="307"/>
+            <ac:spMk id="4" creationId="{6497745E-5C55-AA8E-7E2D-7FC11C596E3F}"/>
+          </ac:spMkLst>
+        </pc:spChg>
+        <pc:spChg chg="add mod">
+          <ac:chgData name="Enoch Shin" userId="c39a6cce-38ff-4294-b6f2-b2b8f4cccef0" providerId="ADAL" clId="{EFE24D46-2511-5DA4-B14A-5403E002676C}" dt="2026-03-24T21:29:31.900" v="3676" actId="207"/>
+          <ac:spMkLst>
+            <pc:docMk/>
+            <pc:sldMk cId="2807566719" sldId="307"/>
+            <ac:spMk id="6" creationId="{3286AE4C-3B9E-33FE-8FD4-6D11D80FB691}"/>
+          </ac:spMkLst>
+        </pc:spChg>
+        <pc:spChg chg="add mod">
+          <ac:chgData name="Enoch Shin" userId="c39a6cce-38ff-4294-b6f2-b2b8f4cccef0" providerId="ADAL" clId="{EFE24D46-2511-5DA4-B14A-5403E002676C}" dt="2026-03-24T21:29:33.205" v="3677"/>
+          <ac:spMkLst>
+            <pc:docMk/>
+            <pc:sldMk cId="2807566719" sldId="307"/>
+            <ac:spMk id="7" creationId="{8ABEED01-A238-9999-AECD-938E83B777BD}"/>
+          </ac:spMkLst>
+        </pc:spChg>
+        <pc:spChg chg="add mod">
+          <ac:chgData name="Enoch Shin" userId="c39a6cce-38ff-4294-b6f2-b2b8f4cccef0" providerId="ADAL" clId="{EFE24D46-2511-5DA4-B14A-5403E002676C}" dt="2026-03-24T21:29:33.282" v="3678"/>
+          <ac:spMkLst>
+            <pc:docMk/>
+            <pc:sldMk cId="2807566719" sldId="307"/>
+            <ac:spMk id="8" creationId="{13301B77-82E4-B494-F16C-9CBCFB055E64}"/>
+          </ac:spMkLst>
+        </pc:spChg>
+        <pc:spChg chg="add mod">
+          <ac:chgData name="Enoch Shin" userId="c39a6cce-38ff-4294-b6f2-b2b8f4cccef0" providerId="ADAL" clId="{EFE24D46-2511-5DA4-B14A-5403E002676C}" dt="2026-03-24T21:29:42.456" v="3680" actId="1076"/>
+          <ac:spMkLst>
+            <pc:docMk/>
+            <pc:sldMk cId="2807566719" sldId="307"/>
+            <ac:spMk id="9" creationId="{7648CC76-B1CA-C47C-A333-8D37B46C0E50}"/>
+          </ac:spMkLst>
+        </pc:spChg>
+        <pc:grpChg chg="add mod">
+          <ac:chgData name="Enoch Shin" userId="c39a6cce-38ff-4294-b6f2-b2b8f4cccef0" providerId="ADAL" clId="{EFE24D46-2511-5DA4-B14A-5403E002676C}" dt="2026-03-24T21:31:20.080" v="3755" actId="1076"/>
+          <ac:grpSpMkLst>
+            <pc:docMk/>
+            <pc:sldMk cId="2807566719" sldId="307"/>
+            <ac:grpSpMk id="10" creationId="{B40F1D3D-E845-48C1-8BFB-63A63D661394}"/>
+          </ac:grpSpMkLst>
+        </pc:grpChg>
+        <pc:picChg chg="add mod">
+          <ac:chgData name="Enoch Shin" userId="c39a6cce-38ff-4294-b6f2-b2b8f4cccef0" providerId="ADAL" clId="{EFE24D46-2511-5DA4-B14A-5403E002676C}" dt="2026-03-24T21:25:09.359" v="3372" actId="1076"/>
+          <ac:picMkLst>
+            <pc:docMk/>
+            <pc:sldMk cId="2807566719" sldId="307"/>
+            <ac:picMk id="3" creationId="{A94405FF-2921-E9B6-D03B-7318034A32E9}"/>
+          </ac:picMkLst>
+        </pc:picChg>
+        <pc:picChg chg="del mod">
+          <ac:chgData name="Enoch Shin" userId="c39a6cce-38ff-4294-b6f2-b2b8f4cccef0" providerId="ADAL" clId="{EFE24D46-2511-5DA4-B14A-5403E002676C}" dt="2026-03-24T21:25:04.535" v="3369" actId="478"/>
+          <ac:picMkLst>
+            <pc:docMk/>
+            <pc:sldMk cId="2807566719" sldId="307"/>
+            <ac:picMk id="5" creationId="{FA023C6D-467C-EB47-DC0D-69F5E2503814}"/>
+          </ac:picMkLst>
+        </pc:picChg>
+      </pc:sldChg>
+    </pc:docChg>
+  </pc:docChgLst>
+</pc:chgInfo>
 </file>
 
 <file path=ppt/notesMasters/notesMaster1.xml><?xml version="1.0" encoding="utf-8"?>
@@ -226,7 +927,7 @@
           <a:p>
             <a:fld id="{4A3C5CF5-2F08-B740-9061-51D0631E3765}" type="datetimeFigureOut">
               <a:rPr lang="en-US" smtClean="0"/>
-              <a:t>3/12/26</a:t>
+              <a:t>3/24/26</a:t>
             </a:fld>
             <a:endParaRPr lang="en-US"/>
           </a:p>
@@ -602,7 +1303,13 @@
   <p:cSld>
     <p:spTree>
       <p:nvGrpSpPr>
-        <p:cNvPr id="1" name=""/>
+        <p:cNvPr id="1" name="">
+          <a:extLst>
+            <a:ext uri="{FF2B5EF4-FFF2-40B4-BE49-F238E27FC236}">
+              <a16:creationId xmlns:a16="http://schemas.microsoft.com/office/drawing/2014/main" id="{12B65B97-8D96-1DDA-4F0A-D76FD37AF6D2}"/>
+            </a:ext>
+          </a:extLst>
+        </p:cNvPr>
         <p:cNvGrpSpPr/>
         <p:nvPr/>
       </p:nvGrpSpPr>
@@ -616,7 +1323,13 @@
       </p:grpSpPr>
       <p:sp>
         <p:nvSpPr>
-          <p:cNvPr id="2" name="Slide Image Placeholder 1"/>
+          <p:cNvPr id="2" name="Slide Image Placeholder 1">
+            <a:extLst>
+              <a:ext uri="{FF2B5EF4-FFF2-40B4-BE49-F238E27FC236}">
+                <a16:creationId xmlns:a16="http://schemas.microsoft.com/office/drawing/2014/main" id="{63DB854C-4C3C-7591-23E4-554C9E38FC76}"/>
+              </a:ext>
+            </a:extLst>
+          </p:cNvPr>
           <p:cNvSpPr>
             <a:spLocks noGrp="1" noRot="1" noChangeAspect="1"/>
           </p:cNvSpPr>
@@ -628,7 +1341,13 @@
       </p:sp>
       <p:sp>
         <p:nvSpPr>
-          <p:cNvPr id="3" name="Notes Placeholder 2"/>
+          <p:cNvPr id="3" name="Notes Placeholder 2">
+            <a:extLst>
+              <a:ext uri="{FF2B5EF4-FFF2-40B4-BE49-F238E27FC236}">
+                <a16:creationId xmlns:a16="http://schemas.microsoft.com/office/drawing/2014/main" id="{536CE1F4-80C0-1B51-2118-443CB82A5B78}"/>
+              </a:ext>
+            </a:extLst>
+          </p:cNvPr>
           <p:cNvSpPr>
             <a:spLocks noGrp="1"/>
           </p:cNvSpPr>
@@ -642,39 +1361,45 @@
           <a:lstStyle/>
           <a:p>
             <a:r>
-              <a:rPr lang="en-US"/>
+              <a:rPr lang="en-US" dirty="0"/>
               <a:t>https://</a:t>
             </a:r>
             <a:r>
-              <a:rPr lang="en-US" err="1"/>
-              <a:t>www.kungfu.ai</a:t>
-            </a:r>
-            <a:r>
-              <a:rPr lang="en-US"/>
-              <a:t>/blog-post/</a:t>
-            </a:r>
-            <a:r>
-              <a:rPr lang="en-US" err="1"/>
-              <a:t>convnext</a:t>
-            </a:r>
-            <a:r>
-              <a:rPr lang="en-US"/>
-              <a:t>-a-transformer-inspired-</a:t>
-            </a:r>
-            <a:r>
-              <a:rPr lang="en-US" err="1"/>
-              <a:t>cnn</a:t>
-            </a:r>
-            <a:r>
-              <a:rPr lang="en-US"/>
-              <a:t>-architecture</a:t>
-            </a:r>
-          </a:p>
-        </p:txBody>
-      </p:sp>
-      <p:sp>
-        <p:nvSpPr>
-          <p:cNvPr id="4" name="Slide Number Placeholder 3"/>
+              <a:rPr lang="en-US" dirty="0" err="1"/>
+              <a:t>dravetfoundation.org</a:t>
+            </a:r>
+            <a:r>
+              <a:rPr lang="en-US" dirty="0"/>
+              <a:t>/comprehensive-center/</a:t>
+            </a:r>
+            <a:r>
+              <a:rPr lang="en-US" dirty="0" err="1"/>
+              <a:t>boston</a:t>
+            </a:r>
+            <a:r>
+              <a:rPr lang="en-US" dirty="0"/>
+              <a:t>-</a:t>
+            </a:r>
+            <a:r>
+              <a:rPr lang="en-US" dirty="0" err="1"/>
+              <a:t>childrens</a:t>
+            </a:r>
+            <a:r>
+              <a:rPr lang="en-US" dirty="0"/>
+              <a:t>-hospital/</a:t>
+            </a:r>
+          </a:p>
+        </p:txBody>
+      </p:sp>
+      <p:sp>
+        <p:nvSpPr>
+          <p:cNvPr id="4" name="Slide Number Placeholder 3">
+            <a:extLst>
+              <a:ext uri="{FF2B5EF4-FFF2-40B4-BE49-F238E27FC236}">
+                <a16:creationId xmlns:a16="http://schemas.microsoft.com/office/drawing/2014/main" id="{F6D3D9D3-ACD7-68C7-0EF3-916D4948720B}"/>
+              </a:ext>
+            </a:extLst>
+          </p:cNvPr>
           <p:cNvSpPr>
             <a:spLocks noGrp="1"/>
           </p:cNvSpPr>
@@ -689,7 +1414,7 @@
           <a:p>
             <a:fld id="{BD0EE75B-EF0F-E245-A34A-06675D448390}" type="slidenum">
               <a:rPr lang="en-US" smtClean="0"/>
-              <a:t>6</a:t>
+              <a:t>3</a:t>
             </a:fld>
             <a:endParaRPr lang="en-US"/>
           </a:p>
@@ -698,7 +1423,7 @@
     </p:spTree>
     <p:extLst>
       <p:ext uri="{BB962C8B-B14F-4D97-AF65-F5344CB8AC3E}">
-        <p14:creationId xmlns:p14="http://schemas.microsoft.com/office/powerpoint/2010/main" val="379157446"/>
+        <p14:creationId xmlns:p14="http://schemas.microsoft.com/office/powerpoint/2010/main" val="2871486444"/>
       </p:ext>
     </p:extLst>
   </p:cSld>
@@ -752,7 +1477,38 @@
           <a:bodyPr/>
           <a:lstStyle/>
           <a:p>
-            <a:endParaRPr lang="en-US"/>
+            <a:pPr marL="0" marR="0" lvl="0" indent="0" algn="l" defTabSz="914400" rtl="0" eaLnBrk="1" fontAlgn="auto" latinLnBrk="0" hangingPunct="1">
+              <a:lnSpc>
+                <a:spcPct val="100000"/>
+              </a:lnSpc>
+              <a:spcBef>
+                <a:spcPts val="0"/>
+              </a:spcBef>
+              <a:spcAft>
+                <a:spcPts val="0"/>
+              </a:spcAft>
+              <a:buClrTx/>
+              <a:buSzTx/>
+              <a:buFontTx/>
+              <a:buNone/>
+              <a:tabLst/>
+              <a:defRPr/>
+            </a:pPr>
+            <a:r>
+              <a:rPr lang="en-US" sz="1200" kern="1200" dirty="0">
+                <a:solidFill>
+                  <a:schemeClr val="tx1"/>
+                </a:solidFill>
+                <a:effectLst/>
+                <a:latin typeface="+mn-lt"/>
+                <a:ea typeface="+mn-ea"/>
+                <a:cs typeface="+mn-cs"/>
+              </a:rPr>
+              <a:t>The ordering is consistent with the challenge narrative that we expected in the beginning of this report: the time window holdout gives the upper bound of performance, seizure holdout is a personalized unseen-event setting, and patient holdout is the hardest population-level setting to model. The unbalanced test condition typically lowers F1, because it exposes the cost of false positives more realistically.</a:t>
+            </a:r>
+          </a:p>
+          <a:p>
+            <a:endParaRPr lang="en-US" dirty="0"/>
           </a:p>
         </p:txBody>
       </p:sp>
@@ -773,7 +1529,7 @@
           <a:p>
             <a:fld id="{BD0EE75B-EF0F-E245-A34A-06675D448390}" type="slidenum">
               <a:rPr lang="en-US" smtClean="0"/>
-              <a:t>14</a:t>
+              <a:t>10</a:t>
             </a:fld>
             <a:endParaRPr lang="en-US"/>
           </a:p>
@@ -782,7 +1538,380 @@
     </p:spTree>
     <p:extLst>
       <p:ext uri="{BB962C8B-B14F-4D97-AF65-F5344CB8AC3E}">
-        <p14:creationId xmlns:p14="http://schemas.microsoft.com/office/powerpoint/2010/main" val="4089882810"/>
+        <p14:creationId xmlns:p14="http://schemas.microsoft.com/office/powerpoint/2010/main" val="3480349158"/>
+      </p:ext>
+    </p:extLst>
+  </p:cSld>
+  <p:clrMapOvr>
+    <a:masterClrMapping/>
+  </p:clrMapOvr>
+</p:notes>
+</file>
+
+<file path=ppt/notesSlides/notesSlide4.xml><?xml version="1.0" encoding="utf-8"?>
+<p:notes xmlns:a="http://schemas.openxmlformats.org/drawingml/2006/main" xmlns:r="http://schemas.openxmlformats.org/officeDocument/2006/relationships" xmlns:p="http://schemas.openxmlformats.org/presentationml/2006/main">
+  <p:cSld>
+    <p:spTree>
+      <p:nvGrpSpPr>
+        <p:cNvPr id="1" name="">
+          <a:extLst>
+            <a:ext uri="{FF2B5EF4-FFF2-40B4-BE49-F238E27FC236}">
+              <a16:creationId xmlns:a16="http://schemas.microsoft.com/office/drawing/2014/main" id="{5311FAC6-056D-3392-CB52-C45E749D5E6F}"/>
+            </a:ext>
+          </a:extLst>
+        </p:cNvPr>
+        <p:cNvGrpSpPr/>
+        <p:nvPr/>
+      </p:nvGrpSpPr>
+      <p:grpSpPr>
+        <a:xfrm>
+          <a:off x="0" y="0"/>
+          <a:ext cx="0" cy="0"/>
+          <a:chOff x="0" y="0"/>
+          <a:chExt cx="0" cy="0"/>
+        </a:xfrm>
+      </p:grpSpPr>
+      <p:sp>
+        <p:nvSpPr>
+          <p:cNvPr id="2" name="Slide Image Placeholder 1">
+            <a:extLst>
+              <a:ext uri="{FF2B5EF4-FFF2-40B4-BE49-F238E27FC236}">
+                <a16:creationId xmlns:a16="http://schemas.microsoft.com/office/drawing/2014/main" id="{681C5F14-7DDC-9087-3DA2-E905AC1E5643}"/>
+              </a:ext>
+            </a:extLst>
+          </p:cNvPr>
+          <p:cNvSpPr>
+            <a:spLocks noGrp="1" noRot="1" noChangeAspect="1"/>
+          </p:cNvSpPr>
+          <p:nvPr>
+            <p:ph type="sldImg"/>
+          </p:nvPr>
+        </p:nvSpPr>
+        <p:spPr/>
+      </p:sp>
+      <p:sp>
+        <p:nvSpPr>
+          <p:cNvPr id="3" name="Notes Placeholder 2">
+            <a:extLst>
+              <a:ext uri="{FF2B5EF4-FFF2-40B4-BE49-F238E27FC236}">
+                <a16:creationId xmlns:a16="http://schemas.microsoft.com/office/drawing/2014/main" id="{96300C6B-E643-9F87-82D7-EE01E2B2B9FE}"/>
+              </a:ext>
+            </a:extLst>
+          </p:cNvPr>
+          <p:cNvSpPr>
+            <a:spLocks noGrp="1"/>
+          </p:cNvSpPr>
+          <p:nvPr>
+            <p:ph type="body" idx="1"/>
+          </p:nvPr>
+        </p:nvSpPr>
+        <p:spPr/>
+        <p:txBody>
+          <a:bodyPr/>
+          <a:lstStyle/>
+          <a:p>
+            <a:endParaRPr lang="en-US" dirty="0"/>
+          </a:p>
+        </p:txBody>
+      </p:sp>
+      <p:sp>
+        <p:nvSpPr>
+          <p:cNvPr id="4" name="Slide Number Placeholder 3">
+            <a:extLst>
+              <a:ext uri="{FF2B5EF4-FFF2-40B4-BE49-F238E27FC236}">
+                <a16:creationId xmlns:a16="http://schemas.microsoft.com/office/drawing/2014/main" id="{4315090D-0E91-B702-3987-E059ED3713EB}"/>
+              </a:ext>
+            </a:extLst>
+          </p:cNvPr>
+          <p:cNvSpPr>
+            <a:spLocks noGrp="1"/>
+          </p:cNvSpPr>
+          <p:nvPr>
+            <p:ph type="sldNum" sz="quarter" idx="5"/>
+          </p:nvPr>
+        </p:nvSpPr>
+        <p:spPr/>
+        <p:txBody>
+          <a:bodyPr/>
+          <a:lstStyle/>
+          <a:p>
+            <a:fld id="{BD0EE75B-EF0F-E245-A34A-06675D448390}" type="slidenum">
+              <a:rPr lang="en-US" smtClean="0"/>
+              <a:t>11</a:t>
+            </a:fld>
+            <a:endParaRPr lang="en-US"/>
+          </a:p>
+        </p:txBody>
+      </p:sp>
+    </p:spTree>
+    <p:extLst>
+      <p:ext uri="{BB962C8B-B14F-4D97-AF65-F5344CB8AC3E}">
+        <p14:creationId xmlns:p14="http://schemas.microsoft.com/office/powerpoint/2010/main" val="852883182"/>
+      </p:ext>
+    </p:extLst>
+  </p:cSld>
+  <p:clrMapOvr>
+    <a:masterClrMapping/>
+  </p:clrMapOvr>
+</p:notes>
+</file>
+
+<file path=ppt/notesSlides/notesSlide5.xml><?xml version="1.0" encoding="utf-8"?>
+<p:notes xmlns:a="http://schemas.openxmlformats.org/drawingml/2006/main" xmlns:r="http://schemas.openxmlformats.org/officeDocument/2006/relationships" xmlns:p="http://schemas.openxmlformats.org/presentationml/2006/main">
+  <p:cSld>
+    <p:spTree>
+      <p:nvGrpSpPr>
+        <p:cNvPr id="1" name=""/>
+        <p:cNvGrpSpPr/>
+        <p:nvPr/>
+      </p:nvGrpSpPr>
+      <p:grpSpPr>
+        <a:xfrm>
+          <a:off x="0" y="0"/>
+          <a:ext cx="0" cy="0"/>
+          <a:chOff x="0" y="0"/>
+          <a:chExt cx="0" cy="0"/>
+        </a:xfrm>
+      </p:grpSpPr>
+      <p:sp>
+        <p:nvSpPr>
+          <p:cNvPr id="2" name="Slide Image Placeholder 1"/>
+          <p:cNvSpPr>
+            <a:spLocks noGrp="1" noRot="1" noChangeAspect="1"/>
+          </p:cNvSpPr>
+          <p:nvPr>
+            <p:ph type="sldImg"/>
+          </p:nvPr>
+        </p:nvSpPr>
+        <p:spPr/>
+      </p:sp>
+      <p:sp>
+        <p:nvSpPr>
+          <p:cNvPr id="3" name="Notes Placeholder 2"/>
+          <p:cNvSpPr>
+            <a:spLocks noGrp="1"/>
+          </p:cNvSpPr>
+          <p:nvPr>
+            <p:ph type="body" idx="1"/>
+          </p:nvPr>
+        </p:nvSpPr>
+        <p:spPr/>
+        <p:txBody>
+          <a:bodyPr/>
+          <a:lstStyle/>
+          <a:p>
+            <a:pPr marL="0" marR="0" lvl="0" indent="0" algn="l" defTabSz="914400" rtl="0" eaLnBrk="1" fontAlgn="auto" latinLnBrk="0" hangingPunct="1">
+              <a:lnSpc>
+                <a:spcPct val="100000"/>
+              </a:lnSpc>
+              <a:spcBef>
+                <a:spcPts val="0"/>
+              </a:spcBef>
+              <a:spcAft>
+                <a:spcPts val="0"/>
+              </a:spcAft>
+              <a:buClrTx/>
+              <a:buSzTx/>
+              <a:buFontTx/>
+              <a:buNone/>
+              <a:tabLst/>
+              <a:defRPr/>
+            </a:pPr>
+            <a:r>
+              <a:rPr lang="en-US" sz="1200" kern="1200" dirty="0">
+                <a:solidFill>
+                  <a:schemeClr val="tx1"/>
+                </a:solidFill>
+                <a:effectLst/>
+                <a:latin typeface="+mn-lt"/>
+                <a:ea typeface="+mn-ea"/>
+                <a:cs typeface="+mn-cs"/>
+              </a:rPr>
+              <a:t>This figure above reports the mean ROC-AUC for the same protocol and sampling matrix as the previous figure. The ranking pattern is similar to F1, but AUC is more stable. This suggests that the model still preserves useful ranking ability under harder protocols, even when the </a:t>
+            </a:r>
+            <a:r>
+              <a:rPr lang="en-US" sz="1200" kern="1200" dirty="0" err="1">
+                <a:solidFill>
+                  <a:schemeClr val="tx1"/>
+                </a:solidFill>
+                <a:effectLst/>
+                <a:latin typeface="+mn-lt"/>
+                <a:ea typeface="+mn-ea"/>
+                <a:cs typeface="+mn-cs"/>
+              </a:rPr>
+              <a:t>thresholded</a:t>
+            </a:r>
+            <a:r>
+              <a:rPr lang="en-US" sz="1200" kern="1200" dirty="0">
+                <a:solidFill>
+                  <a:schemeClr val="tx1"/>
+                </a:solidFill>
+                <a:effectLst/>
+                <a:latin typeface="+mn-lt"/>
+                <a:ea typeface="+mn-ea"/>
+                <a:cs typeface="+mn-cs"/>
+              </a:rPr>
+              <a:t> F1 score drops. In practice, this means class imbalance and threshold selection remain critical for deployment-oriented interpretation. Below, we report the F1 scores in all our sampling and split settings.</a:t>
+            </a:r>
+          </a:p>
+          <a:p>
+            <a:endParaRPr lang="en-US" dirty="0"/>
+          </a:p>
+        </p:txBody>
+      </p:sp>
+      <p:sp>
+        <p:nvSpPr>
+          <p:cNvPr id="4" name="Slide Number Placeholder 3"/>
+          <p:cNvSpPr>
+            <a:spLocks noGrp="1"/>
+          </p:cNvSpPr>
+          <p:nvPr>
+            <p:ph type="sldNum" sz="quarter" idx="5"/>
+          </p:nvPr>
+        </p:nvSpPr>
+        <p:spPr/>
+        <p:txBody>
+          <a:bodyPr/>
+          <a:lstStyle/>
+          <a:p>
+            <a:fld id="{BD0EE75B-EF0F-E245-A34A-06675D448390}" type="slidenum">
+              <a:rPr lang="en-US" smtClean="0"/>
+              <a:t>12</a:t>
+            </a:fld>
+            <a:endParaRPr lang="en-US"/>
+          </a:p>
+        </p:txBody>
+      </p:sp>
+    </p:spTree>
+    <p:extLst>
+      <p:ext uri="{BB962C8B-B14F-4D97-AF65-F5344CB8AC3E}">
+        <p14:creationId xmlns:p14="http://schemas.microsoft.com/office/powerpoint/2010/main" val="40581154"/>
+      </p:ext>
+    </p:extLst>
+  </p:cSld>
+  <p:clrMapOvr>
+    <a:masterClrMapping/>
+  </p:clrMapOvr>
+</p:notes>
+</file>
+
+<file path=ppt/notesSlides/notesSlide6.xml><?xml version="1.0" encoding="utf-8"?>
+<p:notes xmlns:a="http://schemas.openxmlformats.org/drawingml/2006/main" xmlns:r="http://schemas.openxmlformats.org/officeDocument/2006/relationships" xmlns:p="http://schemas.openxmlformats.org/presentationml/2006/main">
+  <p:cSld>
+    <p:spTree>
+      <p:nvGrpSpPr>
+        <p:cNvPr id="1" name=""/>
+        <p:cNvGrpSpPr/>
+        <p:nvPr/>
+      </p:nvGrpSpPr>
+      <p:grpSpPr>
+        <a:xfrm>
+          <a:off x="0" y="0"/>
+          <a:ext cx="0" cy="0"/>
+          <a:chOff x="0" y="0"/>
+          <a:chExt cx="0" cy="0"/>
+        </a:xfrm>
+      </p:grpSpPr>
+      <p:sp>
+        <p:nvSpPr>
+          <p:cNvPr id="2" name="Slide Image Placeholder 1"/>
+          <p:cNvSpPr>
+            <a:spLocks noGrp="1" noRot="1" noChangeAspect="1"/>
+          </p:cNvSpPr>
+          <p:nvPr>
+            <p:ph type="sldImg"/>
+          </p:nvPr>
+        </p:nvSpPr>
+        <p:spPr/>
+      </p:sp>
+      <p:sp>
+        <p:nvSpPr>
+          <p:cNvPr id="3" name="Notes Placeholder 2"/>
+          <p:cNvSpPr>
+            <a:spLocks noGrp="1"/>
+          </p:cNvSpPr>
+          <p:nvPr>
+            <p:ph type="body" idx="1"/>
+          </p:nvPr>
+        </p:nvSpPr>
+        <p:spPr/>
+        <p:txBody>
+          <a:bodyPr/>
+          <a:lstStyle/>
+          <a:p>
+            <a:r>
+              <a:rPr lang="en-US" sz="1200" kern="1200" dirty="0">
+                <a:solidFill>
+                  <a:schemeClr val="tx1"/>
+                </a:solidFill>
+                <a:effectLst/>
+                <a:latin typeface="+mn-lt"/>
+                <a:ea typeface="+mn-ea"/>
+                <a:cs typeface="+mn-cs"/>
+              </a:rPr>
+              <a:t>Above, we see a comparison of confusion matrices for both balanced and unbalanced (80/20) test sets. </a:t>
+            </a:r>
+          </a:p>
+          <a:p>
+            <a:r>
+              <a:rPr lang="en-US" sz="1200" kern="1200" dirty="0">
+                <a:solidFill>
+                  <a:schemeClr val="tx1"/>
+                </a:solidFill>
+                <a:effectLst/>
+                <a:latin typeface="+mn-lt"/>
+                <a:ea typeface="+mn-ea"/>
+                <a:cs typeface="+mn-cs"/>
+              </a:rPr>
+              <a:t>Under the balanced 50/50 testing setting, this figure selects the best train setting for each protocol and aggregates the confusion matrices across all outer folds. Each cell reports both the total count and the row-normalized proportion. Window holdout has the strongest diagonal, indicating the easiest generalization setting; seizure holdout is intermediate; patient holdout is hardest and mainly loses performance through reduced positive recall. This matches the intended challenge hierarchy of window &gt; seizure &gt; patient.</a:t>
+            </a:r>
+          </a:p>
+          <a:p>
+            <a:r>
+              <a:rPr lang="en-US" sz="1200" kern="1200" dirty="0">
+                <a:solidFill>
+                  <a:schemeClr val="tx1"/>
+                </a:solidFill>
+                <a:effectLst/>
+                <a:latin typeface="+mn-lt"/>
+                <a:ea typeface="+mn-ea"/>
+                <a:cs typeface="+mn-cs"/>
+              </a:rPr>
+              <a:t>For the 80/20 unbalanced setting, because the negative class dominates, high specificity becomes visually tied to a large true-negative block, while the recall-versus-false-positive trade-off becomes more deployment-relevant. For seizure and patient holdout especially, this view better exposes trustworthiness under realistic class ratios.</a:t>
+            </a:r>
+          </a:p>
+          <a:p>
+            <a:endParaRPr lang="en-US" dirty="0"/>
+          </a:p>
+        </p:txBody>
+      </p:sp>
+      <p:sp>
+        <p:nvSpPr>
+          <p:cNvPr id="4" name="Slide Number Placeholder 3"/>
+          <p:cNvSpPr>
+            <a:spLocks noGrp="1"/>
+          </p:cNvSpPr>
+          <p:nvPr>
+            <p:ph type="sldNum" sz="quarter" idx="5"/>
+          </p:nvPr>
+        </p:nvSpPr>
+        <p:spPr/>
+        <p:txBody>
+          <a:bodyPr/>
+          <a:lstStyle/>
+          <a:p>
+            <a:fld id="{BD0EE75B-EF0F-E245-A34A-06675D448390}" type="slidenum">
+              <a:rPr lang="en-US" smtClean="0"/>
+              <a:t>13</a:t>
+            </a:fld>
+            <a:endParaRPr lang="en-US"/>
+          </a:p>
+        </p:txBody>
+      </p:sp>
+    </p:spTree>
+    <p:extLst>
+      <p:ext uri="{BB962C8B-B14F-4D97-AF65-F5344CB8AC3E}">
+        <p14:creationId xmlns:p14="http://schemas.microsoft.com/office/powerpoint/2010/main" val="2957328908"/>
       </p:ext>
     </p:extLst>
   </p:cSld>
@@ -939,7 +2068,7 @@
           <a:p>
             <a:fld id="{947FBD62-AA3B-E74B-8A60-7E8626BB6760}" type="datetimeFigureOut">
               <a:rPr lang="en-US" smtClean="0"/>
-              <a:t>3/12/26</a:t>
+              <a:t>3/24/26</a:t>
             </a:fld>
             <a:endParaRPr lang="en-US"/>
           </a:p>
@@ -1137,7 +2266,7 @@
           <a:p>
             <a:fld id="{947FBD62-AA3B-E74B-8A60-7E8626BB6760}" type="datetimeFigureOut">
               <a:rPr lang="en-US" smtClean="0"/>
-              <a:t>3/12/26</a:t>
+              <a:t>3/24/26</a:t>
             </a:fld>
             <a:endParaRPr lang="en-US"/>
           </a:p>
@@ -1345,7 +2474,7 @@
           <a:p>
             <a:fld id="{947FBD62-AA3B-E74B-8A60-7E8626BB6760}" type="datetimeFigureOut">
               <a:rPr lang="en-US" smtClean="0"/>
-              <a:t>3/12/26</a:t>
+              <a:t>3/24/26</a:t>
             </a:fld>
             <a:endParaRPr lang="en-US"/>
           </a:p>
@@ -1543,7 +2672,7 @@
           <a:p>
             <a:fld id="{947FBD62-AA3B-E74B-8A60-7E8626BB6760}" type="datetimeFigureOut">
               <a:rPr lang="en-US" smtClean="0"/>
-              <a:t>3/12/26</a:t>
+              <a:t>3/24/26</a:t>
             </a:fld>
             <a:endParaRPr lang="en-US"/>
           </a:p>
@@ -1818,7 +2947,7 @@
           <a:p>
             <a:fld id="{947FBD62-AA3B-E74B-8A60-7E8626BB6760}" type="datetimeFigureOut">
               <a:rPr lang="en-US" smtClean="0"/>
-              <a:t>3/12/26</a:t>
+              <a:t>3/24/26</a:t>
             </a:fld>
             <a:endParaRPr lang="en-US"/>
           </a:p>
@@ -2083,7 +3212,7 @@
           <a:p>
             <a:fld id="{947FBD62-AA3B-E74B-8A60-7E8626BB6760}" type="datetimeFigureOut">
               <a:rPr lang="en-US" smtClean="0"/>
-              <a:t>3/12/26</a:t>
+              <a:t>3/24/26</a:t>
             </a:fld>
             <a:endParaRPr lang="en-US"/>
           </a:p>
@@ -2495,7 +3624,7 @@
           <a:p>
             <a:fld id="{947FBD62-AA3B-E74B-8A60-7E8626BB6760}" type="datetimeFigureOut">
               <a:rPr lang="en-US" smtClean="0"/>
-              <a:t>3/12/26</a:t>
+              <a:t>3/24/26</a:t>
             </a:fld>
             <a:endParaRPr lang="en-US"/>
           </a:p>
@@ -2636,7 +3765,7 @@
           <a:p>
             <a:fld id="{947FBD62-AA3B-E74B-8A60-7E8626BB6760}" type="datetimeFigureOut">
               <a:rPr lang="en-US" smtClean="0"/>
-              <a:t>3/12/26</a:t>
+              <a:t>3/24/26</a:t>
             </a:fld>
             <a:endParaRPr lang="en-US"/>
           </a:p>
@@ -2749,7 +3878,7 @@
           <a:p>
             <a:fld id="{947FBD62-AA3B-E74B-8A60-7E8626BB6760}" type="datetimeFigureOut">
               <a:rPr lang="en-US" smtClean="0"/>
-              <a:t>3/12/26</a:t>
+              <a:t>3/24/26</a:t>
             </a:fld>
             <a:endParaRPr lang="en-US"/>
           </a:p>
@@ -3060,7 +4189,7 @@
           <a:p>
             <a:fld id="{947FBD62-AA3B-E74B-8A60-7E8626BB6760}" type="datetimeFigureOut">
               <a:rPr lang="en-US" smtClean="0"/>
-              <a:t>3/12/26</a:t>
+              <a:t>3/24/26</a:t>
             </a:fld>
             <a:endParaRPr lang="en-US"/>
           </a:p>
@@ -3348,7 +4477,7 @@
           <a:p>
             <a:fld id="{947FBD62-AA3B-E74B-8A60-7E8626BB6760}" type="datetimeFigureOut">
               <a:rPr lang="en-US" smtClean="0"/>
-              <a:t>3/12/26</a:t>
+              <a:t>3/24/26</a:t>
             </a:fld>
             <a:endParaRPr lang="en-US"/>
           </a:p>
@@ -3589,7 +4718,7 @@
           <a:p>
             <a:fld id="{947FBD62-AA3B-E74B-8A60-7E8626BB6760}" type="datetimeFigureOut">
               <a:rPr lang="en-US" smtClean="0"/>
-              <a:t>3/12/26</a:t>
+              <a:t>3/24/26</a:t>
             </a:fld>
             <a:endParaRPr lang="en-US"/>
           </a:p>
@@ -3992,6 +5121,14 @@
 <file path=ppt/slides/slide1.xml><?xml version="1.0" encoding="utf-8"?>
 <p:sld xmlns:a="http://schemas.openxmlformats.org/drawingml/2006/main" xmlns:r="http://schemas.openxmlformats.org/officeDocument/2006/relationships" xmlns:p="http://schemas.openxmlformats.org/presentationml/2006/main">
   <p:cSld>
+    <p:bg>
+      <p:bgPr>
+        <a:solidFill>
+          <a:schemeClr val="bg1"/>
+        </a:solidFill>
+        <a:effectLst/>
+      </p:bgPr>
+    </p:bg>
     <p:spTree>
       <p:nvGrpSpPr>
         <p:cNvPr id="1" name=""/>
@@ -4076,7 +5213,7 @@
           </a:p>
           <a:p>
             <a:r>
-              <a:rPr lang="en-GB" sz="2000">
+              <a:rPr lang="en-GB" sz="2000" dirty="0">
                 <a:solidFill>
                   <a:schemeClr val="tx2">
                     <a:lumMod val="75000"/>
@@ -4086,7 +5223,7 @@
               </a:rPr>
               <a:t>Twyla Keating, 1770979</a:t>
             </a:r>
-            <a:endParaRPr lang="en-US" sz="2000">
+            <a:endParaRPr lang="en-US" sz="2000" dirty="0">
               <a:solidFill>
                 <a:schemeClr val="tx2">
                   <a:lumMod val="75000"/>
@@ -4097,14 +5234,14 @@
           </a:p>
           <a:p>
             <a:r>
-              <a:rPr lang="en-GB" sz="2000">
+              <a:rPr lang="en-GB" sz="2000" dirty="0">
                 <a:solidFill>
                   <a:srgbClr val="7030A0"/>
                 </a:solidFill>
               </a:rPr>
               <a:t>Zijian Li, 1781642</a:t>
             </a:r>
-            <a:endParaRPr lang="en-US" sz="2000">
+            <a:endParaRPr lang="en-US" sz="2000" dirty="0">
               <a:solidFill>
                 <a:srgbClr val="7030A0"/>
               </a:solidFill>
@@ -4112,14 +5249,14 @@
           </a:p>
           <a:p>
             <a:r>
-              <a:rPr lang="en-GB" sz="2000"/>
+              <a:rPr lang="en-GB" sz="2000" dirty="0"/>
               <a:t>Enoch Shin, 1767565</a:t>
             </a:r>
-            <a:endParaRPr lang="en-US" sz="2000"/>
-          </a:p>
-          <a:p>
-            <a:r>
-              <a:rPr lang="en-GB" sz="2000" err="1">
+            <a:endParaRPr lang="en-US" sz="2000" dirty="0"/>
+          </a:p>
+          <a:p>
+            <a:r>
+              <a:rPr lang="en-GB" sz="2000" dirty="0" err="1">
                 <a:solidFill>
                   <a:schemeClr val="accent6">
                     <a:lumMod val="75000"/>
@@ -4129,7 +5266,7 @@
               <a:t>Wenqi</a:t>
             </a:r>
             <a:r>
-              <a:rPr lang="en-GB" sz="2000">
+              <a:rPr lang="en-GB" sz="2000" dirty="0">
                 <a:solidFill>
                   <a:schemeClr val="accent6">
                     <a:lumMod val="75000"/>
@@ -4138,7 +5275,7 @@
               </a:rPr>
               <a:t> Zhang, 1785174</a:t>
             </a:r>
-            <a:endParaRPr lang="en-US" sz="2000">
+            <a:endParaRPr lang="en-US" sz="2000" dirty="0">
               <a:solidFill>
                 <a:schemeClr val="accent6">
                   <a:lumMod val="75000"/>
@@ -4147,7 +5284,7 @@
             </a:endParaRPr>
           </a:p>
           <a:p>
-            <a:endParaRPr lang="en-US" sz="2000"/>
+            <a:endParaRPr lang="en-US" sz="2000" dirty="0"/>
           </a:p>
         </p:txBody>
       </p:sp>
@@ -4170,23 +5307,14 @@
     <p:bg>
       <p:bgPr>
         <a:solidFill>
-          <a:schemeClr val="accent1">
-            <a:lumMod val="20000"/>
-            <a:lumOff val="80000"/>
-          </a:schemeClr>
+          <a:schemeClr val="bg1"/>
         </a:solidFill>
         <a:effectLst/>
       </p:bgPr>
     </p:bg>
     <p:spTree>
       <p:nvGrpSpPr>
-        <p:cNvPr id="1" name="">
-          <a:extLst>
-            <a:ext uri="{FF2B5EF4-FFF2-40B4-BE49-F238E27FC236}">
-              <a16:creationId xmlns:a16="http://schemas.microsoft.com/office/drawing/2014/main" id="{409715EA-567B-8F2A-65FB-B20CD0B6340C}"/>
-            </a:ext>
-          </a:extLst>
-        </p:cNvPr>
+        <p:cNvPr id="1" name=""/>
         <p:cNvGrpSpPr/>
         <p:nvPr/>
       </p:nvGrpSpPr>
@@ -4203,7 +5331,7 @@
           <p:cNvPr id="2" name="Title 1">
             <a:extLst>
               <a:ext uri="{FF2B5EF4-FFF2-40B4-BE49-F238E27FC236}">
-                <a16:creationId xmlns:a16="http://schemas.microsoft.com/office/drawing/2014/main" id="{4923A275-8DE5-5CE7-C0AD-14FEB1D9B923}"/>
+                <a16:creationId xmlns:a16="http://schemas.microsoft.com/office/drawing/2014/main" id="{312E1568-1ADF-E14C-5869-6889CFE44164}"/>
               </a:ext>
             </a:extLst>
           </p:cNvPr>
@@ -4216,111 +5344,55 @@
         </p:nvSpPr>
         <p:spPr>
           <a:xfrm>
-            <a:off x="282256" y="-16373"/>
-            <a:ext cx="9795638" cy="1114380"/>
+            <a:off x="331152" y="0"/>
+            <a:ext cx="10515600" cy="1325563"/>
           </a:xfrm>
         </p:spPr>
         <p:txBody>
-          <a:bodyPr vert="horz" lIns="91440" tIns="45720" rIns="91440" bIns="45720" rtlCol="0" anchor="b">
-            <a:normAutofit/>
-          </a:bodyPr>
+          <a:bodyPr/>
           <a:lstStyle/>
           <a:p>
             <a:r>
-              <a:rPr lang="en-US" sz="5200"/>
-              <a:t>Method 1 Details – Step 3 </a:t>
-            </a:r>
-          </a:p>
-        </p:txBody>
-      </p:sp>
-      <p:sp>
-        <p:nvSpPr>
-          <p:cNvPr id="9" name="TextBox 8">
-            <a:extLst>
-              <a:ext uri="{FF2B5EF4-FFF2-40B4-BE49-F238E27FC236}">
-                <a16:creationId xmlns:a16="http://schemas.microsoft.com/office/drawing/2014/main" id="{D2903A53-B2D9-D874-BCF0-9F414968F33A}"/>
-              </a:ext>
-            </a:extLst>
-          </p:cNvPr>
-          <p:cNvSpPr txBox="1"/>
+              <a:rPr lang="en-US" dirty="0"/>
+              <a:t>F1 Scores – 3 × 2 × 2 Scenario Comparison</a:t>
+            </a:r>
+          </a:p>
+        </p:txBody>
+      </p:sp>
+      <p:pic>
+        <p:nvPicPr>
+          <p:cNvPr id="12" name="Picture 11" descr="A graph of different colored bars&#10;&#10;AI-generated content may be incorrect.">
+            <a:extLst>
+              <a:ext uri="{FF2B5EF4-FFF2-40B4-BE49-F238E27FC236}">
+                <a16:creationId xmlns:a16="http://schemas.microsoft.com/office/drawing/2014/main" id="{ACB8BB64-728C-51D8-F705-6F15774D8C65}"/>
+              </a:ext>
+            </a:extLst>
+          </p:cNvPr>
+          <p:cNvPicPr>
+            <a:picLocks noChangeAspect="1"/>
+          </p:cNvPicPr>
           <p:nvPr/>
-        </p:nvSpPr>
+        </p:nvPicPr>
+        <p:blipFill>
+          <a:blip r:embed="rId3"/>
+          <a:stretch>
+            <a:fillRect/>
+          </a:stretch>
+        </p:blipFill>
         <p:spPr>
           <a:xfrm>
-            <a:off x="282256" y="1074509"/>
-            <a:ext cx="11388813" cy="3785652"/>
+            <a:off x="331152" y="1054101"/>
+            <a:ext cx="11630974" cy="4986657"/>
           </a:xfrm>
           <a:prstGeom prst="rect">
             <a:avLst/>
           </a:prstGeom>
-          <a:noFill/>
         </p:spPr>
-        <p:txBody>
-          <a:bodyPr wrap="square" lIns="91440" tIns="45720" rIns="91440" bIns="45720" rtlCol="0" anchor="t">
-            <a:spAutoFit/>
-          </a:bodyPr>
-          <a:lstStyle/>
-          <a:p>
-            <a:pPr marL="457200" indent="-457200">
-              <a:buFont typeface="Arial" panose="020B0604020202020204" pitchFamily="34" charset="0"/>
-              <a:buChar char="•"/>
-            </a:pPr>
-            <a:r>
-              <a:rPr lang="en-US" sz="3000"/>
-              <a:t>Patient-level pos/neg rule classification based on 2 separate thresholds (OR gate):</a:t>
-            </a:r>
-          </a:p>
-          <a:p>
-            <a:pPr marL="914400" lvl="1" indent="-457200">
-              <a:buFont typeface="Arial" panose="020B0604020202020204" pitchFamily="34" charset="0"/>
-              <a:buChar char="•"/>
-            </a:pPr>
-            <a:r>
-              <a:rPr lang="en-US" sz="3000" b="1"/>
-              <a:t>Density: </a:t>
-            </a:r>
-            <a:r>
-              <a:rPr lang="en-US" sz="3000"/>
-              <a:t>N≥40 patches with P &gt; 0.90</a:t>
-            </a:r>
-          </a:p>
-          <a:p>
-            <a:pPr marL="914400" lvl="1" indent="-457200">
-              <a:buFont typeface="Arial" panose="020B0604020202020204" pitchFamily="34" charset="0"/>
-              <a:buChar char="•"/>
-            </a:pPr>
-            <a:r>
-              <a:rPr lang="en-US" sz="3000" b="1"/>
-              <a:t>Consistency: </a:t>
-            </a:r>
-            <a:r>
-              <a:rPr lang="en-US" sz="3000"/>
-              <a:t>mean probability across patient patches &gt; 0.88 and spread &lt; 20</a:t>
-            </a:r>
-          </a:p>
-          <a:p>
-            <a:pPr marL="457200" indent="-457200">
-              <a:buFont typeface="Arial" panose="020B0604020202020204" pitchFamily="34" charset="0"/>
-              <a:buChar char="•"/>
-            </a:pPr>
-            <a:r>
-              <a:rPr lang="en-US" sz="3000" b="1"/>
-              <a:t>Why: </a:t>
-            </a:r>
-            <a:r>
-              <a:rPr lang="en-US" sz="3000"/>
-              <a:t>to reduce computation time (cost), clearly evaluate ResNet18 efficacy with simple final diagnostic</a:t>
-            </a:r>
-          </a:p>
-          <a:p>
-            <a:endParaRPr lang="en-US" sz="3000"/>
-          </a:p>
-        </p:txBody>
-      </p:sp>
+      </p:pic>
     </p:spTree>
     <p:extLst>
       <p:ext uri="{BB962C8B-B14F-4D97-AF65-F5344CB8AC3E}">
-        <p14:creationId xmlns:p14="http://schemas.microsoft.com/office/powerpoint/2010/main" val="4109261465"/>
+        <p14:creationId xmlns:p14="http://schemas.microsoft.com/office/powerpoint/2010/main" val="2238264942"/>
       </p:ext>
     </p:extLst>
   </p:cSld>
@@ -4336,10 +5408,7 @@
     <p:bg>
       <p:bgPr>
         <a:solidFill>
-          <a:schemeClr val="accent4">
-            <a:lumMod val="20000"/>
-            <a:lumOff val="80000"/>
-          </a:schemeClr>
+          <a:schemeClr val="bg1"/>
         </a:solidFill>
         <a:effectLst/>
       </p:bgPr>
@@ -4349,7 +5418,7 @@
         <p:cNvPr id="1" name="">
           <a:extLst>
             <a:ext uri="{FF2B5EF4-FFF2-40B4-BE49-F238E27FC236}">
-              <a16:creationId xmlns:a16="http://schemas.microsoft.com/office/drawing/2014/main" id="{DFB953C1-17D9-D5FA-E8FF-7BCDB3A3C105}"/>
+              <a16:creationId xmlns:a16="http://schemas.microsoft.com/office/drawing/2014/main" id="{1D717D66-4AC0-ED9B-0F84-A29E0598D312}"/>
             </a:ext>
           </a:extLst>
         </p:cNvPr>
@@ -4369,7 +5438,7 @@
           <p:cNvPr id="2" name="Title 1">
             <a:extLst>
               <a:ext uri="{FF2B5EF4-FFF2-40B4-BE49-F238E27FC236}">
-                <a16:creationId xmlns:a16="http://schemas.microsoft.com/office/drawing/2014/main" id="{F60D1728-342B-F6C4-68E2-63A0E9D1ECCD}"/>
+                <a16:creationId xmlns:a16="http://schemas.microsoft.com/office/drawing/2014/main" id="{9B45C7BF-4B36-64E7-61F8-C10ABBE94294}"/>
               </a:ext>
             </a:extLst>
           </p:cNvPr>
@@ -4382,37 +5451,27 @@
         </p:nvSpPr>
         <p:spPr>
           <a:xfrm>
-            <a:off x="282256" y="-16373"/>
-            <a:ext cx="9795638" cy="1114380"/>
+            <a:off x="0" y="-319087"/>
+            <a:ext cx="12065000" cy="1325563"/>
           </a:xfrm>
         </p:spPr>
         <p:txBody>
-          <a:bodyPr vert="horz" lIns="91440" tIns="45720" rIns="91440" bIns="45720" rtlCol="0" anchor="b">
-            <a:normAutofit fontScale="90000"/>
-          </a:bodyPr>
+          <a:bodyPr/>
           <a:lstStyle/>
           <a:p>
             <a:r>
-              <a:rPr lang="en-US" sz="5200"/>
-              <a:t>Method 2 </a:t>
-            </a:r>
-            <a:r>
-              <a:rPr lang="en-US" sz="5200" err="1"/>
-              <a:t>ConvNeXt</a:t>
-            </a:r>
-            <a:r>
-              <a:rPr lang="en-US" sz="5200"/>
-              <a:t> Steps Overview</a:t>
-            </a:r>
-          </a:p>
-        </p:txBody>
-      </p:sp>
-      <p:sp>
-        <p:nvSpPr>
-          <p:cNvPr id="9" name="TextBox 8">
-            <a:extLst>
-              <a:ext uri="{FF2B5EF4-FFF2-40B4-BE49-F238E27FC236}">
-                <a16:creationId xmlns:a16="http://schemas.microsoft.com/office/drawing/2014/main" id="{61BCA501-5319-430D-EC18-01D84D204EE9}"/>
+              <a:rPr lang="en-US" dirty="0"/>
+              <a:t>F1 and ROC AUC: Key Insights</a:t>
+            </a:r>
+          </a:p>
+        </p:txBody>
+      </p:sp>
+      <p:sp>
+        <p:nvSpPr>
+          <p:cNvPr id="4" name="TextBox 3">
+            <a:extLst>
+              <a:ext uri="{FF2B5EF4-FFF2-40B4-BE49-F238E27FC236}">
+                <a16:creationId xmlns:a16="http://schemas.microsoft.com/office/drawing/2014/main" id="{6497745E-5C55-AA8E-7E2D-7FC11C596E3F}"/>
               </a:ext>
             </a:extLst>
           </p:cNvPr>
@@ -4421,8 +5480,8 @@
         </p:nvSpPr>
         <p:spPr>
           <a:xfrm>
-            <a:off x="282256" y="943024"/>
-            <a:ext cx="11407996" cy="6555641"/>
+            <a:off x="499047" y="4114970"/>
+            <a:ext cx="11066906" cy="2862322"/>
           </a:xfrm>
           <a:prstGeom prst="rect">
             <a:avLst/>
@@ -4435,121 +5494,233 @@
           </a:bodyPr>
           <a:lstStyle/>
           <a:p>
+            <a:r>
+              <a:rPr lang="en-US" sz="2000" b="1" dirty="0"/>
+              <a:t>Surprising:</a:t>
+            </a:r>
+          </a:p>
+          <a:p>
+            <a:pPr marL="342900" indent="-342900">
+              <a:buFont typeface="Arial" panose="020B0604020202020204" pitchFamily="34" charset="0"/>
+              <a:buChar char="•"/>
+            </a:pPr>
+            <a:r>
+              <a:rPr lang="en-US" sz="2000" dirty="0"/>
+              <a:t>Training with balanced classes slightly worse than training on unbalancing!</a:t>
+            </a:r>
+          </a:p>
+          <a:p>
+            <a:endParaRPr lang="en-US" sz="2000" b="1" dirty="0"/>
+          </a:p>
+          <a:p>
+            <a:r>
+              <a:rPr lang="en-US" sz="2000" b="1" dirty="0"/>
+              <a:t>Expected:</a:t>
+            </a:r>
+          </a:p>
+          <a:p>
+            <a:pPr marL="342900" indent="-342900">
+              <a:buFont typeface="Arial" panose="020B0604020202020204" pitchFamily="34" charset="0"/>
+              <a:buChar char="•"/>
+            </a:pPr>
+            <a:r>
+              <a:rPr lang="en-US" sz="2000" dirty="0"/>
+              <a:t>Window split – highest scores due to leakage of 80% overlap</a:t>
+            </a:r>
+          </a:p>
+          <a:p>
+            <a:pPr marL="342900" indent="-342900">
+              <a:buFont typeface="Arial" panose="020B0604020202020204" pitchFamily="34" charset="0"/>
+              <a:buChar char="•"/>
+            </a:pPr>
+            <a:r>
+              <a:rPr lang="en-US" sz="2000" dirty="0"/>
+              <a:t>For the same training mode: ROC AUC stays stable across unbalanced vs balanced test, but F1 score drops on unbalanced  test (this is expected)</a:t>
+            </a:r>
+          </a:p>
+          <a:p>
             <a:pPr marL="457200" indent="-457200">
               <a:buFont typeface="Arial" panose="020B0604020202020204" pitchFamily="34" charset="0"/>
               <a:buChar char="•"/>
             </a:pPr>
-            <a:r>
-              <a:rPr lang="en-US" sz="3000" b="1"/>
-              <a:t>Step 1: Pre-process </a:t>
-            </a:r>
-          </a:p>
-          <a:p>
-            <a:pPr marL="914400" lvl="1" indent="-457200">
-              <a:buFont typeface="Arial" panose="020B0604020202020204" pitchFamily="34" charset="0"/>
-              <a:buChar char="•"/>
-            </a:pPr>
-            <a:r>
-              <a:rPr lang="en-US" sz="3000"/>
-              <a:t>Industry-standard color jitter and transformations</a:t>
-            </a:r>
-          </a:p>
-          <a:p>
-            <a:pPr marL="914400" lvl="1" indent="-457200">
-              <a:buFont typeface="Arial" panose="020B0604020202020204" pitchFamily="34" charset="0"/>
-              <a:buChar char="•"/>
-            </a:pPr>
-            <a:endParaRPr lang="en-US" sz="3000"/>
+            <a:endParaRPr lang="en-US" sz="2000" dirty="0"/>
           </a:p>
           <a:p>
             <a:pPr marL="457200" indent="-457200">
               <a:buFont typeface="Arial" panose="020B0604020202020204" pitchFamily="34" charset="0"/>
               <a:buChar char="•"/>
             </a:pPr>
-            <a:r>
-              <a:rPr lang="en-US" sz="3000" b="1"/>
-              <a:t>Step 2: Training with </a:t>
-            </a:r>
-            <a:r>
-              <a:rPr lang="en-US" sz="3000" b="1" err="1"/>
-              <a:t>ConvNeXt</a:t>
-            </a:r>
-            <a:r>
-              <a:rPr lang="en-US" sz="3000" b="1"/>
-              <a:t>-Tiny model</a:t>
-            </a:r>
-          </a:p>
-          <a:p>
-            <a:pPr marL="914400" lvl="1" indent="-457200">
-              <a:buFont typeface="Arial" panose="020B0604020202020204" pitchFamily="34" charset="0"/>
-              <a:buChar char="•"/>
-            </a:pPr>
-            <a:r>
-              <a:rPr lang="en-US" sz="3000"/>
-              <a:t>5-fold cross-validation based strictly on patient ID</a:t>
-            </a:r>
-          </a:p>
-          <a:p>
-            <a:pPr marL="1371600" lvl="2" indent="-457200">
-              <a:buFont typeface="Arial" panose="020B0604020202020204" pitchFamily="34" charset="0"/>
-              <a:buChar char="•"/>
-            </a:pPr>
-            <a:r>
-              <a:rPr lang="en-US" sz="3000"/>
-              <a:t>Result: 17-feature per-patient signature (max probability, kurtosis, etc.)</a:t>
-            </a:r>
-          </a:p>
-          <a:p>
-            <a:pPr marL="1371600" lvl="2" indent="-457200">
-              <a:buFont typeface="Arial" panose="020B0604020202020204" pitchFamily="34" charset="0"/>
-              <a:buChar char="•"/>
-            </a:pPr>
-            <a:endParaRPr lang="en-US" sz="3000"/>
-          </a:p>
-          <a:p>
-            <a:pPr marL="457200" indent="-457200">
-              <a:buFont typeface="Arial" panose="020B0604020202020204" pitchFamily="34" charset="0"/>
-              <a:buChar char="•"/>
-            </a:pPr>
-            <a:r>
-              <a:rPr lang="en-US" sz="3000" b="1"/>
-              <a:t>Step 3: Patient-level +/- classification </a:t>
-            </a:r>
-          </a:p>
-          <a:p>
-            <a:pPr marL="914400" lvl="1" indent="-457200">
-              <a:buFont typeface="Arial" panose="020B0604020202020204" pitchFamily="34" charset="0"/>
-              <a:buChar char="•"/>
-            </a:pPr>
-            <a:r>
-              <a:rPr lang="en-US" sz="3000"/>
-              <a:t>Random Forest ensemble: Leave-One-Patient-Out (LOPO) grid search for optimal decision boundaries</a:t>
-            </a:r>
-          </a:p>
-          <a:p>
-            <a:pPr lvl="1"/>
-            <a:endParaRPr lang="en-US" sz="3000"/>
-          </a:p>
-          <a:p>
-            <a:pPr marL="457200" indent="-457200">
-              <a:buFont typeface="Arial" panose="020B0604020202020204" pitchFamily="34" charset="0"/>
-              <a:buChar char="•"/>
-            </a:pPr>
-            <a:endParaRPr lang="en-US" sz="3000"/>
-          </a:p>
-          <a:p>
-            <a:pPr marL="457200" indent="-457200">
-              <a:buFont typeface="Arial" panose="020B0604020202020204" pitchFamily="34" charset="0"/>
-              <a:buChar char="•"/>
-            </a:pPr>
-            <a:endParaRPr lang="en-US" sz="3000"/>
-          </a:p>
-        </p:txBody>
-      </p:sp>
+            <a:endParaRPr lang="en-US" sz="2000" dirty="0"/>
+          </a:p>
+        </p:txBody>
+      </p:sp>
+      <p:grpSp>
+        <p:nvGrpSpPr>
+          <p:cNvPr id="10" name="Group 9">
+            <a:extLst>
+              <a:ext uri="{FF2B5EF4-FFF2-40B4-BE49-F238E27FC236}">
+                <a16:creationId xmlns:a16="http://schemas.microsoft.com/office/drawing/2014/main" id="{B40F1D3D-E845-48C1-8BFB-63A63D661394}"/>
+              </a:ext>
+            </a:extLst>
+          </p:cNvPr>
+          <p:cNvGrpSpPr/>
+          <p:nvPr/>
+        </p:nvGrpSpPr>
+        <p:grpSpPr>
+          <a:xfrm>
+            <a:off x="565265" y="573605"/>
+            <a:ext cx="10738765" cy="3451205"/>
+            <a:chOff x="389206" y="703897"/>
+            <a:chExt cx="11413588" cy="3668078"/>
+          </a:xfrm>
+        </p:grpSpPr>
+        <p:pic>
+          <p:nvPicPr>
+            <p:cNvPr id="3" name="Picture 2" descr="A screenshot of a computer&#10;&#10;AI-generated content may be incorrect.">
+              <a:extLst>
+                <a:ext uri="{FF2B5EF4-FFF2-40B4-BE49-F238E27FC236}">
+                  <a16:creationId xmlns:a16="http://schemas.microsoft.com/office/drawing/2014/main" id="{A94405FF-2921-E9B6-D03B-7318034A32E9}"/>
+                </a:ext>
+              </a:extLst>
+            </p:cNvPr>
+            <p:cNvPicPr>
+              <a:picLocks noChangeAspect="1"/>
+            </p:cNvPicPr>
+            <p:nvPr/>
+          </p:nvPicPr>
+          <p:blipFill>
+            <a:blip r:embed="rId3"/>
+            <a:stretch>
+              <a:fillRect/>
+            </a:stretch>
+          </p:blipFill>
+          <p:spPr>
+            <a:xfrm>
+              <a:off x="389206" y="703897"/>
+              <a:ext cx="11413588" cy="3668078"/>
+            </a:xfrm>
+            <a:prstGeom prst="rect">
+              <a:avLst/>
+            </a:prstGeom>
+          </p:spPr>
+        </p:pic>
+        <p:sp>
+          <p:nvSpPr>
+            <p:cNvPr id="6" name="Rectangle 5">
+              <a:extLst>
+                <a:ext uri="{FF2B5EF4-FFF2-40B4-BE49-F238E27FC236}">
+                  <a16:creationId xmlns:a16="http://schemas.microsoft.com/office/drawing/2014/main" id="{3286AE4C-3B9E-33FE-8FD4-6D11D80FB691}"/>
+                </a:ext>
+              </a:extLst>
+            </p:cNvPr>
+            <p:cNvSpPr/>
+            <p:nvPr/>
+          </p:nvSpPr>
+          <p:spPr>
+            <a:xfrm>
+              <a:off x="389206" y="1828800"/>
+              <a:ext cx="11413588" cy="315686"/>
+            </a:xfrm>
+            <a:prstGeom prst="rect">
+              <a:avLst/>
+            </a:prstGeom>
+            <a:solidFill>
+              <a:srgbClr val="FFFF00">
+                <a:alpha val="32941"/>
+              </a:srgbClr>
+            </a:solidFill>
+            <a:ln>
+              <a:solidFill>
+                <a:srgbClr val="FF0000"/>
+              </a:solidFill>
+            </a:ln>
+          </p:spPr>
+          <p:style>
+            <a:lnRef idx="2">
+              <a:schemeClr val="accent1">
+                <a:shade val="15000"/>
+              </a:schemeClr>
+            </a:lnRef>
+            <a:fillRef idx="1">
+              <a:schemeClr val="accent1"/>
+            </a:fillRef>
+            <a:effectRef idx="0">
+              <a:schemeClr val="accent1"/>
+            </a:effectRef>
+            <a:fontRef idx="minor">
+              <a:schemeClr val="lt1"/>
+            </a:fontRef>
+          </p:style>
+          <p:txBody>
+            <a:bodyPr rtlCol="0" anchor="ctr"/>
+            <a:lstStyle/>
+            <a:p>
+              <a:pPr algn="ctr"/>
+              <a:endParaRPr lang="en-US"/>
+            </a:p>
+          </p:txBody>
+        </p:sp>
+        <p:sp>
+          <p:nvSpPr>
+            <p:cNvPr id="9" name="Rectangle 8">
+              <a:extLst>
+                <a:ext uri="{FF2B5EF4-FFF2-40B4-BE49-F238E27FC236}">
+                  <a16:creationId xmlns:a16="http://schemas.microsoft.com/office/drawing/2014/main" id="{7648CC76-B1CA-C47C-A333-8D37B46C0E50}"/>
+                </a:ext>
+              </a:extLst>
+            </p:cNvPr>
+            <p:cNvSpPr/>
+            <p:nvPr/>
+          </p:nvSpPr>
+          <p:spPr>
+            <a:xfrm>
+              <a:off x="389206" y="1259795"/>
+              <a:ext cx="11413588" cy="315686"/>
+            </a:xfrm>
+            <a:prstGeom prst="rect">
+              <a:avLst/>
+            </a:prstGeom>
+            <a:solidFill>
+              <a:srgbClr val="FFFF00">
+                <a:alpha val="32941"/>
+              </a:srgbClr>
+            </a:solidFill>
+            <a:ln>
+              <a:solidFill>
+                <a:srgbClr val="FF0000"/>
+              </a:solidFill>
+            </a:ln>
+          </p:spPr>
+          <p:style>
+            <a:lnRef idx="2">
+              <a:schemeClr val="accent1">
+                <a:shade val="15000"/>
+              </a:schemeClr>
+            </a:lnRef>
+            <a:fillRef idx="1">
+              <a:schemeClr val="accent1"/>
+            </a:fillRef>
+            <a:effectRef idx="0">
+              <a:schemeClr val="accent1"/>
+            </a:effectRef>
+            <a:fontRef idx="minor">
+              <a:schemeClr val="lt1"/>
+            </a:fontRef>
+          </p:style>
+          <p:txBody>
+            <a:bodyPr rtlCol="0" anchor="ctr"/>
+            <a:lstStyle/>
+            <a:p>
+              <a:pPr algn="ctr"/>
+              <a:endParaRPr lang="en-US"/>
+            </a:p>
+          </p:txBody>
+        </p:sp>
+      </p:grpSp>
     </p:spTree>
     <p:extLst>
       <p:ext uri="{BB962C8B-B14F-4D97-AF65-F5344CB8AC3E}">
-        <p14:creationId xmlns:p14="http://schemas.microsoft.com/office/powerpoint/2010/main" val="545851158"/>
+        <p14:creationId xmlns:p14="http://schemas.microsoft.com/office/powerpoint/2010/main" val="2807566719"/>
       </p:ext>
     </p:extLst>
   </p:cSld>
@@ -4560,15 +5731,12 @@
 </file>
 
 <file path=ppt/slides/slide12.xml><?xml version="1.0" encoding="utf-8"?>
-<p:sld xmlns:a="http://schemas.openxmlformats.org/drawingml/2006/main" xmlns:r="http://schemas.openxmlformats.org/officeDocument/2006/relationships" xmlns:p="http://schemas.openxmlformats.org/presentationml/2006/main">
+<p:sld xmlns:a="http://schemas.openxmlformats.org/drawingml/2006/main" xmlns:r="http://schemas.openxmlformats.org/officeDocument/2006/relationships" xmlns:p="http://schemas.openxmlformats.org/presentationml/2006/main" show="0">
   <p:cSld>
     <p:bg>
       <p:bgPr>
         <a:solidFill>
-          <a:schemeClr val="accent4">
-            <a:lumMod val="20000"/>
-            <a:lumOff val="80000"/>
-          </a:schemeClr>
+          <a:schemeClr val="bg1"/>
         </a:solidFill>
         <a:effectLst/>
       </p:bgPr>
@@ -4578,7 +5746,7 @@
         <p:cNvPr id="1" name="">
           <a:extLst>
             <a:ext uri="{FF2B5EF4-FFF2-40B4-BE49-F238E27FC236}">
-              <a16:creationId xmlns:a16="http://schemas.microsoft.com/office/drawing/2014/main" id="{679E26F6-70EC-0761-1F26-2FC1B183CD1B}"/>
+              <a16:creationId xmlns:a16="http://schemas.microsoft.com/office/drawing/2014/main" id="{86CBA4EB-329F-BFCA-B92A-F441C529F2CC}"/>
             </a:ext>
           </a:extLst>
         </p:cNvPr>
@@ -4598,7 +5766,7 @@
           <p:cNvPr id="2" name="Title 1">
             <a:extLst>
               <a:ext uri="{FF2B5EF4-FFF2-40B4-BE49-F238E27FC236}">
-                <a16:creationId xmlns:a16="http://schemas.microsoft.com/office/drawing/2014/main" id="{4A4E139F-90DD-74BF-90E9-8BF8C2EC4A55}"/>
+                <a16:creationId xmlns:a16="http://schemas.microsoft.com/office/drawing/2014/main" id="{6B0EBE99-24D5-9589-E51F-8AB318E64223}"/>
               </a:ext>
             </a:extLst>
           </p:cNvPr>
@@ -4611,37 +5779,27 @@
         </p:nvSpPr>
         <p:spPr>
           <a:xfrm>
-            <a:off x="282256" y="-16373"/>
-            <a:ext cx="9795638" cy="1114380"/>
+            <a:off x="331152" y="0"/>
+            <a:ext cx="10515600" cy="1325563"/>
           </a:xfrm>
         </p:spPr>
         <p:txBody>
-          <a:bodyPr vert="horz" lIns="91440" tIns="45720" rIns="91440" bIns="45720" rtlCol="0" anchor="b">
-            <a:normAutofit fontScale="90000"/>
-          </a:bodyPr>
+          <a:bodyPr/>
           <a:lstStyle/>
           <a:p>
             <a:r>
-              <a:rPr lang="en-US" sz="5200"/>
-              <a:t>Method 2 </a:t>
-            </a:r>
-            <a:r>
-              <a:rPr lang="en-US" sz="5200" err="1"/>
-              <a:t>ConvNeXt</a:t>
-            </a:r>
-            <a:r>
-              <a:rPr lang="en-US" sz="5200"/>
-              <a:t> Steps Overview</a:t>
+              <a:rPr lang="en-US" dirty="0"/>
+              <a:t>ROC-AUC Scores – 3 × 2 × 2 Scenarios</a:t>
             </a:r>
           </a:p>
         </p:txBody>
       </p:sp>
       <p:pic>
         <p:nvPicPr>
-          <p:cNvPr id="3" name="drawing">
-            <a:extLst>
-              <a:ext uri="{FF2B5EF4-FFF2-40B4-BE49-F238E27FC236}">
-                <a16:creationId xmlns:a16="http://schemas.microsoft.com/office/drawing/2014/main" id="{AB460625-3BCA-CF33-29E9-E64FA786ECE1}"/>
+          <p:cNvPr id="3" name="Picture 2" descr="A graph of different colored bars&#10;&#10;AI-generated content may be incorrect.">
+            <a:extLst>
+              <a:ext uri="{FF2B5EF4-FFF2-40B4-BE49-F238E27FC236}">
+                <a16:creationId xmlns:a16="http://schemas.microsoft.com/office/drawing/2014/main" id="{B30F0460-C559-C112-4D0A-16547E261267}"/>
               </a:ext>
             </a:extLst>
           </p:cNvPr>
@@ -4651,21 +5809,15 @@
           <p:nvPr/>
         </p:nvPicPr>
         <p:blipFill>
-          <a:blip r:embed="rId2">
-            <a:extLst>
-              <a:ext uri="{28A0092B-C50C-407E-A947-70E740481C1C}">
-                <a14:useLocalDpi xmlns:a14="http://schemas.microsoft.com/office/drawing/2010/main"/>
-              </a:ext>
-            </a:extLst>
-          </a:blip>
+          <a:blip r:embed="rId3"/>
           <a:stretch>
             <a:fillRect/>
           </a:stretch>
         </p:blipFill>
         <p:spPr>
           <a:xfrm>
-            <a:off x="702451" y="1577996"/>
-            <a:ext cx="10787098" cy="4450845"/>
+            <a:off x="156201" y="1121092"/>
+            <a:ext cx="12035799" cy="5065396"/>
           </a:xfrm>
           <a:prstGeom prst="rect">
             <a:avLst/>
@@ -4675,7 +5827,7 @@
     </p:spTree>
     <p:extLst>
       <p:ext uri="{BB962C8B-B14F-4D97-AF65-F5344CB8AC3E}">
-        <p14:creationId xmlns:p14="http://schemas.microsoft.com/office/powerpoint/2010/main" val="1977856822"/>
+        <p14:creationId xmlns:p14="http://schemas.microsoft.com/office/powerpoint/2010/main" val="2460127186"/>
       </p:ext>
     </p:extLst>
   </p:cSld>
@@ -4686,15 +5838,119 @@
 </file>
 
 <file path=ppt/slides/slide13.xml><?xml version="1.0" encoding="utf-8"?>
-<p:sld xmlns:a="http://schemas.openxmlformats.org/drawingml/2006/main" xmlns:r="http://schemas.openxmlformats.org/officeDocument/2006/relationships" xmlns:p="http://schemas.openxmlformats.org/presentationml/2006/main" show="0">
+<p:sld xmlns:a="http://schemas.openxmlformats.org/drawingml/2006/main" xmlns:r="http://schemas.openxmlformats.org/officeDocument/2006/relationships" xmlns:p="http://schemas.openxmlformats.org/presentationml/2006/main">
   <p:cSld>
     <p:bg>
       <p:bgPr>
         <a:solidFill>
-          <a:schemeClr val="accent6">
-            <a:lumMod val="20000"/>
-            <a:lumOff val="80000"/>
-          </a:schemeClr>
+          <a:schemeClr val="bg1"/>
+        </a:solidFill>
+        <a:effectLst/>
+      </p:bgPr>
+    </p:bg>
+    <p:spTree>
+      <p:nvGrpSpPr>
+        <p:cNvPr id="1" name="">
+          <a:extLst>
+            <a:ext uri="{FF2B5EF4-FFF2-40B4-BE49-F238E27FC236}">
+              <a16:creationId xmlns:a16="http://schemas.microsoft.com/office/drawing/2014/main" id="{4D39AA16-2F4F-F75E-1175-EFFFB8DBE699}"/>
+            </a:ext>
+          </a:extLst>
+        </p:cNvPr>
+        <p:cNvGrpSpPr/>
+        <p:nvPr/>
+      </p:nvGrpSpPr>
+      <p:grpSpPr>
+        <a:xfrm>
+          <a:off x="0" y="0"/>
+          <a:ext cx="0" cy="0"/>
+          <a:chOff x="0" y="0"/>
+          <a:chExt cx="0" cy="0"/>
+        </a:xfrm>
+      </p:grpSpPr>
+      <p:sp>
+        <p:nvSpPr>
+          <p:cNvPr id="2" name="Title 1">
+            <a:extLst>
+              <a:ext uri="{FF2B5EF4-FFF2-40B4-BE49-F238E27FC236}">
+                <a16:creationId xmlns:a16="http://schemas.microsoft.com/office/drawing/2014/main" id="{93BA0621-7D01-3D9C-9FBD-76124A0535FB}"/>
+              </a:ext>
+            </a:extLst>
+          </p:cNvPr>
+          <p:cNvSpPr>
+            <a:spLocks noGrp="1"/>
+          </p:cNvSpPr>
+          <p:nvPr>
+            <p:ph type="title"/>
+          </p:nvPr>
+        </p:nvSpPr>
+        <p:spPr>
+          <a:xfrm>
+            <a:off x="0" y="-319087"/>
+            <a:ext cx="12065000" cy="1325563"/>
+          </a:xfrm>
+        </p:spPr>
+        <p:txBody>
+          <a:bodyPr/>
+          <a:lstStyle/>
+          <a:p>
+            <a:r>
+              <a:rPr lang="en-US" dirty="0"/>
+              <a:t>Confusion Matrices</a:t>
+            </a:r>
+          </a:p>
+        </p:txBody>
+      </p:sp>
+      <p:pic>
+        <p:nvPicPr>
+          <p:cNvPr id="5" name="Picture 4">
+            <a:extLst>
+              <a:ext uri="{FF2B5EF4-FFF2-40B4-BE49-F238E27FC236}">
+                <a16:creationId xmlns:a16="http://schemas.microsoft.com/office/drawing/2014/main" id="{569108FF-44E1-68AB-AAFB-BD969BF1DA4D}"/>
+              </a:ext>
+            </a:extLst>
+          </p:cNvPr>
+          <p:cNvPicPr>
+            <a:picLocks noChangeAspect="1"/>
+          </p:cNvPicPr>
+          <p:nvPr/>
+        </p:nvPicPr>
+        <p:blipFill>
+          <a:blip r:embed="rId3"/>
+          <a:stretch>
+            <a:fillRect/>
+          </a:stretch>
+        </p:blipFill>
+        <p:spPr>
+          <a:xfrm>
+            <a:off x="890587" y="546572"/>
+            <a:ext cx="10410825" cy="6152518"/>
+          </a:xfrm>
+          <a:prstGeom prst="rect">
+            <a:avLst/>
+          </a:prstGeom>
+        </p:spPr>
+      </p:pic>
+    </p:spTree>
+    <p:extLst>
+      <p:ext uri="{BB962C8B-B14F-4D97-AF65-F5344CB8AC3E}">
+        <p14:creationId xmlns:p14="http://schemas.microsoft.com/office/powerpoint/2010/main" val="1225510391"/>
+      </p:ext>
+    </p:extLst>
+  </p:cSld>
+  <p:clrMapOvr>
+    <a:masterClrMapping/>
+  </p:clrMapOvr>
+</p:sld>
+</file>
+
+<file path=ppt/slides/slide14.xml><?xml version="1.0" encoding="utf-8"?>
+<p:sld xmlns:a="http://schemas.openxmlformats.org/drawingml/2006/main" xmlns:r="http://schemas.openxmlformats.org/officeDocument/2006/relationships" xmlns:p="http://schemas.openxmlformats.org/presentationml/2006/main">
+  <p:cSld>
+    <p:bg>
+      <p:bgPr>
+        <a:solidFill>
+          <a:schemeClr val="bg1"/>
         </a:solidFill>
         <a:effectLst/>
       </p:bgPr>
@@ -4715,7 +5971,7 @@
       </p:grpSpPr>
       <p:sp useBgFill="1">
         <p:nvSpPr>
-          <p:cNvPr id="39" name="Rectangle 38">
+          <p:cNvPr id="13" name="Rectangle 12">
             <a:extLst>
               <a:ext uri="{FF2B5EF4-FFF2-40B4-BE49-F238E27FC236}">
                 <a16:creationId xmlns:a16="http://schemas.microsoft.com/office/drawing/2014/main" id="{743AA782-23D1-4521-8CAD-47662984AA08}"/>
@@ -4778,7 +6034,7 @@
           <p:cNvPr id="2" name="Title 1">
             <a:extLst>
               <a:ext uri="{FF2B5EF4-FFF2-40B4-BE49-F238E27FC236}">
-                <a16:creationId xmlns:a16="http://schemas.microsoft.com/office/drawing/2014/main" id="{503828D6-8BD1-EFCA-EAC9-256D68E502E9}"/>
+                <a16:creationId xmlns:a16="http://schemas.microsoft.com/office/drawing/2014/main" id="{F103D429-0790-28FF-4D0E-FCFD54134165}"/>
               </a:ext>
             </a:extLst>
           </p:cNvPr>
@@ -4792,29 +6048,28 @@
         <p:spPr>
           <a:xfrm>
             <a:off x="630936" y="640080"/>
-            <a:ext cx="7964424" cy="1481328"/>
+            <a:ext cx="6791840" cy="1481328"/>
           </a:xfrm>
         </p:spPr>
         <p:txBody>
           <a:bodyPr anchor="b">
-            <a:normAutofit/>
+            <a:normAutofit fontScale="90000"/>
           </a:bodyPr>
           <a:lstStyle/>
           <a:p>
             <a:r>
-              <a:rPr lang="en-GB" sz="5000"/>
-              <a:t>Experimental Design: Evaluation Metrics</a:t>
-            </a:r>
-            <a:endParaRPr lang="en-US" sz="5000"/>
-          </a:p>
-        </p:txBody>
-      </p:sp>
-      <p:sp>
-        <p:nvSpPr>
-          <p:cNvPr id="41" name="sketch line">
-            <a:extLst>
-              <a:ext uri="{FF2B5EF4-FFF2-40B4-BE49-F238E27FC236}">
-                <a16:creationId xmlns:a16="http://schemas.microsoft.com/office/drawing/2014/main" id="{650D18FE-0824-4A46-B22C-A86B52E5780A}"/>
+              <a:rPr lang="en-GB" sz="5400"/>
+              <a:t>Conclusion and Next Steps</a:t>
+            </a:r>
+          </a:p>
+        </p:txBody>
+      </p:sp>
+      <p:sp>
+        <p:nvSpPr>
+          <p:cNvPr id="14" name="sketch line">
+            <a:extLst>
+              <a:ext uri="{FF2B5EF4-FFF2-40B4-BE49-F238E27FC236}">
+                <a16:creationId xmlns:a16="http://schemas.microsoft.com/office/drawing/2014/main" id="{71877DBC-BB60-40F0-AC93-2ACDBAAE60CE}"/>
               </a:ext>
               <a:ext uri="{C183D7F6-B498-43B3-948B-1728B52AA6E4}">
                 <adec:decorative xmlns:adec="http://schemas.microsoft.com/office/drawing/2017/decorative" val="1"/>
@@ -5087,7 +6342,7 @@
           <p:cNvPr id="3" name="Content Placeholder 2">
             <a:extLst>
               <a:ext uri="{FF2B5EF4-FFF2-40B4-BE49-F238E27FC236}">
-                <a16:creationId xmlns:a16="http://schemas.microsoft.com/office/drawing/2014/main" id="{080EB49A-E361-34FE-B214-216DB6B8B4BB}"/>
+                <a16:creationId xmlns:a16="http://schemas.microsoft.com/office/drawing/2014/main" id="{70762040-9254-2FCA-5342-F274ECBFDDC1}"/>
               </a:ext>
             </a:extLst>
           </p:cNvPr>
@@ -5101,100 +6356,619 @@
         <p:spPr>
           <a:xfrm>
             <a:off x="630935" y="2660904"/>
-            <a:ext cx="10491493" cy="3547872"/>
+            <a:ext cx="11156511" cy="3547872"/>
           </a:xfrm>
         </p:spPr>
         <p:txBody>
           <a:bodyPr vert="horz" lIns="91440" tIns="45720" rIns="91440" bIns="45720" rtlCol="0" anchor="t">
-            <a:normAutofit/>
+            <a:noAutofit/>
           </a:bodyPr>
           <a:lstStyle/>
           <a:p>
             <a:r>
-              <a:rPr lang="en-GB" sz="2500">
-                <a:ea typeface="+mn-lt"/>
-                <a:cs typeface="+mn-lt"/>
-              </a:rPr>
-              <a:t>Stage A: </a:t>
-            </a:r>
-            <a:r>
-              <a:rPr lang="en-GB" sz="2500" b="1">
-                <a:ea typeface="+mn-lt"/>
-                <a:cs typeface="+mn-lt"/>
-              </a:rPr>
-              <a:t>patch-level</a:t>
-            </a:r>
-            <a:r>
-              <a:rPr lang="en-GB" sz="2500">
-                <a:ea typeface="+mn-lt"/>
-                <a:cs typeface="+mn-lt"/>
-              </a:rPr>
-              <a:t> presence classification (validation/test)</a:t>
-            </a:r>
-            <a:endParaRPr lang="en-GB" sz="2500"/>
-          </a:p>
-          <a:p>
-            <a:r>
-              <a:rPr lang="en-GB" sz="2500">
-                <a:ea typeface="+mn-lt"/>
-                <a:cs typeface="+mn-lt"/>
-              </a:rPr>
-              <a:t>Stage B: </a:t>
-            </a:r>
-            <a:r>
-              <a:rPr lang="en-GB" sz="2500" b="1">
-                <a:ea typeface="+mn-lt"/>
-                <a:cs typeface="+mn-lt"/>
-              </a:rPr>
-              <a:t>patient-level </a:t>
-            </a:r>
-            <a:r>
-              <a:rPr lang="en-GB" sz="2500">
-                <a:ea typeface="+mn-lt"/>
-                <a:cs typeface="+mn-lt"/>
-              </a:rPr>
-              <a:t>(holdout, both binary and trinary)</a:t>
-            </a:r>
-            <a:endParaRPr lang="en-GB" sz="2500"/>
-          </a:p>
-          <a:p>
-            <a:r>
-              <a:rPr lang="en-GB" sz="2500">
-                <a:ea typeface="+mn-lt"/>
-                <a:cs typeface="+mn-lt"/>
-              </a:rPr>
-              <a:t>Metrics:</a:t>
-            </a:r>
-            <a:endParaRPr lang="en-GB" sz="2500"/>
+              <a:rPr lang="es-ES" sz="2400" b="1" dirty="0" err="1">
+                <a:ea typeface="+mn-lt"/>
+                <a:cs typeface="+mn-lt"/>
+              </a:rPr>
+              <a:t>Importance</a:t>
+            </a:r>
+            <a:r>
+              <a:rPr lang="es-ES" sz="2400" b="1" dirty="0">
+                <a:ea typeface="+mn-lt"/>
+                <a:cs typeface="+mn-lt"/>
+              </a:rPr>
+              <a:t> </a:t>
+            </a:r>
+            <a:r>
+              <a:rPr lang="es-ES" sz="2400" b="1" dirty="0" err="1">
+                <a:ea typeface="+mn-lt"/>
+                <a:cs typeface="+mn-lt"/>
+              </a:rPr>
+              <a:t>of</a:t>
+            </a:r>
+            <a:r>
+              <a:rPr lang="es-ES" sz="2400" b="1" dirty="0">
+                <a:ea typeface="+mn-lt"/>
+                <a:cs typeface="+mn-lt"/>
+              </a:rPr>
+              <a:t> data </a:t>
+            </a:r>
+            <a:r>
+              <a:rPr lang="es-ES" sz="2400" b="1" dirty="0" err="1">
+                <a:ea typeface="+mn-lt"/>
+                <a:cs typeface="+mn-lt"/>
+              </a:rPr>
+              <a:t>splits</a:t>
+            </a:r>
+            <a:r>
+              <a:rPr lang="es-ES" sz="2400" b="1" dirty="0">
+                <a:ea typeface="+mn-lt"/>
+                <a:cs typeface="+mn-lt"/>
+              </a:rPr>
+              <a:t>: </a:t>
+            </a:r>
+            <a:r>
+              <a:rPr lang="es-ES" sz="2400" b="1" dirty="0" err="1">
+                <a:ea typeface="+mn-lt"/>
+                <a:cs typeface="+mn-lt"/>
+              </a:rPr>
+              <a:t>implications</a:t>
+            </a:r>
+            <a:r>
+              <a:rPr lang="es-ES" sz="2400" b="1" dirty="0">
+                <a:ea typeface="+mn-lt"/>
+                <a:cs typeface="+mn-lt"/>
+              </a:rPr>
+              <a:t> </a:t>
+            </a:r>
+            <a:r>
+              <a:rPr lang="es-ES" sz="2400" b="1" dirty="0" err="1">
+                <a:ea typeface="+mn-lt"/>
+                <a:cs typeface="+mn-lt"/>
+              </a:rPr>
+              <a:t>for</a:t>
+            </a:r>
+            <a:r>
+              <a:rPr lang="es-ES" sz="2400" b="1" dirty="0">
+                <a:ea typeface="+mn-lt"/>
+                <a:cs typeface="+mn-lt"/>
+              </a:rPr>
+              <a:t> </a:t>
+            </a:r>
+            <a:r>
+              <a:rPr lang="es-ES" sz="2400" b="1" dirty="0" err="1">
+                <a:ea typeface="+mn-lt"/>
+                <a:cs typeface="+mn-lt"/>
+              </a:rPr>
+              <a:t>generalizability</a:t>
+            </a:r>
+            <a:endParaRPr lang="es-ES" sz="2400" b="1" dirty="0">
+              <a:ea typeface="+mn-lt"/>
+              <a:cs typeface="+mn-lt"/>
+            </a:endParaRPr>
           </a:p>
           <a:p>
             <a:pPr lvl="1"/>
             <a:r>
-              <a:rPr lang="en-GB" sz="2500">
-                <a:ea typeface="+mn-lt"/>
-                <a:cs typeface="+mn-lt"/>
-              </a:rPr>
-              <a:t>Patch: Accuracy, F1, ROC-AUC, PR-AUC, confusion matrix</a:t>
-            </a:r>
-            <a:endParaRPr lang="en-GB" sz="2500"/>
+              <a:rPr lang="es-ES" b="1" dirty="0" err="1">
+                <a:ea typeface="+mn-lt"/>
+                <a:cs typeface="+mn-lt"/>
+              </a:rPr>
+              <a:t>Window-level</a:t>
+            </a:r>
+            <a:r>
+              <a:rPr lang="es-ES" b="1" dirty="0">
+                <a:ea typeface="+mn-lt"/>
+                <a:cs typeface="+mn-lt"/>
+              </a:rPr>
+              <a:t>: </a:t>
+            </a:r>
+            <a:r>
+              <a:rPr lang="es-ES" dirty="0">
+                <a:ea typeface="+mn-lt"/>
+                <a:cs typeface="+mn-lt"/>
+              </a:rPr>
+              <a:t>80% </a:t>
+            </a:r>
+            <a:r>
+              <a:rPr lang="es-ES" dirty="0" err="1">
+                <a:ea typeface="+mn-lt"/>
+                <a:cs typeface="+mn-lt"/>
+              </a:rPr>
+              <a:t>overlap</a:t>
+            </a:r>
+            <a:r>
+              <a:rPr lang="es-ES" dirty="0">
+                <a:ea typeface="+mn-lt"/>
+                <a:cs typeface="+mn-lt"/>
+              </a:rPr>
+              <a:t> = </a:t>
+            </a:r>
+            <a:r>
+              <a:rPr lang="es-ES" dirty="0" err="1">
+                <a:ea typeface="+mn-lt"/>
+                <a:cs typeface="+mn-lt"/>
+              </a:rPr>
+              <a:t>falsely</a:t>
+            </a:r>
+            <a:r>
+              <a:rPr lang="es-ES" dirty="0">
+                <a:ea typeface="+mn-lt"/>
+                <a:cs typeface="+mn-lt"/>
+              </a:rPr>
+              <a:t> </a:t>
+            </a:r>
+            <a:r>
+              <a:rPr lang="es-ES" dirty="0" err="1">
+                <a:ea typeface="+mn-lt"/>
+                <a:cs typeface="+mn-lt"/>
+              </a:rPr>
+              <a:t>high</a:t>
+            </a:r>
+            <a:r>
+              <a:rPr lang="es-ES" dirty="0">
+                <a:ea typeface="+mn-lt"/>
+                <a:cs typeface="+mn-lt"/>
+              </a:rPr>
+              <a:t> performance</a:t>
+            </a:r>
           </a:p>
           <a:p>
             <a:pPr lvl="1"/>
             <a:r>
-              <a:rPr lang="en-GB" sz="2500">
-                <a:ea typeface="+mn-lt"/>
-                <a:cs typeface="+mn-lt"/>
-              </a:rPr>
-              <a:t>Patient: Accuracy, Precision-Recall, ROC/AUC, confusion matrix</a:t>
-            </a:r>
-            <a:endParaRPr lang="en-GB" sz="2500"/>
+              <a:rPr lang="es-ES" b="1" dirty="0" err="1">
+                <a:ea typeface="+mn-lt"/>
+                <a:cs typeface="+mn-lt"/>
+              </a:rPr>
+              <a:t>Seizure-level</a:t>
+            </a:r>
+            <a:r>
+              <a:rPr lang="es-ES" b="1" dirty="0">
+                <a:ea typeface="+mn-lt"/>
+                <a:cs typeface="+mn-lt"/>
+              </a:rPr>
+              <a:t>:</a:t>
+            </a:r>
+            <a:r>
+              <a:rPr lang="es-ES" dirty="0">
+                <a:ea typeface="+mn-lt"/>
+                <a:cs typeface="+mn-lt"/>
+              </a:rPr>
+              <a:t> </a:t>
+            </a:r>
+            <a:r>
+              <a:rPr lang="es-ES" dirty="0" err="1">
+                <a:ea typeface="+mn-lt"/>
+                <a:cs typeface="+mn-lt"/>
+              </a:rPr>
+              <a:t>useful</a:t>
+            </a:r>
+            <a:r>
+              <a:rPr lang="es-ES" dirty="0">
+                <a:ea typeface="+mn-lt"/>
+                <a:cs typeface="+mn-lt"/>
+              </a:rPr>
+              <a:t> </a:t>
+            </a:r>
+            <a:r>
+              <a:rPr lang="es-ES" dirty="0" err="1">
+                <a:ea typeface="+mn-lt"/>
+                <a:cs typeface="+mn-lt"/>
+              </a:rPr>
+              <a:t>for</a:t>
+            </a:r>
+            <a:r>
+              <a:rPr lang="es-ES" dirty="0">
+                <a:ea typeface="+mn-lt"/>
+                <a:cs typeface="+mn-lt"/>
+              </a:rPr>
+              <a:t> </a:t>
+            </a:r>
+            <a:r>
+              <a:rPr lang="es-ES" dirty="0" err="1">
+                <a:ea typeface="+mn-lt"/>
+                <a:cs typeface="+mn-lt"/>
+              </a:rPr>
+              <a:t>personalized</a:t>
+            </a:r>
+            <a:r>
+              <a:rPr lang="es-ES" dirty="0">
+                <a:ea typeface="+mn-lt"/>
+                <a:cs typeface="+mn-lt"/>
+              </a:rPr>
+              <a:t> </a:t>
+            </a:r>
+            <a:r>
+              <a:rPr lang="es-ES" dirty="0" err="1">
+                <a:ea typeface="+mn-lt"/>
+                <a:cs typeface="+mn-lt"/>
+              </a:rPr>
+              <a:t>settings</a:t>
+            </a:r>
+            <a:r>
+              <a:rPr lang="es-ES" dirty="0">
+                <a:ea typeface="+mn-lt"/>
+                <a:cs typeface="+mn-lt"/>
+              </a:rPr>
+              <a:t> </a:t>
+            </a:r>
+            <a:r>
+              <a:rPr lang="es-ES" dirty="0" err="1">
+                <a:ea typeface="+mn-lt"/>
+                <a:cs typeface="+mn-lt"/>
+              </a:rPr>
+              <a:t>to</a:t>
+            </a:r>
+            <a:r>
+              <a:rPr lang="es-ES" dirty="0">
+                <a:ea typeface="+mn-lt"/>
+                <a:cs typeface="+mn-lt"/>
+              </a:rPr>
+              <a:t> </a:t>
+            </a:r>
+            <a:r>
+              <a:rPr lang="es-ES" dirty="0" err="1">
+                <a:ea typeface="+mn-lt"/>
+                <a:cs typeface="+mn-lt"/>
+              </a:rPr>
+              <a:t>classify</a:t>
+            </a:r>
+            <a:r>
+              <a:rPr lang="es-ES" dirty="0">
+                <a:ea typeface="+mn-lt"/>
+                <a:cs typeface="+mn-lt"/>
+              </a:rPr>
+              <a:t> </a:t>
+            </a:r>
+            <a:r>
+              <a:rPr lang="es-ES" dirty="0" err="1">
+                <a:ea typeface="+mn-lt"/>
+                <a:cs typeface="+mn-lt"/>
+              </a:rPr>
+              <a:t>seizures</a:t>
+            </a:r>
+            <a:r>
+              <a:rPr lang="es-ES" dirty="0">
+                <a:ea typeface="+mn-lt"/>
+                <a:cs typeface="+mn-lt"/>
+              </a:rPr>
+              <a:t> </a:t>
+            </a:r>
+            <a:r>
+              <a:rPr lang="es-ES" dirty="0" err="1">
+                <a:ea typeface="+mn-lt"/>
+                <a:cs typeface="+mn-lt"/>
+              </a:rPr>
+              <a:t>within</a:t>
+            </a:r>
+            <a:r>
+              <a:rPr lang="es-ES" dirty="0">
+                <a:ea typeface="+mn-lt"/>
+                <a:cs typeface="+mn-lt"/>
+              </a:rPr>
+              <a:t> </a:t>
+            </a:r>
+            <a:r>
+              <a:rPr lang="es-ES" dirty="0" err="1">
+                <a:ea typeface="+mn-lt"/>
+                <a:cs typeface="+mn-lt"/>
+              </a:rPr>
+              <a:t>same</a:t>
+            </a:r>
+            <a:r>
+              <a:rPr lang="es-ES" dirty="0">
+                <a:ea typeface="+mn-lt"/>
+                <a:cs typeface="+mn-lt"/>
+              </a:rPr>
+              <a:t> </a:t>
+            </a:r>
+            <a:r>
+              <a:rPr lang="es-ES" dirty="0" err="1">
+                <a:ea typeface="+mn-lt"/>
+                <a:cs typeface="+mn-lt"/>
+              </a:rPr>
+              <a:t>patient</a:t>
+            </a:r>
+            <a:endParaRPr lang="es-ES" dirty="0">
+              <a:ea typeface="+mn-lt"/>
+              <a:cs typeface="+mn-lt"/>
+            </a:endParaRPr>
+          </a:p>
+          <a:p>
+            <a:pPr lvl="1"/>
+            <a:r>
+              <a:rPr lang="es-ES" b="1" dirty="0" err="1">
+                <a:ea typeface="+mn-lt"/>
+                <a:cs typeface="+mn-lt"/>
+              </a:rPr>
+              <a:t>Patient-level</a:t>
+            </a:r>
+            <a:r>
+              <a:rPr lang="es-ES" dirty="0">
+                <a:ea typeface="+mn-lt"/>
+                <a:cs typeface="+mn-lt"/>
+              </a:rPr>
+              <a:t>: </a:t>
+            </a:r>
+            <a:r>
+              <a:rPr lang="es-ES" dirty="0" err="1">
+                <a:ea typeface="+mn-lt"/>
+                <a:cs typeface="+mn-lt"/>
+              </a:rPr>
+              <a:t>hardest</a:t>
+            </a:r>
+            <a:r>
+              <a:rPr lang="es-ES" dirty="0">
+                <a:ea typeface="+mn-lt"/>
+                <a:cs typeface="+mn-lt"/>
+              </a:rPr>
+              <a:t> case, </a:t>
+            </a:r>
+            <a:r>
+              <a:rPr lang="es-ES" dirty="0" err="1">
+                <a:ea typeface="+mn-lt"/>
+                <a:cs typeface="+mn-lt"/>
+              </a:rPr>
+              <a:t>but</a:t>
+            </a:r>
+            <a:r>
+              <a:rPr lang="es-ES" dirty="0">
+                <a:ea typeface="+mn-lt"/>
+                <a:cs typeface="+mn-lt"/>
+              </a:rPr>
+              <a:t> generalizable </a:t>
+            </a:r>
+            <a:r>
+              <a:rPr lang="es-ES" dirty="0" err="1">
+                <a:ea typeface="+mn-lt"/>
+                <a:cs typeface="+mn-lt"/>
+              </a:rPr>
+              <a:t>to</a:t>
+            </a:r>
+            <a:r>
+              <a:rPr lang="es-ES" dirty="0">
+                <a:ea typeface="+mn-lt"/>
+                <a:cs typeface="+mn-lt"/>
+              </a:rPr>
+              <a:t> new </a:t>
+            </a:r>
+            <a:r>
+              <a:rPr lang="es-ES" dirty="0" err="1">
+                <a:ea typeface="+mn-lt"/>
+                <a:cs typeface="+mn-lt"/>
+              </a:rPr>
+              <a:t>unseen</a:t>
+            </a:r>
+            <a:r>
+              <a:rPr lang="es-ES" dirty="0">
+                <a:ea typeface="+mn-lt"/>
+                <a:cs typeface="+mn-lt"/>
+              </a:rPr>
+              <a:t> </a:t>
+            </a:r>
+            <a:r>
+              <a:rPr lang="es-ES" dirty="0" err="1">
+                <a:ea typeface="+mn-lt"/>
+                <a:cs typeface="+mn-lt"/>
+              </a:rPr>
+              <a:t>patients</a:t>
+            </a:r>
+            <a:endParaRPr lang="es-ES" dirty="0">
+              <a:ea typeface="+mn-lt"/>
+              <a:cs typeface="+mn-lt"/>
+            </a:endParaRPr>
+          </a:p>
+          <a:p>
+            <a:r>
+              <a:rPr lang="es-ES" sz="2400" b="1" dirty="0">
+                <a:ea typeface="+mn-lt"/>
+                <a:cs typeface="+mn-lt"/>
+              </a:rPr>
+              <a:t>Next</a:t>
+            </a:r>
+            <a:r>
+              <a:rPr lang="es-ES" sz="2400" dirty="0">
+                <a:ea typeface="+mn-lt"/>
+                <a:cs typeface="+mn-lt"/>
+              </a:rPr>
+              <a:t>: </a:t>
+            </a:r>
+            <a:r>
+              <a:rPr lang="es-ES" sz="2400" dirty="0" err="1">
+                <a:ea typeface="+mn-lt"/>
+                <a:cs typeface="+mn-lt"/>
+              </a:rPr>
+              <a:t>incorporate</a:t>
+            </a:r>
+            <a:r>
+              <a:rPr lang="es-ES" sz="2400" dirty="0">
+                <a:ea typeface="+mn-lt"/>
+                <a:cs typeface="+mn-lt"/>
+              </a:rPr>
+              <a:t> temporal </a:t>
+            </a:r>
+            <a:r>
+              <a:rPr lang="es-ES" sz="2400" dirty="0" err="1">
+                <a:ea typeface="+mn-lt"/>
+                <a:cs typeface="+mn-lt"/>
+              </a:rPr>
+              <a:t>information</a:t>
+            </a:r>
+            <a:r>
+              <a:rPr lang="es-ES" sz="2400" dirty="0">
+                <a:ea typeface="+mn-lt"/>
+                <a:cs typeface="+mn-lt"/>
+              </a:rPr>
+              <a:t> </a:t>
+            </a:r>
+          </a:p>
+          <a:p>
+            <a:pPr lvl="1"/>
+            <a:r>
+              <a:rPr lang="es-ES" dirty="0" err="1">
+                <a:ea typeface="+mn-lt"/>
+                <a:cs typeface="+mn-lt"/>
+              </a:rPr>
+              <a:t>Allows</a:t>
+            </a:r>
+            <a:r>
+              <a:rPr lang="es-ES" dirty="0">
+                <a:ea typeface="+mn-lt"/>
+                <a:cs typeface="+mn-lt"/>
+              </a:rPr>
+              <a:t> </a:t>
+            </a:r>
+            <a:r>
+              <a:rPr lang="es-ES" dirty="0" err="1">
+                <a:ea typeface="+mn-lt"/>
+                <a:cs typeface="+mn-lt"/>
+              </a:rPr>
+              <a:t>for</a:t>
+            </a:r>
+            <a:r>
+              <a:rPr lang="es-ES" dirty="0">
+                <a:ea typeface="+mn-lt"/>
+                <a:cs typeface="+mn-lt"/>
+              </a:rPr>
+              <a:t> </a:t>
+            </a:r>
+            <a:r>
+              <a:rPr lang="es-ES" dirty="0" err="1">
+                <a:ea typeface="+mn-lt"/>
+                <a:cs typeface="+mn-lt"/>
+              </a:rPr>
+              <a:t>model</a:t>
+            </a:r>
+            <a:r>
+              <a:rPr lang="es-ES" dirty="0">
+                <a:ea typeface="+mn-lt"/>
+                <a:cs typeface="+mn-lt"/>
+              </a:rPr>
+              <a:t> </a:t>
+            </a:r>
+            <a:r>
+              <a:rPr lang="es-ES" dirty="0" err="1">
+                <a:ea typeface="+mn-lt"/>
+                <a:cs typeface="+mn-lt"/>
+              </a:rPr>
+              <a:t>to</a:t>
+            </a:r>
+            <a:r>
+              <a:rPr lang="es-ES" dirty="0">
+                <a:ea typeface="+mn-lt"/>
+                <a:cs typeface="+mn-lt"/>
+              </a:rPr>
+              <a:t> </a:t>
+            </a:r>
+            <a:r>
+              <a:rPr lang="es-ES" dirty="0" err="1">
+                <a:ea typeface="+mn-lt"/>
+                <a:cs typeface="+mn-lt"/>
+              </a:rPr>
+              <a:t>track</a:t>
+            </a:r>
+            <a:r>
+              <a:rPr lang="es-ES" dirty="0">
+                <a:ea typeface="+mn-lt"/>
+                <a:cs typeface="+mn-lt"/>
+              </a:rPr>
+              <a:t> </a:t>
+            </a:r>
+            <a:r>
+              <a:rPr lang="es-ES" dirty="0" err="1">
+                <a:ea typeface="+mn-lt"/>
+                <a:cs typeface="+mn-lt"/>
+              </a:rPr>
+              <a:t>evolution</a:t>
+            </a:r>
+            <a:r>
+              <a:rPr lang="es-ES" dirty="0">
+                <a:ea typeface="+mn-lt"/>
+                <a:cs typeface="+mn-lt"/>
+              </a:rPr>
+              <a:t> </a:t>
+            </a:r>
+            <a:r>
+              <a:rPr lang="es-ES" dirty="0" err="1">
+                <a:ea typeface="+mn-lt"/>
+                <a:cs typeface="+mn-lt"/>
+              </a:rPr>
+              <a:t>over</a:t>
+            </a:r>
+            <a:r>
+              <a:rPr lang="es-ES" dirty="0">
+                <a:ea typeface="+mn-lt"/>
+                <a:cs typeface="+mn-lt"/>
+              </a:rPr>
+              <a:t> time, </a:t>
+            </a:r>
+            <a:r>
+              <a:rPr lang="es-ES" dirty="0" err="1">
+                <a:ea typeface="+mn-lt"/>
+                <a:cs typeface="+mn-lt"/>
+              </a:rPr>
+              <a:t>gives</a:t>
+            </a:r>
+            <a:r>
+              <a:rPr lang="es-ES" dirty="0">
+                <a:ea typeface="+mn-lt"/>
+                <a:cs typeface="+mn-lt"/>
+              </a:rPr>
+              <a:t> </a:t>
+            </a:r>
+            <a:r>
+              <a:rPr lang="es-ES" dirty="0" err="1">
+                <a:ea typeface="+mn-lt"/>
+                <a:cs typeface="+mn-lt"/>
+              </a:rPr>
+              <a:t>it</a:t>
+            </a:r>
+            <a:r>
+              <a:rPr lang="es-ES" dirty="0">
+                <a:ea typeface="+mn-lt"/>
+                <a:cs typeface="+mn-lt"/>
+              </a:rPr>
+              <a:t> “</a:t>
+            </a:r>
+            <a:r>
+              <a:rPr lang="es-ES" dirty="0" err="1">
+                <a:ea typeface="+mn-lt"/>
+                <a:cs typeface="+mn-lt"/>
+              </a:rPr>
+              <a:t>memory</a:t>
+            </a:r>
+            <a:r>
+              <a:rPr lang="es-ES" dirty="0">
+                <a:ea typeface="+mn-lt"/>
+                <a:cs typeface="+mn-lt"/>
+              </a:rPr>
+              <a:t>” </a:t>
+            </a:r>
+          </a:p>
+          <a:p>
+            <a:endParaRPr lang="es-ES" sz="2400" dirty="0">
+              <a:ea typeface="+mn-lt"/>
+              <a:cs typeface="+mn-lt"/>
+            </a:endParaRPr>
+          </a:p>
+          <a:p>
+            <a:endParaRPr lang="en-GB" sz="2400" b="1" dirty="0">
+              <a:ea typeface="+mn-lt"/>
+              <a:cs typeface="+mn-lt"/>
+            </a:endParaRPr>
+          </a:p>
+          <a:p>
+            <a:pPr marL="0" indent="0">
+              <a:buNone/>
+            </a:pPr>
+            <a:endParaRPr lang="en-GB" sz="2400" dirty="0"/>
           </a:p>
         </p:txBody>
       </p:sp>
     </p:spTree>
     <p:extLst>
       <p:ext uri="{BB962C8B-B14F-4D97-AF65-F5344CB8AC3E}">
-        <p14:creationId xmlns:p14="http://schemas.microsoft.com/office/powerpoint/2010/main" val="893231155"/>
+        <p14:creationId xmlns:p14="http://schemas.microsoft.com/office/powerpoint/2010/main" val="2736603610"/>
       </p:ext>
     </p:extLst>
   </p:cSld>
@@ -5204,431 +6978,13 @@
 </p:sld>
 </file>
 
-<file path=ppt/slides/slide14.xml><?xml version="1.0" encoding="utf-8"?>
-<p:sld xmlns:a="http://schemas.openxmlformats.org/drawingml/2006/main" xmlns:r="http://schemas.openxmlformats.org/officeDocument/2006/relationships" xmlns:p="http://schemas.openxmlformats.org/presentationml/2006/main" show="0">
-  <p:cSld>
-    <p:bg>
-      <p:bgPr>
-        <a:solidFill>
-          <a:srgbClr val="FF5F50"/>
-        </a:solidFill>
-        <a:effectLst/>
-      </p:bgPr>
-    </p:bg>
-    <p:spTree>
-      <p:nvGrpSpPr>
-        <p:cNvPr id="1" name="">
-          <a:extLst>
-            <a:ext uri="{FF2B5EF4-FFF2-40B4-BE49-F238E27FC236}">
-              <a16:creationId xmlns:a16="http://schemas.microsoft.com/office/drawing/2014/main" id="{726B30B8-9017-5A3B-92A1-2C3E78D44369}"/>
-            </a:ext>
-          </a:extLst>
-        </p:cNvPr>
-        <p:cNvGrpSpPr/>
-        <p:nvPr/>
-      </p:nvGrpSpPr>
-      <p:grpSpPr>
-        <a:xfrm>
-          <a:off x="0" y="0"/>
-          <a:ext cx="0" cy="0"/>
-          <a:chOff x="0" y="0"/>
-          <a:chExt cx="0" cy="0"/>
-        </a:xfrm>
-      </p:grpSpPr>
-      <p:sp>
-        <p:nvSpPr>
-          <p:cNvPr id="2" name="Title 1">
-            <a:extLst>
-              <a:ext uri="{FF2B5EF4-FFF2-40B4-BE49-F238E27FC236}">
-                <a16:creationId xmlns:a16="http://schemas.microsoft.com/office/drawing/2014/main" id="{30D11481-BCA3-D4D2-2985-D914B7C3ABB5}"/>
-              </a:ext>
-            </a:extLst>
-          </p:cNvPr>
-          <p:cNvSpPr>
-            <a:spLocks noGrp="1"/>
-          </p:cNvSpPr>
-          <p:nvPr>
-            <p:ph type="title"/>
-          </p:nvPr>
-        </p:nvSpPr>
-        <p:spPr>
-          <a:xfrm>
-            <a:off x="331152" y="0"/>
-            <a:ext cx="10515600" cy="1325563"/>
-          </a:xfrm>
-        </p:spPr>
-        <p:txBody>
-          <a:bodyPr/>
-          <a:lstStyle/>
-          <a:p>
-            <a:r>
-              <a:rPr lang="en-US"/>
-              <a:t>Results Overview – Patch and Patient Level</a:t>
-            </a:r>
-          </a:p>
-        </p:txBody>
-      </p:sp>
-      <p:sp>
-        <p:nvSpPr>
-          <p:cNvPr id="8" name="Content Placeholder 2">
-            <a:extLst>
-              <a:ext uri="{FF2B5EF4-FFF2-40B4-BE49-F238E27FC236}">
-                <a16:creationId xmlns:a16="http://schemas.microsoft.com/office/drawing/2014/main" id="{101578B1-62A3-D90C-57D7-987CD19C4909}"/>
-              </a:ext>
-            </a:extLst>
-          </p:cNvPr>
-          <p:cNvSpPr>
-            <a:spLocks noGrp="1"/>
-          </p:cNvSpPr>
-          <p:nvPr>
-            <p:ph idx="1"/>
-          </p:nvPr>
-        </p:nvSpPr>
-        <p:spPr>
-          <a:xfrm>
-            <a:off x="562352" y="1537756"/>
-            <a:ext cx="10856064" cy="3545695"/>
-          </a:xfrm>
-        </p:spPr>
-        <p:txBody>
-          <a:bodyPr vert="horz" lIns="91440" tIns="45720" rIns="91440" bIns="45720" rtlCol="0" anchor="t">
-            <a:normAutofit/>
-          </a:bodyPr>
-          <a:lstStyle/>
-          <a:p>
-            <a:r>
-              <a:rPr lang="en-GB" sz="2500">
-                <a:ea typeface="+mn-lt"/>
-                <a:cs typeface="+mn-lt"/>
-              </a:rPr>
-              <a:t>Patch level</a:t>
-            </a:r>
-          </a:p>
-          <a:p>
-            <a:pPr lvl="1"/>
-            <a:r>
-              <a:rPr lang="en-GB" sz="2500">
-                <a:ea typeface="+mn-lt"/>
-                <a:cs typeface="+mn-lt"/>
-              </a:rPr>
-              <a:t>Method 1 </a:t>
-            </a:r>
-            <a:r>
-              <a:rPr lang="en-GB" sz="2500" err="1">
-                <a:ea typeface="+mn-lt"/>
-                <a:cs typeface="+mn-lt"/>
-              </a:rPr>
-              <a:t>ResNet</a:t>
-            </a:r>
-            <a:r>
-              <a:rPr lang="en-GB" sz="2500">
-                <a:ea typeface="+mn-lt"/>
-                <a:cs typeface="+mn-lt"/>
-              </a:rPr>
-              <a:t> model performs poorly, ~50% accuracy</a:t>
-            </a:r>
-          </a:p>
-          <a:p>
-            <a:pPr lvl="1"/>
-            <a:r>
-              <a:rPr lang="en-US" sz="2500"/>
-              <a:t>Method 2 </a:t>
-            </a:r>
-            <a:r>
-              <a:rPr lang="en-US" sz="2500" err="1"/>
-              <a:t>ConvNeXt</a:t>
-            </a:r>
-            <a:r>
-              <a:rPr lang="en-US" sz="2500"/>
-              <a:t> outperforms, 67.2%</a:t>
-            </a:r>
-          </a:p>
-          <a:p>
-            <a:pPr lvl="1"/>
-            <a:endParaRPr lang="en-US" sz="2500"/>
-          </a:p>
-          <a:p>
-            <a:r>
-              <a:rPr lang="en-GB" sz="2500"/>
-              <a:t>Patient level</a:t>
-            </a:r>
-            <a:endParaRPr lang="en-US" sz="2500"/>
-          </a:p>
-          <a:p>
-            <a:pPr lvl="1"/>
-            <a:r>
-              <a:rPr lang="en-GB" sz="2500"/>
-              <a:t>Method 1 </a:t>
-            </a:r>
-            <a:r>
-              <a:rPr lang="en-GB" sz="2500" err="1"/>
-              <a:t>ResNet</a:t>
-            </a:r>
-            <a:r>
-              <a:rPr lang="en-GB" sz="2500"/>
-              <a:t> model performs poorly, 70.7% accuracy</a:t>
-            </a:r>
-            <a:endParaRPr lang="en-US" sz="2500"/>
-          </a:p>
-          <a:p>
-            <a:pPr lvl="1"/>
-            <a:r>
-              <a:rPr lang="en-US" sz="2500"/>
-              <a:t>Method 2 </a:t>
-            </a:r>
-            <a:r>
-              <a:rPr lang="en-US" sz="2500" err="1"/>
-              <a:t>ConvNeXt</a:t>
-            </a:r>
-            <a:r>
-              <a:rPr lang="en-US" sz="2500"/>
-              <a:t> outperforms, 92.4%</a:t>
-            </a:r>
-            <a:endParaRPr lang="en-US"/>
-          </a:p>
-        </p:txBody>
-      </p:sp>
-    </p:spTree>
-    <p:extLst>
-      <p:ext uri="{BB962C8B-B14F-4D97-AF65-F5344CB8AC3E}">
-        <p14:creationId xmlns:p14="http://schemas.microsoft.com/office/powerpoint/2010/main" val="2781030190"/>
-      </p:ext>
-    </p:extLst>
-  </p:cSld>
-  <p:clrMapOvr>
-    <a:masterClrMapping/>
-  </p:clrMapOvr>
-</p:sld>
-</file>
-
-<file path=ppt/slides/slide15.xml><?xml version="1.0" encoding="utf-8"?>
+<file path=ppt/slides/slide2.xml><?xml version="1.0" encoding="utf-8"?>
 <p:sld xmlns:a="http://schemas.openxmlformats.org/drawingml/2006/main" xmlns:r="http://schemas.openxmlformats.org/officeDocument/2006/relationships" xmlns:p="http://schemas.openxmlformats.org/presentationml/2006/main">
   <p:cSld>
     <p:bg>
       <p:bgPr>
         <a:solidFill>
-          <a:schemeClr val="accent3">
-            <a:lumMod val="20000"/>
-            <a:lumOff val="80000"/>
-          </a:schemeClr>
-        </a:solidFill>
-        <a:effectLst/>
-      </p:bgPr>
-    </p:bg>
-    <p:spTree>
-      <p:nvGrpSpPr>
-        <p:cNvPr id="1" name="">
-          <a:extLst>
-            <a:ext uri="{FF2B5EF4-FFF2-40B4-BE49-F238E27FC236}">
-              <a16:creationId xmlns:a16="http://schemas.microsoft.com/office/drawing/2014/main" id="{5351E7BC-B0F2-C3A8-63E2-FBCF0434360E}"/>
-            </a:ext>
-          </a:extLst>
-        </p:cNvPr>
-        <p:cNvGrpSpPr/>
-        <p:nvPr/>
-      </p:nvGrpSpPr>
-      <p:grpSpPr>
-        <a:xfrm>
-          <a:off x="0" y="0"/>
-          <a:ext cx="0" cy="0"/>
-          <a:chOff x="0" y="0"/>
-          <a:chExt cx="0" cy="0"/>
-        </a:xfrm>
-      </p:grpSpPr>
-      <p:sp>
-        <p:nvSpPr>
-          <p:cNvPr id="2" name="Title 1">
-            <a:extLst>
-              <a:ext uri="{FF2B5EF4-FFF2-40B4-BE49-F238E27FC236}">
-                <a16:creationId xmlns:a16="http://schemas.microsoft.com/office/drawing/2014/main" id="{7DD79E17-236A-6E63-F8FF-C80AD64F69E0}"/>
-              </a:ext>
-            </a:extLst>
-          </p:cNvPr>
-          <p:cNvSpPr>
-            <a:spLocks noGrp="1"/>
-          </p:cNvSpPr>
-          <p:nvPr>
-            <p:ph type="title"/>
-          </p:nvPr>
-        </p:nvSpPr>
-        <p:spPr>
-          <a:xfrm>
-            <a:off x="331152" y="0"/>
-            <a:ext cx="10515600" cy="1325563"/>
-          </a:xfrm>
-        </p:spPr>
-        <p:txBody>
-          <a:bodyPr/>
-          <a:lstStyle/>
-          <a:p>
-            <a:r>
-              <a:rPr lang="en-US"/>
-              <a:t>Learning Curves</a:t>
-            </a:r>
-          </a:p>
-        </p:txBody>
-      </p:sp>
-      <p:pic>
-        <p:nvPicPr>
-          <p:cNvPr id="10" name="Imatge 9" descr="Imatge que conté text, diagrama, línia, Trama&#10;&#10;Pot ser que el contingut generat per IA no sigui correcte.">
-            <a:extLst>
-              <a:ext uri="{FF2B5EF4-FFF2-40B4-BE49-F238E27FC236}">
-                <a16:creationId xmlns:a16="http://schemas.microsoft.com/office/drawing/2014/main" id="{A80C666B-356A-5D40-B090-6F3C59735D67}"/>
-              </a:ext>
-            </a:extLst>
-          </p:cNvPr>
-          <p:cNvPicPr>
-            <a:picLocks noChangeAspect="1"/>
-          </p:cNvPicPr>
-          <p:nvPr/>
-        </p:nvPicPr>
-        <p:blipFill>
-          <a:blip r:embed="rId2"/>
-          <a:srcRect l="7484" t="4025" r="8129" b="5263"/>
-          <a:stretch>
-            <a:fillRect/>
-          </a:stretch>
-        </p:blipFill>
-        <p:spPr>
-          <a:xfrm>
-            <a:off x="5594311" y="3945185"/>
-            <a:ext cx="6304837" cy="2828131"/>
-          </a:xfrm>
-          <a:prstGeom prst="rect">
-            <a:avLst/>
-          </a:prstGeom>
-        </p:spPr>
-      </p:pic>
-      <p:pic>
-        <p:nvPicPr>
-          <p:cNvPr id="11" name="Imatge 10" descr="Imatge que conté text, diagrama, Trama, línia&#10;&#10;Pot ser que el contingut generat per IA no sigui correcte.">
-            <a:extLst>
-              <a:ext uri="{FF2B5EF4-FFF2-40B4-BE49-F238E27FC236}">
-                <a16:creationId xmlns:a16="http://schemas.microsoft.com/office/drawing/2014/main" id="{55CF607F-ED73-D8CC-7377-1D8431669086}"/>
-              </a:ext>
-            </a:extLst>
-          </p:cNvPr>
-          <p:cNvPicPr>
-            <a:picLocks noChangeAspect="1"/>
-          </p:cNvPicPr>
-          <p:nvPr/>
-        </p:nvPicPr>
-        <p:blipFill>
-          <a:blip r:embed="rId3"/>
-          <a:srcRect l="9200" t="4153" r="7333" b="1917"/>
-          <a:stretch>
-            <a:fillRect/>
-          </a:stretch>
-        </p:blipFill>
-        <p:spPr>
-          <a:xfrm>
-            <a:off x="155152" y="1049867"/>
-            <a:ext cx="6034406" cy="2832444"/>
-          </a:xfrm>
-          <a:prstGeom prst="rect">
-            <a:avLst/>
-          </a:prstGeom>
-        </p:spPr>
-      </p:pic>
-      <p:sp>
-        <p:nvSpPr>
-          <p:cNvPr id="12" name="QuadreDeText 11">
-            <a:extLst>
-              <a:ext uri="{FF2B5EF4-FFF2-40B4-BE49-F238E27FC236}">
-                <a16:creationId xmlns:a16="http://schemas.microsoft.com/office/drawing/2014/main" id="{21F6ADD1-C86E-0F38-1F4B-1FFDD58EE42E}"/>
-              </a:ext>
-            </a:extLst>
-          </p:cNvPr>
-          <p:cNvSpPr txBox="1"/>
-          <p:nvPr/>
-        </p:nvSpPr>
-        <p:spPr>
-          <a:xfrm>
-            <a:off x="1803721" y="3945038"/>
-            <a:ext cx="3298784" cy="369332"/>
-          </a:xfrm>
-          <a:prstGeom prst="rect">
-            <a:avLst/>
-          </a:prstGeom>
-          <a:noFill/>
-        </p:spPr>
-        <p:txBody>
-          <a:bodyPr rot="0" spcFirstLastPara="0" vertOverflow="overflow" horzOverflow="overflow" vert="horz" wrap="square" lIns="91440" tIns="45720" rIns="91440" bIns="45720" numCol="1" spcCol="0" rtlCol="0" fromWordArt="0" anchor="t" anchorCtr="0" forceAA="0" compatLnSpc="1">
-            <a:prstTxWarp prst="textNoShape">
-              <a:avLst/>
-            </a:prstTxWarp>
-            <a:spAutoFit/>
-          </a:bodyPr>
-          <a:lstStyle/>
-          <a:p>
-            <a:r>
-              <a:rPr lang="ca-ES"/>
-              <a:t>Method 1 ResNet</a:t>
-            </a:r>
-          </a:p>
-        </p:txBody>
-      </p:sp>
-      <p:sp>
-        <p:nvSpPr>
-          <p:cNvPr id="13" name="QuadreDeText 12">
-            <a:extLst>
-              <a:ext uri="{FF2B5EF4-FFF2-40B4-BE49-F238E27FC236}">
-                <a16:creationId xmlns:a16="http://schemas.microsoft.com/office/drawing/2014/main" id="{AB6F329E-E10C-5431-7B9B-517B25CB80A3}"/>
-              </a:ext>
-            </a:extLst>
-          </p:cNvPr>
-          <p:cNvSpPr txBox="1"/>
-          <p:nvPr/>
-        </p:nvSpPr>
-        <p:spPr>
-          <a:xfrm>
-            <a:off x="7822555" y="3510987"/>
-            <a:ext cx="3298784" cy="369332"/>
-          </a:xfrm>
-          <a:prstGeom prst="rect">
-            <a:avLst/>
-          </a:prstGeom>
-          <a:noFill/>
-        </p:spPr>
-        <p:txBody>
-          <a:bodyPr rot="0" spcFirstLastPara="0" vertOverflow="overflow" horzOverflow="overflow" vert="horz" wrap="square" lIns="91440" tIns="45720" rIns="91440" bIns="45720" numCol="1" spcCol="0" rtlCol="0" fromWordArt="0" anchor="t" anchorCtr="0" forceAA="0" compatLnSpc="1">
-            <a:prstTxWarp prst="textNoShape">
-              <a:avLst/>
-            </a:prstTxWarp>
-            <a:spAutoFit/>
-          </a:bodyPr>
-          <a:lstStyle/>
-          <a:p>
-            <a:r>
-              <a:rPr lang="ca-ES"/>
-              <a:t>Method 2 ConvNeXt</a:t>
-            </a:r>
-          </a:p>
-        </p:txBody>
-      </p:sp>
-    </p:spTree>
-    <p:extLst>
-      <p:ext uri="{BB962C8B-B14F-4D97-AF65-F5344CB8AC3E}">
-        <p14:creationId xmlns:p14="http://schemas.microsoft.com/office/powerpoint/2010/main" val="786601153"/>
-      </p:ext>
-    </p:extLst>
-  </p:cSld>
-  <p:clrMapOvr>
-    <a:masterClrMapping/>
-  </p:clrMapOvr>
-</p:sld>
-</file>
-
-<file path=ppt/slides/slide16.xml><?xml version="1.0" encoding="utf-8"?>
-<p:sld xmlns:a="http://schemas.openxmlformats.org/drawingml/2006/main" xmlns:r="http://schemas.openxmlformats.org/officeDocument/2006/relationships" xmlns:p="http://schemas.openxmlformats.org/presentationml/2006/main">
-  <p:cSld>
-    <p:bg>
-      <p:bgPr>
-        <a:solidFill>
-          <a:schemeClr val="accent3">
-            <a:lumMod val="20000"/>
-            <a:lumOff val="80000"/>
-          </a:schemeClr>
+          <a:schemeClr val="bg1"/>
         </a:solidFill>
         <a:effectLst/>
       </p:bgPr>
@@ -5652,1193 +7008,6 @@
           <p:cNvPr id="2" name="Title 1">
             <a:extLst>
               <a:ext uri="{FF2B5EF4-FFF2-40B4-BE49-F238E27FC236}">
-                <a16:creationId xmlns:a16="http://schemas.microsoft.com/office/drawing/2014/main" id="{312E1568-1ADF-E14C-5869-6889CFE44164}"/>
-              </a:ext>
-            </a:extLst>
-          </p:cNvPr>
-          <p:cNvSpPr>
-            <a:spLocks noGrp="1"/>
-          </p:cNvSpPr>
-          <p:nvPr>
-            <p:ph type="title"/>
-          </p:nvPr>
-        </p:nvSpPr>
-        <p:spPr>
-          <a:xfrm>
-            <a:off x="331152" y="0"/>
-            <a:ext cx="10515600" cy="1325563"/>
-          </a:xfrm>
-        </p:spPr>
-        <p:txBody>
-          <a:bodyPr/>
-          <a:lstStyle/>
-          <a:p>
-            <a:r>
-              <a:rPr lang="en-US"/>
-              <a:t>Patch Level - Confusion Matrix</a:t>
-            </a:r>
-          </a:p>
-        </p:txBody>
-      </p:sp>
-      <p:sp>
-        <p:nvSpPr>
-          <p:cNvPr id="4" name="Content Placeholder 2">
-            <a:extLst>
-              <a:ext uri="{FF2B5EF4-FFF2-40B4-BE49-F238E27FC236}">
-                <a16:creationId xmlns:a16="http://schemas.microsoft.com/office/drawing/2014/main" id="{BEEBFB18-4A43-F10F-8147-3CFC1669BE7F}"/>
-              </a:ext>
-            </a:extLst>
-          </p:cNvPr>
-          <p:cNvSpPr>
-            <a:spLocks noGrp="1"/>
-          </p:cNvSpPr>
-          <p:nvPr>
-            <p:ph idx="1"/>
-          </p:nvPr>
-        </p:nvSpPr>
-        <p:spPr>
-          <a:xfrm>
-            <a:off x="95616" y="1225673"/>
-            <a:ext cx="5153721" cy="767182"/>
-          </a:xfrm>
-        </p:spPr>
-        <p:txBody>
-          <a:bodyPr vert="horz" lIns="91440" tIns="45720" rIns="91440" bIns="45720" rtlCol="0" anchor="t">
-            <a:normAutofit lnSpcReduction="10000"/>
-          </a:bodyPr>
-          <a:lstStyle/>
-          <a:p>
-            <a:r>
-              <a:rPr lang="en-GB" sz="2500" err="1">
-                <a:ea typeface="+mn-lt"/>
-                <a:cs typeface="+mn-lt"/>
-              </a:rPr>
-              <a:t>ResNet</a:t>
-            </a:r>
-            <a:r>
-              <a:rPr lang="en-GB" sz="2500">
-                <a:ea typeface="+mn-lt"/>
-                <a:cs typeface="+mn-lt"/>
-              </a:rPr>
-              <a:t> patch-level holdout result: 51.9% accuracy</a:t>
-            </a:r>
-            <a:endParaRPr lang="ca-ES"/>
-          </a:p>
-          <a:p>
-            <a:endParaRPr lang="en-GB" sz="2500"/>
-          </a:p>
-        </p:txBody>
-      </p:sp>
-      <p:pic>
-        <p:nvPicPr>
-          <p:cNvPr id="5" name="Imagen 4">
-            <a:extLst>
-              <a:ext uri="{FF2B5EF4-FFF2-40B4-BE49-F238E27FC236}">
-                <a16:creationId xmlns:a16="http://schemas.microsoft.com/office/drawing/2014/main" id="{92BCEE66-6E6E-2087-4D1E-EF4A9668C527}"/>
-              </a:ext>
-            </a:extLst>
-          </p:cNvPr>
-          <p:cNvPicPr>
-            <a:picLocks noChangeAspect="1"/>
-          </p:cNvPicPr>
-          <p:nvPr/>
-        </p:nvPicPr>
-        <p:blipFill>
-          <a:blip r:embed="rId2"/>
-          <a:stretch>
-            <a:fillRect/>
-          </a:stretch>
-        </p:blipFill>
-        <p:spPr>
-          <a:xfrm>
-            <a:off x="247319" y="2215579"/>
-            <a:ext cx="4304734" cy="3242489"/>
-          </a:xfrm>
-          <a:prstGeom prst="rect">
-            <a:avLst/>
-          </a:prstGeom>
-        </p:spPr>
-      </p:pic>
-      <p:sp>
-        <p:nvSpPr>
-          <p:cNvPr id="3" name="Title 1">
-            <a:extLst>
-              <a:ext uri="{FF2B5EF4-FFF2-40B4-BE49-F238E27FC236}">
-                <a16:creationId xmlns:a16="http://schemas.microsoft.com/office/drawing/2014/main" id="{C101DA6A-6684-A24C-0F0C-07BFB9E16E78}"/>
-              </a:ext>
-            </a:extLst>
-          </p:cNvPr>
-          <p:cNvSpPr txBox="1">
-            <a:spLocks/>
-          </p:cNvSpPr>
-          <p:nvPr/>
-        </p:nvSpPr>
-        <p:spPr>
-          <a:xfrm>
-            <a:off x="1831871" y="5426165"/>
-            <a:ext cx="1978099" cy="1013727"/>
-          </a:xfrm>
-          <a:prstGeom prst="rect">
-            <a:avLst/>
-          </a:prstGeom>
-        </p:spPr>
-        <p:txBody>
-          <a:bodyPr vert="horz" lIns="91440" tIns="45720" rIns="91440" bIns="45720" rtlCol="0" anchor="ctr">
-            <a:normAutofit fontScale="97500"/>
-          </a:bodyPr>
-          <a:lstStyle>
-            <a:lvl1pPr algn="l" defTabSz="914400" rtl="0" eaLnBrk="1" latinLnBrk="0" hangingPunct="1">
-              <a:lnSpc>
-                <a:spcPct val="90000"/>
-              </a:lnSpc>
-              <a:spcBef>
-                <a:spcPct val="0"/>
-              </a:spcBef>
-              <a:buNone/>
-              <a:defRPr sz="4400" kern="1200">
-                <a:solidFill>
-                  <a:schemeClr val="tx1"/>
-                </a:solidFill>
-                <a:latin typeface="+mj-lt"/>
-                <a:ea typeface="+mj-ea"/>
-                <a:cs typeface="+mj-cs"/>
-              </a:defRPr>
-            </a:lvl1pPr>
-          </a:lstStyle>
-          <a:p>
-            <a:r>
-              <a:rPr lang="en-US" sz="1550">
-                <a:solidFill>
-                  <a:schemeClr val="tx1">
-                    <a:lumMod val="75000"/>
-                    <a:lumOff val="25000"/>
-                  </a:schemeClr>
-                </a:solidFill>
-                <a:latin typeface="Verdana" panose="020B0604030504040204" pitchFamily="34" charset="0"/>
-                <a:ea typeface="Verdana" panose="020B0604030504040204" pitchFamily="34" charset="0"/>
-                <a:cs typeface="Verdana" panose="020B0604030504040204" pitchFamily="34" charset="0"/>
-              </a:rPr>
-              <a:t>Method 1 (</a:t>
-            </a:r>
-            <a:r>
-              <a:rPr lang="en-US" sz="1550" err="1">
-                <a:solidFill>
-                  <a:schemeClr val="tx1">
-                    <a:lumMod val="75000"/>
-                    <a:lumOff val="25000"/>
-                  </a:schemeClr>
-                </a:solidFill>
-                <a:latin typeface="Verdana" panose="020B0604030504040204" pitchFamily="34" charset="0"/>
-                <a:ea typeface="Verdana" panose="020B0604030504040204" pitchFamily="34" charset="0"/>
-                <a:cs typeface="Verdana" panose="020B0604030504040204" pitchFamily="34" charset="0"/>
-              </a:rPr>
-              <a:t>ResNet</a:t>
-            </a:r>
-            <a:r>
-              <a:rPr lang="en-US" sz="1550">
-                <a:solidFill>
-                  <a:schemeClr val="tx1">
-                    <a:lumMod val="75000"/>
-                    <a:lumOff val="25000"/>
-                  </a:schemeClr>
-                </a:solidFill>
-                <a:latin typeface="Verdana" panose="020B0604030504040204" pitchFamily="34" charset="0"/>
-                <a:ea typeface="Verdana" panose="020B0604030504040204" pitchFamily="34" charset="0"/>
-                <a:cs typeface="Verdana" panose="020B0604030504040204" pitchFamily="34" charset="0"/>
-              </a:rPr>
-              <a:t>)</a:t>
-            </a:r>
-          </a:p>
-        </p:txBody>
-      </p:sp>
-      <p:sp>
-        <p:nvSpPr>
-          <p:cNvPr id="6" name="Title 1">
-            <a:extLst>
-              <a:ext uri="{FF2B5EF4-FFF2-40B4-BE49-F238E27FC236}">
-                <a16:creationId xmlns:a16="http://schemas.microsoft.com/office/drawing/2014/main" id="{D1FBE12A-1E4F-D416-5783-C1EC90A61264}"/>
-              </a:ext>
-            </a:extLst>
-          </p:cNvPr>
-          <p:cNvSpPr txBox="1">
-            <a:spLocks/>
-          </p:cNvSpPr>
-          <p:nvPr/>
-        </p:nvSpPr>
-        <p:spPr>
-          <a:xfrm>
-            <a:off x="7285466" y="5442343"/>
-            <a:ext cx="2284757" cy="976557"/>
-          </a:xfrm>
-          <a:prstGeom prst="rect">
-            <a:avLst/>
-          </a:prstGeom>
-        </p:spPr>
-        <p:txBody>
-          <a:bodyPr vert="horz" lIns="91440" tIns="45720" rIns="91440" bIns="45720" rtlCol="0" anchor="ctr">
-            <a:normAutofit fontScale="97500"/>
-          </a:bodyPr>
-          <a:lstStyle>
-            <a:lvl1pPr algn="l" defTabSz="914400" rtl="0" eaLnBrk="1" latinLnBrk="0" hangingPunct="1">
-              <a:lnSpc>
-                <a:spcPct val="90000"/>
-              </a:lnSpc>
-              <a:spcBef>
-                <a:spcPct val="0"/>
-              </a:spcBef>
-              <a:buNone/>
-              <a:defRPr sz="4400" kern="1200">
-                <a:solidFill>
-                  <a:schemeClr val="tx1"/>
-                </a:solidFill>
-                <a:latin typeface="+mj-lt"/>
-                <a:ea typeface="+mj-ea"/>
-                <a:cs typeface="+mj-cs"/>
-              </a:defRPr>
-            </a:lvl1pPr>
-          </a:lstStyle>
-          <a:p>
-            <a:pPr algn="ctr"/>
-            <a:r>
-              <a:rPr lang="en-US" sz="1550" err="1">
-                <a:solidFill>
-                  <a:schemeClr val="tx1">
-                    <a:lumMod val="75000"/>
-                    <a:lumOff val="25000"/>
-                  </a:schemeClr>
-                </a:solidFill>
-                <a:latin typeface="Verdana"/>
-                <a:ea typeface="Verdana"/>
-                <a:cs typeface="Verdana" panose="020B0604030504040204" pitchFamily="34" charset="0"/>
-              </a:rPr>
-              <a:t>Method </a:t>
-            </a:r>
-            <a:r>
-              <a:rPr lang="en-US" sz="1550">
-                <a:solidFill>
-                  <a:schemeClr val="tx1">
-                    <a:lumMod val="75000"/>
-                    <a:lumOff val="25000"/>
-                  </a:schemeClr>
-                </a:solidFill>
-                <a:latin typeface="Verdana"/>
-                <a:ea typeface="Verdana"/>
-                <a:cs typeface="Verdana" panose="020B0604030504040204" pitchFamily="34" charset="0"/>
-              </a:rPr>
-              <a:t>2 </a:t>
-            </a:r>
-            <a:endParaRPr lang="ca-ES"/>
-          </a:p>
-          <a:p>
-            <a:pPr algn="ctr"/>
-            <a:r>
-              <a:rPr lang="en-US" sz="1550">
-                <a:solidFill>
-                  <a:schemeClr val="tx1">
-                    <a:lumMod val="75000"/>
-                    <a:lumOff val="25000"/>
-                  </a:schemeClr>
-                </a:solidFill>
-                <a:latin typeface="Verdana"/>
-                <a:ea typeface="Verdana"/>
-                <a:cs typeface="Verdana" panose="020B0604030504040204" pitchFamily="34" charset="0"/>
-              </a:rPr>
-              <a:t>(</a:t>
-            </a:r>
-            <a:r>
-              <a:rPr lang="en-US" sz="1550" err="1">
-                <a:solidFill>
-                  <a:schemeClr val="tx1">
-                    <a:lumMod val="75000"/>
-                    <a:lumOff val="25000"/>
-                  </a:schemeClr>
-                </a:solidFill>
-                <a:latin typeface="Verdana"/>
-                <a:ea typeface="Verdana"/>
-                <a:cs typeface="Verdana" panose="020B0604030504040204" pitchFamily="34" charset="0"/>
-              </a:rPr>
-              <a:t>ConvNeX</a:t>
-            </a:r>
-            <a:r>
-              <a:rPr lang="es-ES" sz="1550">
-                <a:solidFill>
-                  <a:schemeClr val="tx1">
-                    <a:lumMod val="75000"/>
-                    <a:lumOff val="25000"/>
-                  </a:schemeClr>
-                </a:solidFill>
-                <a:latin typeface="Verdana"/>
-                <a:ea typeface="Verdana"/>
-                <a:cs typeface="Verdana" panose="020B0604030504040204" pitchFamily="34" charset="0"/>
-              </a:rPr>
-              <a:t>t)</a:t>
-            </a:r>
-            <a:endParaRPr lang="en-US" sz="1550">
-              <a:solidFill>
-                <a:schemeClr val="tx1">
-                  <a:lumMod val="75000"/>
-                  <a:lumOff val="25000"/>
-                </a:schemeClr>
-              </a:solidFill>
-              <a:latin typeface="Verdana"/>
-              <a:ea typeface="Verdana"/>
-              <a:cs typeface="Verdana" panose="020B0604030504040204" pitchFamily="34" charset="0"/>
-            </a:endParaRPr>
-          </a:p>
-        </p:txBody>
-      </p:sp>
-      <p:pic>
-        <p:nvPicPr>
-          <p:cNvPr id="11" name="Imatge 10" descr="Imatge que conté text, captura de pantalla, diagrama, nombre&#10;&#10;Pot ser que el contingut generat per IA no sigui correcte.">
-            <a:extLst>
-              <a:ext uri="{FF2B5EF4-FFF2-40B4-BE49-F238E27FC236}">
-                <a16:creationId xmlns:a16="http://schemas.microsoft.com/office/drawing/2014/main" id="{98DB21B7-64A5-8F4F-E398-790AF03F5B2B}"/>
-              </a:ext>
-            </a:extLst>
-          </p:cNvPr>
-          <p:cNvPicPr>
-            <a:picLocks noChangeAspect="1"/>
-          </p:cNvPicPr>
-          <p:nvPr/>
-        </p:nvPicPr>
-        <p:blipFill>
-          <a:blip r:embed="rId3"/>
-          <a:stretch>
-            <a:fillRect/>
-          </a:stretch>
-        </p:blipFill>
-        <p:spPr>
-          <a:xfrm>
-            <a:off x="4637050" y="2243254"/>
-            <a:ext cx="3705225" cy="2771775"/>
-          </a:xfrm>
-          <a:prstGeom prst="rect">
-            <a:avLst/>
-          </a:prstGeom>
-        </p:spPr>
-      </p:pic>
-      <p:pic>
-        <p:nvPicPr>
-          <p:cNvPr id="7" name="Imatge 6" descr="Imatge que conté text, captura de pantalla, diagrama, Font&#10;&#10;Pot ser que el contingut generat per IA no sigui correcte.">
-            <a:extLst>
-              <a:ext uri="{FF2B5EF4-FFF2-40B4-BE49-F238E27FC236}">
-                <a16:creationId xmlns:a16="http://schemas.microsoft.com/office/drawing/2014/main" id="{A7B8CEBF-7759-98F1-3340-BCD62BFA5EFB}"/>
-              </a:ext>
-            </a:extLst>
-          </p:cNvPr>
-          <p:cNvPicPr>
-            <a:picLocks noChangeAspect="1"/>
-          </p:cNvPicPr>
-          <p:nvPr/>
-        </p:nvPicPr>
-        <p:blipFill>
-          <a:blip r:embed="rId4"/>
-          <a:stretch>
-            <a:fillRect/>
-          </a:stretch>
-        </p:blipFill>
-        <p:spPr>
-          <a:xfrm>
-            <a:off x="8428462" y="2239536"/>
-            <a:ext cx="3707782" cy="2778514"/>
-          </a:xfrm>
-          <a:prstGeom prst="rect">
-            <a:avLst/>
-          </a:prstGeom>
-        </p:spPr>
-      </p:pic>
-      <p:sp>
-        <p:nvSpPr>
-          <p:cNvPr id="10" name="Content Placeholder 2">
-            <a:extLst>
-              <a:ext uri="{FF2B5EF4-FFF2-40B4-BE49-F238E27FC236}">
-                <a16:creationId xmlns:a16="http://schemas.microsoft.com/office/drawing/2014/main" id="{187CB16B-AC01-AA01-D01F-41951B8C1D0E}"/>
-              </a:ext>
-            </a:extLst>
-          </p:cNvPr>
-          <p:cNvSpPr txBox="1">
-            <a:spLocks/>
-          </p:cNvSpPr>
-          <p:nvPr/>
-        </p:nvSpPr>
-        <p:spPr>
-          <a:xfrm>
-            <a:off x="5972309" y="1229390"/>
-            <a:ext cx="5153721" cy="767182"/>
-          </a:xfrm>
-          <a:prstGeom prst="rect">
-            <a:avLst/>
-          </a:prstGeom>
-        </p:spPr>
-        <p:txBody>
-          <a:bodyPr vert="horz" lIns="91440" tIns="45720" rIns="91440" bIns="45720" rtlCol="0" anchor="t">
-            <a:normAutofit lnSpcReduction="10000"/>
-          </a:bodyPr>
-          <a:lstStyle>
-            <a:lvl1pPr marL="228600" indent="-228600" algn="l" defTabSz="914400" rtl="0" eaLnBrk="1" latinLnBrk="0" hangingPunct="1">
-              <a:lnSpc>
-                <a:spcPct val="90000"/>
-              </a:lnSpc>
-              <a:spcBef>
-                <a:spcPts val="1000"/>
-              </a:spcBef>
-              <a:buFont typeface="Arial" panose="020B0604020202020204" pitchFamily="34" charset="0"/>
-              <a:buChar char="•"/>
-              <a:defRPr sz="2800" kern="1200">
-                <a:solidFill>
-                  <a:schemeClr val="tx1"/>
-                </a:solidFill>
-                <a:latin typeface="+mn-lt"/>
-                <a:ea typeface="+mn-ea"/>
-                <a:cs typeface="+mn-cs"/>
-              </a:defRPr>
-            </a:lvl1pPr>
-            <a:lvl2pPr marL="685800" indent="-228600" algn="l" defTabSz="914400" rtl="0" eaLnBrk="1" latinLnBrk="0" hangingPunct="1">
-              <a:lnSpc>
-                <a:spcPct val="90000"/>
-              </a:lnSpc>
-              <a:spcBef>
-                <a:spcPts val="500"/>
-              </a:spcBef>
-              <a:buFont typeface="Arial" panose="020B0604020202020204" pitchFamily="34" charset="0"/>
-              <a:buChar char="•"/>
-              <a:defRPr sz="2400" kern="1200">
-                <a:solidFill>
-                  <a:schemeClr val="tx1"/>
-                </a:solidFill>
-                <a:latin typeface="+mn-lt"/>
-                <a:ea typeface="+mn-ea"/>
-                <a:cs typeface="+mn-cs"/>
-              </a:defRPr>
-            </a:lvl2pPr>
-            <a:lvl3pPr marL="1143000" indent="-228600" algn="l" defTabSz="914400" rtl="0" eaLnBrk="1" latinLnBrk="0" hangingPunct="1">
-              <a:lnSpc>
-                <a:spcPct val="90000"/>
-              </a:lnSpc>
-              <a:spcBef>
-                <a:spcPts val="500"/>
-              </a:spcBef>
-              <a:buFont typeface="Arial" panose="020B0604020202020204" pitchFamily="34" charset="0"/>
-              <a:buChar char="•"/>
-              <a:defRPr sz="2000" kern="1200">
-                <a:solidFill>
-                  <a:schemeClr val="tx1"/>
-                </a:solidFill>
-                <a:latin typeface="+mn-lt"/>
-                <a:ea typeface="+mn-ea"/>
-                <a:cs typeface="+mn-cs"/>
-              </a:defRPr>
-            </a:lvl3pPr>
-            <a:lvl4pPr marL="1600200" indent="-228600" algn="l" defTabSz="914400" rtl="0" eaLnBrk="1" latinLnBrk="0" hangingPunct="1">
-              <a:lnSpc>
-                <a:spcPct val="90000"/>
-              </a:lnSpc>
-              <a:spcBef>
-                <a:spcPts val="500"/>
-              </a:spcBef>
-              <a:buFont typeface="Arial" panose="020B0604020202020204" pitchFamily="34" charset="0"/>
-              <a:buChar char="•"/>
-              <a:defRPr sz="1800" kern="1200">
-                <a:solidFill>
-                  <a:schemeClr val="tx1"/>
-                </a:solidFill>
-                <a:latin typeface="+mn-lt"/>
-                <a:ea typeface="+mn-ea"/>
-                <a:cs typeface="+mn-cs"/>
-              </a:defRPr>
-            </a:lvl4pPr>
-            <a:lvl5pPr marL="2057400" indent="-228600" algn="l" defTabSz="914400" rtl="0" eaLnBrk="1" latinLnBrk="0" hangingPunct="1">
-              <a:lnSpc>
-                <a:spcPct val="90000"/>
-              </a:lnSpc>
-              <a:spcBef>
-                <a:spcPts val="500"/>
-              </a:spcBef>
-              <a:buFont typeface="Arial" panose="020B0604020202020204" pitchFamily="34" charset="0"/>
-              <a:buChar char="•"/>
-              <a:defRPr sz="1800" kern="1200">
-                <a:solidFill>
-                  <a:schemeClr val="tx1"/>
-                </a:solidFill>
-                <a:latin typeface="+mn-lt"/>
-                <a:ea typeface="+mn-ea"/>
-                <a:cs typeface="+mn-cs"/>
-              </a:defRPr>
-            </a:lvl5pPr>
-            <a:lvl6pPr marL="2514600" indent="-228600" algn="l" defTabSz="914400" rtl="0" eaLnBrk="1" latinLnBrk="0" hangingPunct="1">
-              <a:lnSpc>
-                <a:spcPct val="90000"/>
-              </a:lnSpc>
-              <a:spcBef>
-                <a:spcPts val="500"/>
-              </a:spcBef>
-              <a:buFont typeface="Arial" panose="020B0604020202020204" pitchFamily="34" charset="0"/>
-              <a:buChar char="•"/>
-              <a:defRPr sz="1800" kern="1200">
-                <a:solidFill>
-                  <a:schemeClr val="tx1"/>
-                </a:solidFill>
-                <a:latin typeface="+mn-lt"/>
-                <a:ea typeface="+mn-ea"/>
-                <a:cs typeface="+mn-cs"/>
-              </a:defRPr>
-            </a:lvl6pPr>
-            <a:lvl7pPr marL="2971800" indent="-228600" algn="l" defTabSz="914400" rtl="0" eaLnBrk="1" latinLnBrk="0" hangingPunct="1">
-              <a:lnSpc>
-                <a:spcPct val="90000"/>
-              </a:lnSpc>
-              <a:spcBef>
-                <a:spcPts val="500"/>
-              </a:spcBef>
-              <a:buFont typeface="Arial" panose="020B0604020202020204" pitchFamily="34" charset="0"/>
-              <a:buChar char="•"/>
-              <a:defRPr sz="1800" kern="1200">
-                <a:solidFill>
-                  <a:schemeClr val="tx1"/>
-                </a:solidFill>
-                <a:latin typeface="+mn-lt"/>
-                <a:ea typeface="+mn-ea"/>
-                <a:cs typeface="+mn-cs"/>
-              </a:defRPr>
-            </a:lvl7pPr>
-            <a:lvl8pPr marL="3429000" indent="-228600" algn="l" defTabSz="914400" rtl="0" eaLnBrk="1" latinLnBrk="0" hangingPunct="1">
-              <a:lnSpc>
-                <a:spcPct val="90000"/>
-              </a:lnSpc>
-              <a:spcBef>
-                <a:spcPts val="500"/>
-              </a:spcBef>
-              <a:buFont typeface="Arial" panose="020B0604020202020204" pitchFamily="34" charset="0"/>
-              <a:buChar char="•"/>
-              <a:defRPr sz="1800" kern="1200">
-                <a:solidFill>
-                  <a:schemeClr val="tx1"/>
-                </a:solidFill>
-                <a:latin typeface="+mn-lt"/>
-                <a:ea typeface="+mn-ea"/>
-                <a:cs typeface="+mn-cs"/>
-              </a:defRPr>
-            </a:lvl8pPr>
-            <a:lvl9pPr marL="3886200" indent="-228600" algn="l" defTabSz="914400" rtl="0" eaLnBrk="1" latinLnBrk="0" hangingPunct="1">
-              <a:lnSpc>
-                <a:spcPct val="90000"/>
-              </a:lnSpc>
-              <a:spcBef>
-                <a:spcPts val="500"/>
-              </a:spcBef>
-              <a:buFont typeface="Arial" panose="020B0604020202020204" pitchFamily="34" charset="0"/>
-              <a:buChar char="•"/>
-              <a:defRPr sz="1800" kern="1200">
-                <a:solidFill>
-                  <a:schemeClr val="tx1"/>
-                </a:solidFill>
-                <a:latin typeface="+mn-lt"/>
-                <a:ea typeface="+mn-ea"/>
-                <a:cs typeface="+mn-cs"/>
-              </a:defRPr>
-            </a:lvl9pPr>
-          </a:lstStyle>
-          <a:p>
-            <a:r>
-              <a:rPr lang="en-GB" sz="2500" err="1">
-                <a:ea typeface="+mn-lt"/>
-                <a:cs typeface="+mn-lt"/>
-              </a:rPr>
-              <a:t>ConvNeXt</a:t>
-            </a:r>
-            <a:r>
-              <a:rPr lang="en-GB" sz="2500">
-                <a:ea typeface="+mn-lt"/>
-                <a:cs typeface="+mn-lt"/>
-              </a:rPr>
-              <a:t> patch-level holdout result: 67.2% accuracy average</a:t>
-            </a:r>
-            <a:endParaRPr lang="ca-ES"/>
-          </a:p>
-          <a:p>
-            <a:endParaRPr lang="en-GB" sz="2500"/>
-          </a:p>
-        </p:txBody>
-      </p:sp>
-    </p:spTree>
-    <p:extLst>
-      <p:ext uri="{BB962C8B-B14F-4D97-AF65-F5344CB8AC3E}">
-        <p14:creationId xmlns:p14="http://schemas.microsoft.com/office/powerpoint/2010/main" val="2238264942"/>
-      </p:ext>
-    </p:extLst>
-  </p:cSld>
-  <p:clrMapOvr>
-    <a:masterClrMapping/>
-  </p:clrMapOvr>
-</p:sld>
-</file>
-
-<file path=ppt/slides/slide17.xml><?xml version="1.0" encoding="utf-8"?>
-<p:sld xmlns:a="http://schemas.openxmlformats.org/drawingml/2006/main" xmlns:r="http://schemas.openxmlformats.org/officeDocument/2006/relationships" xmlns:p="http://schemas.openxmlformats.org/presentationml/2006/main">
-  <p:cSld>
-    <p:bg>
-      <p:bgPr>
-        <a:solidFill>
-          <a:schemeClr val="accent3">
-            <a:lumMod val="20000"/>
-            <a:lumOff val="80000"/>
-          </a:schemeClr>
-        </a:solidFill>
-        <a:effectLst/>
-      </p:bgPr>
-    </p:bg>
-    <p:spTree>
-      <p:nvGrpSpPr>
-        <p:cNvPr id="1" name="">
-          <a:extLst>
-            <a:ext uri="{FF2B5EF4-FFF2-40B4-BE49-F238E27FC236}">
-              <a16:creationId xmlns:a16="http://schemas.microsoft.com/office/drawing/2014/main" id="{9134FED0-284E-A214-4E6D-12E0ED6C1518}"/>
-            </a:ext>
-          </a:extLst>
-        </p:cNvPr>
-        <p:cNvGrpSpPr/>
-        <p:nvPr/>
-      </p:nvGrpSpPr>
-      <p:grpSpPr>
-        <a:xfrm>
-          <a:off x="0" y="0"/>
-          <a:ext cx="0" cy="0"/>
-          <a:chOff x="0" y="0"/>
-          <a:chExt cx="0" cy="0"/>
-        </a:xfrm>
-      </p:grpSpPr>
-      <p:sp>
-        <p:nvSpPr>
-          <p:cNvPr id="2" name="Title 1">
-            <a:extLst>
-              <a:ext uri="{FF2B5EF4-FFF2-40B4-BE49-F238E27FC236}">
-                <a16:creationId xmlns:a16="http://schemas.microsoft.com/office/drawing/2014/main" id="{1F76D229-F22B-AE50-8ECB-0B7331A31A27}"/>
-              </a:ext>
-            </a:extLst>
-          </p:cNvPr>
-          <p:cNvSpPr>
-            <a:spLocks noGrp="1"/>
-          </p:cNvSpPr>
-          <p:nvPr>
-            <p:ph type="title"/>
-          </p:nvPr>
-        </p:nvSpPr>
-        <p:spPr>
-          <a:xfrm>
-            <a:off x="176823" y="-250785"/>
-            <a:ext cx="10515600" cy="1325563"/>
-          </a:xfrm>
-        </p:spPr>
-        <p:txBody>
-          <a:bodyPr/>
-          <a:lstStyle/>
-          <a:p>
-            <a:r>
-              <a:rPr lang="en-US"/>
-              <a:t>Patch Level – Grad-CAM Images</a:t>
-            </a:r>
-          </a:p>
-        </p:txBody>
-      </p:sp>
-      <p:pic>
-        <p:nvPicPr>
-          <p:cNvPr id="9" name="Contenidor de contingut 8" descr="Imatge que conté captura de pantalla, Gràfics, Saturació cromàtica, disseny&#10;&#10;Pot ser que el contingut generat per IA no sigui correcte.">
-            <a:extLst>
-              <a:ext uri="{FF2B5EF4-FFF2-40B4-BE49-F238E27FC236}">
-                <a16:creationId xmlns:a16="http://schemas.microsoft.com/office/drawing/2014/main" id="{D79937F5-D22A-2ACC-8D72-807C5A13B904}"/>
-              </a:ext>
-            </a:extLst>
-          </p:cNvPr>
-          <p:cNvPicPr>
-            <a:picLocks noGrp="1" noChangeAspect="1"/>
-          </p:cNvPicPr>
-          <p:nvPr>
-            <p:ph idx="1"/>
-          </p:nvPr>
-        </p:nvPicPr>
-        <p:blipFill>
-          <a:blip r:embed="rId2"/>
-          <a:srcRect l="9553" t="7055" r="7550" b="10123"/>
-          <a:stretch>
-            <a:fillRect/>
-          </a:stretch>
-        </p:blipFill>
-        <p:spPr>
-          <a:xfrm>
-            <a:off x="6324238" y="1144156"/>
-            <a:ext cx="5646661" cy="2828930"/>
-          </a:xfrm>
-          <a:prstGeom prst="rect">
-            <a:avLst/>
-          </a:prstGeom>
-        </p:spPr>
-      </p:pic>
-      <p:pic>
-        <p:nvPicPr>
-          <p:cNvPr id="11" name="Imatge 10" descr="Imatge que conté captura de pantalla, Saturació cromàtica, mapa&#10;&#10;Pot ser que el contingut generat per IA no sigui correcte.">
-            <a:extLst>
-              <a:ext uri="{FF2B5EF4-FFF2-40B4-BE49-F238E27FC236}">
-                <a16:creationId xmlns:a16="http://schemas.microsoft.com/office/drawing/2014/main" id="{59E1ED67-5CEC-450D-C0D9-EA6682AB7F19}"/>
-              </a:ext>
-            </a:extLst>
-          </p:cNvPr>
-          <p:cNvPicPr>
-            <a:picLocks noChangeAspect="1"/>
-          </p:cNvPicPr>
-          <p:nvPr/>
-        </p:nvPicPr>
-        <p:blipFill>
-          <a:blip r:embed="rId3"/>
-          <a:srcRect l="11347" t="7692" r="7185" b="10526"/>
-          <a:stretch>
-            <a:fillRect/>
-          </a:stretch>
-        </p:blipFill>
-        <p:spPr>
-          <a:xfrm>
-            <a:off x="6339550" y="3989649"/>
-            <a:ext cx="5637737" cy="2833828"/>
-          </a:xfrm>
-          <a:prstGeom prst="rect">
-            <a:avLst/>
-          </a:prstGeom>
-        </p:spPr>
-      </p:pic>
-      <p:pic>
-        <p:nvPicPr>
-          <p:cNvPr id="12" name="Imatge 11" descr="Imatge que conté captura de pantalla, Gràfics, diagrama, Saturació cromàtica&#10;&#10;Pot ser que el contingut generat per IA no sigui correcte.">
-            <a:extLst>
-              <a:ext uri="{FF2B5EF4-FFF2-40B4-BE49-F238E27FC236}">
-                <a16:creationId xmlns:a16="http://schemas.microsoft.com/office/drawing/2014/main" id="{16091B2B-D361-65EB-5648-A83819041643}"/>
-              </a:ext>
-            </a:extLst>
-          </p:cNvPr>
-          <p:cNvPicPr>
-            <a:picLocks noChangeAspect="1"/>
-          </p:cNvPicPr>
-          <p:nvPr/>
-        </p:nvPicPr>
-        <p:blipFill>
-          <a:blip r:embed="rId4"/>
-          <a:srcRect l="10841" t="8907" r="8511" b="11741"/>
-          <a:stretch>
-            <a:fillRect/>
-          </a:stretch>
-        </p:blipFill>
-        <p:spPr>
-          <a:xfrm>
-            <a:off x="282132" y="3999294"/>
-            <a:ext cx="5636911" cy="2833894"/>
-          </a:xfrm>
-          <a:prstGeom prst="rect">
-            <a:avLst/>
-          </a:prstGeom>
-        </p:spPr>
-      </p:pic>
-      <p:pic>
-        <p:nvPicPr>
-          <p:cNvPr id="13" name="Imatge 12" descr="Imatge que conté captura de pantalla, Saturació cromàtica, Gràfics, visualització&#10;&#10;Pot ser que el contingut generat per IA no sigui correcte.">
-            <a:extLst>
-              <a:ext uri="{FF2B5EF4-FFF2-40B4-BE49-F238E27FC236}">
-                <a16:creationId xmlns:a16="http://schemas.microsoft.com/office/drawing/2014/main" id="{59D06E83-0FFC-95D9-CEEE-152038E4CF17}"/>
-              </a:ext>
-            </a:extLst>
-          </p:cNvPr>
-          <p:cNvPicPr>
-            <a:picLocks noChangeAspect="1"/>
-          </p:cNvPicPr>
-          <p:nvPr/>
-        </p:nvPicPr>
-        <p:blipFill>
-          <a:blip r:embed="rId5"/>
-          <a:srcRect l="10841" t="9109" r="8604" b="11943"/>
-          <a:stretch>
-            <a:fillRect/>
-          </a:stretch>
-        </p:blipFill>
-        <p:spPr>
-          <a:xfrm>
-            <a:off x="282132" y="1144206"/>
-            <a:ext cx="5637698" cy="2833898"/>
-          </a:xfrm>
-          <a:prstGeom prst="rect">
-            <a:avLst/>
-          </a:prstGeom>
-        </p:spPr>
-      </p:pic>
-      <p:sp>
-        <p:nvSpPr>
-          <p:cNvPr id="14" name="QuadreDeText 13">
-            <a:extLst>
-              <a:ext uri="{FF2B5EF4-FFF2-40B4-BE49-F238E27FC236}">
-                <a16:creationId xmlns:a16="http://schemas.microsoft.com/office/drawing/2014/main" id="{4F95B6AD-5C9D-3844-C88E-CA2E097E4996}"/>
-              </a:ext>
-            </a:extLst>
-          </p:cNvPr>
-          <p:cNvSpPr txBox="1"/>
-          <p:nvPr/>
-        </p:nvSpPr>
-        <p:spPr>
-          <a:xfrm>
-            <a:off x="2006279" y="781291"/>
-            <a:ext cx="1929114" cy="369332"/>
-          </a:xfrm>
-          <a:prstGeom prst="rect">
-            <a:avLst/>
-          </a:prstGeom>
-          <a:noFill/>
-        </p:spPr>
-        <p:txBody>
-          <a:bodyPr rot="0" spcFirstLastPara="0" vertOverflow="overflow" horzOverflow="overflow" vert="horz" wrap="square" lIns="91440" tIns="45720" rIns="91440" bIns="45720" numCol="1" spcCol="0" rtlCol="0" fromWordArt="0" anchor="t" anchorCtr="0" forceAA="0" compatLnSpc="1">
-            <a:prstTxWarp prst="textNoShape">
-              <a:avLst/>
-            </a:prstTxWarp>
-            <a:spAutoFit/>
-          </a:bodyPr>
-          <a:lstStyle/>
-          <a:p>
-            <a:r>
-              <a:rPr lang="ca-ES"/>
-              <a:t>Method 1 ResNet</a:t>
-            </a:r>
-          </a:p>
-        </p:txBody>
-      </p:sp>
-      <p:sp>
-        <p:nvSpPr>
-          <p:cNvPr id="15" name="QuadreDeText 14">
-            <a:extLst>
-              <a:ext uri="{FF2B5EF4-FFF2-40B4-BE49-F238E27FC236}">
-                <a16:creationId xmlns:a16="http://schemas.microsoft.com/office/drawing/2014/main" id="{E2E1B7DD-87CE-E2AF-831E-782251DCB9C7}"/>
-              </a:ext>
-            </a:extLst>
-          </p:cNvPr>
-          <p:cNvSpPr txBox="1"/>
-          <p:nvPr/>
-        </p:nvSpPr>
-        <p:spPr>
-          <a:xfrm>
-            <a:off x="8266253" y="781290"/>
-            <a:ext cx="2314936" cy="369332"/>
-          </a:xfrm>
-          <a:prstGeom prst="rect">
-            <a:avLst/>
-          </a:prstGeom>
-          <a:noFill/>
-        </p:spPr>
-        <p:txBody>
-          <a:bodyPr rot="0" spcFirstLastPara="0" vertOverflow="overflow" horzOverflow="overflow" vert="horz" wrap="square" lIns="91440" tIns="45720" rIns="91440" bIns="45720" numCol="1" spcCol="0" rtlCol="0" fromWordArt="0" anchor="t" anchorCtr="0" forceAA="0" compatLnSpc="1">
-            <a:prstTxWarp prst="textNoShape">
-              <a:avLst/>
-            </a:prstTxWarp>
-            <a:spAutoFit/>
-          </a:bodyPr>
-          <a:lstStyle/>
-          <a:p>
-            <a:r>
-              <a:rPr lang="ca-ES"/>
-              <a:t>Method 2 ConvNeXt</a:t>
-            </a:r>
-          </a:p>
-        </p:txBody>
-      </p:sp>
-    </p:spTree>
-    <p:extLst>
-      <p:ext uri="{BB962C8B-B14F-4D97-AF65-F5344CB8AC3E}">
-        <p14:creationId xmlns:p14="http://schemas.microsoft.com/office/powerpoint/2010/main" val="2607122922"/>
-      </p:ext>
-    </p:extLst>
-  </p:cSld>
-  <p:clrMapOvr>
-    <a:masterClrMapping/>
-  </p:clrMapOvr>
-</p:sld>
-</file>
-
-<file path=ppt/slides/slide18.xml><?xml version="1.0" encoding="utf-8"?>
-<p:sld xmlns:a="http://schemas.openxmlformats.org/drawingml/2006/main" xmlns:r="http://schemas.openxmlformats.org/officeDocument/2006/relationships" xmlns:p="http://schemas.openxmlformats.org/presentationml/2006/main">
-  <p:cSld>
-    <p:bg>
-      <p:bgPr>
-        <a:solidFill>
-          <a:schemeClr val="accent3">
-            <a:lumMod val="20000"/>
-            <a:lumOff val="80000"/>
-          </a:schemeClr>
-        </a:solidFill>
-        <a:effectLst/>
-      </p:bgPr>
-    </p:bg>
-    <p:spTree>
-      <p:nvGrpSpPr>
-        <p:cNvPr id="1" name="">
-          <a:extLst>
-            <a:ext uri="{FF2B5EF4-FFF2-40B4-BE49-F238E27FC236}">
-              <a16:creationId xmlns:a16="http://schemas.microsoft.com/office/drawing/2014/main" id="{4D39AA16-2F4F-F75E-1175-EFFFB8DBE699}"/>
-            </a:ext>
-          </a:extLst>
-        </p:cNvPr>
-        <p:cNvGrpSpPr/>
-        <p:nvPr/>
-      </p:nvGrpSpPr>
-      <p:grpSpPr>
-        <a:xfrm>
-          <a:off x="0" y="0"/>
-          <a:ext cx="0" cy="0"/>
-          <a:chOff x="0" y="0"/>
-          <a:chExt cx="0" cy="0"/>
-        </a:xfrm>
-      </p:grpSpPr>
-      <p:sp>
-        <p:nvSpPr>
-          <p:cNvPr id="2" name="Title 1">
-            <a:extLst>
-              <a:ext uri="{FF2B5EF4-FFF2-40B4-BE49-F238E27FC236}">
-                <a16:creationId xmlns:a16="http://schemas.microsoft.com/office/drawing/2014/main" id="{93BA0621-7D01-3D9C-9FBD-76124A0535FB}"/>
-              </a:ext>
-            </a:extLst>
-          </p:cNvPr>
-          <p:cNvSpPr>
-            <a:spLocks noGrp="1"/>
-          </p:cNvSpPr>
-          <p:nvPr>
-            <p:ph type="title"/>
-          </p:nvPr>
-        </p:nvSpPr>
-        <p:spPr>
-          <a:xfrm>
-            <a:off x="64452" y="-76200"/>
-            <a:ext cx="12065000" cy="1325563"/>
-          </a:xfrm>
-        </p:spPr>
-        <p:txBody>
-          <a:bodyPr/>
-          <a:lstStyle/>
-          <a:p>
-            <a:r>
-              <a:rPr lang="en-US"/>
-              <a:t>Method 1 </a:t>
-            </a:r>
-            <a:r>
-              <a:rPr lang="en-US" err="1"/>
-              <a:t>ResNet</a:t>
-            </a:r>
-            <a:r>
-              <a:rPr lang="en-US"/>
-              <a:t> Patient Level Results – ROC + PR</a:t>
-            </a:r>
-          </a:p>
-        </p:txBody>
-      </p:sp>
-      <p:pic>
-        <p:nvPicPr>
-          <p:cNvPr id="3" name="Imagen 2">
-            <a:extLst>
-              <a:ext uri="{FF2B5EF4-FFF2-40B4-BE49-F238E27FC236}">
-                <a16:creationId xmlns:a16="http://schemas.microsoft.com/office/drawing/2014/main" id="{237C5DB4-6888-6701-1857-EFD8BD5D0E3D}"/>
-              </a:ext>
-            </a:extLst>
-          </p:cNvPr>
-          <p:cNvPicPr>
-            <a:picLocks noChangeAspect="1"/>
-          </p:cNvPicPr>
-          <p:nvPr/>
-        </p:nvPicPr>
-        <p:blipFill>
-          <a:blip r:embed="rId2"/>
-          <a:stretch>
-            <a:fillRect/>
-          </a:stretch>
-        </p:blipFill>
-        <p:spPr>
-          <a:xfrm>
-            <a:off x="381000" y="1047750"/>
-            <a:ext cx="11430000" cy="4762500"/>
-          </a:xfrm>
-          <a:prstGeom prst="rect">
-            <a:avLst/>
-          </a:prstGeom>
-        </p:spPr>
-      </p:pic>
-    </p:spTree>
-    <p:extLst>
-      <p:ext uri="{BB962C8B-B14F-4D97-AF65-F5344CB8AC3E}">
-        <p14:creationId xmlns:p14="http://schemas.microsoft.com/office/powerpoint/2010/main" val="1225510391"/>
-      </p:ext>
-    </p:extLst>
-  </p:cSld>
-  <p:clrMapOvr>
-    <a:masterClrMapping/>
-  </p:clrMapOvr>
-</p:sld>
-</file>
-
-<file path=ppt/slides/slide19.xml><?xml version="1.0" encoding="utf-8"?>
-<p:sld xmlns:a="http://schemas.openxmlformats.org/drawingml/2006/main" xmlns:r="http://schemas.openxmlformats.org/officeDocument/2006/relationships" xmlns:p="http://schemas.openxmlformats.org/presentationml/2006/main">
-  <p:cSld>
-    <p:bg>
-      <p:bgPr>
-        <a:solidFill>
-          <a:schemeClr val="accent4">
-            <a:lumMod val="20000"/>
-            <a:lumOff val="80000"/>
-          </a:schemeClr>
-        </a:solidFill>
-        <a:effectLst/>
-      </p:bgPr>
-    </p:bg>
-    <p:spTree>
-      <p:nvGrpSpPr>
-        <p:cNvPr id="1" name="">
-          <a:extLst>
-            <a:ext uri="{FF2B5EF4-FFF2-40B4-BE49-F238E27FC236}">
-              <a16:creationId xmlns:a16="http://schemas.microsoft.com/office/drawing/2014/main" id="{9A037F09-78EC-6EFB-CC72-5581EED80F8A}"/>
-            </a:ext>
-          </a:extLst>
-        </p:cNvPr>
-        <p:cNvGrpSpPr/>
-        <p:nvPr/>
-      </p:nvGrpSpPr>
-      <p:grpSpPr>
-        <a:xfrm>
-          <a:off x="0" y="0"/>
-          <a:ext cx="0" cy="0"/>
-          <a:chOff x="0" y="0"/>
-          <a:chExt cx="0" cy="0"/>
-        </a:xfrm>
-      </p:grpSpPr>
-      <p:sp>
-        <p:nvSpPr>
-          <p:cNvPr id="2" name="Title 1">
-            <a:extLst>
-              <a:ext uri="{FF2B5EF4-FFF2-40B4-BE49-F238E27FC236}">
-                <a16:creationId xmlns:a16="http://schemas.microsoft.com/office/drawing/2014/main" id="{5195E171-B589-191A-E4AC-162E90EF07BD}"/>
-              </a:ext>
-            </a:extLst>
-          </p:cNvPr>
-          <p:cNvSpPr>
-            <a:spLocks noGrp="1"/>
-          </p:cNvSpPr>
-          <p:nvPr>
-            <p:ph type="title"/>
-          </p:nvPr>
-        </p:nvSpPr>
-        <p:spPr>
-          <a:xfrm>
-            <a:off x="197802" y="447675"/>
-            <a:ext cx="11791950" cy="658813"/>
-          </a:xfrm>
-        </p:spPr>
-        <p:txBody>
-          <a:bodyPr>
-            <a:normAutofit fontScale="90000"/>
-          </a:bodyPr>
-          <a:lstStyle/>
-          <a:p>
-            <a:r>
-              <a:rPr lang="en-US"/>
-              <a:t>Method 2 ConvNeXt Patient Level Results – ROC + PR </a:t>
-            </a:r>
-          </a:p>
-        </p:txBody>
-      </p:sp>
-      <p:pic>
-        <p:nvPicPr>
-          <p:cNvPr id="5" name="Contenidor de contingut 4" descr="Imatge que conté text, línia, captura de pantalla, Trama&#10;&#10;Pot ser que el contingut generat per IA no sigui correcte.">
-            <a:extLst>
-              <a:ext uri="{FF2B5EF4-FFF2-40B4-BE49-F238E27FC236}">
-                <a16:creationId xmlns:a16="http://schemas.microsoft.com/office/drawing/2014/main" id="{9EE7A83B-1F3F-22BA-AA80-92411BA72850}"/>
-              </a:ext>
-            </a:extLst>
-          </p:cNvPr>
-          <p:cNvPicPr>
-            <a:picLocks noGrp="1" noChangeAspect="1"/>
-          </p:cNvPicPr>
-          <p:nvPr>
-            <p:ph idx="1"/>
-          </p:nvPr>
-        </p:nvPicPr>
-        <p:blipFill>
-          <a:blip r:embed="rId2"/>
-          <a:stretch>
-            <a:fillRect/>
-          </a:stretch>
-        </p:blipFill>
-        <p:spPr>
-          <a:xfrm>
-            <a:off x="81776" y="1488553"/>
-            <a:ext cx="5802351" cy="4402872"/>
-          </a:xfrm>
-          <a:prstGeom prst="rect">
-            <a:avLst/>
-          </a:prstGeom>
-        </p:spPr>
-      </p:pic>
-      <p:pic>
-        <p:nvPicPr>
-          <p:cNvPr id="6" name="Imatge 5" descr="Imatge que conté text, captura de pantalla, pantalla, nombre&#10;&#10;Pot ser que el contingut generat per IA no sigui correcte.">
-            <a:extLst>
-              <a:ext uri="{FF2B5EF4-FFF2-40B4-BE49-F238E27FC236}">
-                <a16:creationId xmlns:a16="http://schemas.microsoft.com/office/drawing/2014/main" id="{32335CC6-4815-E536-CC44-7035158A304C}"/>
-              </a:ext>
-            </a:extLst>
-          </p:cNvPr>
-          <p:cNvPicPr>
-            <a:picLocks noChangeAspect="1"/>
-          </p:cNvPicPr>
-          <p:nvPr/>
-        </p:nvPicPr>
-        <p:blipFill>
-          <a:blip r:embed="rId3"/>
-          <a:stretch>
-            <a:fillRect/>
-          </a:stretch>
-        </p:blipFill>
-        <p:spPr>
-          <a:xfrm>
-            <a:off x="5938024" y="1486829"/>
-            <a:ext cx="5872976" cy="4404732"/>
-          </a:xfrm>
-          <a:prstGeom prst="rect">
-            <a:avLst/>
-          </a:prstGeom>
-        </p:spPr>
-      </p:pic>
-    </p:spTree>
-    <p:extLst>
-      <p:ext uri="{BB962C8B-B14F-4D97-AF65-F5344CB8AC3E}">
-        <p14:creationId xmlns:p14="http://schemas.microsoft.com/office/powerpoint/2010/main" val="588325595"/>
-      </p:ext>
-    </p:extLst>
-  </p:cSld>
-  <p:clrMapOvr>
-    <a:masterClrMapping/>
-  </p:clrMapOvr>
-</p:sld>
-</file>
-
-<file path=ppt/slides/slide2.xml><?xml version="1.0" encoding="utf-8"?>
-<p:sld xmlns:a="http://schemas.openxmlformats.org/drawingml/2006/main" xmlns:r="http://schemas.openxmlformats.org/officeDocument/2006/relationships" xmlns:p="http://schemas.openxmlformats.org/presentationml/2006/main">
-  <p:cSld>
-    <p:spTree>
-      <p:nvGrpSpPr>
-        <p:cNvPr id="1" name=""/>
-        <p:cNvGrpSpPr/>
-        <p:nvPr/>
-      </p:nvGrpSpPr>
-      <p:grpSpPr>
-        <a:xfrm>
-          <a:off x="0" y="0"/>
-          <a:ext cx="0" cy="0"/>
-          <a:chOff x="0" y="0"/>
-          <a:chExt cx="0" cy="0"/>
-        </a:xfrm>
-      </p:grpSpPr>
-      <p:sp>
-        <p:nvSpPr>
-          <p:cNvPr id="2" name="Title 1">
-            <a:extLst>
-              <a:ext uri="{FF2B5EF4-FFF2-40B4-BE49-F238E27FC236}">
                 <a16:creationId xmlns:a16="http://schemas.microsoft.com/office/drawing/2014/main" id="{13B0BF86-C7F4-0AA3-4482-85B58F55AAEB}"/>
               </a:ext>
             </a:extLst>
@@ -6997,7 +7166,7 @@
         </p:blipFill>
         <p:spPr bwMode="auto">
           <a:xfrm>
-            <a:off x="2979868" y="2662000"/>
+            <a:off x="3394982" y="2662000"/>
             <a:ext cx="5402036" cy="4196000"/>
           </a:xfrm>
           <a:prstGeom prst="rect">
@@ -7028,16 +7197,13 @@
 </p:sld>
 </file>
 
-<file path=ppt/slides/slide20.xml><?xml version="1.0" encoding="utf-8"?>
+<file path=ppt/slides/slide3.xml><?xml version="1.0" encoding="utf-8"?>
 <p:sld xmlns:a="http://schemas.openxmlformats.org/drawingml/2006/main" xmlns:r="http://schemas.openxmlformats.org/officeDocument/2006/relationships" xmlns:p="http://schemas.openxmlformats.org/presentationml/2006/main">
   <p:cSld>
     <p:bg>
       <p:bgPr>
         <a:solidFill>
-          <a:schemeClr val="accent4">
-            <a:lumMod val="20000"/>
-            <a:lumOff val="80000"/>
-          </a:schemeClr>
+          <a:schemeClr val="bg1"/>
         </a:solidFill>
         <a:effectLst/>
       </p:bgPr>
@@ -7047,7 +7213,7 @@
         <p:cNvPr id="1" name="">
           <a:extLst>
             <a:ext uri="{FF2B5EF4-FFF2-40B4-BE49-F238E27FC236}">
-              <a16:creationId xmlns:a16="http://schemas.microsoft.com/office/drawing/2014/main" id="{BB0ED244-FDF5-B88B-FB0D-69912DAA5A8C}"/>
+              <a16:creationId xmlns:a16="http://schemas.microsoft.com/office/drawing/2014/main" id="{AB513967-151F-FC36-8F5B-DACC0C175770}"/>
             </a:ext>
           </a:extLst>
         </p:cNvPr>
@@ -7067,7 +7233,7 @@
           <p:cNvPr id="2" name="Title 1">
             <a:extLst>
               <a:ext uri="{FF2B5EF4-FFF2-40B4-BE49-F238E27FC236}">
-                <a16:creationId xmlns:a16="http://schemas.microsoft.com/office/drawing/2014/main" id="{DC50BB01-7701-58E4-3751-3F0FDDB03B1B}"/>
+                <a16:creationId xmlns:a16="http://schemas.microsoft.com/office/drawing/2014/main" id="{880F0AD4-C375-FF7C-1297-03CEE47C7AC2}"/>
               </a:ext>
             </a:extLst>
           </p:cNvPr>
@@ -7080,7 +7246,7 @@
         </p:nvSpPr>
         <p:spPr>
           <a:xfrm>
-            <a:off x="331152" y="0"/>
+            <a:off x="264762" y="-185979"/>
             <a:ext cx="10515600" cy="1325563"/>
           </a:xfrm>
         </p:spPr>
@@ -7089,18 +7255,22 @@
           <a:lstStyle/>
           <a:p>
             <a:r>
-              <a:rPr lang="en-US"/>
-              <a:t>Patient Level – Confusion Matrix</a:t>
-            </a:r>
-          </a:p>
-        </p:txBody>
-      </p:sp>
-      <p:sp>
-        <p:nvSpPr>
-          <p:cNvPr id="4" name="Content Placeholder 2">
-            <a:extLst>
-              <a:ext uri="{FF2B5EF4-FFF2-40B4-BE49-F238E27FC236}">
-                <a16:creationId xmlns:a16="http://schemas.microsoft.com/office/drawing/2014/main" id="{31B52A43-3635-FA85-A098-0F89A1DD76C8}"/>
+              <a:rPr lang="en-GB" dirty="0">
+                <a:ea typeface="+mj-lt"/>
+                <a:cs typeface="+mj-lt"/>
+              </a:rPr>
+              <a:t>Dataset</a:t>
+            </a:r>
+            <a:endParaRPr lang="en-US" dirty="0"/>
+          </a:p>
+        </p:txBody>
+      </p:sp>
+      <p:sp>
+        <p:nvSpPr>
+          <p:cNvPr id="3" name="Content Placeholder 2">
+            <a:extLst>
+              <a:ext uri="{FF2B5EF4-FFF2-40B4-BE49-F238E27FC236}">
+                <a16:creationId xmlns:a16="http://schemas.microsoft.com/office/drawing/2014/main" id="{9C676C20-8A22-C157-BEEB-2954CFB837EB}"/>
               </a:ext>
             </a:extLst>
           </p:cNvPr>
@@ -7113,1755 +7283,104 @@
         </p:nvSpPr>
         <p:spPr>
           <a:xfrm>
-            <a:off x="6094972" y="1249363"/>
-            <a:ext cx="5629900" cy="370695"/>
+            <a:off x="838200" y="754801"/>
+            <a:ext cx="10515600" cy="4351338"/>
           </a:xfrm>
         </p:spPr>
         <p:txBody>
-          <a:bodyPr vert="horz" lIns="91440" tIns="45720" rIns="91440" bIns="45720" rtlCol="0" anchor="t">
-            <a:normAutofit fontScale="85000" lnSpcReduction="10000"/>
+          <a:bodyPr>
+            <a:normAutofit/>
           </a:bodyPr>
           <a:lstStyle/>
           <a:p>
             <a:r>
-              <a:rPr lang="en-GB" sz="2500" err="1">
-                <a:ea typeface="+mn-lt"/>
-                <a:cs typeface="+mn-lt"/>
-              </a:rPr>
-              <a:t>ConvNeXt</a:t>
-            </a:r>
-            <a:r>
-              <a:rPr lang="en-GB" sz="2500">
-                <a:ea typeface="+mn-lt"/>
-                <a:cs typeface="+mn-lt"/>
-              </a:rPr>
-              <a:t> patient-level holdout result: 93.1% </a:t>
-            </a:r>
-          </a:p>
-          <a:p>
-            <a:endParaRPr lang="en-GB" sz="2500"/>
-          </a:p>
-        </p:txBody>
-      </p:sp>
-      <p:sp>
-        <p:nvSpPr>
-          <p:cNvPr id="3" name="Title 1">
-            <a:extLst>
-              <a:ext uri="{FF2B5EF4-FFF2-40B4-BE49-F238E27FC236}">
-                <a16:creationId xmlns:a16="http://schemas.microsoft.com/office/drawing/2014/main" id="{36AF9578-7A54-A5F5-3CB6-FAAA402F55A5}"/>
-              </a:ext>
-            </a:extLst>
-          </p:cNvPr>
-          <p:cNvSpPr txBox="1">
-            <a:spLocks/>
-          </p:cNvSpPr>
+              <a:rPr lang="en-US" sz="2500" dirty="0"/>
+              <a:t>Children’s Hospital Boston – MIT EEG recordings from 23 pediatric and one adult patient</a:t>
+            </a:r>
+          </a:p>
+          <a:p>
+            <a:r>
+              <a:rPr lang="en-GB" sz="2500" dirty="0">
+                <a:ea typeface="+mn-lt"/>
+                <a:cs typeface="+mn-lt"/>
+              </a:rPr>
+              <a:t>23 channels, recorded by EEG cap with 21 electrodes</a:t>
+            </a:r>
+          </a:p>
+          <a:p>
+            <a:r>
+              <a:rPr lang="en-US" sz="2500" dirty="0"/>
+              <a:t>Segmented into 1-second temporal windows</a:t>
+            </a:r>
+          </a:p>
+          <a:p>
+            <a:pPr marL="0" indent="0">
+              <a:buNone/>
+            </a:pPr>
+            <a:endParaRPr lang="en-GB" sz="2500" dirty="0">
+              <a:ea typeface="+mn-lt"/>
+              <a:cs typeface="+mn-lt"/>
+            </a:endParaRPr>
+          </a:p>
+          <a:p>
+            <a:endParaRPr lang="en-GB" sz="2500" dirty="0">
+              <a:ea typeface="+mn-lt"/>
+              <a:cs typeface="+mn-lt"/>
+            </a:endParaRPr>
+          </a:p>
+        </p:txBody>
+      </p:sp>
+      <p:pic>
+        <p:nvPicPr>
+          <p:cNvPr id="4" name="Picture 2" descr="Boston Children's Hospital - Dravet Syndrome Foundation">
+            <a:extLst>
+              <a:ext uri="{FF2B5EF4-FFF2-40B4-BE49-F238E27FC236}">
+                <a16:creationId xmlns:a16="http://schemas.microsoft.com/office/drawing/2014/main" id="{937DA4E9-1F41-E9B4-949B-0B77107D6DC2}"/>
+              </a:ext>
+            </a:extLst>
+          </p:cNvPr>
+          <p:cNvPicPr>
+            <a:picLocks noChangeAspect="1" noChangeArrowheads="1"/>
+          </p:cNvPicPr>
           <p:nvPr/>
-        </p:nvSpPr>
-        <p:spPr>
+        </p:nvPicPr>
+        <p:blipFill>
+          <a:blip r:embed="rId3">
+            <a:extLst>
+              <a:ext uri="{28A0092B-C50C-407E-A947-70E740481C1C}">
+                <a14:useLocalDpi xmlns:a14="http://schemas.microsoft.com/office/drawing/2010/main" val="0"/>
+              </a:ext>
+            </a:extLst>
+          </a:blip>
+          <a:srcRect/>
+          <a:stretch>
+            <a:fillRect/>
+          </a:stretch>
+        </p:blipFill>
+        <p:spPr bwMode="auto">
           <a:xfrm>
-            <a:off x="2481739" y="6038553"/>
-            <a:ext cx="1978099" cy="1013727"/>
+            <a:off x="3120111" y="2568030"/>
+            <a:ext cx="6325849" cy="4217233"/>
           </a:xfrm>
           <a:prstGeom prst="rect">
             <a:avLst/>
           </a:prstGeom>
-        </p:spPr>
-        <p:txBody>
-          <a:bodyPr vert="horz" lIns="91440" tIns="45720" rIns="91440" bIns="45720" rtlCol="0" anchor="ctr">
-            <a:normAutofit fontScale="97500"/>
-          </a:bodyPr>
-          <a:lstStyle>
-            <a:lvl1pPr algn="l" defTabSz="914400" rtl="0" eaLnBrk="1" latinLnBrk="0" hangingPunct="1">
-              <a:lnSpc>
-                <a:spcPct val="90000"/>
-              </a:lnSpc>
-              <a:spcBef>
-                <a:spcPct val="0"/>
-              </a:spcBef>
-              <a:buNone/>
-              <a:defRPr sz="4400" kern="1200">
+          <a:noFill/>
+          <a:extLst>
+            <a:ext uri="{909E8E84-426E-40DD-AFC4-6F175D3DCCD1}">
+              <a14:hiddenFill xmlns:a14="http://schemas.microsoft.com/office/drawing/2010/main">
                 <a:solidFill>
-                  <a:schemeClr val="tx1"/>
+                  <a:srgbClr val="FFFFFF"/>
                 </a:solidFill>
-                <a:latin typeface="+mj-lt"/>
-                <a:ea typeface="+mj-ea"/>
-                <a:cs typeface="+mj-cs"/>
-              </a:defRPr>
-            </a:lvl1pPr>
-          </a:lstStyle>
-          <a:p>
-            <a:r>
-              <a:rPr lang="en-US" sz="1550" err="1">
-                <a:solidFill>
-                  <a:schemeClr val="tx1">
-                    <a:lumMod val="75000"/>
-                    <a:lumOff val="25000"/>
-                  </a:schemeClr>
-                </a:solidFill>
-                <a:latin typeface="Verdana" panose="020B0604030504040204" pitchFamily="34" charset="0"/>
-                <a:ea typeface="Verdana" panose="020B0604030504040204" pitchFamily="34" charset="0"/>
-                <a:cs typeface="Verdana" panose="020B0604030504040204" pitchFamily="34" charset="0"/>
-              </a:rPr>
-              <a:t>ResNet</a:t>
-            </a:r>
-            <a:endParaRPr lang="en-US" sz="1550">
-              <a:solidFill>
-                <a:schemeClr val="tx1">
-                  <a:lumMod val="75000"/>
-                  <a:lumOff val="25000"/>
-                </a:schemeClr>
-              </a:solidFill>
-              <a:latin typeface="Verdana" panose="020B0604030504040204" pitchFamily="34" charset="0"/>
-              <a:ea typeface="Verdana" panose="020B0604030504040204" pitchFamily="34" charset="0"/>
-              <a:cs typeface="Verdana" panose="020B0604030504040204" pitchFamily="34" charset="0"/>
-            </a:endParaRPr>
-          </a:p>
-        </p:txBody>
-      </p:sp>
-      <p:sp>
-        <p:nvSpPr>
-          <p:cNvPr id="5" name="Title 1">
-            <a:extLst>
-              <a:ext uri="{FF2B5EF4-FFF2-40B4-BE49-F238E27FC236}">
-                <a16:creationId xmlns:a16="http://schemas.microsoft.com/office/drawing/2014/main" id="{BCE45AD5-4870-7ADC-0C8B-F82FB23AACA0}"/>
-              </a:ext>
-            </a:extLst>
-          </p:cNvPr>
-          <p:cNvSpPr txBox="1">
-            <a:spLocks/>
-          </p:cNvSpPr>
-          <p:nvPr/>
-        </p:nvSpPr>
-        <p:spPr>
-          <a:xfrm>
-            <a:off x="8361869" y="6057891"/>
-            <a:ext cx="1978099" cy="1013727"/>
-          </a:xfrm>
-          <a:prstGeom prst="rect">
-            <a:avLst/>
-          </a:prstGeom>
-        </p:spPr>
-        <p:txBody>
-          <a:bodyPr vert="horz" lIns="91440" tIns="45720" rIns="91440" bIns="45720" rtlCol="0" anchor="ctr">
-            <a:normAutofit fontScale="97500"/>
-          </a:bodyPr>
-          <a:lstStyle>
-            <a:lvl1pPr algn="l" defTabSz="914400" rtl="0" eaLnBrk="1" latinLnBrk="0" hangingPunct="1">
-              <a:lnSpc>
-                <a:spcPct val="90000"/>
-              </a:lnSpc>
-              <a:spcBef>
-                <a:spcPct val="0"/>
-              </a:spcBef>
-              <a:buNone/>
-              <a:defRPr sz="4400" kern="1200">
-                <a:solidFill>
-                  <a:schemeClr val="tx1"/>
-                </a:solidFill>
-                <a:latin typeface="+mj-lt"/>
-                <a:ea typeface="+mj-ea"/>
-                <a:cs typeface="+mj-cs"/>
-              </a:defRPr>
-            </a:lvl1pPr>
-          </a:lstStyle>
-          <a:p>
-            <a:r>
-              <a:rPr lang="en-US" sz="1550" err="1">
-                <a:solidFill>
-                  <a:schemeClr val="tx1">
-                    <a:lumMod val="75000"/>
-                    <a:lumOff val="25000"/>
-                  </a:schemeClr>
-                </a:solidFill>
-                <a:latin typeface="Verdana" panose="020B0604030504040204" pitchFamily="34" charset="0"/>
-                <a:ea typeface="Verdana" panose="020B0604030504040204" pitchFamily="34" charset="0"/>
-                <a:cs typeface="Verdana" panose="020B0604030504040204" pitchFamily="34" charset="0"/>
-              </a:rPr>
-              <a:t>ConvNeX</a:t>
-            </a:r>
-            <a:r>
-              <a:rPr lang="es-ES" sz="1550">
-                <a:solidFill>
-                  <a:schemeClr val="tx1">
-                    <a:lumMod val="75000"/>
-                    <a:lumOff val="25000"/>
-                  </a:schemeClr>
-                </a:solidFill>
-                <a:latin typeface="Verdana" panose="020B0604030504040204" pitchFamily="34" charset="0"/>
-                <a:ea typeface="Verdana" panose="020B0604030504040204" pitchFamily="34" charset="0"/>
-                <a:cs typeface="Verdana" panose="020B0604030504040204" pitchFamily="34" charset="0"/>
-              </a:rPr>
-              <a:t>t</a:t>
-            </a:r>
-            <a:endParaRPr lang="en-US" sz="1550">
-              <a:solidFill>
-                <a:schemeClr val="tx1">
-                  <a:lumMod val="75000"/>
-                  <a:lumOff val="25000"/>
-                </a:schemeClr>
-              </a:solidFill>
-              <a:latin typeface="Verdana" panose="020B0604030504040204" pitchFamily="34" charset="0"/>
-              <a:ea typeface="Verdana" panose="020B0604030504040204" pitchFamily="34" charset="0"/>
-              <a:cs typeface="Verdana" panose="020B0604030504040204" pitchFamily="34" charset="0"/>
-            </a:endParaRPr>
-          </a:p>
-        </p:txBody>
-      </p:sp>
-      <p:pic>
-        <p:nvPicPr>
-          <p:cNvPr id="7" name="Imagen 4" descr="Gráfico, Gráfico de rectángulos&#10;&#10;El contenido generado por IA puede ser incorrecto.">
-            <a:extLst>
-              <a:ext uri="{FF2B5EF4-FFF2-40B4-BE49-F238E27FC236}">
-                <a16:creationId xmlns:a16="http://schemas.microsoft.com/office/drawing/2014/main" id="{68B0D4BC-7298-FA11-761E-16DDC05F494C}"/>
-              </a:ext>
-            </a:extLst>
-          </p:cNvPr>
-          <p:cNvPicPr>
-            <a:picLocks noChangeAspect="1"/>
-          </p:cNvPicPr>
-          <p:nvPr/>
-        </p:nvPicPr>
-        <p:blipFill>
-          <a:blip r:embed="rId2"/>
-          <a:stretch>
-            <a:fillRect/>
-          </a:stretch>
-        </p:blipFill>
-        <p:spPr>
-          <a:xfrm>
-            <a:off x="84175" y="1716086"/>
-            <a:ext cx="5906453" cy="4492625"/>
-          </a:xfrm>
-          <a:prstGeom prst="rect">
-            <a:avLst/>
-          </a:prstGeom>
-        </p:spPr>
-      </p:pic>
-      <p:sp>
-        <p:nvSpPr>
-          <p:cNvPr id="9" name="Content Placeholder 2">
-            <a:extLst>
-              <a:ext uri="{FF2B5EF4-FFF2-40B4-BE49-F238E27FC236}">
-                <a16:creationId xmlns:a16="http://schemas.microsoft.com/office/drawing/2014/main" id="{4780B721-908E-26F9-BA67-16D84844A43A}"/>
-              </a:ext>
-            </a:extLst>
-          </p:cNvPr>
-          <p:cNvSpPr txBox="1">
-            <a:spLocks/>
-          </p:cNvSpPr>
-          <p:nvPr/>
-        </p:nvSpPr>
-        <p:spPr>
-          <a:xfrm>
-            <a:off x="456172" y="1249363"/>
-            <a:ext cx="5363200" cy="434195"/>
-          </a:xfrm>
-          <a:prstGeom prst="rect">
-            <a:avLst/>
-          </a:prstGeom>
-        </p:spPr>
-        <p:txBody>
-          <a:bodyPr vert="horz" lIns="91440" tIns="45720" rIns="91440" bIns="45720" rtlCol="0" anchor="t">
-            <a:normAutofit fontScale="85000" lnSpcReduction="10000"/>
-          </a:bodyPr>
-          <a:lstStyle>
-            <a:lvl1pPr marL="228600" indent="-228600" algn="l" defTabSz="914400" rtl="0" eaLnBrk="1" latinLnBrk="0" hangingPunct="1">
-              <a:lnSpc>
-                <a:spcPct val="90000"/>
-              </a:lnSpc>
-              <a:spcBef>
-                <a:spcPts val="1000"/>
-              </a:spcBef>
-              <a:buFont typeface="Arial" panose="020B0604020202020204" pitchFamily="34" charset="0"/>
-              <a:buChar char="•"/>
-              <a:defRPr sz="2800" kern="1200">
-                <a:solidFill>
-                  <a:schemeClr val="tx1"/>
-                </a:solidFill>
-                <a:latin typeface="+mn-lt"/>
-                <a:ea typeface="+mn-ea"/>
-                <a:cs typeface="+mn-cs"/>
-              </a:defRPr>
-            </a:lvl1pPr>
-            <a:lvl2pPr marL="685800" indent="-228600" algn="l" defTabSz="914400" rtl="0" eaLnBrk="1" latinLnBrk="0" hangingPunct="1">
-              <a:lnSpc>
-                <a:spcPct val="90000"/>
-              </a:lnSpc>
-              <a:spcBef>
-                <a:spcPts val="500"/>
-              </a:spcBef>
-              <a:buFont typeface="Arial" panose="020B0604020202020204" pitchFamily="34" charset="0"/>
-              <a:buChar char="•"/>
-              <a:defRPr sz="2400" kern="1200">
-                <a:solidFill>
-                  <a:schemeClr val="tx1"/>
-                </a:solidFill>
-                <a:latin typeface="+mn-lt"/>
-                <a:ea typeface="+mn-ea"/>
-                <a:cs typeface="+mn-cs"/>
-              </a:defRPr>
-            </a:lvl2pPr>
-            <a:lvl3pPr marL="1143000" indent="-228600" algn="l" defTabSz="914400" rtl="0" eaLnBrk="1" latinLnBrk="0" hangingPunct="1">
-              <a:lnSpc>
-                <a:spcPct val="90000"/>
-              </a:lnSpc>
-              <a:spcBef>
-                <a:spcPts val="500"/>
-              </a:spcBef>
-              <a:buFont typeface="Arial" panose="020B0604020202020204" pitchFamily="34" charset="0"/>
-              <a:buChar char="•"/>
-              <a:defRPr sz="2000" kern="1200">
-                <a:solidFill>
-                  <a:schemeClr val="tx1"/>
-                </a:solidFill>
-                <a:latin typeface="+mn-lt"/>
-                <a:ea typeface="+mn-ea"/>
-                <a:cs typeface="+mn-cs"/>
-              </a:defRPr>
-            </a:lvl3pPr>
-            <a:lvl4pPr marL="1600200" indent="-228600" algn="l" defTabSz="914400" rtl="0" eaLnBrk="1" latinLnBrk="0" hangingPunct="1">
-              <a:lnSpc>
-                <a:spcPct val="90000"/>
-              </a:lnSpc>
-              <a:spcBef>
-                <a:spcPts val="500"/>
-              </a:spcBef>
-              <a:buFont typeface="Arial" panose="020B0604020202020204" pitchFamily="34" charset="0"/>
-              <a:buChar char="•"/>
-              <a:defRPr sz="1800" kern="1200">
-                <a:solidFill>
-                  <a:schemeClr val="tx1"/>
-                </a:solidFill>
-                <a:latin typeface="+mn-lt"/>
-                <a:ea typeface="+mn-ea"/>
-                <a:cs typeface="+mn-cs"/>
-              </a:defRPr>
-            </a:lvl4pPr>
-            <a:lvl5pPr marL="2057400" indent="-228600" algn="l" defTabSz="914400" rtl="0" eaLnBrk="1" latinLnBrk="0" hangingPunct="1">
-              <a:lnSpc>
-                <a:spcPct val="90000"/>
-              </a:lnSpc>
-              <a:spcBef>
-                <a:spcPts val="500"/>
-              </a:spcBef>
-              <a:buFont typeface="Arial" panose="020B0604020202020204" pitchFamily="34" charset="0"/>
-              <a:buChar char="•"/>
-              <a:defRPr sz="1800" kern="1200">
-                <a:solidFill>
-                  <a:schemeClr val="tx1"/>
-                </a:solidFill>
-                <a:latin typeface="+mn-lt"/>
-                <a:ea typeface="+mn-ea"/>
-                <a:cs typeface="+mn-cs"/>
-              </a:defRPr>
-            </a:lvl5pPr>
-            <a:lvl6pPr marL="2514600" indent="-228600" algn="l" defTabSz="914400" rtl="0" eaLnBrk="1" latinLnBrk="0" hangingPunct="1">
-              <a:lnSpc>
-                <a:spcPct val="90000"/>
-              </a:lnSpc>
-              <a:spcBef>
-                <a:spcPts val="500"/>
-              </a:spcBef>
-              <a:buFont typeface="Arial" panose="020B0604020202020204" pitchFamily="34" charset="0"/>
-              <a:buChar char="•"/>
-              <a:defRPr sz="1800" kern="1200">
-                <a:solidFill>
-                  <a:schemeClr val="tx1"/>
-                </a:solidFill>
-                <a:latin typeface="+mn-lt"/>
-                <a:ea typeface="+mn-ea"/>
-                <a:cs typeface="+mn-cs"/>
-              </a:defRPr>
-            </a:lvl6pPr>
-            <a:lvl7pPr marL="2971800" indent="-228600" algn="l" defTabSz="914400" rtl="0" eaLnBrk="1" latinLnBrk="0" hangingPunct="1">
-              <a:lnSpc>
-                <a:spcPct val="90000"/>
-              </a:lnSpc>
-              <a:spcBef>
-                <a:spcPts val="500"/>
-              </a:spcBef>
-              <a:buFont typeface="Arial" panose="020B0604020202020204" pitchFamily="34" charset="0"/>
-              <a:buChar char="•"/>
-              <a:defRPr sz="1800" kern="1200">
-                <a:solidFill>
-                  <a:schemeClr val="tx1"/>
-                </a:solidFill>
-                <a:latin typeface="+mn-lt"/>
-                <a:ea typeface="+mn-ea"/>
-                <a:cs typeface="+mn-cs"/>
-              </a:defRPr>
-            </a:lvl7pPr>
-            <a:lvl8pPr marL="3429000" indent="-228600" algn="l" defTabSz="914400" rtl="0" eaLnBrk="1" latinLnBrk="0" hangingPunct="1">
-              <a:lnSpc>
-                <a:spcPct val="90000"/>
-              </a:lnSpc>
-              <a:spcBef>
-                <a:spcPts val="500"/>
-              </a:spcBef>
-              <a:buFont typeface="Arial" panose="020B0604020202020204" pitchFamily="34" charset="0"/>
-              <a:buChar char="•"/>
-              <a:defRPr sz="1800" kern="1200">
-                <a:solidFill>
-                  <a:schemeClr val="tx1"/>
-                </a:solidFill>
-                <a:latin typeface="+mn-lt"/>
-                <a:ea typeface="+mn-ea"/>
-                <a:cs typeface="+mn-cs"/>
-              </a:defRPr>
-            </a:lvl8pPr>
-            <a:lvl9pPr marL="3886200" indent="-228600" algn="l" defTabSz="914400" rtl="0" eaLnBrk="1" latinLnBrk="0" hangingPunct="1">
-              <a:lnSpc>
-                <a:spcPct val="90000"/>
-              </a:lnSpc>
-              <a:spcBef>
-                <a:spcPts val="500"/>
-              </a:spcBef>
-              <a:buFont typeface="Arial" panose="020B0604020202020204" pitchFamily="34" charset="0"/>
-              <a:buChar char="•"/>
-              <a:defRPr sz="1800" kern="1200">
-                <a:solidFill>
-                  <a:schemeClr val="tx1"/>
-                </a:solidFill>
-                <a:latin typeface="+mn-lt"/>
-                <a:ea typeface="+mn-ea"/>
-                <a:cs typeface="+mn-cs"/>
-              </a:defRPr>
-            </a:lvl9pPr>
-          </a:lstStyle>
-          <a:p>
-            <a:r>
-              <a:rPr lang="en-GB" sz="2500" err="1">
-                <a:ea typeface="+mn-lt"/>
-                <a:cs typeface="+mn-lt"/>
-              </a:rPr>
-              <a:t>ResNet</a:t>
-            </a:r>
-            <a:r>
-              <a:rPr lang="en-GB" sz="2500">
-                <a:ea typeface="+mn-lt"/>
-                <a:cs typeface="+mn-lt"/>
-              </a:rPr>
-              <a:t> patient-level holdout result: 70.7% </a:t>
-            </a:r>
-            <a:endParaRPr lang="ca-ES"/>
-          </a:p>
-          <a:p>
-            <a:endParaRPr lang="en-GB" sz="2500"/>
-          </a:p>
-        </p:txBody>
-      </p:sp>
-      <p:pic>
-        <p:nvPicPr>
-          <p:cNvPr id="8" name="Imatge 7" descr="Imatge que conté text, captura de pantalla, diagrama, Rectangle&#10;&#10;Pot ser que el contingut generat per IA no sigui correcte.">
-            <a:extLst>
-              <a:ext uri="{FF2B5EF4-FFF2-40B4-BE49-F238E27FC236}">
-                <a16:creationId xmlns:a16="http://schemas.microsoft.com/office/drawing/2014/main" id="{AC6BE805-72C8-F210-1E99-090E9AB13832}"/>
-              </a:ext>
-            </a:extLst>
-          </p:cNvPr>
-          <p:cNvPicPr>
-            <a:picLocks noChangeAspect="1"/>
-          </p:cNvPicPr>
-          <p:nvPr/>
-        </p:nvPicPr>
-        <p:blipFill>
-          <a:blip r:embed="rId3"/>
-          <a:stretch>
-            <a:fillRect/>
-          </a:stretch>
-        </p:blipFill>
-        <p:spPr>
-          <a:xfrm>
-            <a:off x="6121400" y="1701800"/>
-            <a:ext cx="5981700" cy="4495800"/>
-          </a:xfrm>
-          <a:prstGeom prst="rect">
-            <a:avLst/>
-          </a:prstGeom>
+              </a14:hiddenFill>
+            </a:ext>
+          </a:extLst>
         </p:spPr>
       </p:pic>
     </p:spTree>
     <p:extLst>
       <p:ext uri="{BB962C8B-B14F-4D97-AF65-F5344CB8AC3E}">
-        <p14:creationId xmlns:p14="http://schemas.microsoft.com/office/powerpoint/2010/main" val="3637275730"/>
-      </p:ext>
-    </p:extLst>
-  </p:cSld>
-  <p:clrMapOvr>
-    <a:masterClrMapping/>
-  </p:clrMapOvr>
-</p:sld>
-</file>
-
-<file path=ppt/slides/slide21.xml><?xml version="1.0" encoding="utf-8"?>
-<p:sld xmlns:a="http://schemas.openxmlformats.org/drawingml/2006/main" xmlns:r="http://schemas.openxmlformats.org/officeDocument/2006/relationships" xmlns:p="http://schemas.openxmlformats.org/presentationml/2006/main">
-  <p:cSld>
-    <p:bg>
-      <p:bgPr>
-        <a:solidFill>
-          <a:schemeClr val="accent4">
-            <a:lumMod val="20000"/>
-            <a:lumOff val="80000"/>
-          </a:schemeClr>
-        </a:solidFill>
-        <a:effectLst/>
-      </p:bgPr>
-    </p:bg>
-    <p:spTree>
-      <p:nvGrpSpPr>
-        <p:cNvPr id="1" name="">
-          <a:extLst>
-            <a:ext uri="{FF2B5EF4-FFF2-40B4-BE49-F238E27FC236}">
-              <a16:creationId xmlns:a16="http://schemas.microsoft.com/office/drawing/2014/main" id="{1EEC7DDB-A90C-057D-8A65-4687DF40338B}"/>
-            </a:ext>
-          </a:extLst>
-        </p:cNvPr>
-        <p:cNvGrpSpPr/>
-        <p:nvPr/>
-      </p:nvGrpSpPr>
-      <p:grpSpPr>
-        <a:xfrm>
-          <a:off x="0" y="0"/>
-          <a:ext cx="0" cy="0"/>
-          <a:chOff x="0" y="0"/>
-          <a:chExt cx="0" cy="0"/>
-        </a:xfrm>
-      </p:grpSpPr>
-      <p:sp>
-        <p:nvSpPr>
-          <p:cNvPr id="2" name="Title 1">
-            <a:extLst>
-              <a:ext uri="{FF2B5EF4-FFF2-40B4-BE49-F238E27FC236}">
-                <a16:creationId xmlns:a16="http://schemas.microsoft.com/office/drawing/2014/main" id="{D0490E2D-1669-C3B5-E75C-3900E43EDBFA}"/>
-              </a:ext>
-            </a:extLst>
-          </p:cNvPr>
-          <p:cNvSpPr>
-            <a:spLocks noGrp="1"/>
-          </p:cNvSpPr>
-          <p:nvPr>
-            <p:ph type="title"/>
-          </p:nvPr>
-        </p:nvSpPr>
-        <p:spPr>
-          <a:xfrm>
-            <a:off x="331152" y="0"/>
-            <a:ext cx="10515600" cy="1325563"/>
-          </a:xfrm>
-        </p:spPr>
-        <p:txBody>
-          <a:bodyPr/>
-          <a:lstStyle/>
-          <a:p>
-            <a:r>
-              <a:rPr lang="en-US"/>
-              <a:t>Patient Level – Clinical Feature Importance</a:t>
-            </a:r>
-          </a:p>
-        </p:txBody>
-      </p:sp>
-      <p:sp>
-        <p:nvSpPr>
-          <p:cNvPr id="4" name="Content Placeholder 2">
-            <a:extLst>
-              <a:ext uri="{FF2B5EF4-FFF2-40B4-BE49-F238E27FC236}">
-                <a16:creationId xmlns:a16="http://schemas.microsoft.com/office/drawing/2014/main" id="{68B657AA-1158-A732-0099-F9B454F31F98}"/>
-              </a:ext>
-            </a:extLst>
-          </p:cNvPr>
-          <p:cNvSpPr>
-            <a:spLocks noGrp="1"/>
-          </p:cNvSpPr>
-          <p:nvPr>
-            <p:ph idx="1"/>
-          </p:nvPr>
-        </p:nvSpPr>
-        <p:spPr>
-          <a:xfrm>
-            <a:off x="327933" y="1260514"/>
-            <a:ext cx="7547600" cy="3545695"/>
-          </a:xfrm>
-        </p:spPr>
-        <p:txBody>
-          <a:bodyPr vert="horz" lIns="91440" tIns="45720" rIns="91440" bIns="45720" rtlCol="0" anchor="t">
-            <a:normAutofit/>
-          </a:bodyPr>
-          <a:lstStyle/>
-          <a:p>
-            <a:r>
-              <a:rPr lang="en-GB" sz="2500">
-                <a:ea typeface="+mn-lt"/>
-                <a:cs typeface="+mn-lt"/>
-              </a:rPr>
-              <a:t>Max Probability of single patch is strongest indicator</a:t>
-            </a:r>
-          </a:p>
-          <a:p>
-            <a:endParaRPr lang="en-GB" sz="2500">
-              <a:solidFill>
-                <a:srgbClr val="000000"/>
-              </a:solidFill>
-            </a:endParaRPr>
-          </a:p>
-        </p:txBody>
-      </p:sp>
-      <p:pic>
-        <p:nvPicPr>
-          <p:cNvPr id="3" name="Imatge 2" descr="Imatge que conté text, captura de pantalla, Trama, diagrama&#10;&#10;Pot ser que el contingut generat per IA no sigui correcte.">
-            <a:extLst>
-              <a:ext uri="{FF2B5EF4-FFF2-40B4-BE49-F238E27FC236}">
-                <a16:creationId xmlns:a16="http://schemas.microsoft.com/office/drawing/2014/main" id="{104571BF-5BAB-F6B4-FADC-868216A94D46}"/>
-              </a:ext>
-            </a:extLst>
-          </p:cNvPr>
-          <p:cNvPicPr>
-            <a:picLocks noChangeAspect="1"/>
-          </p:cNvPicPr>
-          <p:nvPr/>
-        </p:nvPicPr>
-        <p:blipFill>
-          <a:blip r:embed="rId2"/>
-          <a:stretch>
-            <a:fillRect/>
-          </a:stretch>
-        </p:blipFill>
-        <p:spPr>
-          <a:xfrm>
-            <a:off x="1826012" y="1714501"/>
-            <a:ext cx="8344830" cy="5018048"/>
-          </a:xfrm>
-          <a:prstGeom prst="rect">
-            <a:avLst/>
-          </a:prstGeom>
-        </p:spPr>
-      </p:pic>
-    </p:spTree>
-    <p:extLst>
-      <p:ext uri="{BB962C8B-B14F-4D97-AF65-F5344CB8AC3E}">
-        <p14:creationId xmlns:p14="http://schemas.microsoft.com/office/powerpoint/2010/main" val="380703218"/>
-      </p:ext>
-    </p:extLst>
-  </p:cSld>
-  <p:clrMapOvr>
-    <a:masterClrMapping/>
-  </p:clrMapOvr>
-</p:sld>
-</file>
-
-<file path=ppt/slides/slide22.xml><?xml version="1.0" encoding="utf-8"?>
-<p:sld xmlns:a="http://schemas.openxmlformats.org/drawingml/2006/main" xmlns:r="http://schemas.openxmlformats.org/officeDocument/2006/relationships" xmlns:p="http://schemas.openxmlformats.org/presentationml/2006/main">
-  <p:cSld>
-    <p:bg>
-      <p:bgPr>
-        <a:solidFill>
-          <a:schemeClr val="accent4">
-            <a:lumMod val="20000"/>
-            <a:lumOff val="80000"/>
-          </a:schemeClr>
-        </a:solidFill>
-        <a:effectLst/>
-      </p:bgPr>
-    </p:bg>
-    <p:spTree>
-      <p:nvGrpSpPr>
-        <p:cNvPr id="1" name=""/>
-        <p:cNvGrpSpPr/>
-        <p:nvPr/>
-      </p:nvGrpSpPr>
-      <p:grpSpPr>
-        <a:xfrm>
-          <a:off x="0" y="0"/>
-          <a:ext cx="0" cy="0"/>
-          <a:chOff x="0" y="0"/>
-          <a:chExt cx="0" cy="0"/>
-        </a:xfrm>
-      </p:grpSpPr>
-      <p:sp useBgFill="1">
-        <p:nvSpPr>
-          <p:cNvPr id="13" name="Rectangle 12">
-            <a:extLst>
-              <a:ext uri="{FF2B5EF4-FFF2-40B4-BE49-F238E27FC236}">
-                <a16:creationId xmlns:a16="http://schemas.microsoft.com/office/drawing/2014/main" id="{743AA782-23D1-4521-8CAD-47662984AA08}"/>
-              </a:ext>
-              <a:ext uri="{C183D7F6-B498-43B3-948B-1728B52AA6E4}">
-                <adec:decorative xmlns:adec="http://schemas.microsoft.com/office/drawing/2017/decorative" val="1"/>
-              </a:ext>
-            </a:extLst>
-          </p:cNvPr>
-          <p:cNvSpPr>
-            <a:spLocks noGrp="1" noRot="1" noChangeAspect="1" noMove="1" noResize="1" noEditPoints="1" noAdjustHandles="1" noChangeArrowheads="1" noChangeShapeType="1" noTextEdit="1"/>
-          </p:cNvSpPr>
-          <p:nvPr>
-            <p:extLst>
-              <p:ext uri="{386F3935-93C4-4BCD-93E2-E3B085C9AB24}">
-                <p16:designElem xmlns:p16="http://schemas.microsoft.com/office/powerpoint/2015/main" val="1"/>
-              </p:ext>
-            </p:extLst>
-          </p:nvPr>
-        </p:nvSpPr>
-        <p:spPr>
-          <a:xfrm>
-            <a:off x="0" y="0"/>
-            <a:ext cx="12192000" cy="6858000"/>
-          </a:xfrm>
-          <a:prstGeom prst="rect">
-            <a:avLst/>
-          </a:prstGeom>
-          <a:ln>
-            <a:noFill/>
-          </a:ln>
-        </p:spPr>
-        <p:style>
-          <a:lnRef idx="2">
-            <a:schemeClr val="accent1">
-              <a:shade val="50000"/>
-            </a:schemeClr>
-          </a:lnRef>
-          <a:fillRef idx="1">
-            <a:schemeClr val="accent1"/>
-          </a:fillRef>
-          <a:effectRef idx="0">
-            <a:schemeClr val="accent1"/>
-          </a:effectRef>
-          <a:fontRef idx="minor">
-            <a:schemeClr val="lt1"/>
-          </a:fontRef>
-        </p:style>
-        <p:txBody>
-          <a:bodyPr rtlCol="0" anchor="ctr"/>
-          <a:lstStyle/>
-          <a:p>
-            <a:pPr algn="ctr"/>
-            <a:endParaRPr lang="en-US"/>
-          </a:p>
-        </p:txBody>
-      </p:sp>
-      <p:sp>
-        <p:nvSpPr>
-          <p:cNvPr id="2" name="Title 1">
-            <a:extLst>
-              <a:ext uri="{FF2B5EF4-FFF2-40B4-BE49-F238E27FC236}">
-                <a16:creationId xmlns:a16="http://schemas.microsoft.com/office/drawing/2014/main" id="{F103D429-0790-28FF-4D0E-FCFD54134165}"/>
-              </a:ext>
-            </a:extLst>
-          </p:cNvPr>
-          <p:cNvSpPr>
-            <a:spLocks noGrp="1"/>
-          </p:cNvSpPr>
-          <p:nvPr>
-            <p:ph type="title"/>
-          </p:nvPr>
-        </p:nvSpPr>
-        <p:spPr>
-          <a:xfrm>
-            <a:off x="630936" y="640080"/>
-            <a:ext cx="6791840" cy="1481328"/>
-          </a:xfrm>
-        </p:spPr>
-        <p:txBody>
-          <a:bodyPr anchor="b">
-            <a:normAutofit fontScale="90000"/>
-          </a:bodyPr>
-          <a:lstStyle/>
-          <a:p>
-            <a:r>
-              <a:rPr lang="en-GB" sz="5400"/>
-              <a:t>Conclusion and Next Steps</a:t>
-            </a:r>
-          </a:p>
-        </p:txBody>
-      </p:sp>
-      <p:sp>
-        <p:nvSpPr>
-          <p:cNvPr id="14" name="sketch line">
-            <a:extLst>
-              <a:ext uri="{FF2B5EF4-FFF2-40B4-BE49-F238E27FC236}">
-                <a16:creationId xmlns:a16="http://schemas.microsoft.com/office/drawing/2014/main" id="{71877DBC-BB60-40F0-AC93-2ACDBAAE60CE}"/>
-              </a:ext>
-              <a:ext uri="{C183D7F6-B498-43B3-948B-1728B52AA6E4}">
-                <adec:decorative xmlns:adec="http://schemas.microsoft.com/office/drawing/2017/decorative" val="1"/>
-              </a:ext>
-            </a:extLst>
-          </p:cNvPr>
-          <p:cNvSpPr>
-            <a:spLocks noGrp="1" noRot="1" noChangeAspect="1" noMove="1" noResize="1" noEditPoints="1" noAdjustHandles="1" noChangeArrowheads="1" noChangeShapeType="1" noTextEdit="1"/>
-          </p:cNvSpPr>
-          <p:nvPr>
-            <p:extLst>
-              <p:ext uri="{386F3935-93C4-4BCD-93E2-E3B085C9AB24}">
-                <p16:designElem xmlns:p16="http://schemas.microsoft.com/office/powerpoint/2015/main" val="1"/>
-              </p:ext>
-            </p:extLst>
-          </p:nvPr>
-        </p:nvSpPr>
-        <p:spPr>
-          <a:xfrm>
-            <a:off x="643278" y="2372868"/>
-            <a:ext cx="3255095" cy="18288"/>
-          </a:xfrm>
-          <a:custGeom>
-            <a:avLst/>
-            <a:gdLst>
-              <a:gd name="csX0" fmla="*/ 0 w 3255095"/>
-              <a:gd name="csY0" fmla="*/ 0 h 18288"/>
-              <a:gd name="csX1" fmla="*/ 618468 w 3255095"/>
-              <a:gd name="csY1" fmla="*/ 0 h 18288"/>
-              <a:gd name="csX2" fmla="*/ 1269487 w 3255095"/>
-              <a:gd name="csY2" fmla="*/ 0 h 18288"/>
-              <a:gd name="csX3" fmla="*/ 1953057 w 3255095"/>
-              <a:gd name="csY3" fmla="*/ 0 h 18288"/>
-              <a:gd name="csX4" fmla="*/ 2636627 w 3255095"/>
-              <a:gd name="csY4" fmla="*/ 0 h 18288"/>
-              <a:gd name="csX5" fmla="*/ 3255095 w 3255095"/>
-              <a:gd name="csY5" fmla="*/ 0 h 18288"/>
-              <a:gd name="csX6" fmla="*/ 3255095 w 3255095"/>
-              <a:gd name="csY6" fmla="*/ 18288 h 18288"/>
-              <a:gd name="csX7" fmla="*/ 2538974 w 3255095"/>
-              <a:gd name="csY7" fmla="*/ 18288 h 18288"/>
-              <a:gd name="csX8" fmla="*/ 1822853 w 3255095"/>
-              <a:gd name="csY8" fmla="*/ 18288 h 18288"/>
-              <a:gd name="csX9" fmla="*/ 1171834 w 3255095"/>
-              <a:gd name="csY9" fmla="*/ 18288 h 18288"/>
-              <a:gd name="csX10" fmla="*/ 0 w 3255095"/>
-              <a:gd name="csY10" fmla="*/ 18288 h 18288"/>
-              <a:gd name="csX11" fmla="*/ 0 w 3255095"/>
-              <a:gd name="csY11" fmla="*/ 0 h 18288"/>
-            </a:gdLst>
-            <a:ahLst/>
-            <a:cxnLst>
-              <a:cxn ang="0">
-                <a:pos x="csX0" y="csY0"/>
-              </a:cxn>
-              <a:cxn ang="0">
-                <a:pos x="csX1" y="csY1"/>
-              </a:cxn>
-              <a:cxn ang="0">
-                <a:pos x="csX2" y="csY2"/>
-              </a:cxn>
-              <a:cxn ang="0">
-                <a:pos x="csX3" y="csY3"/>
-              </a:cxn>
-              <a:cxn ang="0">
-                <a:pos x="csX4" y="csY4"/>
-              </a:cxn>
-              <a:cxn ang="0">
-                <a:pos x="csX5" y="csY5"/>
-              </a:cxn>
-              <a:cxn ang="0">
-                <a:pos x="csX6" y="csY6"/>
-              </a:cxn>
-              <a:cxn ang="0">
-                <a:pos x="csX7" y="csY7"/>
-              </a:cxn>
-              <a:cxn ang="0">
-                <a:pos x="csX8" y="csY8"/>
-              </a:cxn>
-              <a:cxn ang="0">
-                <a:pos x="csX9" y="csY9"/>
-              </a:cxn>
-              <a:cxn ang="0">
-                <a:pos x="csX10" y="csY10"/>
-              </a:cxn>
-              <a:cxn ang="0">
-                <a:pos x="csX11" y="csY11"/>
-              </a:cxn>
-            </a:cxnLst>
-            <a:rect l="l" t="t" r="r" b="b"/>
-            <a:pathLst>
-              <a:path w="3255095" h="18288" fill="none" extrusionOk="0">
-                <a:moveTo>
-                  <a:pt x="0" y="0"/>
-                </a:moveTo>
-                <a:cubicBezTo>
-                  <a:pt x="240201" y="-22123"/>
-                  <a:pt x="462021" y="-19623"/>
-                  <a:pt x="618468" y="0"/>
-                </a:cubicBezTo>
-                <a:cubicBezTo>
-                  <a:pt x="774915" y="19623"/>
-                  <a:pt x="974734" y="2035"/>
-                  <a:pt x="1269487" y="0"/>
-                </a:cubicBezTo>
-                <a:cubicBezTo>
-                  <a:pt x="1564240" y="-2035"/>
-                  <a:pt x="1733579" y="10639"/>
-                  <a:pt x="1953057" y="0"/>
-                </a:cubicBezTo>
-                <a:cubicBezTo>
-                  <a:pt x="2172535" y="-10639"/>
-                  <a:pt x="2453962" y="14018"/>
-                  <a:pt x="2636627" y="0"/>
-                </a:cubicBezTo>
-                <a:cubicBezTo>
-                  <a:pt x="2819292" y="-14018"/>
-                  <a:pt x="3121375" y="5399"/>
-                  <a:pt x="3255095" y="0"/>
-                </a:cubicBezTo>
-                <a:cubicBezTo>
-                  <a:pt x="3254386" y="8157"/>
-                  <a:pt x="3254682" y="12125"/>
-                  <a:pt x="3255095" y="18288"/>
-                </a:cubicBezTo>
-                <a:cubicBezTo>
-                  <a:pt x="3088545" y="23203"/>
-                  <a:pt x="2687475" y="7419"/>
-                  <a:pt x="2538974" y="18288"/>
-                </a:cubicBezTo>
-                <a:cubicBezTo>
-                  <a:pt x="2390473" y="29157"/>
-                  <a:pt x="2137381" y="-8959"/>
-                  <a:pt x="1822853" y="18288"/>
-                </a:cubicBezTo>
-                <a:cubicBezTo>
-                  <a:pt x="1508325" y="45535"/>
-                  <a:pt x="1466437" y="20385"/>
-                  <a:pt x="1171834" y="18288"/>
-                </a:cubicBezTo>
-                <a:cubicBezTo>
-                  <a:pt x="877231" y="16191"/>
-                  <a:pt x="561097" y="37643"/>
-                  <a:pt x="0" y="18288"/>
-                </a:cubicBezTo>
-                <a:cubicBezTo>
-                  <a:pt x="-46" y="12483"/>
-                  <a:pt x="-203" y="6491"/>
-                  <a:pt x="0" y="0"/>
-                </a:cubicBezTo>
-                <a:close/>
-              </a:path>
-              <a:path w="3255095" h="18288" stroke="0" extrusionOk="0">
-                <a:moveTo>
-                  <a:pt x="0" y="0"/>
-                </a:moveTo>
-                <a:cubicBezTo>
-                  <a:pt x="291965" y="19429"/>
-                  <a:pt x="363155" y="8568"/>
-                  <a:pt x="618468" y="0"/>
-                </a:cubicBezTo>
-                <a:cubicBezTo>
-                  <a:pt x="873781" y="-8568"/>
-                  <a:pt x="904459" y="-19505"/>
-                  <a:pt x="1171834" y="0"/>
-                </a:cubicBezTo>
-                <a:cubicBezTo>
-                  <a:pt x="1439209" y="19505"/>
-                  <a:pt x="1744369" y="9790"/>
-                  <a:pt x="1887955" y="0"/>
-                </a:cubicBezTo>
-                <a:cubicBezTo>
-                  <a:pt x="2031541" y="-9790"/>
-                  <a:pt x="2346378" y="21240"/>
-                  <a:pt x="2506423" y="0"/>
-                </a:cubicBezTo>
-                <a:cubicBezTo>
-                  <a:pt x="2666468" y="-21240"/>
-                  <a:pt x="2990257" y="30414"/>
-                  <a:pt x="3255095" y="0"/>
-                </a:cubicBezTo>
-                <a:cubicBezTo>
-                  <a:pt x="3254831" y="4493"/>
-                  <a:pt x="3255479" y="9472"/>
-                  <a:pt x="3255095" y="18288"/>
-                </a:cubicBezTo>
-                <a:cubicBezTo>
-                  <a:pt x="3120743" y="16690"/>
-                  <a:pt x="2759628" y="42462"/>
-                  <a:pt x="2604076" y="18288"/>
-                </a:cubicBezTo>
-                <a:cubicBezTo>
-                  <a:pt x="2448524" y="-5886"/>
-                  <a:pt x="2184336" y="19599"/>
-                  <a:pt x="1887955" y="18288"/>
-                </a:cubicBezTo>
-                <a:cubicBezTo>
-                  <a:pt x="1591574" y="16977"/>
-                  <a:pt x="1548845" y="6870"/>
-                  <a:pt x="1334589" y="18288"/>
-                </a:cubicBezTo>
-                <a:cubicBezTo>
-                  <a:pt x="1120333" y="29706"/>
-                  <a:pt x="996014" y="9662"/>
-                  <a:pt x="683570" y="18288"/>
-                </a:cubicBezTo>
-                <a:cubicBezTo>
-                  <a:pt x="371126" y="26914"/>
-                  <a:pt x="198687" y="16167"/>
-                  <a:pt x="0" y="18288"/>
-                </a:cubicBezTo>
-                <a:cubicBezTo>
-                  <a:pt x="843" y="9577"/>
-                  <a:pt x="371" y="6900"/>
-                  <a:pt x="0" y="0"/>
-                </a:cubicBezTo>
-                <a:close/>
-              </a:path>
-            </a:pathLst>
-          </a:custGeom>
-          <a:solidFill>
-            <a:schemeClr val="accent2"/>
-          </a:solidFill>
-          <a:ln w="38100" cap="rnd">
-            <a:solidFill>
-              <a:schemeClr val="accent2"/>
-            </a:solidFill>
-            <a:round/>
-            <a:extLst>
-              <a:ext uri="{C807C97D-BFC1-408E-A445-0C87EB9F89A2}">
-                <ask:lineSketchStyleProps xmlns:ask="http://schemas.microsoft.com/office/drawing/2018/sketchyshapes" sd="1219033472">
-                  <a:prstGeom prst="rect">
-                    <a:avLst/>
-                  </a:prstGeom>
-                  <ask:type>
-                    <ask:lineSketchFreehand/>
-                  </ask:type>
-                </ask:lineSketchStyleProps>
-              </a:ext>
-            </a:extLst>
-          </a:ln>
-        </p:spPr>
-        <p:style>
-          <a:lnRef idx="2">
-            <a:schemeClr val="accent1">
-              <a:shade val="50000"/>
-            </a:schemeClr>
-          </a:lnRef>
-          <a:fillRef idx="1">
-            <a:schemeClr val="accent1"/>
-          </a:fillRef>
-          <a:effectRef idx="0">
-            <a:schemeClr val="accent1"/>
-          </a:effectRef>
-          <a:fontRef idx="minor">
-            <a:schemeClr val="lt1"/>
-          </a:fontRef>
-        </p:style>
-        <p:txBody>
-          <a:bodyPr rtlCol="0" anchor="ctr"/>
-          <a:lstStyle/>
-          <a:p>
-            <a:pPr algn="ctr"/>
-            <a:endParaRPr lang="en-US"/>
-          </a:p>
-        </p:txBody>
-      </p:sp>
-      <p:sp>
-        <p:nvSpPr>
-          <p:cNvPr id="3" name="Content Placeholder 2">
-            <a:extLst>
-              <a:ext uri="{FF2B5EF4-FFF2-40B4-BE49-F238E27FC236}">
-                <a16:creationId xmlns:a16="http://schemas.microsoft.com/office/drawing/2014/main" id="{70762040-9254-2FCA-5342-F274ECBFDDC1}"/>
-              </a:ext>
-            </a:extLst>
-          </p:cNvPr>
-          <p:cNvSpPr>
-            <a:spLocks noGrp="1"/>
-          </p:cNvSpPr>
-          <p:nvPr>
-            <p:ph idx="1"/>
-          </p:nvPr>
-        </p:nvSpPr>
-        <p:spPr>
-          <a:xfrm>
-            <a:off x="630935" y="2660904"/>
-            <a:ext cx="11156511" cy="3547872"/>
-          </a:xfrm>
-        </p:spPr>
-        <p:txBody>
-          <a:bodyPr vert="horz" lIns="91440" tIns="45720" rIns="91440" bIns="45720" rtlCol="0" anchor="t">
-            <a:noAutofit/>
-          </a:bodyPr>
-          <a:lstStyle/>
-          <a:p>
-            <a:r>
-              <a:rPr lang="en-GB" sz="2500" b="1" err="1">
-                <a:ea typeface="+mn-lt"/>
-                <a:cs typeface="+mn-lt"/>
-              </a:rPr>
-              <a:t>ResNet</a:t>
-            </a:r>
-            <a:endParaRPr lang="en-GB" sz="2500">
-              <a:ea typeface="+mn-lt"/>
-              <a:cs typeface="+mn-lt"/>
-            </a:endParaRPr>
-          </a:p>
-          <a:p>
-            <a:pPr lvl="1"/>
-            <a:r>
-              <a:rPr lang="en-GB" sz="2500">
-                <a:ea typeface="+mn-lt"/>
-                <a:cs typeface="+mn-lt"/>
-              </a:rPr>
-              <a:t>Binary outcome the accuracy was poor</a:t>
-            </a:r>
-          </a:p>
-          <a:p>
-            <a:pPr lvl="1"/>
-            <a:r>
-              <a:rPr lang="en-GB" sz="2500">
-                <a:ea typeface="+mn-lt"/>
-                <a:cs typeface="+mn-lt"/>
-              </a:rPr>
-              <a:t>This model served as baseline comparison</a:t>
-            </a:r>
-          </a:p>
-          <a:p>
-            <a:pPr lvl="1"/>
-            <a:r>
-              <a:rPr lang="en-GB" sz="2500">
-                <a:ea typeface="+mn-lt"/>
-                <a:cs typeface="+mn-lt"/>
-              </a:rPr>
-              <a:t>Try again without </a:t>
-            </a:r>
-            <a:r>
-              <a:rPr lang="en-GB" sz="2500" err="1">
-                <a:ea typeface="+mn-lt"/>
-                <a:cs typeface="+mn-lt"/>
-              </a:rPr>
-              <a:t>Macenko</a:t>
-            </a:r>
-            <a:r>
-              <a:rPr lang="en-GB" sz="2500">
-                <a:ea typeface="+mn-lt"/>
-                <a:cs typeface="+mn-lt"/>
-              </a:rPr>
-              <a:t> to measure improvement, if any</a:t>
-            </a:r>
-          </a:p>
-          <a:p>
-            <a:r>
-              <a:rPr lang="en-GB" sz="2500" b="1" err="1">
-                <a:ea typeface="+mn-lt"/>
-                <a:cs typeface="+mn-lt"/>
-              </a:rPr>
-              <a:t>ConvNeXT</a:t>
-            </a:r>
-            <a:r>
-              <a:rPr lang="en-GB" sz="2500" b="1">
-                <a:ea typeface="+mn-lt"/>
-                <a:cs typeface="+mn-lt"/>
-              </a:rPr>
-              <a:t> </a:t>
-            </a:r>
-          </a:p>
-          <a:p>
-            <a:pPr lvl="1"/>
-            <a:r>
-              <a:rPr lang="es-ES" sz="2100" err="1">
-                <a:ea typeface="+mn-lt"/>
-                <a:cs typeface="+mn-lt"/>
-              </a:rPr>
-              <a:t>Move</a:t>
-            </a:r>
-            <a:r>
-              <a:rPr lang="es-ES" sz="2100">
-                <a:ea typeface="+mn-lt"/>
-                <a:cs typeface="+mn-lt"/>
-              </a:rPr>
-              <a:t> </a:t>
-            </a:r>
-            <a:r>
-              <a:rPr lang="es-ES" sz="2100" err="1">
-                <a:ea typeface="+mn-lt"/>
-                <a:cs typeface="+mn-lt"/>
-              </a:rPr>
-              <a:t>to</a:t>
-            </a:r>
-            <a:r>
-              <a:rPr lang="es-ES" sz="2100">
-                <a:ea typeface="+mn-lt"/>
-                <a:cs typeface="+mn-lt"/>
-              </a:rPr>
-              <a:t> bag-</a:t>
-            </a:r>
-            <a:r>
-              <a:rPr lang="es-ES" sz="2100" err="1">
-                <a:ea typeface="+mn-lt"/>
-                <a:cs typeface="+mn-lt"/>
-              </a:rPr>
-              <a:t>level</a:t>
-            </a:r>
-            <a:r>
-              <a:rPr lang="es-ES" sz="2100">
-                <a:ea typeface="+mn-lt"/>
-                <a:cs typeface="+mn-lt"/>
-              </a:rPr>
-              <a:t> </a:t>
-            </a:r>
-            <a:r>
-              <a:rPr lang="es-ES" sz="2100" err="1">
-                <a:ea typeface="+mn-lt"/>
-                <a:cs typeface="+mn-lt"/>
-              </a:rPr>
-              <a:t>learning</a:t>
-            </a:r>
-          </a:p>
-          <a:p>
-            <a:pPr lvl="1"/>
-            <a:r>
-              <a:rPr lang="en-US" sz="2100">
-                <a:ea typeface="+mn-lt"/>
-                <a:cs typeface="+mn-lt"/>
-              </a:rPr>
-              <a:t>Try new image transformations and pre-processing methods</a:t>
-            </a:r>
-          </a:p>
-          <a:p>
-            <a:pPr lvl="1"/>
-            <a:r>
-              <a:rPr lang="en-US" sz="2100">
-                <a:ea typeface="+mn-lt"/>
-                <a:cs typeface="+mn-lt"/>
-              </a:rPr>
-              <a:t>Test on new datasets to evaluate generalizability</a:t>
-            </a:r>
-            <a:endParaRPr lang="en-GB" sz="2100" b="1">
-              <a:ea typeface="+mn-lt"/>
-              <a:cs typeface="+mn-lt"/>
-            </a:endParaRPr>
-          </a:p>
-          <a:p>
-            <a:pPr marL="0" indent="0">
-              <a:buNone/>
-            </a:pPr>
-            <a:endParaRPr lang="en-GB" sz="2500" b="1">
-              <a:ea typeface="+mn-lt"/>
-              <a:cs typeface="+mn-lt"/>
-            </a:endParaRPr>
-          </a:p>
-          <a:p>
-            <a:pPr marL="0" indent="0">
-              <a:buNone/>
-            </a:pPr>
-            <a:endParaRPr lang="en-GB" sz="2500"/>
-          </a:p>
-        </p:txBody>
-      </p:sp>
-    </p:spTree>
-    <p:extLst>
-      <p:ext uri="{BB962C8B-B14F-4D97-AF65-F5344CB8AC3E}">
-        <p14:creationId xmlns:p14="http://schemas.microsoft.com/office/powerpoint/2010/main" val="2736603610"/>
-      </p:ext>
-    </p:extLst>
-  </p:cSld>
-  <p:clrMapOvr>
-    <a:masterClrMapping/>
-  </p:clrMapOvr>
-</p:sld>
-</file>
-
-<file path=ppt/slides/slide3.xml><?xml version="1.0" encoding="utf-8"?>
-<p:sld xmlns:a="http://schemas.openxmlformats.org/drawingml/2006/main" xmlns:r="http://schemas.openxmlformats.org/officeDocument/2006/relationships" xmlns:p="http://schemas.openxmlformats.org/presentationml/2006/main">
-  <p:cSld>
-    <p:bg>
-      <p:bgPr>
-        <a:solidFill>
-          <a:schemeClr val="accent5">
-            <a:lumMod val="20000"/>
-            <a:lumOff val="80000"/>
-          </a:schemeClr>
-        </a:solidFill>
-        <a:effectLst/>
-      </p:bgPr>
-    </p:bg>
-    <p:spTree>
-      <p:nvGrpSpPr>
-        <p:cNvPr id="1" name=""/>
-        <p:cNvGrpSpPr/>
-        <p:nvPr/>
-      </p:nvGrpSpPr>
-      <p:grpSpPr>
-        <a:xfrm>
-          <a:off x="0" y="0"/>
-          <a:ext cx="0" cy="0"/>
-          <a:chOff x="0" y="0"/>
-          <a:chExt cx="0" cy="0"/>
-        </a:xfrm>
-      </p:grpSpPr>
-      <p:sp useBgFill="1">
-        <p:nvSpPr>
-          <p:cNvPr id="25" name="Rectangle 24">
-            <a:extLst>
-              <a:ext uri="{FF2B5EF4-FFF2-40B4-BE49-F238E27FC236}">
-                <a16:creationId xmlns:a16="http://schemas.microsoft.com/office/drawing/2014/main" id="{743AA782-23D1-4521-8CAD-47662984AA08}"/>
-              </a:ext>
-              <a:ext uri="{C183D7F6-B498-43B3-948B-1728B52AA6E4}">
-                <adec:decorative xmlns:adec="http://schemas.microsoft.com/office/drawing/2017/decorative" val="1"/>
-              </a:ext>
-            </a:extLst>
-          </p:cNvPr>
-          <p:cNvSpPr>
-            <a:spLocks noGrp="1" noRot="1" noChangeAspect="1" noMove="1" noResize="1" noEditPoints="1" noAdjustHandles="1" noChangeArrowheads="1" noChangeShapeType="1" noTextEdit="1"/>
-          </p:cNvSpPr>
-          <p:nvPr>
-            <p:extLst>
-              <p:ext uri="{386F3935-93C4-4BCD-93E2-E3B085C9AB24}">
-                <p16:designElem xmlns:p16="http://schemas.microsoft.com/office/powerpoint/2015/main" val="1"/>
-              </p:ext>
-            </p:extLst>
-          </p:nvPr>
-        </p:nvSpPr>
-        <p:spPr>
-          <a:xfrm>
-            <a:off x="0" y="0"/>
-            <a:ext cx="12192000" cy="6858000"/>
-          </a:xfrm>
-          <a:prstGeom prst="rect">
-            <a:avLst/>
-          </a:prstGeom>
-          <a:ln>
-            <a:noFill/>
-          </a:ln>
-        </p:spPr>
-        <p:style>
-          <a:lnRef idx="2">
-            <a:schemeClr val="accent1">
-              <a:shade val="50000"/>
-            </a:schemeClr>
-          </a:lnRef>
-          <a:fillRef idx="1">
-            <a:schemeClr val="accent1"/>
-          </a:fillRef>
-          <a:effectRef idx="0">
-            <a:schemeClr val="accent1"/>
-          </a:effectRef>
-          <a:fontRef idx="minor">
-            <a:schemeClr val="lt1"/>
-          </a:fontRef>
-        </p:style>
-        <p:txBody>
-          <a:bodyPr rtlCol="0" anchor="ctr"/>
-          <a:lstStyle/>
-          <a:p>
-            <a:pPr algn="ctr"/>
-            <a:endParaRPr lang="en-US"/>
-          </a:p>
-        </p:txBody>
-      </p:sp>
-      <p:sp>
-        <p:nvSpPr>
-          <p:cNvPr id="2" name="Title 1">
-            <a:extLst>
-              <a:ext uri="{FF2B5EF4-FFF2-40B4-BE49-F238E27FC236}">
-                <a16:creationId xmlns:a16="http://schemas.microsoft.com/office/drawing/2014/main" id="{8097BA5C-3B48-9779-B1C5-F89941FD786B}"/>
-              </a:ext>
-            </a:extLst>
-          </p:cNvPr>
-          <p:cNvSpPr>
-            <a:spLocks noGrp="1"/>
-          </p:cNvSpPr>
-          <p:nvPr>
-            <p:ph type="title"/>
-          </p:nvPr>
-        </p:nvSpPr>
-        <p:spPr>
-          <a:xfrm>
-            <a:off x="630936" y="640080"/>
-            <a:ext cx="4818888" cy="1481328"/>
-          </a:xfrm>
-        </p:spPr>
-        <p:txBody>
-          <a:bodyPr anchor="b">
-            <a:normAutofit/>
-          </a:bodyPr>
-          <a:lstStyle/>
-          <a:p>
-            <a:r>
-              <a:rPr lang="en-GB" sz="5400"/>
-              <a:t>Dataset</a:t>
-            </a:r>
-          </a:p>
-        </p:txBody>
-      </p:sp>
-      <p:sp>
-        <p:nvSpPr>
-          <p:cNvPr id="27" name="sketch line">
-            <a:extLst>
-              <a:ext uri="{FF2B5EF4-FFF2-40B4-BE49-F238E27FC236}">
-                <a16:creationId xmlns:a16="http://schemas.microsoft.com/office/drawing/2014/main" id="{71877DBC-BB60-40F0-AC93-2ACDBAAE60CE}"/>
-              </a:ext>
-              <a:ext uri="{C183D7F6-B498-43B3-948B-1728B52AA6E4}">
-                <adec:decorative xmlns:adec="http://schemas.microsoft.com/office/drawing/2017/decorative" val="1"/>
-              </a:ext>
-            </a:extLst>
-          </p:cNvPr>
-          <p:cNvSpPr>
-            <a:spLocks noGrp="1" noRot="1" noChangeAspect="1" noMove="1" noResize="1" noEditPoints="1" noAdjustHandles="1" noChangeArrowheads="1" noChangeShapeType="1" noTextEdit="1"/>
-          </p:cNvSpPr>
-          <p:nvPr>
-            <p:extLst>
-              <p:ext uri="{386F3935-93C4-4BCD-93E2-E3B085C9AB24}">
-                <p16:designElem xmlns:p16="http://schemas.microsoft.com/office/powerpoint/2015/main" val="1"/>
-              </p:ext>
-            </p:extLst>
-          </p:nvPr>
-        </p:nvSpPr>
-        <p:spPr>
-          <a:xfrm>
-            <a:off x="643278" y="2372868"/>
-            <a:ext cx="3255095" cy="18288"/>
-          </a:xfrm>
-          <a:custGeom>
-            <a:avLst/>
-            <a:gdLst>
-              <a:gd name="csX0" fmla="*/ 0 w 3255095"/>
-              <a:gd name="csY0" fmla="*/ 0 h 18288"/>
-              <a:gd name="csX1" fmla="*/ 618468 w 3255095"/>
-              <a:gd name="csY1" fmla="*/ 0 h 18288"/>
-              <a:gd name="csX2" fmla="*/ 1269487 w 3255095"/>
-              <a:gd name="csY2" fmla="*/ 0 h 18288"/>
-              <a:gd name="csX3" fmla="*/ 1953057 w 3255095"/>
-              <a:gd name="csY3" fmla="*/ 0 h 18288"/>
-              <a:gd name="csX4" fmla="*/ 2636627 w 3255095"/>
-              <a:gd name="csY4" fmla="*/ 0 h 18288"/>
-              <a:gd name="csX5" fmla="*/ 3255095 w 3255095"/>
-              <a:gd name="csY5" fmla="*/ 0 h 18288"/>
-              <a:gd name="csX6" fmla="*/ 3255095 w 3255095"/>
-              <a:gd name="csY6" fmla="*/ 18288 h 18288"/>
-              <a:gd name="csX7" fmla="*/ 2538974 w 3255095"/>
-              <a:gd name="csY7" fmla="*/ 18288 h 18288"/>
-              <a:gd name="csX8" fmla="*/ 1822853 w 3255095"/>
-              <a:gd name="csY8" fmla="*/ 18288 h 18288"/>
-              <a:gd name="csX9" fmla="*/ 1171834 w 3255095"/>
-              <a:gd name="csY9" fmla="*/ 18288 h 18288"/>
-              <a:gd name="csX10" fmla="*/ 0 w 3255095"/>
-              <a:gd name="csY10" fmla="*/ 18288 h 18288"/>
-              <a:gd name="csX11" fmla="*/ 0 w 3255095"/>
-              <a:gd name="csY11" fmla="*/ 0 h 18288"/>
-            </a:gdLst>
-            <a:ahLst/>
-            <a:cxnLst>
-              <a:cxn ang="0">
-                <a:pos x="csX0" y="csY0"/>
-              </a:cxn>
-              <a:cxn ang="0">
-                <a:pos x="csX1" y="csY1"/>
-              </a:cxn>
-              <a:cxn ang="0">
-                <a:pos x="csX2" y="csY2"/>
-              </a:cxn>
-              <a:cxn ang="0">
-                <a:pos x="csX3" y="csY3"/>
-              </a:cxn>
-              <a:cxn ang="0">
-                <a:pos x="csX4" y="csY4"/>
-              </a:cxn>
-              <a:cxn ang="0">
-                <a:pos x="csX5" y="csY5"/>
-              </a:cxn>
-              <a:cxn ang="0">
-                <a:pos x="csX6" y="csY6"/>
-              </a:cxn>
-              <a:cxn ang="0">
-                <a:pos x="csX7" y="csY7"/>
-              </a:cxn>
-              <a:cxn ang="0">
-                <a:pos x="csX8" y="csY8"/>
-              </a:cxn>
-              <a:cxn ang="0">
-                <a:pos x="csX9" y="csY9"/>
-              </a:cxn>
-              <a:cxn ang="0">
-                <a:pos x="csX10" y="csY10"/>
-              </a:cxn>
-              <a:cxn ang="0">
-                <a:pos x="csX11" y="csY11"/>
-              </a:cxn>
-            </a:cxnLst>
-            <a:rect l="l" t="t" r="r" b="b"/>
-            <a:pathLst>
-              <a:path w="3255095" h="18288" fill="none" extrusionOk="0">
-                <a:moveTo>
-                  <a:pt x="0" y="0"/>
-                </a:moveTo>
-                <a:cubicBezTo>
-                  <a:pt x="240201" y="-22123"/>
-                  <a:pt x="462021" y="-19623"/>
-                  <a:pt x="618468" y="0"/>
-                </a:cubicBezTo>
-                <a:cubicBezTo>
-                  <a:pt x="774915" y="19623"/>
-                  <a:pt x="974734" y="2035"/>
-                  <a:pt x="1269487" y="0"/>
-                </a:cubicBezTo>
-                <a:cubicBezTo>
-                  <a:pt x="1564240" y="-2035"/>
-                  <a:pt x="1733579" y="10639"/>
-                  <a:pt x="1953057" y="0"/>
-                </a:cubicBezTo>
-                <a:cubicBezTo>
-                  <a:pt x="2172535" y="-10639"/>
-                  <a:pt x="2453962" y="14018"/>
-                  <a:pt x="2636627" y="0"/>
-                </a:cubicBezTo>
-                <a:cubicBezTo>
-                  <a:pt x="2819292" y="-14018"/>
-                  <a:pt x="3121375" y="5399"/>
-                  <a:pt x="3255095" y="0"/>
-                </a:cubicBezTo>
-                <a:cubicBezTo>
-                  <a:pt x="3254386" y="8157"/>
-                  <a:pt x="3254682" y="12125"/>
-                  <a:pt x="3255095" y="18288"/>
-                </a:cubicBezTo>
-                <a:cubicBezTo>
-                  <a:pt x="3088545" y="23203"/>
-                  <a:pt x="2687475" y="7419"/>
-                  <a:pt x="2538974" y="18288"/>
-                </a:cubicBezTo>
-                <a:cubicBezTo>
-                  <a:pt x="2390473" y="29157"/>
-                  <a:pt x="2137381" y="-8959"/>
-                  <a:pt x="1822853" y="18288"/>
-                </a:cubicBezTo>
-                <a:cubicBezTo>
-                  <a:pt x="1508325" y="45535"/>
-                  <a:pt x="1466437" y="20385"/>
-                  <a:pt x="1171834" y="18288"/>
-                </a:cubicBezTo>
-                <a:cubicBezTo>
-                  <a:pt x="877231" y="16191"/>
-                  <a:pt x="561097" y="37643"/>
-                  <a:pt x="0" y="18288"/>
-                </a:cubicBezTo>
-                <a:cubicBezTo>
-                  <a:pt x="-46" y="12483"/>
-                  <a:pt x="-203" y="6491"/>
-                  <a:pt x="0" y="0"/>
-                </a:cubicBezTo>
-                <a:close/>
-              </a:path>
-              <a:path w="3255095" h="18288" stroke="0" extrusionOk="0">
-                <a:moveTo>
-                  <a:pt x="0" y="0"/>
-                </a:moveTo>
-                <a:cubicBezTo>
-                  <a:pt x="291965" y="19429"/>
-                  <a:pt x="363155" y="8568"/>
-                  <a:pt x="618468" y="0"/>
-                </a:cubicBezTo>
-                <a:cubicBezTo>
-                  <a:pt x="873781" y="-8568"/>
-                  <a:pt x="904459" y="-19505"/>
-                  <a:pt x="1171834" y="0"/>
-                </a:cubicBezTo>
-                <a:cubicBezTo>
-                  <a:pt x="1439209" y="19505"/>
-                  <a:pt x="1744369" y="9790"/>
-                  <a:pt x="1887955" y="0"/>
-                </a:cubicBezTo>
-                <a:cubicBezTo>
-                  <a:pt x="2031541" y="-9790"/>
-                  <a:pt x="2346378" y="21240"/>
-                  <a:pt x="2506423" y="0"/>
-                </a:cubicBezTo>
-                <a:cubicBezTo>
-                  <a:pt x="2666468" y="-21240"/>
-                  <a:pt x="2990257" y="30414"/>
-                  <a:pt x="3255095" y="0"/>
-                </a:cubicBezTo>
-                <a:cubicBezTo>
-                  <a:pt x="3254831" y="4493"/>
-                  <a:pt x="3255479" y="9472"/>
-                  <a:pt x="3255095" y="18288"/>
-                </a:cubicBezTo>
-                <a:cubicBezTo>
-                  <a:pt x="3120743" y="16690"/>
-                  <a:pt x="2759628" y="42462"/>
-                  <a:pt x="2604076" y="18288"/>
-                </a:cubicBezTo>
-                <a:cubicBezTo>
-                  <a:pt x="2448524" y="-5886"/>
-                  <a:pt x="2184336" y="19599"/>
-                  <a:pt x="1887955" y="18288"/>
-                </a:cubicBezTo>
-                <a:cubicBezTo>
-                  <a:pt x="1591574" y="16977"/>
-                  <a:pt x="1548845" y="6870"/>
-                  <a:pt x="1334589" y="18288"/>
-                </a:cubicBezTo>
-                <a:cubicBezTo>
-                  <a:pt x="1120333" y="29706"/>
-                  <a:pt x="996014" y="9662"/>
-                  <a:pt x="683570" y="18288"/>
-                </a:cubicBezTo>
-                <a:cubicBezTo>
-                  <a:pt x="371126" y="26914"/>
-                  <a:pt x="198687" y="16167"/>
-                  <a:pt x="0" y="18288"/>
-                </a:cubicBezTo>
-                <a:cubicBezTo>
-                  <a:pt x="843" y="9577"/>
-                  <a:pt x="371" y="6900"/>
-                  <a:pt x="0" y="0"/>
-                </a:cubicBezTo>
-                <a:close/>
-              </a:path>
-            </a:pathLst>
-          </a:custGeom>
-          <a:solidFill>
-            <a:schemeClr val="accent2"/>
-          </a:solidFill>
-          <a:ln w="38100" cap="rnd">
-            <a:solidFill>
-              <a:schemeClr val="accent2"/>
-            </a:solidFill>
-            <a:round/>
-            <a:extLst>
-              <a:ext uri="{C807C97D-BFC1-408E-A445-0C87EB9F89A2}">
-                <ask:lineSketchStyleProps xmlns:ask="http://schemas.microsoft.com/office/drawing/2018/sketchyshapes" sd="1219033472">
-                  <a:prstGeom prst="rect">
-                    <a:avLst/>
-                  </a:prstGeom>
-                  <ask:type>
-                    <ask:lineSketchFreehand/>
-                  </ask:type>
-                </ask:lineSketchStyleProps>
-              </a:ext>
-            </a:extLst>
-          </a:ln>
-        </p:spPr>
-        <p:style>
-          <a:lnRef idx="2">
-            <a:schemeClr val="accent1">
-              <a:shade val="50000"/>
-            </a:schemeClr>
-          </a:lnRef>
-          <a:fillRef idx="1">
-            <a:schemeClr val="accent1"/>
-          </a:fillRef>
-          <a:effectRef idx="0">
-            <a:schemeClr val="accent1"/>
-          </a:effectRef>
-          <a:fontRef idx="minor">
-            <a:schemeClr val="lt1"/>
-          </a:fontRef>
-        </p:style>
-        <p:txBody>
-          <a:bodyPr rtlCol="0" anchor="ctr"/>
-          <a:lstStyle/>
-          <a:p>
-            <a:pPr algn="ctr"/>
-            <a:endParaRPr lang="en-US"/>
-          </a:p>
-        </p:txBody>
-      </p:sp>
-      <p:sp>
-        <p:nvSpPr>
-          <p:cNvPr id="3" name="Content Placeholder 2">
-            <a:extLst>
-              <a:ext uri="{FF2B5EF4-FFF2-40B4-BE49-F238E27FC236}">
-                <a16:creationId xmlns:a16="http://schemas.microsoft.com/office/drawing/2014/main" id="{83E1D507-7695-26F0-2214-0FF6195317CA}"/>
-              </a:ext>
-            </a:extLst>
-          </p:cNvPr>
-          <p:cNvSpPr>
-            <a:spLocks noGrp="1"/>
-          </p:cNvSpPr>
-          <p:nvPr>
-            <p:ph idx="1"/>
-          </p:nvPr>
-        </p:nvSpPr>
-        <p:spPr>
-          <a:xfrm>
-            <a:off x="630935" y="2660904"/>
-            <a:ext cx="11006883" cy="3547872"/>
-          </a:xfrm>
-        </p:spPr>
-        <p:txBody>
-          <a:bodyPr vert="horz" lIns="91440" tIns="45720" rIns="91440" bIns="45720" rtlCol="0" anchor="t">
-            <a:noAutofit/>
-          </a:bodyPr>
-          <a:lstStyle/>
-          <a:p>
-            <a:r>
-              <a:rPr lang="en-GB" sz="2200">
-                <a:ea typeface="+mn-lt"/>
-                <a:cs typeface="+mn-lt"/>
-              </a:rPr>
-              <a:t>WSIs are divided into patches for scalable training and inference</a:t>
-            </a:r>
-          </a:p>
-          <a:p>
-            <a:r>
-              <a:rPr lang="en-GB" sz="2200">
-                <a:ea typeface="+mn-lt"/>
-                <a:cs typeface="+mn-lt"/>
-              </a:rPr>
-              <a:t>Two annotation levels are provided:</a:t>
-            </a:r>
-            <a:endParaRPr lang="en-GB">
-              <a:ea typeface="+mn-lt"/>
-              <a:cs typeface="+mn-lt"/>
-            </a:endParaRPr>
-          </a:p>
-          <a:p>
-            <a:pPr lvl="1"/>
-            <a:r>
-              <a:rPr lang="en-GB" sz="1800">
-                <a:ea typeface="+mn-lt"/>
-                <a:cs typeface="+mn-lt"/>
-              </a:rPr>
-              <a:t>Patch-level: H. pylori presence (binary)</a:t>
-            </a:r>
-          </a:p>
-          <a:p>
-            <a:pPr lvl="1"/>
-            <a:r>
-              <a:rPr lang="en-GB" sz="1800">
-                <a:ea typeface="+mn-lt"/>
-                <a:cs typeface="+mn-lt"/>
-              </a:rPr>
-              <a:t>Patient-level: infection density (NEGATIVA / BAIXA / ALTA), collapsed </a:t>
-            </a:r>
-            <a:r>
-              <a:rPr lang="en-GB" sz="1800">
-                <a:ea typeface="+mn-lt"/>
-                <a:cs typeface="+mn-lt"/>
-                <a:sym typeface="Wingdings" pitchFamily="2" charset="2"/>
-              </a:rPr>
-              <a:t>to binary for final diagnosis (BAIXA + ALTA → Positive)</a:t>
-            </a:r>
-            <a:endParaRPr lang="en-GB" sz="1800"/>
-          </a:p>
-          <a:p>
-            <a:r>
-              <a:rPr lang="en-GB" sz="2200">
-                <a:ea typeface="+mn-lt"/>
-                <a:cs typeface="+mn-lt"/>
-              </a:rPr>
-              <a:t>Cleaned to remove invalid labels and missing files</a:t>
-            </a:r>
-            <a:endParaRPr lang="en-GB">
-              <a:ea typeface="+mn-lt"/>
-              <a:cs typeface="+mn-lt"/>
-            </a:endParaRPr>
-          </a:p>
-          <a:p>
-            <a:r>
-              <a:rPr lang="en-GB" sz="2200">
-                <a:ea typeface="+mn-lt"/>
-                <a:cs typeface="+mn-lt"/>
-              </a:rPr>
-              <a:t>Splits performed at patient level to prevent leakage</a:t>
-            </a:r>
-            <a:endParaRPr lang="en-GB">
-              <a:ea typeface="+mn-lt"/>
-              <a:cs typeface="+mn-lt"/>
-            </a:endParaRPr>
-          </a:p>
-          <a:p>
-            <a:endParaRPr lang="en-GB" sz="2200" dirty="0"/>
-          </a:p>
-          <a:p>
-            <a:endParaRPr lang="en-GB" sz="2200"/>
-          </a:p>
-        </p:txBody>
-      </p:sp>
-    </p:spTree>
-    <p:extLst>
-      <p:ext uri="{BB962C8B-B14F-4D97-AF65-F5344CB8AC3E}">
-        <p14:creationId xmlns:p14="http://schemas.microsoft.com/office/powerpoint/2010/main" val="3352654828"/>
+        <p14:creationId xmlns:p14="http://schemas.microsoft.com/office/powerpoint/2010/main" val="1357844401"/>
       </p:ext>
     </p:extLst>
   </p:cSld>
@@ -8877,10 +7396,7 @@
     <p:bg>
       <p:bgPr>
         <a:solidFill>
-          <a:schemeClr val="accent5">
-            <a:lumMod val="20000"/>
-            <a:lumOff val="80000"/>
-          </a:schemeClr>
+          <a:schemeClr val="bg1"/>
         </a:solidFill>
         <a:effectLst/>
       </p:bgPr>
@@ -8934,7 +7450,7 @@
           <a:lstStyle/>
           <a:p>
             <a:r>
-              <a:rPr lang="en-US" sz="5400"/>
+              <a:rPr lang="en-US" sz="5400" dirty="0"/>
               <a:t>Goals</a:t>
             </a:r>
           </a:p>
@@ -8973,51 +7489,101 @@
                 <a:ea typeface="+mn-lt"/>
                 <a:cs typeface="+mn-lt"/>
               </a:rPr>
-              <a:t>Goal:</a:t>
+              <a:t>Overall Goal:</a:t>
             </a:r>
             <a:r>
               <a:rPr lang="en-US" dirty="0">
                 <a:ea typeface="+mn-lt"/>
                 <a:cs typeface="+mn-lt"/>
               </a:rPr>
-              <a:t> accurate and conservative </a:t>
+              <a:t> accurate classification</a:t>
             </a:r>
             <a:r>
               <a:rPr lang="en-US" b="1" dirty="0">
                 <a:ea typeface="+mn-lt"/>
                 <a:cs typeface="+mn-lt"/>
               </a:rPr>
-              <a:t>binary diagnosis</a:t>
+              <a:t> </a:t>
             </a:r>
             <a:r>
               <a:rPr lang="en-US" dirty="0">
                 <a:ea typeface="+mn-lt"/>
                 <a:cs typeface="+mn-lt"/>
               </a:rPr>
-              <a:t> at </a:t>
-            </a:r>
+              <a:t>of EEG data, generalizable model</a:t>
+            </a:r>
+          </a:p>
+          <a:p>
             <a:r>
               <a:rPr lang="en-US" b="1" dirty="0">
                 <a:ea typeface="+mn-lt"/>
                 <a:cs typeface="+mn-lt"/>
               </a:rPr>
-              <a:t>patient level</a:t>
+              <a:t>Goal 1 – Model with different data scopes</a:t>
+            </a:r>
+          </a:p>
+          <a:p>
+            <a:pPr lvl="1"/>
+            <a:r>
+              <a:rPr lang="en-US" b="1" dirty="0">
+                <a:ea typeface="+mn-lt"/>
+                <a:cs typeface="+mn-lt"/>
+              </a:rPr>
+              <a:t>Window:</a:t>
             </a:r>
             <a:r>
               <a:rPr lang="en-US" dirty="0">
                 <a:ea typeface="+mn-lt"/>
                 <a:cs typeface="+mn-lt"/>
               </a:rPr>
-              <a:t> (Positive vs Negative)</a:t>
-            </a:r>
-          </a:p>
-          <a:p>
+              <a:t> each unit of time. Represents upper bound of performance (because train and test windows can be from same seizure episode) </a:t>
+            </a:r>
+          </a:p>
+          <a:p>
+            <a:pPr lvl="1"/>
             <a:r>
               <a:rPr lang="en-US" b="1" dirty="0">
                 <a:ea typeface="+mn-lt"/>
                 <a:cs typeface="+mn-lt"/>
               </a:rPr>
-              <a:t>Two-stage objective:</a:t>
+              <a:t>Seizure:</a:t>
+            </a:r>
+            <a:r>
+              <a:rPr lang="en-US" dirty="0">
+                <a:ea typeface="+mn-lt"/>
+                <a:cs typeface="+mn-lt"/>
+              </a:rPr>
+              <a:t> split by seizure vs. non-seizure events </a:t>
+            </a:r>
+          </a:p>
+          <a:p>
+            <a:pPr lvl="1"/>
+            <a:r>
+              <a:rPr lang="en-US" b="1" dirty="0">
+                <a:ea typeface="+mn-lt"/>
+                <a:cs typeface="+mn-lt"/>
+              </a:rPr>
+              <a:t>Patient:</a:t>
+            </a:r>
+            <a:r>
+              <a:rPr lang="en-US" dirty="0">
+                <a:ea typeface="+mn-lt"/>
+                <a:cs typeface="+mn-lt"/>
+              </a:rPr>
+              <a:t> most generalizable, for modeling unseen patients</a:t>
+            </a:r>
+            <a:endParaRPr lang="en-US" b="1" dirty="0">
+              <a:ea typeface="+mn-lt"/>
+              <a:cs typeface="+mn-lt"/>
+            </a:endParaRPr>
+          </a:p>
+          <a:p>
+            <a:r>
+              <a:rPr lang="en-US" b="1" dirty="0">
+                <a:ea typeface="+mn-lt"/>
+                <a:cs typeface="+mn-lt"/>
+              </a:rPr>
+              <a:t>Goal 2 -- Compare two architectures</a:t>
             </a:r>
             <a:endParaRPr lang="en-US" dirty="0">
               <a:ea typeface="+mn-lt"/>
@@ -9027,131 +7593,128 @@
           <a:p>
             <a:pPr lvl="1"/>
             <a:r>
-              <a:rPr lang="en-US" b="1">
-                <a:ea typeface="+mn-lt"/>
-                <a:cs typeface="+mn-lt"/>
-              </a:rPr>
-              <a:t>Patch-level detection:</a:t>
-            </a:r>
-            <a:r>
-              <a:rPr lang="en-US">
-                <a:ea typeface="+mn-lt"/>
-                <a:cs typeface="+mn-lt"/>
-              </a:rPr>
-              <a:t> estimate infection probability for patches</a:t>
-            </a:r>
-            <a:endParaRPr lang="en-US"/>
+              <a:rPr lang="en-US" dirty="0">
+                <a:ea typeface="+mn-lt"/>
+                <a:cs typeface="+mn-lt"/>
+              </a:rPr>
+              <a:t>Classification with channel fusion (no temporal data / “memory”)</a:t>
+            </a:r>
           </a:p>
           <a:p>
             <a:pPr lvl="1"/>
             <a:r>
-              <a:rPr lang="en-US" b="1">
-                <a:ea typeface="+mn-lt"/>
-                <a:cs typeface="+mn-lt"/>
-              </a:rPr>
-              <a:t>Patient-level aggregation:</a:t>
-            </a:r>
-            <a:r>
-              <a:rPr lang="en-US">
-                <a:ea typeface="+mn-lt"/>
-                <a:cs typeface="+mn-lt"/>
-              </a:rPr>
-              <a:t> convert patch evidence into a patient diagnosis</a:t>
-            </a:r>
-            <a:endParaRPr lang="en-US"/>
-          </a:p>
-          <a:p>
-            <a:r>
-              <a:rPr lang="en-US" b="1" dirty="0">
-                <a:ea typeface="+mn-lt"/>
-                <a:cs typeface="+mn-lt"/>
-              </a:rPr>
-              <a:t>Model comparison (patch level):</a:t>
-            </a:r>
-            <a:r>
               <a:rPr lang="en-US" dirty="0">
                 <a:ea typeface="+mn-lt"/>
                 <a:cs typeface="+mn-lt"/>
               </a:rPr>
-              <a:t> </a:t>
-            </a:r>
-            <a:r>
-              <a:rPr lang="en-US" dirty="0" err="1">
-                <a:ea typeface="+mn-lt"/>
-                <a:cs typeface="+mn-lt"/>
-              </a:rPr>
-              <a:t>ResNet</a:t>
-            </a:r>
+              <a:t>LSTM methods to incorporate temporal data</a:t>
+            </a:r>
+            <a:endParaRPr lang="en-US" dirty="0"/>
+          </a:p>
+          <a:p>
+            <a:pPr marL="457200" lvl="1" indent="0">
+              <a:buNone/>
+            </a:pPr>
+            <a:endParaRPr lang="en-US" dirty="0"/>
+          </a:p>
+          <a:p>
+            <a:pPr lvl="1"/>
+            <a:endParaRPr lang="en-US" dirty="0"/>
+          </a:p>
+          <a:p>
+            <a:pPr lvl="1"/>
+            <a:endParaRPr lang="en-US" dirty="0"/>
+          </a:p>
+          <a:p>
+            <a:endParaRPr lang="en-US" dirty="0"/>
+          </a:p>
+          <a:p>
+            <a:endParaRPr lang="en-US" dirty="0"/>
+          </a:p>
+        </p:txBody>
+      </p:sp>
+      <p:sp>
+        <p:nvSpPr>
+          <p:cNvPr id="4" name="TextBox 3">
+            <a:extLst>
+              <a:ext uri="{FF2B5EF4-FFF2-40B4-BE49-F238E27FC236}">
+                <a16:creationId xmlns:a16="http://schemas.microsoft.com/office/drawing/2014/main" id="{F7999505-AE91-8B1A-FC3A-3E9337785D69}"/>
+              </a:ext>
+            </a:extLst>
+          </p:cNvPr>
+          <p:cNvSpPr txBox="1"/>
+          <p:nvPr/>
+        </p:nvSpPr>
+        <p:spPr>
+          <a:xfrm>
+            <a:off x="-606019" y="3244333"/>
+            <a:ext cx="2575931" cy="369332"/>
+          </a:xfrm>
+          <a:prstGeom prst="rect">
+            <a:avLst/>
+          </a:prstGeom>
+          <a:noFill/>
+        </p:spPr>
+        <p:txBody>
+          <a:bodyPr wrap="square" rtlCol="0">
+            <a:spAutoFit/>
+          </a:bodyPr>
+          <a:lstStyle/>
+          <a:p>
+            <a:pPr algn="ctr"/>
             <a:r>
               <a:rPr lang="en-US" dirty="0">
-                <a:ea typeface="+mn-lt"/>
-                <a:cs typeface="+mn-lt"/>
-              </a:rPr>
-              <a:t> (Method 1) vs </a:t>
-            </a:r>
-            <a:r>
-              <a:rPr lang="en-US" dirty="0" err="1">
-                <a:ea typeface="+mn-lt"/>
-                <a:cs typeface="+mn-lt"/>
-              </a:rPr>
-              <a:t>ConvNeXt</a:t>
-            </a:r>
-            <a:r>
-              <a:rPr lang="en-US" dirty="0">
-                <a:ea typeface="+mn-lt"/>
-                <a:cs typeface="+mn-lt"/>
-              </a:rPr>
-              <a:t>-Tiny (Method 2)</a:t>
-            </a:r>
-            <a:endParaRPr lang="en-US"/>
-          </a:p>
-          <a:p>
-            <a:r>
-              <a:rPr lang="en-US" b="1">
-                <a:ea typeface="+mn-lt"/>
-                <a:cs typeface="+mn-lt"/>
-              </a:rPr>
-              <a:t>Evaluation:</a:t>
-            </a:r>
-            <a:r>
-              <a:rPr lang="en-US">
-                <a:ea typeface="+mn-lt"/>
-                <a:cs typeface="+mn-lt"/>
-              </a:rPr>
-              <a:t> Accuracy / Macro-F1 / Balanced Accuracy on </a:t>
-            </a:r>
-            <a:r>
-              <a:rPr lang="en-US" b="1">
-                <a:ea typeface="+mn-lt"/>
-                <a:cs typeface="+mn-lt"/>
-              </a:rPr>
-              <a:t>holdout patients</a:t>
-            </a:r>
-            <a:endParaRPr lang="en-US"/>
-          </a:p>
-          <a:p>
-            <a:endParaRPr lang="en-US" dirty="0"/>
-          </a:p>
-          <a:p>
-            <a:pPr lvl="1"/>
-            <a:endParaRPr lang="en-US"/>
-          </a:p>
-          <a:p>
-            <a:pPr lvl="1"/>
-            <a:endParaRPr lang="en-US"/>
-          </a:p>
-          <a:p>
-            <a:pPr lvl="1"/>
-            <a:endParaRPr lang="en-US"/>
-          </a:p>
-          <a:p>
-            <a:endParaRPr lang="en-US"/>
-          </a:p>
-          <a:p>
-            <a:endParaRPr lang="en-US"/>
-          </a:p>
-        </p:txBody>
-      </p:sp>
+                <a:solidFill>
+                  <a:srgbClr val="FF0000"/>
+                </a:solidFill>
+              </a:rPr>
+              <a:t>difficulty</a:t>
+            </a:r>
+          </a:p>
+        </p:txBody>
+      </p:sp>
+      <p:cxnSp>
+        <p:nvCxnSpPr>
+          <p:cNvPr id="6" name="Straight Arrow Connector 5">
+            <a:extLst>
+              <a:ext uri="{FF2B5EF4-FFF2-40B4-BE49-F238E27FC236}">
+                <a16:creationId xmlns:a16="http://schemas.microsoft.com/office/drawing/2014/main" id="{54C9B681-D77E-06EA-AA3B-ABC49B67B644}"/>
+              </a:ext>
+            </a:extLst>
+          </p:cNvPr>
+          <p:cNvCxnSpPr/>
+          <p:nvPr/>
+        </p:nvCxnSpPr>
+        <p:spPr>
+          <a:xfrm>
+            <a:off x="1193181" y="2798956"/>
+            <a:ext cx="0" cy="1260087"/>
+          </a:xfrm>
+          <a:prstGeom prst="straightConnector1">
+            <a:avLst/>
+          </a:prstGeom>
+          <a:ln>
+            <a:solidFill>
+              <a:srgbClr val="FF0000"/>
+            </a:solidFill>
+            <a:tailEnd type="triangle"/>
+          </a:ln>
+        </p:spPr>
+        <p:style>
+          <a:lnRef idx="2">
+            <a:schemeClr val="accent1"/>
+          </a:lnRef>
+          <a:fillRef idx="0">
+            <a:schemeClr val="accent1"/>
+          </a:fillRef>
+          <a:effectRef idx="1">
+            <a:schemeClr val="accent1"/>
+          </a:effectRef>
+          <a:fontRef idx="minor">
+            <a:schemeClr val="tx1"/>
+          </a:fontRef>
+        </p:style>
+      </p:cxnSp>
     </p:spTree>
     <p:extLst>
       <p:ext uri="{BB962C8B-B14F-4D97-AF65-F5344CB8AC3E}">
@@ -9171,10 +7734,7 @@
     <p:bg>
       <p:bgPr>
         <a:solidFill>
-          <a:schemeClr val="accent5">
-            <a:lumMod val="20000"/>
-            <a:lumOff val="80000"/>
-          </a:schemeClr>
+          <a:schemeClr val="bg1"/>
         </a:solidFill>
         <a:effectLst/>
       </p:bgPr>
@@ -9226,16 +7786,8 @@
           <a:lstStyle/>
           <a:p>
             <a:r>
-              <a:rPr lang="en-US"/>
-              <a:t>Methodology Selection -- </a:t>
-            </a:r>
-            <a:r>
-              <a:rPr lang="en-US" err="1"/>
-              <a:t>ResNet</a:t>
-            </a:r>
-            <a:r>
-              <a:rPr lang="en-US"/>
-              <a:t> </a:t>
+              <a:rPr lang="en-US" dirty="0"/>
+              <a:t>Methodology: Architecture Selection</a:t>
             </a:r>
           </a:p>
         </p:txBody>
@@ -9258,79 +7810,108 @@
         </p:nvSpPr>
         <p:spPr>
           <a:xfrm>
-            <a:off x="800415" y="1351222"/>
-            <a:ext cx="8921155" cy="1951828"/>
+            <a:off x="814703" y="1051185"/>
+            <a:ext cx="8921155" cy="2358028"/>
           </a:xfrm>
         </p:spPr>
         <p:txBody>
           <a:bodyPr vert="horz" lIns="91440" tIns="45720" rIns="91440" bIns="45720" rtlCol="0" anchor="t">
-            <a:normAutofit fontScale="85000" lnSpcReduction="20000"/>
+            <a:normAutofit/>
           </a:bodyPr>
           <a:lstStyle/>
           <a:p>
-            <a:r>
-              <a:rPr lang="en-US" dirty="0" err="1">
-                <a:ea typeface="+mn-lt"/>
-                <a:cs typeface="+mn-lt"/>
-              </a:rPr>
-              <a:t>ResNet</a:t>
-            </a:r>
+            <a:pPr lvl="1"/>
             <a:r>
               <a:rPr lang="en-US" dirty="0">
                 <a:ea typeface="+mn-lt"/>
                 <a:cs typeface="+mn-lt"/>
               </a:rPr>
-              <a:t>-type models have documented success in this task</a:t>
-            </a:r>
-          </a:p>
-          <a:p>
-            <a:r>
-              <a:rPr lang="en-US">
-                <a:ea typeface="+mn-lt"/>
-                <a:cs typeface="+mn-lt"/>
-              </a:rPr>
-              <a:t>Prior work reports ResNet-101 achieving ~92% average accuracy for binary classification</a:t>
-            </a:r>
-            <a:endParaRPr lang="en-US"/>
-          </a:p>
-          <a:p>
+              <a:t>Classification (not temporal) </a:t>
+            </a:r>
             <a:r>
               <a:rPr lang="en-US" dirty="0">
                 <a:ea typeface="+mn-lt"/>
                 <a:cs typeface="+mn-lt"/>
-              </a:rPr>
-              <a:t>We use </a:t>
-            </a:r>
-            <a:r>
-              <a:rPr lang="en-US" dirty="0" err="1">
-                <a:ea typeface="+mn-lt"/>
-                <a:cs typeface="+mn-lt"/>
-              </a:rPr>
-              <a:t>ResNet</a:t>
-            </a:r>
+                <a:sym typeface="Wingdings" pitchFamily="2" charset="2"/>
+              </a:rPr>
+              <a:t> CNN</a:t>
+            </a:r>
+          </a:p>
+          <a:p>
+            <a:pPr lvl="2"/>
             <a:r>
               <a:rPr lang="en-US" dirty="0">
                 <a:ea typeface="+mn-lt"/>
                 <a:cs typeface="+mn-lt"/>
-              </a:rPr>
-              <a:t> as the patch-level backbone and train a lightweight ResNet18 model to support WSI-scale patch inference</a:t>
-            </a:r>
-            <a:endParaRPr lang="en-US" dirty="0"/>
-          </a:p>
-          <a:p>
-            <a:endParaRPr lang="en-US" dirty="0"/>
-          </a:p>
-          <a:p>
-            <a:endParaRPr lang="en-US"/>
+                <a:sym typeface="Wingdings" pitchFamily="2" charset="2"/>
+              </a:rPr>
+              <a:t>Why: well-validated in existing literature, light computation</a:t>
+            </a:r>
+          </a:p>
+          <a:p>
+            <a:pPr lvl="2"/>
+            <a:r>
+              <a:rPr lang="en-US" dirty="0">
+                <a:ea typeface="+mn-lt"/>
+                <a:cs typeface="+mn-lt"/>
+                <a:sym typeface="Wingdings" pitchFamily="2" charset="2"/>
+              </a:rPr>
+              <a:t>Serves as baseline because it doesn’t use sequential context</a:t>
+            </a:r>
+            <a:endParaRPr lang="en-US" dirty="0">
+              <a:ea typeface="+mn-lt"/>
+              <a:cs typeface="+mn-lt"/>
+            </a:endParaRPr>
+          </a:p>
+          <a:p>
+            <a:pPr lvl="1"/>
+            <a:r>
+              <a:rPr lang="en-US" dirty="0">
+                <a:ea typeface="+mn-lt"/>
+                <a:cs typeface="+mn-lt"/>
+              </a:rPr>
+              <a:t>With temporal data </a:t>
+            </a:r>
+            <a:r>
+              <a:rPr lang="en-US" dirty="0">
+                <a:ea typeface="+mn-lt"/>
+                <a:cs typeface="+mn-lt"/>
+                <a:sym typeface="Wingdings" pitchFamily="2" charset="2"/>
+              </a:rPr>
+              <a:t> Spiking Convolutional Transformer</a:t>
+            </a:r>
+          </a:p>
+          <a:p>
+            <a:pPr lvl="2"/>
+            <a:r>
+              <a:rPr lang="en-US" dirty="0">
+                <a:ea typeface="+mn-lt"/>
+                <a:cs typeface="+mn-lt"/>
+                <a:sym typeface="Wingdings" pitchFamily="2" charset="2"/>
+              </a:rPr>
+              <a:t>Why: recent literature from 2024, reflects more cutting-edge method</a:t>
+            </a:r>
+          </a:p>
+          <a:p>
+            <a:pPr lvl="2"/>
+            <a:r>
+              <a:rPr lang="en-US" i="1" dirty="0">
+                <a:ea typeface="+mn-lt"/>
+                <a:cs typeface="+mn-lt"/>
+                <a:sym typeface="Wingdings" pitchFamily="2" charset="2"/>
+              </a:rPr>
+              <a:t>We will discuss this later in the final submission.</a:t>
+            </a:r>
+            <a:endParaRPr lang="en-US" i="1" dirty="0"/>
           </a:p>
         </p:txBody>
       </p:sp>
       <p:pic>
         <p:nvPicPr>
-          <p:cNvPr id="4" name="Picture 3">
-            <a:extLst>
-              <a:ext uri="{FF2B5EF4-FFF2-40B4-BE49-F238E27FC236}">
-                <a16:creationId xmlns:a16="http://schemas.microsoft.com/office/drawing/2014/main" id="{FDAC0420-4751-3DAD-30E1-FB800CED94E3}"/>
+          <p:cNvPr id="5" name="Picture 4">
+            <a:extLst>
+              <a:ext uri="{FF2B5EF4-FFF2-40B4-BE49-F238E27FC236}">
+                <a16:creationId xmlns:a16="http://schemas.microsoft.com/office/drawing/2014/main" id="{D093D101-6FA7-258E-639D-40383ECF4616}"/>
               </a:ext>
             </a:extLst>
           </p:cNvPr>
@@ -9347,8 +7928,8 @@
         </p:blipFill>
         <p:spPr>
           <a:xfrm>
-            <a:off x="800792" y="3427786"/>
-            <a:ext cx="8990845" cy="3159142"/>
+            <a:off x="1949170" y="3448787"/>
+            <a:ext cx="7772400" cy="3111909"/>
           </a:xfrm>
           <a:prstGeom prst="rect">
             <a:avLst/>
@@ -9381,13 +7962,7 @@
     </p:bg>
     <p:spTree>
       <p:nvGrpSpPr>
-        <p:cNvPr id="1" name="">
-          <a:extLst>
-            <a:ext uri="{FF2B5EF4-FFF2-40B4-BE49-F238E27FC236}">
-              <a16:creationId xmlns:a16="http://schemas.microsoft.com/office/drawing/2014/main" id="{A0FD50BE-5C4E-AF1A-0658-B6A778E1070E}"/>
-            </a:ext>
-          </a:extLst>
-        </p:cNvPr>
+        <p:cNvPr id="1" name=""/>
         <p:cNvGrpSpPr/>
         <p:nvPr/>
       </p:nvGrpSpPr>
@@ -9401,10 +7976,10 @@
       </p:grpSpPr>
       <p:sp>
         <p:nvSpPr>
-          <p:cNvPr id="2" name="Title 1">
-            <a:extLst>
-              <a:ext uri="{FF2B5EF4-FFF2-40B4-BE49-F238E27FC236}">
-                <a16:creationId xmlns:a16="http://schemas.microsoft.com/office/drawing/2014/main" id="{FA19439A-C66F-B2B5-031F-8307200A84A7}"/>
+          <p:cNvPr id="11" name="Title 1">
+            <a:extLst>
+              <a:ext uri="{FF2B5EF4-FFF2-40B4-BE49-F238E27FC236}">
+                <a16:creationId xmlns:a16="http://schemas.microsoft.com/office/drawing/2014/main" id="{BB29C28C-A96F-77AF-C659-09438D1FF19A}"/>
               </a:ext>
             </a:extLst>
           </p:cNvPr>
@@ -9417,34 +7992,57 @@
         </p:nvSpPr>
         <p:spPr>
           <a:xfrm>
-            <a:off x="282256" y="-16373"/>
-            <a:ext cx="9795638" cy="1114380"/>
+            <a:off x="223104" y="0"/>
+            <a:ext cx="10515600" cy="1325563"/>
           </a:xfrm>
         </p:spPr>
         <p:txBody>
-          <a:bodyPr vert="horz" lIns="91440" tIns="45720" rIns="91440" bIns="45720" rtlCol="0" anchor="b">
-            <a:normAutofit fontScale="90000"/>
-          </a:bodyPr>
+          <a:bodyPr/>
           <a:lstStyle/>
           <a:p>
             <a:r>
-              <a:rPr lang="en-US" sz="5400"/>
-              <a:t>Methodology Selection -- </a:t>
-            </a:r>
-            <a:r>
-              <a:rPr lang="en-US" sz="5400" err="1"/>
-              <a:t>ConvNeXT</a:t>
-            </a:r>
-            <a:endParaRPr lang="en-US" sz="5200"/>
-          </a:p>
-        </p:txBody>
-      </p:sp>
-      <p:sp>
-        <p:nvSpPr>
-          <p:cNvPr id="9" name="TextBox 8">
-            <a:extLst>
-              <a:ext uri="{FF2B5EF4-FFF2-40B4-BE49-F238E27FC236}">
-                <a16:creationId xmlns:a16="http://schemas.microsoft.com/office/drawing/2014/main" id="{72B67880-AD02-8D91-59CD-32BDFED61FC1}"/>
+              <a:rPr lang="en-US" dirty="0"/>
+              <a:t>Methodology Overview</a:t>
+            </a:r>
+          </a:p>
+        </p:txBody>
+      </p:sp>
+      <p:pic>
+        <p:nvPicPr>
+          <p:cNvPr id="4" name="Picture 3" descr="A diagram of a computer program&#10;&#10;AI-generated content may be incorrect.">
+            <a:extLst>
+              <a:ext uri="{FF2B5EF4-FFF2-40B4-BE49-F238E27FC236}">
+                <a16:creationId xmlns:a16="http://schemas.microsoft.com/office/drawing/2014/main" id="{16BF2CBD-9212-C0FE-899F-4385F9CB363B}"/>
+              </a:ext>
+            </a:extLst>
+          </p:cNvPr>
+          <p:cNvPicPr>
+            <a:picLocks noChangeAspect="1"/>
+          </p:cNvPicPr>
+          <p:nvPr/>
+        </p:nvPicPr>
+        <p:blipFill>
+          <a:blip r:embed="rId2"/>
+          <a:stretch>
+            <a:fillRect/>
+          </a:stretch>
+        </p:blipFill>
+        <p:spPr>
+          <a:xfrm>
+            <a:off x="1803083" y="2275300"/>
+            <a:ext cx="9047480" cy="4052428"/>
+          </a:xfrm>
+          <a:prstGeom prst="rect">
+            <a:avLst/>
+          </a:prstGeom>
+        </p:spPr>
+      </p:pic>
+      <p:sp>
+        <p:nvSpPr>
+          <p:cNvPr id="5" name="TextBox 4">
+            <a:extLst>
+              <a:ext uri="{FF2B5EF4-FFF2-40B4-BE49-F238E27FC236}">
+                <a16:creationId xmlns:a16="http://schemas.microsoft.com/office/drawing/2014/main" id="{6EA17400-C680-8583-2D68-D65FB4ED4FA7}"/>
               </a:ext>
             </a:extLst>
           </p:cNvPr>
@@ -9453,8 +8051,8 @@
         </p:nvSpPr>
         <p:spPr>
           <a:xfrm>
-            <a:off x="282256" y="1074509"/>
-            <a:ext cx="11388813" cy="1938992"/>
+            <a:off x="646843" y="1211786"/>
+            <a:ext cx="10898313" cy="1477328"/>
           </a:xfrm>
           <a:prstGeom prst="rect">
             <a:avLst/>
@@ -9472,8 +8070,8 @@
               <a:buChar char="•"/>
             </a:pPr>
             <a:r>
-              <a:rPr lang="en-US" sz="3000"/>
-              <a:t>Based on vision transformers</a:t>
+              <a:rPr lang="en-US" sz="3000" dirty="0"/>
+              <a:t>CNN is a simple baseline to help us see difference in data splits (patient, seizure, window)</a:t>
             </a:r>
           </a:p>
           <a:p>
@@ -9481,145 +8079,14 @@
               <a:buFont typeface="Arial" panose="020B0604020202020204" pitchFamily="34" charset="0"/>
               <a:buChar char="•"/>
             </a:pPr>
-            <a:r>
-              <a:rPr lang="en-US" sz="3000"/>
-              <a:t>Larger kernels, non-overlapping, modernized improvement from </a:t>
-            </a:r>
-            <a:r>
-              <a:rPr lang="en-US" sz="3000" err="1"/>
-              <a:t>ResNet</a:t>
-            </a:r>
-            <a:endParaRPr lang="en-US" sz="3000"/>
-          </a:p>
-          <a:p>
-            <a:endParaRPr lang="en-US" sz="3000"/>
-          </a:p>
-        </p:txBody>
-      </p:sp>
-      <p:sp>
-        <p:nvSpPr>
-          <p:cNvPr id="3" name="AutoShape 2">
-            <a:extLst>
-              <a:ext uri="{FF2B5EF4-FFF2-40B4-BE49-F238E27FC236}">
-                <a16:creationId xmlns:a16="http://schemas.microsoft.com/office/drawing/2014/main" id="{527054DC-C77B-47DC-A5D7-195BACC22414}"/>
-              </a:ext>
-            </a:extLst>
-          </p:cNvPr>
-          <p:cNvSpPr>
-            <a:spLocks noChangeAspect="1" noChangeArrowheads="1"/>
-          </p:cNvSpPr>
-          <p:nvPr/>
-        </p:nvSpPr>
-        <p:spPr bwMode="auto">
-          <a:xfrm>
-            <a:off x="5943600" y="3276600"/>
-            <a:ext cx="304800" cy="304800"/>
-          </a:xfrm>
-          <a:prstGeom prst="rect">
-            <a:avLst/>
-          </a:prstGeom>
-          <a:noFill/>
-          <a:extLst>
-            <a:ext uri="{909E8E84-426E-40DD-AFC4-6F175D3DCCD1}">
-              <a14:hiddenFill xmlns:a14="http://schemas.microsoft.com/office/drawing/2010/main">
-                <a:solidFill>
-                  <a:srgbClr val="FFFFFF"/>
-                </a:solidFill>
-              </a14:hiddenFill>
-            </a:ext>
-          </a:extLst>
-        </p:spPr>
-        <p:txBody>
-          <a:bodyPr vert="horz" wrap="square" lIns="91440" tIns="45720" rIns="91440" bIns="45720" numCol="1" anchor="t" anchorCtr="0" compatLnSpc="1">
-            <a:prstTxWarp prst="textNoShape">
-              <a:avLst/>
-            </a:prstTxWarp>
-          </a:bodyPr>
-          <a:lstStyle/>
-          <a:p>
-            <a:endParaRPr lang="en-US"/>
-          </a:p>
-        </p:txBody>
-      </p:sp>
-      <p:sp>
-        <p:nvSpPr>
-          <p:cNvPr id="8" name="AutoShape 6" descr="ConvNeXt: A Transformer-Inspired CNN Architecture | KUNGFU.AI Blog">
-            <a:extLst>
-              <a:ext uri="{FF2B5EF4-FFF2-40B4-BE49-F238E27FC236}">
-                <a16:creationId xmlns:a16="http://schemas.microsoft.com/office/drawing/2014/main" id="{10C6E9E9-EEB9-1049-AB80-D04339CF7748}"/>
-              </a:ext>
-            </a:extLst>
-          </p:cNvPr>
-          <p:cNvSpPr>
-            <a:spLocks noChangeAspect="1" noChangeArrowheads="1"/>
-          </p:cNvSpPr>
-          <p:nvPr/>
-        </p:nvSpPr>
-        <p:spPr bwMode="auto">
-          <a:xfrm>
-            <a:off x="6096000" y="3429000"/>
-            <a:ext cx="304800" cy="304800"/>
-          </a:xfrm>
-          <a:prstGeom prst="rect">
-            <a:avLst/>
-          </a:prstGeom>
-          <a:noFill/>
-          <a:extLst>
-            <a:ext uri="{909E8E84-426E-40DD-AFC4-6F175D3DCCD1}">
-              <a14:hiddenFill xmlns:a14="http://schemas.microsoft.com/office/drawing/2010/main">
-                <a:solidFill>
-                  <a:srgbClr val="FFFFFF"/>
-                </a:solidFill>
-              </a14:hiddenFill>
-            </a:ext>
-          </a:extLst>
-        </p:spPr>
-        <p:txBody>
-          <a:bodyPr vert="horz" wrap="square" lIns="91440" tIns="45720" rIns="91440" bIns="45720" numCol="1" anchor="t" anchorCtr="0" compatLnSpc="1">
-            <a:prstTxWarp prst="textNoShape">
-              <a:avLst/>
-            </a:prstTxWarp>
-          </a:bodyPr>
-          <a:lstStyle/>
-          <a:p>
-            <a:endParaRPr lang="en-US"/>
-          </a:p>
-        </p:txBody>
-      </p:sp>
-      <p:pic>
-        <p:nvPicPr>
-          <p:cNvPr id="10" name="Picture 9">
-            <a:extLst>
-              <a:ext uri="{FF2B5EF4-FFF2-40B4-BE49-F238E27FC236}">
-                <a16:creationId xmlns:a16="http://schemas.microsoft.com/office/drawing/2014/main" id="{EF91570E-45A9-B951-D587-556A8D0CBC17}"/>
-              </a:ext>
-            </a:extLst>
-          </p:cNvPr>
-          <p:cNvPicPr>
-            <a:picLocks noChangeAspect="1"/>
-          </p:cNvPicPr>
-          <p:nvPr/>
-        </p:nvPicPr>
-        <p:blipFill>
-          <a:blip r:embed="rId3"/>
-          <a:stretch>
-            <a:fillRect/>
-          </a:stretch>
-        </p:blipFill>
-        <p:spPr>
-          <a:xfrm>
-            <a:off x="2582076" y="2454126"/>
-            <a:ext cx="7332648" cy="4325815"/>
-          </a:xfrm>
-          <a:prstGeom prst="rect">
-            <a:avLst/>
-          </a:prstGeom>
-        </p:spPr>
-      </p:pic>
+            <a:endParaRPr lang="en-US" sz="3000" dirty="0"/>
+          </a:p>
+        </p:txBody>
+      </p:sp>
     </p:spTree>
     <p:extLst>
       <p:ext uri="{BB962C8B-B14F-4D97-AF65-F5344CB8AC3E}">
-        <p14:creationId xmlns:p14="http://schemas.microsoft.com/office/powerpoint/2010/main" val="3740749597"/>
+        <p14:creationId xmlns:p14="http://schemas.microsoft.com/office/powerpoint/2010/main" val="2634110997"/>
       </p:ext>
     </p:extLst>
   </p:cSld>
@@ -9636,308 +8103,6 @@
       <p:bgPr>
         <a:solidFill>
           <a:schemeClr val="bg1"/>
-        </a:solidFill>
-        <a:effectLst/>
-      </p:bgPr>
-    </p:bg>
-    <p:spTree>
-      <p:nvGrpSpPr>
-        <p:cNvPr id="1" name=""/>
-        <p:cNvGrpSpPr/>
-        <p:nvPr/>
-      </p:nvGrpSpPr>
-      <p:grpSpPr>
-        <a:xfrm>
-          <a:off x="0" y="0"/>
-          <a:ext cx="0" cy="0"/>
-          <a:chOff x="0" y="0"/>
-          <a:chExt cx="0" cy="0"/>
-        </a:xfrm>
-      </p:grpSpPr>
-      <p:sp>
-        <p:nvSpPr>
-          <p:cNvPr id="11" name="Title 1">
-            <a:extLst>
-              <a:ext uri="{FF2B5EF4-FFF2-40B4-BE49-F238E27FC236}">
-                <a16:creationId xmlns:a16="http://schemas.microsoft.com/office/drawing/2014/main" id="{BB29C28C-A96F-77AF-C659-09438D1FF19A}"/>
-              </a:ext>
-            </a:extLst>
-          </p:cNvPr>
-          <p:cNvSpPr>
-            <a:spLocks noGrp="1"/>
-          </p:cNvSpPr>
-          <p:nvPr>
-            <p:ph type="title"/>
-          </p:nvPr>
-        </p:nvSpPr>
-        <p:spPr>
-          <a:xfrm>
-            <a:off x="234534" y="242030"/>
-            <a:ext cx="10515600" cy="1325563"/>
-          </a:xfrm>
-        </p:spPr>
-        <p:txBody>
-          <a:bodyPr/>
-          <a:lstStyle/>
-          <a:p>
-            <a:r>
-              <a:rPr lang="en-US"/>
-              <a:t>Methodology Overview</a:t>
-            </a:r>
-          </a:p>
-        </p:txBody>
-      </p:sp>
-      <p:pic>
-        <p:nvPicPr>
-          <p:cNvPr id="12" name="Graphic 11" descr="Badge 1 with solid fill">
-            <a:extLst>
-              <a:ext uri="{FF2B5EF4-FFF2-40B4-BE49-F238E27FC236}">
-                <a16:creationId xmlns:a16="http://schemas.microsoft.com/office/drawing/2014/main" id="{07245003-0A34-B229-2B21-ECD646B1F721}"/>
-              </a:ext>
-            </a:extLst>
-          </p:cNvPr>
-          <p:cNvPicPr>
-            <a:picLocks noChangeAspect="1"/>
-          </p:cNvPicPr>
-          <p:nvPr/>
-        </p:nvPicPr>
-        <p:blipFill>
-          <a:blip r:embed="rId2">
-            <a:extLst>
-              <a:ext uri="{96DAC541-7B7A-43D3-8B79-37D633B846F1}">
-                <asvg:svgBlip xmlns:asvg="http://schemas.microsoft.com/office/drawing/2016/SVG/main" r:embed="rId3"/>
-              </a:ext>
-            </a:extLst>
-          </a:blip>
-          <a:stretch>
-            <a:fillRect/>
-          </a:stretch>
-        </p:blipFill>
-        <p:spPr>
-          <a:xfrm>
-            <a:off x="146050" y="1285678"/>
-            <a:ext cx="914400" cy="914400"/>
-          </a:xfrm>
-          <a:prstGeom prst="rect">
-            <a:avLst/>
-          </a:prstGeom>
-        </p:spPr>
-      </p:pic>
-      <p:pic>
-        <p:nvPicPr>
-          <p:cNvPr id="13" name="Graphic 12" descr="Badge with solid fill">
-            <a:extLst>
-              <a:ext uri="{FF2B5EF4-FFF2-40B4-BE49-F238E27FC236}">
-                <a16:creationId xmlns:a16="http://schemas.microsoft.com/office/drawing/2014/main" id="{5F84BAAB-24A3-2221-E622-CE1EAB3A159D}"/>
-              </a:ext>
-            </a:extLst>
-          </p:cNvPr>
-          <p:cNvPicPr>
-            <a:picLocks noChangeAspect="1"/>
-          </p:cNvPicPr>
-          <p:nvPr/>
-        </p:nvPicPr>
-        <p:blipFill>
-          <a:blip r:embed="rId4">
-            <a:extLst>
-              <a:ext uri="{96DAC541-7B7A-43D3-8B79-37D633B846F1}">
-                <asvg:svgBlip xmlns:asvg="http://schemas.microsoft.com/office/drawing/2016/SVG/main" r:embed="rId5"/>
-              </a:ext>
-            </a:extLst>
-          </a:blip>
-          <a:stretch>
-            <a:fillRect/>
-          </a:stretch>
-        </p:blipFill>
-        <p:spPr>
-          <a:xfrm>
-            <a:off x="146050" y="2107010"/>
-            <a:ext cx="914400" cy="914400"/>
-          </a:xfrm>
-          <a:prstGeom prst="rect">
-            <a:avLst/>
-          </a:prstGeom>
-        </p:spPr>
-      </p:pic>
-      <p:sp>
-        <p:nvSpPr>
-          <p:cNvPr id="14" name="TextBox 13">
-            <a:extLst>
-              <a:ext uri="{FF2B5EF4-FFF2-40B4-BE49-F238E27FC236}">
-                <a16:creationId xmlns:a16="http://schemas.microsoft.com/office/drawing/2014/main" id="{36C38740-2ABC-26C3-F818-C13345218A2C}"/>
-              </a:ext>
-            </a:extLst>
-          </p:cNvPr>
-          <p:cNvSpPr txBox="1"/>
-          <p:nvPr/>
-        </p:nvSpPr>
-        <p:spPr>
-          <a:xfrm>
-            <a:off x="1151456" y="1420818"/>
-            <a:ext cx="8047628" cy="553998"/>
-          </a:xfrm>
-          <a:prstGeom prst="rect">
-            <a:avLst/>
-          </a:prstGeom>
-          <a:noFill/>
-        </p:spPr>
-        <p:txBody>
-          <a:bodyPr wrap="square" rtlCol="0">
-            <a:spAutoFit/>
-          </a:bodyPr>
-          <a:lstStyle/>
-          <a:p>
-            <a:r>
-              <a:rPr lang="en-US" sz="3000" u="sng" err="1"/>
-              <a:t>ResNet</a:t>
-            </a:r>
-            <a:r>
-              <a:rPr lang="en-US" sz="3000"/>
-              <a:t> with heuristic-based patient diagnosis</a:t>
-            </a:r>
-            <a:endParaRPr lang="en-US" sz="3000" b="1" u="sng">
-              <a:solidFill>
-                <a:schemeClr val="accent2"/>
-              </a:solidFill>
-            </a:endParaRPr>
-          </a:p>
-        </p:txBody>
-      </p:sp>
-      <p:sp>
-        <p:nvSpPr>
-          <p:cNvPr id="15" name="TextBox 14">
-            <a:extLst>
-              <a:ext uri="{FF2B5EF4-FFF2-40B4-BE49-F238E27FC236}">
-                <a16:creationId xmlns:a16="http://schemas.microsoft.com/office/drawing/2014/main" id="{41732842-40C3-AB5B-F563-E596CE4E7D26}"/>
-              </a:ext>
-            </a:extLst>
-          </p:cNvPr>
-          <p:cNvSpPr txBox="1"/>
-          <p:nvPr/>
-        </p:nvSpPr>
-        <p:spPr>
-          <a:xfrm>
-            <a:off x="1351911" y="3429000"/>
-            <a:ext cx="10256319" cy="1938992"/>
-          </a:xfrm>
-          <a:prstGeom prst="rect">
-            <a:avLst/>
-          </a:prstGeom>
-          <a:noFill/>
-        </p:spPr>
-        <p:txBody>
-          <a:bodyPr wrap="square" rtlCol="0">
-            <a:spAutoFit/>
-          </a:bodyPr>
-          <a:lstStyle/>
-          <a:p>
-            <a:r>
-              <a:rPr lang="en-US" sz="3000" b="1"/>
-              <a:t>Goal: </a:t>
-            </a:r>
-            <a:r>
-              <a:rPr lang="en-US" sz="3000"/>
-              <a:t>Per-patient </a:t>
-            </a:r>
-            <a:r>
-              <a:rPr lang="en-US" sz="3000" b="1"/>
-              <a:t>binary </a:t>
-            </a:r>
-            <a:r>
-              <a:rPr lang="en-US" sz="3000"/>
-              <a:t>diagnosis (positive / negative)</a:t>
-            </a:r>
-          </a:p>
-          <a:p>
-            <a:endParaRPr lang="en-US" sz="3000"/>
-          </a:p>
-          <a:p>
-            <a:r>
-              <a:rPr lang="en-US" sz="3000" b="1"/>
-              <a:t>Why: </a:t>
-            </a:r>
-            <a:r>
-              <a:rPr lang="en-US" sz="3000"/>
-              <a:t>Compare different pretrained models, conservatively flag “low/</a:t>
-            </a:r>
-            <a:r>
-              <a:rPr lang="en-US" sz="3000" err="1"/>
-              <a:t>baixa</a:t>
-            </a:r>
-            <a:r>
-              <a:rPr lang="en-US" sz="3000"/>
-              <a:t>” patients as positive</a:t>
-            </a:r>
-          </a:p>
-        </p:txBody>
-      </p:sp>
-      <p:sp>
-        <p:nvSpPr>
-          <p:cNvPr id="16" name="TextBox 15">
-            <a:extLst>
-              <a:ext uri="{FF2B5EF4-FFF2-40B4-BE49-F238E27FC236}">
-                <a16:creationId xmlns:a16="http://schemas.microsoft.com/office/drawing/2014/main" id="{9B7782B6-A8A4-C346-DCAE-8EB0DB7DB868}"/>
-              </a:ext>
-            </a:extLst>
-          </p:cNvPr>
-          <p:cNvSpPr txBox="1"/>
-          <p:nvPr/>
-        </p:nvSpPr>
-        <p:spPr>
-          <a:xfrm>
-            <a:off x="1175455" y="2287211"/>
-            <a:ext cx="7825326" cy="553998"/>
-          </a:xfrm>
-          <a:prstGeom prst="rect">
-            <a:avLst/>
-          </a:prstGeom>
-          <a:noFill/>
-        </p:spPr>
-        <p:txBody>
-          <a:bodyPr wrap="square" rtlCol="0">
-            <a:spAutoFit/>
-          </a:bodyPr>
-          <a:lstStyle/>
-          <a:p>
-            <a:r>
-              <a:rPr lang="en-US" sz="3000" u="sng" err="1"/>
-              <a:t>ConvNeXt</a:t>
-            </a:r>
-            <a:r>
-              <a:rPr lang="en-US" sz="3000" u="sng"/>
-              <a:t>-tiny</a:t>
-            </a:r>
-            <a:r>
-              <a:rPr lang="en-US" sz="3000"/>
-              <a:t> with RF-based diagnosis</a:t>
-            </a:r>
-            <a:endParaRPr lang="en-US" sz="3000" b="1" u="sng"/>
-          </a:p>
-        </p:txBody>
-      </p:sp>
-    </p:spTree>
-    <p:extLst>
-      <p:ext uri="{BB962C8B-B14F-4D97-AF65-F5344CB8AC3E}">
-        <p14:creationId xmlns:p14="http://schemas.microsoft.com/office/powerpoint/2010/main" val="2634110997"/>
-      </p:ext>
-    </p:extLst>
-  </p:cSld>
-  <p:clrMapOvr>
-    <a:masterClrMapping/>
-  </p:clrMapOvr>
-</p:sld>
-</file>
-
-<file path=ppt/slides/slide8.xml><?xml version="1.0" encoding="utf-8"?>
-<p:sld xmlns:a="http://schemas.openxmlformats.org/drawingml/2006/main" xmlns:r="http://schemas.openxmlformats.org/officeDocument/2006/relationships" xmlns:p="http://schemas.openxmlformats.org/presentationml/2006/main">
-  <p:cSld>
-    <p:bg>
-      <p:bgPr>
-        <a:solidFill>
-          <a:schemeClr val="accent6">
-            <a:lumMod val="20000"/>
-            <a:lumOff val="80000"/>
-          </a:schemeClr>
         </a:solidFill>
         <a:effectLst/>
       </p:bgPr>
@@ -10051,58 +8216,28 @@
           <a:lstStyle/>
           <a:p>
             <a:r>
-              <a:rPr lang="en-US" sz="5200"/>
-              <a:t>Method 1 Steps Overview</a:t>
-            </a:r>
-          </a:p>
-        </p:txBody>
-      </p:sp>
-      <p:pic>
-        <p:nvPicPr>
-          <p:cNvPr id="3" name="Picture 2">
-            <a:extLst>
-              <a:ext uri="{FF2B5EF4-FFF2-40B4-BE49-F238E27FC236}">
-                <a16:creationId xmlns:a16="http://schemas.microsoft.com/office/drawing/2014/main" id="{8EB5E343-6A95-F818-8652-A4421533E362}"/>
-              </a:ext>
-            </a:extLst>
-          </p:cNvPr>
-          <p:cNvPicPr>
-            <a:picLocks noChangeAspect="1"/>
-          </p:cNvPicPr>
+              <a:rPr lang="en-US" sz="5200" dirty="0"/>
+              <a:t>CNN Steps</a:t>
+            </a:r>
+          </a:p>
+        </p:txBody>
+      </p:sp>
+      <p:sp>
+        <p:nvSpPr>
+          <p:cNvPr id="9" name="TextBox 8">
+            <a:extLst>
+              <a:ext uri="{FF2B5EF4-FFF2-40B4-BE49-F238E27FC236}">
+                <a16:creationId xmlns:a16="http://schemas.microsoft.com/office/drawing/2014/main" id="{F37D45D0-81CB-7E09-4D17-7E26DC899661}"/>
+              </a:ext>
+            </a:extLst>
+          </p:cNvPr>
+          <p:cNvSpPr txBox="1"/>
           <p:nvPr/>
-        </p:nvPicPr>
-        <p:blipFill>
-          <a:blip r:embed="rId2"/>
-          <a:stretch>
-            <a:fillRect/>
-          </a:stretch>
-        </p:blipFill>
+        </p:nvSpPr>
         <p:spPr>
           <a:xfrm>
-            <a:off x="8083994" y="279400"/>
-            <a:ext cx="3987800" cy="6578600"/>
-          </a:xfrm>
-          <a:prstGeom prst="rect">
-            <a:avLst/>
-          </a:prstGeom>
-        </p:spPr>
-      </p:pic>
-      <p:sp>
-        <p:nvSpPr>
-          <p:cNvPr id="9" name="TextBox 8">
-            <a:extLst>
-              <a:ext uri="{FF2B5EF4-FFF2-40B4-BE49-F238E27FC236}">
-                <a16:creationId xmlns:a16="http://schemas.microsoft.com/office/drawing/2014/main" id="{F37D45D0-81CB-7E09-4D17-7E26DC899661}"/>
-              </a:ext>
-            </a:extLst>
-          </p:cNvPr>
-          <p:cNvSpPr txBox="1"/>
-          <p:nvPr/>
-        </p:nvSpPr>
-        <p:spPr>
-          <a:xfrm>
-            <a:off x="120207" y="1098009"/>
-            <a:ext cx="8124892" cy="6093976"/>
+            <a:off x="561022" y="1114380"/>
+            <a:ext cx="11066906" cy="5863144"/>
           </a:xfrm>
           <a:prstGeom prst="rect">
             <a:avLst/>
@@ -10120,8 +8255,8 @@
               <a:buChar char="•"/>
             </a:pPr>
             <a:r>
-              <a:rPr lang="en-US" sz="3000" b="1"/>
-              <a:t>Step 1: Pre-process</a:t>
+              <a:rPr lang="en-US" sz="2500" b="1" dirty="0"/>
+              <a:t>Step 1: Pre-process </a:t>
             </a:r>
           </a:p>
           <a:p>
@@ -10130,28 +8265,70 @@
               <a:buChar char="•"/>
             </a:pPr>
             <a:r>
-              <a:rPr lang="en-US" sz="3000" b="1"/>
-              <a:t> </a:t>
-            </a:r>
-            <a:r>
-              <a:rPr lang="en-US" sz="3000"/>
-              <a:t>Nvidia A40 GPU-optimized </a:t>
-            </a:r>
-            <a:r>
-              <a:rPr lang="en-US" sz="3000" err="1"/>
-              <a:t>Macenko</a:t>
-            </a:r>
-            <a:r>
-              <a:rPr lang="en-US" sz="3000"/>
-              <a:t> normalization, and augment patches dataset (Weakly Supervised Learning)</a:t>
-            </a:r>
+              <a:rPr lang="en-US" sz="2500" dirty="0"/>
+              <a:t>Z-score normalization: dynamically per fold rather than globally (avoids leakage)</a:t>
+            </a:r>
+          </a:p>
+          <a:p>
+            <a:pPr marL="914400" lvl="1" indent="-457200">
+              <a:buFont typeface="Arial" panose="020B0604020202020204" pitchFamily="34" charset="0"/>
+              <a:buChar char="•"/>
+            </a:pPr>
+            <a:r>
+              <a:rPr lang="en-US" sz="2500" dirty="0"/>
+              <a:t>Class balancing for both train and test </a:t>
+            </a:r>
+          </a:p>
+          <a:p>
+            <a:pPr marL="914400" lvl="1" indent="-457200">
+              <a:buFont typeface="Arial" panose="020B0604020202020204" pitchFamily="34" charset="0"/>
+              <a:buChar char="•"/>
+            </a:pPr>
+            <a:endParaRPr lang="en-US" sz="2500" dirty="0"/>
           </a:p>
           <a:p>
             <a:pPr marL="457200" indent="-457200">
               <a:buFont typeface="Arial" panose="020B0604020202020204" pitchFamily="34" charset="0"/>
               <a:buChar char="•"/>
             </a:pPr>
-            <a:endParaRPr lang="en-US" sz="3000"/>
+            <a:r>
+              <a:rPr lang="en-US" sz="2500" b="1" dirty="0"/>
+              <a:t>Step 2: Training	</a:t>
+            </a:r>
+          </a:p>
+          <a:p>
+            <a:pPr marL="914400" lvl="1" indent="-457200">
+              <a:buFont typeface="Arial" panose="020B0604020202020204" pitchFamily="34" charset="0"/>
+              <a:buChar char="•"/>
+            </a:pPr>
+            <a:r>
+              <a:rPr lang="en-US" sz="2500" dirty="0"/>
+              <a:t>Conv1d: “early channel fusion” – looks 1-dimensionally at all 21 EEG electrodes simultaneously</a:t>
+            </a:r>
+          </a:p>
+          <a:p>
+            <a:pPr marL="914400" lvl="1" indent="-457200">
+              <a:buFont typeface="Arial" panose="020B0604020202020204" pitchFamily="34" charset="0"/>
+              <a:buChar char="•"/>
+            </a:pPr>
+            <a:r>
+              <a:rPr lang="en-US" sz="2500" dirty="0"/>
+              <a:t>2 training modes (50-50 Balanced vs. 80-20 Unbalanced) </a:t>
+            </a:r>
+          </a:p>
+          <a:p>
+            <a:pPr marL="914400" lvl="1" indent="-457200">
+              <a:buFont typeface="Arial" panose="020B0604020202020204" pitchFamily="34" charset="0"/>
+              <a:buChar char="•"/>
+            </a:pPr>
+            <a:r>
+              <a:rPr lang="en-US" sz="2500" dirty="0"/>
+              <a:t>Split data over 10 shards due to size</a:t>
+            </a:r>
+          </a:p>
+          <a:p>
+            <a:pPr lvl="1"/>
+            <a:endParaRPr lang="en-US" sz="2500" dirty="0"/>
           </a:p>
           <a:p>
             <a:pPr marL="457200" indent="-457200">
@@ -10159,8 +8336,8 @@
               <a:buChar char="•"/>
             </a:pPr>
             <a:r>
-              <a:rPr lang="en-US" sz="3000" b="1"/>
-              <a:t>Step 2: Training</a:t>
+              <a:rPr lang="en-US" sz="2500" b="1" dirty="0"/>
+              <a:t>Step 3: Classification (window, seizure, patient)</a:t>
             </a:r>
           </a:p>
           <a:p>
@@ -10169,8 +8346,8 @@
               <a:buChar char="•"/>
             </a:pPr>
             <a:r>
-              <a:rPr lang="en-US" sz="3000"/>
-              <a:t> Pre-trained ResNet18 model</a:t>
+              <a:rPr lang="en-US" sz="2500" dirty="0"/>
+              <a:t>Test with both balanced and unbalanced sets</a:t>
             </a:r>
           </a:p>
           <a:p>
@@ -10178,45 +8355,14 @@
               <a:buFont typeface="Arial" panose="020B0604020202020204" pitchFamily="34" charset="0"/>
               <a:buChar char="•"/>
             </a:pPr>
-            <a:endParaRPr lang="en-US" sz="3000"/>
+            <a:endParaRPr lang="en-US" sz="2500" dirty="0"/>
           </a:p>
           <a:p>
             <a:pPr marL="457200" indent="-457200">
               <a:buFont typeface="Arial" panose="020B0604020202020204" pitchFamily="34" charset="0"/>
               <a:buChar char="•"/>
             </a:pPr>
-            <a:r>
-              <a:rPr lang="en-US" sz="3000" b="1"/>
-              <a:t>Step 3: Patient-level pos/neg classification </a:t>
-            </a:r>
-          </a:p>
-          <a:p>
-            <a:pPr marL="914400" lvl="1" indent="-457200">
-              <a:buFont typeface="Arial" panose="020B0604020202020204" pitchFamily="34" charset="0"/>
-              <a:buChar char="•"/>
-            </a:pPr>
-            <a:r>
-              <a:rPr lang="en-US" sz="3000"/>
-              <a:t>Logic gates</a:t>
-            </a:r>
-          </a:p>
-          <a:p>
-            <a:pPr lvl="1"/>
-            <a:endParaRPr lang="en-US" sz="3000"/>
-          </a:p>
-          <a:p>
-            <a:pPr marL="457200" indent="-457200">
-              <a:buFont typeface="Arial" panose="020B0604020202020204" pitchFamily="34" charset="0"/>
-              <a:buChar char="•"/>
-            </a:pPr>
-            <a:endParaRPr lang="en-US" sz="3000"/>
-          </a:p>
-          <a:p>
-            <a:pPr marL="457200" indent="-457200">
-              <a:buFont typeface="Arial" panose="020B0604020202020204" pitchFamily="34" charset="0"/>
-              <a:buChar char="•"/>
-            </a:pPr>
-            <a:endParaRPr lang="en-US" sz="3000"/>
+            <a:endParaRPr lang="en-US" sz="2500" dirty="0"/>
           </a:p>
         </p:txBody>
       </p:sp>
@@ -10233,16 +8379,13 @@
 </p:sld>
 </file>
 
-<file path=ppt/slides/slide9.xml><?xml version="1.0" encoding="utf-8"?>
-<p:sld xmlns:a="http://schemas.openxmlformats.org/drawingml/2006/main" xmlns:r="http://schemas.openxmlformats.org/officeDocument/2006/relationships" xmlns:p="http://schemas.openxmlformats.org/presentationml/2006/main" show="0">
+<file path=ppt/slides/slide8.xml><?xml version="1.0" encoding="utf-8"?>
+<p:sld xmlns:a="http://schemas.openxmlformats.org/drawingml/2006/main" xmlns:r="http://schemas.openxmlformats.org/officeDocument/2006/relationships" xmlns:p="http://schemas.openxmlformats.org/presentationml/2006/main">
   <p:cSld>
     <p:bg>
       <p:bgPr>
         <a:solidFill>
-          <a:schemeClr val="accent1">
-            <a:lumMod val="20000"/>
-            <a:lumOff val="80000"/>
-          </a:schemeClr>
+          <a:schemeClr val="bg1"/>
         </a:solidFill>
         <a:effectLst/>
       </p:bgPr>
@@ -10252,7 +8395,7 @@
         <p:cNvPr id="1" name="">
           <a:extLst>
             <a:ext uri="{FF2B5EF4-FFF2-40B4-BE49-F238E27FC236}">
-              <a16:creationId xmlns:a16="http://schemas.microsoft.com/office/drawing/2014/main" id="{C3A1FBA6-61DF-D305-F571-0D94B3FB0BA5}"/>
+              <a16:creationId xmlns:a16="http://schemas.microsoft.com/office/drawing/2014/main" id="{FBB47EFB-DE2C-42CD-53D7-97F8025BCA5C}"/>
             </a:ext>
           </a:extLst>
         </p:cNvPr>
@@ -10267,25 +8410,85 @@
           <a:chExt cx="0" cy="0"/>
         </a:xfrm>
       </p:grpSpPr>
-      <p:sp>
-        <p:nvSpPr>
-          <p:cNvPr id="2" name="Title 1">
-            <a:extLst>
-              <a:ext uri="{FF2B5EF4-FFF2-40B4-BE49-F238E27FC236}">
-                <a16:creationId xmlns:a16="http://schemas.microsoft.com/office/drawing/2014/main" id="{DA3213B3-9DFB-56B7-3427-167716A6EF9C}"/>
-              </a:ext>
-            </a:extLst>
-          </p:cNvPr>
-          <p:cNvSpPr>
-            <a:spLocks noGrp="1"/>
-          </p:cNvSpPr>
-          <p:nvPr>
-            <p:ph type="title"/>
+      <p:sp useBgFill="1">
+        <p:nvSpPr>
+          <p:cNvPr id="2074" name="Rectangle 2073">
+            <a:extLst>
+              <a:ext uri="{FF2B5EF4-FFF2-40B4-BE49-F238E27FC236}">
+                <a16:creationId xmlns:a16="http://schemas.microsoft.com/office/drawing/2014/main" id="{42558A07-D6F3-4FA4-2448-C6503BAD6E75}"/>
+              </a:ext>
+              <a:ext uri="{C183D7F6-B498-43B3-948B-1728B52AA6E4}">
+                <adec:decorative xmlns:adec="http://schemas.microsoft.com/office/drawing/2017/decorative" val="1"/>
+              </a:ext>
+            </a:extLst>
+          </p:cNvPr>
+          <p:cNvSpPr>
+            <a:spLocks noGrp="1" noRot="1" noChangeAspect="1" noMove="1" noResize="1" noEditPoints="1" noAdjustHandles="1" noChangeArrowheads="1" noChangeShapeType="1" noTextEdit="1"/>
+          </p:cNvSpPr>
+          <p:nvPr>
+            <p:extLst>
+              <p:ext uri="{386F3935-93C4-4BCD-93E2-E3B085C9AB24}">
+                <p16:designElem xmlns:p16="http://schemas.microsoft.com/office/powerpoint/2015/main" val="1"/>
+              </p:ext>
+            </p:extLst>
           </p:nvPr>
         </p:nvSpPr>
         <p:spPr>
           <a:xfrm>
-            <a:off x="282256" y="-16373"/>
+            <a:off x="-1" y="0"/>
+            <a:ext cx="12188952" cy="6858000"/>
+          </a:xfrm>
+          <a:prstGeom prst="rect">
+            <a:avLst/>
+          </a:prstGeom>
+          <a:ln>
+            <a:noFill/>
+          </a:ln>
+        </p:spPr>
+        <p:style>
+          <a:lnRef idx="2">
+            <a:schemeClr val="accent1">
+              <a:shade val="50000"/>
+            </a:schemeClr>
+          </a:lnRef>
+          <a:fillRef idx="1">
+            <a:schemeClr val="accent1"/>
+          </a:fillRef>
+          <a:effectRef idx="0">
+            <a:schemeClr val="accent1"/>
+          </a:effectRef>
+          <a:fontRef idx="minor">
+            <a:schemeClr val="lt1"/>
+          </a:fontRef>
+        </p:style>
+        <p:txBody>
+          <a:bodyPr rtlCol="0" anchor="ctr"/>
+          <a:lstStyle/>
+          <a:p>
+            <a:pPr algn="ctr"/>
+            <a:endParaRPr lang="en-US"/>
+          </a:p>
+        </p:txBody>
+      </p:sp>
+      <p:sp>
+        <p:nvSpPr>
+          <p:cNvPr id="2" name="Title 1">
+            <a:extLst>
+              <a:ext uri="{FF2B5EF4-FFF2-40B4-BE49-F238E27FC236}">
+                <a16:creationId xmlns:a16="http://schemas.microsoft.com/office/drawing/2014/main" id="{E53C7165-D489-5A46-B643-5518BA348781}"/>
+              </a:ext>
+            </a:extLst>
+          </p:cNvPr>
+          <p:cNvSpPr>
+            <a:spLocks noGrp="1"/>
+          </p:cNvSpPr>
+          <p:nvPr>
+            <p:ph type="title"/>
+          </p:nvPr>
+        </p:nvSpPr>
+        <p:spPr>
+          <a:xfrm>
+            <a:off x="28575" y="-252099"/>
             <a:ext cx="9795638" cy="1114380"/>
           </a:xfrm>
         </p:spPr>
@@ -10296,64 +8499,18 @@
           <a:lstStyle/>
           <a:p>
             <a:r>
-              <a:rPr lang="en-US" sz="5200"/>
-              <a:t>Method 1 Details – Steps 1 + 2</a:t>
-            </a:r>
-          </a:p>
-        </p:txBody>
-      </p:sp>
-      <p:pic>
-        <p:nvPicPr>
-          <p:cNvPr id="2050" name="Picture 2">
-            <a:extLst>
-              <a:ext uri="{FF2B5EF4-FFF2-40B4-BE49-F238E27FC236}">
-                <a16:creationId xmlns:a16="http://schemas.microsoft.com/office/drawing/2014/main" id="{A4DF74FB-1135-C313-39B0-E6551F3AEF17}"/>
-              </a:ext>
-            </a:extLst>
-          </p:cNvPr>
-          <p:cNvPicPr>
-            <a:picLocks noChangeAspect="1" noChangeArrowheads="1"/>
-          </p:cNvPicPr>
-          <p:nvPr/>
-        </p:nvPicPr>
-        <p:blipFill>
-          <a:blip r:embed="rId2">
-            <a:extLst>
-              <a:ext uri="{28A0092B-C50C-407E-A947-70E740481C1C}">
-                <a14:useLocalDpi xmlns:a14="http://schemas.microsoft.com/office/drawing/2010/main" val="0"/>
-              </a:ext>
-            </a:extLst>
-          </a:blip>
-          <a:stretch>
-            <a:fillRect/>
-          </a:stretch>
-        </p:blipFill>
-        <p:spPr bwMode="auto">
-          <a:xfrm>
-            <a:off x="277532" y="3359209"/>
-            <a:ext cx="4420161" cy="3409891"/>
-          </a:xfrm>
-          <a:prstGeom prst="rect">
-            <a:avLst/>
-          </a:prstGeom>
-          <a:noFill/>
-          <a:extLst>
-            <a:ext uri="{909E8E84-426E-40DD-AFC4-6F175D3DCCD1}">
-              <a14:hiddenFill xmlns:a14="http://schemas.microsoft.com/office/drawing/2010/main">
-                <a:solidFill>
-                  <a:srgbClr val="FFFFFF"/>
-                </a:solidFill>
-              </a14:hiddenFill>
-            </a:ext>
-          </a:extLst>
-        </p:spPr>
-      </p:pic>
+              <a:rPr lang="en-US" sz="5200" dirty="0"/>
+              <a:t>Experimental Design</a:t>
+            </a:r>
+          </a:p>
+        </p:txBody>
+      </p:sp>
       <p:sp>
         <p:nvSpPr>
           <p:cNvPr id="9" name="TextBox 8">
             <a:extLst>
               <a:ext uri="{FF2B5EF4-FFF2-40B4-BE49-F238E27FC236}">
-                <a16:creationId xmlns:a16="http://schemas.microsoft.com/office/drawing/2014/main" id="{5BC68EF2-CE73-CACC-178C-1499A75490C3}"/>
+                <a16:creationId xmlns:a16="http://schemas.microsoft.com/office/drawing/2014/main" id="{4853E6AE-7496-D488-61CE-7B6ED6227727}"/>
               </a:ext>
             </a:extLst>
           </p:cNvPr>
@@ -10362,8 +8519,8 @@
         </p:nvSpPr>
         <p:spPr>
           <a:xfrm>
-            <a:off x="267266" y="1142977"/>
-            <a:ext cx="11787824" cy="2246769"/>
+            <a:off x="220219" y="733692"/>
+            <a:ext cx="11066906" cy="3785652"/>
           </a:xfrm>
           <a:prstGeom prst="rect">
             <a:avLst/>
@@ -10381,20 +8538,16 @@
               <a:buChar char="•"/>
             </a:pPr>
             <a:r>
-              <a:rPr lang="en-US" sz="2800" err="1"/>
-              <a:t>Macenko</a:t>
-            </a:r>
-            <a:r>
-              <a:rPr lang="en-US" sz="2800"/>
-              <a:t> normalization and image transformation standardizes images to force model to detect true </a:t>
-            </a:r>
-            <a:r>
-              <a:rPr lang="en-US" sz="2800" i="1"/>
-              <a:t>H. pylori</a:t>
-            </a:r>
-            <a:r>
-              <a:rPr lang="en-US" sz="2800"/>
-              <a:t> features </a:t>
+              <a:rPr lang="en-US" sz="3000" dirty="0"/>
+              <a:t>Dataset is </a:t>
+            </a:r>
+            <a:r>
+              <a:rPr lang="en-US" sz="3000" b="1" dirty="0"/>
+              <a:t>very</a:t>
+            </a:r>
+            <a:r>
+              <a:rPr lang="en-US" sz="3000" dirty="0"/>
+              <a:t> unbalanced (~85% normal vs. 15% seizure) </a:t>
             </a:r>
           </a:p>
           <a:p>
@@ -10403,28 +8556,66 @@
               <a:buChar char="•"/>
             </a:pPr>
             <a:r>
-              <a:rPr lang="en-US" sz="2800"/>
-              <a:t>Augment data with additional samples to avoid overfitting and minimize impact of image artifacts (debris, etc.) (Train = 100k, Val = 30k)</a:t>
-            </a:r>
+              <a:rPr lang="en-US" sz="3000" dirty="0"/>
+              <a:t>3 × 2 × 2 design for different stress testing of CNN performance</a:t>
+            </a:r>
+          </a:p>
+          <a:p>
+            <a:pPr marL="914400" lvl="1" indent="-457200">
+              <a:buFont typeface="Arial" panose="020B0604020202020204" pitchFamily="34" charset="0"/>
+              <a:buChar char="•"/>
+            </a:pPr>
+            <a:r>
+              <a:rPr lang="en-US" sz="3000" dirty="0"/>
+              <a:t>3 data splits (Window vs. Seizure vs. Patient)</a:t>
+            </a:r>
+          </a:p>
+          <a:p>
+            <a:pPr marL="914400" lvl="1" indent="-457200">
+              <a:buFont typeface="Arial" panose="020B0604020202020204" pitchFamily="34" charset="0"/>
+              <a:buChar char="•"/>
+            </a:pPr>
+            <a:r>
+              <a:rPr lang="en-US" sz="3000" dirty="0"/>
+              <a:t>2 training modes (50-50 Balanced vs. 80-20 Unbalanced) </a:t>
+            </a:r>
+          </a:p>
+          <a:p>
+            <a:pPr marL="914400" lvl="1" indent="-457200">
+              <a:buFont typeface="Arial" panose="020B0604020202020204" pitchFamily="34" charset="0"/>
+              <a:buChar char="•"/>
+            </a:pPr>
+            <a:r>
+              <a:rPr lang="en-US" sz="3000" dirty="0"/>
+              <a:t>2 testing modes (50-50 Balanced vs. 80-20 Unbalanced)</a:t>
+            </a:r>
+          </a:p>
+          <a:p>
+            <a:pPr lvl="1"/>
+            <a:endParaRPr lang="en-US" sz="3000" dirty="0"/>
           </a:p>
           <a:p>
             <a:pPr marL="457200" indent="-457200">
               <a:buFont typeface="Arial" panose="020B0604020202020204" pitchFamily="34" charset="0"/>
               <a:buChar char="•"/>
             </a:pPr>
-            <a:r>
-              <a:rPr lang="en-US" sz="2800"/>
-              <a:t>Trained on 15 epochs to maximize accuracy</a:t>
-            </a:r>
+            <a:endParaRPr lang="en-US" sz="3000" dirty="0"/>
+          </a:p>
+          <a:p>
+            <a:pPr marL="457200" indent="-457200">
+              <a:buFont typeface="Arial" panose="020B0604020202020204" pitchFamily="34" charset="0"/>
+              <a:buChar char="•"/>
+            </a:pPr>
+            <a:endParaRPr lang="en-US" sz="3000" dirty="0"/>
           </a:p>
         </p:txBody>
       </p:sp>
       <p:pic>
         <p:nvPicPr>
-          <p:cNvPr id="3" name="Imagen 2" descr="Gráfico, Gráfico de líneas&#10;&#10;El contenido generado por IA puede ser incorrecto.">
-            <a:extLst>
-              <a:ext uri="{FF2B5EF4-FFF2-40B4-BE49-F238E27FC236}">
-                <a16:creationId xmlns:a16="http://schemas.microsoft.com/office/drawing/2014/main" id="{246F7A79-DA24-1D0F-86A4-A40EFBB61194}"/>
+          <p:cNvPr id="3" name="Picture 2" descr="A diagram of a train&#10;&#10;AI-generated content may be incorrect.">
+            <a:extLst>
+              <a:ext uri="{FF2B5EF4-FFF2-40B4-BE49-F238E27FC236}">
+                <a16:creationId xmlns:a16="http://schemas.microsoft.com/office/drawing/2014/main" id="{69E516BE-305B-69F1-353E-2CDE850F4018}"/>
               </a:ext>
             </a:extLst>
           </p:cNvPr>
@@ -10434,16 +8625,15 @@
           <p:nvPr/>
         </p:nvPicPr>
         <p:blipFill>
-          <a:blip r:embed="rId3"/>
-          <a:srcRect l="8075" r="7143"/>
+          <a:blip r:embed="rId2"/>
           <a:stretch>
             <a:fillRect/>
           </a:stretch>
         </p:blipFill>
         <p:spPr>
           <a:xfrm>
-            <a:off x="5127625" y="3357563"/>
-            <a:ext cx="6928825" cy="3400425"/>
+            <a:off x="2490184" y="3114691"/>
+            <a:ext cx="7208582" cy="3743309"/>
           </a:xfrm>
           <a:prstGeom prst="rect">
             <a:avLst/>
@@ -10453,7 +8643,146 @@
     </p:spTree>
     <p:extLst>
       <p:ext uri="{BB962C8B-B14F-4D97-AF65-F5344CB8AC3E}">
-        <p14:creationId xmlns:p14="http://schemas.microsoft.com/office/powerpoint/2010/main" val="767452580"/>
+        <p14:creationId xmlns:p14="http://schemas.microsoft.com/office/powerpoint/2010/main" val="3394601628"/>
+      </p:ext>
+    </p:extLst>
+  </p:cSld>
+  <p:clrMapOvr>
+    <a:masterClrMapping/>
+  </p:clrMapOvr>
+</p:sld>
+</file>
+
+<file path=ppt/slides/slide9.xml><?xml version="1.0" encoding="utf-8"?>
+<p:sld xmlns:a="http://schemas.openxmlformats.org/drawingml/2006/main" xmlns:r="http://schemas.openxmlformats.org/officeDocument/2006/relationships" xmlns:p="http://schemas.openxmlformats.org/presentationml/2006/main">
+  <p:cSld>
+    <p:bg>
+      <p:bgPr>
+        <a:solidFill>
+          <a:schemeClr val="bg1"/>
+        </a:solidFill>
+        <a:effectLst/>
+      </p:bgPr>
+    </p:bg>
+    <p:spTree>
+      <p:nvGrpSpPr>
+        <p:cNvPr id="1" name="">
+          <a:extLst>
+            <a:ext uri="{FF2B5EF4-FFF2-40B4-BE49-F238E27FC236}">
+              <a16:creationId xmlns:a16="http://schemas.microsoft.com/office/drawing/2014/main" id="{5351E7BC-B0F2-C3A8-63E2-FBCF0434360E}"/>
+            </a:ext>
+          </a:extLst>
+        </p:cNvPr>
+        <p:cNvGrpSpPr/>
+        <p:nvPr/>
+      </p:nvGrpSpPr>
+      <p:grpSpPr>
+        <a:xfrm>
+          <a:off x="0" y="0"/>
+          <a:ext cx="0" cy="0"/>
+          <a:chOff x="0" y="0"/>
+          <a:chExt cx="0" cy="0"/>
+        </a:xfrm>
+      </p:grpSpPr>
+      <p:sp>
+        <p:nvSpPr>
+          <p:cNvPr id="2" name="Title 1">
+            <a:extLst>
+              <a:ext uri="{FF2B5EF4-FFF2-40B4-BE49-F238E27FC236}">
+                <a16:creationId xmlns:a16="http://schemas.microsoft.com/office/drawing/2014/main" id="{7DD79E17-236A-6E63-F8FF-C80AD64F69E0}"/>
+              </a:ext>
+            </a:extLst>
+          </p:cNvPr>
+          <p:cNvSpPr>
+            <a:spLocks noGrp="1"/>
+          </p:cNvSpPr>
+          <p:nvPr>
+            <p:ph type="title"/>
+          </p:nvPr>
+        </p:nvSpPr>
+        <p:spPr>
+          <a:xfrm>
+            <a:off x="145415" y="-157162"/>
+            <a:ext cx="10515600" cy="1325563"/>
+          </a:xfrm>
+        </p:spPr>
+        <p:txBody>
+          <a:bodyPr>
+            <a:normAutofit/>
+          </a:bodyPr>
+          <a:lstStyle/>
+          <a:p>
+            <a:r>
+              <a:rPr lang="en-US" sz="4000" dirty="0"/>
+              <a:t>Results: Understanding Training Process</a:t>
+            </a:r>
+          </a:p>
+        </p:txBody>
+      </p:sp>
+      <p:pic>
+        <p:nvPicPr>
+          <p:cNvPr id="3" name="Picture 2" descr="A graph of a person and person&#10;&#10;AI-generated content may be incorrect.">
+            <a:extLst>
+              <a:ext uri="{FF2B5EF4-FFF2-40B4-BE49-F238E27FC236}">
+                <a16:creationId xmlns:a16="http://schemas.microsoft.com/office/drawing/2014/main" id="{12963C76-D579-ED1C-E29D-CA93EDF485E0}"/>
+              </a:ext>
+            </a:extLst>
+          </p:cNvPr>
+          <p:cNvPicPr>
+            <a:picLocks noChangeAspect="1"/>
+          </p:cNvPicPr>
+          <p:nvPr/>
+        </p:nvPicPr>
+        <p:blipFill>
+          <a:blip r:embed="rId2"/>
+          <a:stretch>
+            <a:fillRect/>
+          </a:stretch>
+        </p:blipFill>
+        <p:spPr>
+          <a:xfrm>
+            <a:off x="145415" y="698141"/>
+            <a:ext cx="7394823" cy="2982913"/>
+          </a:xfrm>
+          <a:prstGeom prst="rect">
+            <a:avLst/>
+          </a:prstGeom>
+        </p:spPr>
+      </p:pic>
+      <p:pic>
+        <p:nvPicPr>
+          <p:cNvPr id="4" name="Picture 3" descr="A screenshot of a graph&#10;&#10;AI-generated content may be incorrect.">
+            <a:extLst>
+              <a:ext uri="{FF2B5EF4-FFF2-40B4-BE49-F238E27FC236}">
+                <a16:creationId xmlns:a16="http://schemas.microsoft.com/office/drawing/2014/main" id="{B5A393D9-3AE4-E496-CA9F-E0A5A8BA966C}"/>
+              </a:ext>
+            </a:extLst>
+          </p:cNvPr>
+          <p:cNvPicPr>
+            <a:picLocks noChangeAspect="1"/>
+          </p:cNvPicPr>
+          <p:nvPr/>
+        </p:nvPicPr>
+        <p:blipFill>
+          <a:blip r:embed="rId3"/>
+          <a:stretch>
+            <a:fillRect/>
+          </a:stretch>
+        </p:blipFill>
+        <p:spPr>
+          <a:xfrm>
+            <a:off x="4057139" y="3553694"/>
+            <a:ext cx="7262812" cy="3304306"/>
+          </a:xfrm>
+          <a:prstGeom prst="rect">
+            <a:avLst/>
+          </a:prstGeom>
+        </p:spPr>
+      </p:pic>
+    </p:spTree>
+    <p:extLst>
+      <p:ext uri="{BB962C8B-B14F-4D97-AF65-F5344CB8AC3E}">
+        <p14:creationId xmlns:p14="http://schemas.microsoft.com/office/powerpoint/2010/main" val="786601153"/>
       </p:ext>
     </p:extLst>
   </p:cSld>

--- a/Group 3 Seizures Deep Learning Presentation.pptx
+++ b/Group 3 Seizures Deep Learning Presentation.pptx
@@ -5,7 +5,7 @@
     <p:sldMasterId id="2147483756" r:id="rId1"/>
   </p:sldMasterIdLst>
   <p:notesMasterIdLst>
-    <p:notesMasterId r:id="rId16"/>
+    <p:notesMasterId r:id="rId17"/>
   </p:notesMasterIdLst>
   <p:sldIdLst>
     <p:sldId id="256" r:id="rId2"/>
@@ -14,14 +14,15 @@
     <p:sldId id="263" r:id="rId5"/>
     <p:sldId id="277" r:id="rId6"/>
     <p:sldId id="298" r:id="rId7"/>
-    <p:sldId id="278" r:id="rId8"/>
-    <p:sldId id="305" r:id="rId9"/>
-    <p:sldId id="303" r:id="rId10"/>
-    <p:sldId id="285" r:id="rId11"/>
-    <p:sldId id="307" r:id="rId12"/>
-    <p:sldId id="306" r:id="rId13"/>
-    <p:sldId id="288" r:id="rId14"/>
-    <p:sldId id="275" r:id="rId15"/>
+    <p:sldId id="308" r:id="rId8"/>
+    <p:sldId id="278" r:id="rId9"/>
+    <p:sldId id="305" r:id="rId10"/>
+    <p:sldId id="303" r:id="rId11"/>
+    <p:sldId id="285" r:id="rId12"/>
+    <p:sldId id="307" r:id="rId13"/>
+    <p:sldId id="306" r:id="rId14"/>
+    <p:sldId id="288" r:id="rId15"/>
+    <p:sldId id="275" r:id="rId16"/>
   </p:sldIdLst>
   <p:sldSz cx="12192000" cy="6858000"/>
   <p:notesSz cx="6858000" cy="9144000"/>
@@ -927,7 +928,7 @@
           <a:p>
             <a:fld id="{4A3C5CF5-2F08-B740-9061-51D0631E3765}" type="datetimeFigureOut">
               <a:rPr lang="en-US" smtClean="0"/>
-              <a:t>3/24/26</a:t>
+              <a:t>4/24/26</a:t>
             </a:fld>
             <a:endParaRPr lang="en-US"/>
           </a:p>
@@ -1529,7 +1530,7 @@
           <a:p>
             <a:fld id="{BD0EE75B-EF0F-E245-A34A-06675D448390}" type="slidenum">
               <a:rPr lang="en-US" smtClean="0"/>
-              <a:t>10</a:t>
+              <a:t>11</a:t>
             </a:fld>
             <a:endParaRPr lang="en-US"/>
           </a:p>
@@ -1637,7 +1638,7 @@
           <a:p>
             <a:fld id="{BD0EE75B-EF0F-E245-A34A-06675D448390}" type="slidenum">
               <a:rPr lang="en-US" smtClean="0"/>
-              <a:t>11</a:t>
+              <a:t>12</a:t>
             </a:fld>
             <a:endParaRPr lang="en-US"/>
           </a:p>
@@ -1776,7 +1777,7 @@
           <a:p>
             <a:fld id="{BD0EE75B-EF0F-E245-A34A-06675D448390}" type="slidenum">
               <a:rPr lang="en-US" smtClean="0"/>
-              <a:t>12</a:t>
+              <a:t>13</a:t>
             </a:fld>
             <a:endParaRPr lang="en-US"/>
           </a:p>
@@ -1902,7 +1903,7 @@
           <a:p>
             <a:fld id="{BD0EE75B-EF0F-E245-A34A-06675D448390}" type="slidenum">
               <a:rPr lang="en-US" smtClean="0"/>
-              <a:t>13</a:t>
+              <a:t>14</a:t>
             </a:fld>
             <a:endParaRPr lang="en-US"/>
           </a:p>
@@ -2068,7 +2069,7 @@
           <a:p>
             <a:fld id="{947FBD62-AA3B-E74B-8A60-7E8626BB6760}" type="datetimeFigureOut">
               <a:rPr lang="en-US" smtClean="0"/>
-              <a:t>3/24/26</a:t>
+              <a:t>4/24/26</a:t>
             </a:fld>
             <a:endParaRPr lang="en-US"/>
           </a:p>
@@ -2266,7 +2267,7 @@
           <a:p>
             <a:fld id="{947FBD62-AA3B-E74B-8A60-7E8626BB6760}" type="datetimeFigureOut">
               <a:rPr lang="en-US" smtClean="0"/>
-              <a:t>3/24/26</a:t>
+              <a:t>4/24/26</a:t>
             </a:fld>
             <a:endParaRPr lang="en-US"/>
           </a:p>
@@ -2474,7 +2475,7 @@
           <a:p>
             <a:fld id="{947FBD62-AA3B-E74B-8A60-7E8626BB6760}" type="datetimeFigureOut">
               <a:rPr lang="en-US" smtClean="0"/>
-              <a:t>3/24/26</a:t>
+              <a:t>4/24/26</a:t>
             </a:fld>
             <a:endParaRPr lang="en-US"/>
           </a:p>
@@ -2672,7 +2673,7 @@
           <a:p>
             <a:fld id="{947FBD62-AA3B-E74B-8A60-7E8626BB6760}" type="datetimeFigureOut">
               <a:rPr lang="en-US" smtClean="0"/>
-              <a:t>3/24/26</a:t>
+              <a:t>4/24/26</a:t>
             </a:fld>
             <a:endParaRPr lang="en-US"/>
           </a:p>
@@ -2947,7 +2948,7 @@
           <a:p>
             <a:fld id="{947FBD62-AA3B-E74B-8A60-7E8626BB6760}" type="datetimeFigureOut">
               <a:rPr lang="en-US" smtClean="0"/>
-              <a:t>3/24/26</a:t>
+              <a:t>4/24/26</a:t>
             </a:fld>
             <a:endParaRPr lang="en-US"/>
           </a:p>
@@ -3212,7 +3213,7 @@
           <a:p>
             <a:fld id="{947FBD62-AA3B-E74B-8A60-7E8626BB6760}" type="datetimeFigureOut">
               <a:rPr lang="en-US" smtClean="0"/>
-              <a:t>3/24/26</a:t>
+              <a:t>4/24/26</a:t>
             </a:fld>
             <a:endParaRPr lang="en-US"/>
           </a:p>
@@ -3624,7 +3625,7 @@
           <a:p>
             <a:fld id="{947FBD62-AA3B-E74B-8A60-7E8626BB6760}" type="datetimeFigureOut">
               <a:rPr lang="en-US" smtClean="0"/>
-              <a:t>3/24/26</a:t>
+              <a:t>4/24/26</a:t>
             </a:fld>
             <a:endParaRPr lang="en-US"/>
           </a:p>
@@ -3765,7 +3766,7 @@
           <a:p>
             <a:fld id="{947FBD62-AA3B-E74B-8A60-7E8626BB6760}" type="datetimeFigureOut">
               <a:rPr lang="en-US" smtClean="0"/>
-              <a:t>3/24/26</a:t>
+              <a:t>4/24/26</a:t>
             </a:fld>
             <a:endParaRPr lang="en-US"/>
           </a:p>
@@ -3878,7 +3879,7 @@
           <a:p>
             <a:fld id="{947FBD62-AA3B-E74B-8A60-7E8626BB6760}" type="datetimeFigureOut">
               <a:rPr lang="en-US" smtClean="0"/>
-              <a:t>3/24/26</a:t>
+              <a:t>4/24/26</a:t>
             </a:fld>
             <a:endParaRPr lang="en-US"/>
           </a:p>
@@ -4189,7 +4190,7 @@
           <a:p>
             <a:fld id="{947FBD62-AA3B-E74B-8A60-7E8626BB6760}" type="datetimeFigureOut">
               <a:rPr lang="en-US" smtClean="0"/>
-              <a:t>3/24/26</a:t>
+              <a:t>4/24/26</a:t>
             </a:fld>
             <a:endParaRPr lang="en-US"/>
           </a:p>
@@ -4477,7 +4478,7 @@
           <a:p>
             <a:fld id="{947FBD62-AA3B-E74B-8A60-7E8626BB6760}" type="datetimeFigureOut">
               <a:rPr lang="en-US" smtClean="0"/>
-              <a:t>3/24/26</a:t>
+              <a:t>4/24/26</a:t>
             </a:fld>
             <a:endParaRPr lang="en-US"/>
           </a:p>
@@ -4718,7 +4719,7 @@
           <a:p>
             <a:fld id="{947FBD62-AA3B-E74B-8A60-7E8626BB6760}" type="datetimeFigureOut">
               <a:rPr lang="en-US" smtClean="0"/>
-              <a:t>3/24/26</a:t>
+              <a:t>4/24/26</a:t>
             </a:fld>
             <a:endParaRPr lang="en-US"/>
           </a:p>
@@ -5302,6 +5303,145 @@
 </file>
 
 <file path=ppt/slides/slide10.xml><?xml version="1.0" encoding="utf-8"?>
+<p:sld xmlns:a="http://schemas.openxmlformats.org/drawingml/2006/main" xmlns:r="http://schemas.openxmlformats.org/officeDocument/2006/relationships" xmlns:p="http://schemas.openxmlformats.org/presentationml/2006/main">
+  <p:cSld>
+    <p:bg>
+      <p:bgPr>
+        <a:solidFill>
+          <a:schemeClr val="bg1"/>
+        </a:solidFill>
+        <a:effectLst/>
+      </p:bgPr>
+    </p:bg>
+    <p:spTree>
+      <p:nvGrpSpPr>
+        <p:cNvPr id="1" name="">
+          <a:extLst>
+            <a:ext uri="{FF2B5EF4-FFF2-40B4-BE49-F238E27FC236}">
+              <a16:creationId xmlns:a16="http://schemas.microsoft.com/office/drawing/2014/main" id="{5351E7BC-B0F2-C3A8-63E2-FBCF0434360E}"/>
+            </a:ext>
+          </a:extLst>
+        </p:cNvPr>
+        <p:cNvGrpSpPr/>
+        <p:nvPr/>
+      </p:nvGrpSpPr>
+      <p:grpSpPr>
+        <a:xfrm>
+          <a:off x="0" y="0"/>
+          <a:ext cx="0" cy="0"/>
+          <a:chOff x="0" y="0"/>
+          <a:chExt cx="0" cy="0"/>
+        </a:xfrm>
+      </p:grpSpPr>
+      <p:pic>
+        <p:nvPicPr>
+          <p:cNvPr id="3" name="Picture 2" descr="A graph of a person and person&#10;&#10;AI-generated content may be incorrect.">
+            <a:extLst>
+              <a:ext uri="{FF2B5EF4-FFF2-40B4-BE49-F238E27FC236}">
+                <a16:creationId xmlns:a16="http://schemas.microsoft.com/office/drawing/2014/main" id="{12963C76-D579-ED1C-E29D-CA93EDF485E0}"/>
+              </a:ext>
+            </a:extLst>
+          </p:cNvPr>
+          <p:cNvPicPr>
+            <a:picLocks noChangeAspect="1"/>
+          </p:cNvPicPr>
+          <p:nvPr/>
+        </p:nvPicPr>
+        <p:blipFill>
+          <a:blip r:embed="rId2"/>
+          <a:stretch>
+            <a:fillRect/>
+          </a:stretch>
+        </p:blipFill>
+        <p:spPr>
+          <a:xfrm>
+            <a:off x="295044" y="698141"/>
+            <a:ext cx="7394823" cy="2982913"/>
+          </a:xfrm>
+          <a:prstGeom prst="rect">
+            <a:avLst/>
+          </a:prstGeom>
+        </p:spPr>
+      </p:pic>
+      <p:pic>
+        <p:nvPicPr>
+          <p:cNvPr id="4" name="Picture 3" descr="A screenshot of a graph&#10;&#10;AI-generated content may be incorrect.">
+            <a:extLst>
+              <a:ext uri="{FF2B5EF4-FFF2-40B4-BE49-F238E27FC236}">
+                <a16:creationId xmlns:a16="http://schemas.microsoft.com/office/drawing/2014/main" id="{B5A393D9-3AE4-E496-CA9F-E0A5A8BA966C}"/>
+              </a:ext>
+            </a:extLst>
+          </p:cNvPr>
+          <p:cNvPicPr>
+            <a:picLocks noChangeAspect="1"/>
+          </p:cNvPicPr>
+          <p:nvPr/>
+        </p:nvPicPr>
+        <p:blipFill>
+          <a:blip r:embed="rId3"/>
+          <a:stretch>
+            <a:fillRect/>
+          </a:stretch>
+        </p:blipFill>
+        <p:spPr>
+          <a:xfrm>
+            <a:off x="4762933" y="3429000"/>
+            <a:ext cx="7262812" cy="3304306"/>
+          </a:xfrm>
+          <a:prstGeom prst="rect">
+            <a:avLst/>
+          </a:prstGeom>
+        </p:spPr>
+      </p:pic>
+      <p:sp>
+        <p:nvSpPr>
+          <p:cNvPr id="2" name="Title 1">
+            <a:extLst>
+              <a:ext uri="{FF2B5EF4-FFF2-40B4-BE49-F238E27FC236}">
+                <a16:creationId xmlns:a16="http://schemas.microsoft.com/office/drawing/2014/main" id="{7DD79E17-236A-6E63-F8FF-C80AD64F69E0}"/>
+              </a:ext>
+            </a:extLst>
+          </p:cNvPr>
+          <p:cNvSpPr>
+            <a:spLocks noGrp="1"/>
+          </p:cNvSpPr>
+          <p:nvPr>
+            <p:ph type="title"/>
+          </p:nvPr>
+        </p:nvSpPr>
+        <p:spPr>
+          <a:xfrm>
+            <a:off x="145415" y="-157162"/>
+            <a:ext cx="10515600" cy="1325563"/>
+          </a:xfrm>
+        </p:spPr>
+        <p:txBody>
+          <a:bodyPr>
+            <a:normAutofit/>
+          </a:bodyPr>
+          <a:lstStyle/>
+          <a:p>
+            <a:r>
+              <a:rPr lang="en-US" sz="4000" dirty="0"/>
+              <a:t>Results: Understanding Training Process</a:t>
+            </a:r>
+          </a:p>
+        </p:txBody>
+      </p:sp>
+    </p:spTree>
+    <p:extLst>
+      <p:ext uri="{BB962C8B-B14F-4D97-AF65-F5344CB8AC3E}">
+        <p14:creationId xmlns:p14="http://schemas.microsoft.com/office/powerpoint/2010/main" val="786601153"/>
+      </p:ext>
+    </p:extLst>
+  </p:cSld>
+  <p:clrMapOvr>
+    <a:masterClrMapping/>
+  </p:clrMapOvr>
+</p:sld>
+</file>
+
+<file path=ppt/slides/slide11.xml><?xml version="1.0" encoding="utf-8"?>
 <p:sld xmlns:a="http://schemas.openxmlformats.org/drawingml/2006/main" xmlns:r="http://schemas.openxmlformats.org/officeDocument/2006/relationships" xmlns:p="http://schemas.openxmlformats.org/presentationml/2006/main" show="0">
   <p:cSld>
     <p:bg>
@@ -5402,7 +5542,7 @@
 </p:sld>
 </file>
 
-<file path=ppt/slides/slide11.xml><?xml version="1.0" encoding="utf-8"?>
+<file path=ppt/slides/slide12.xml><?xml version="1.0" encoding="utf-8"?>
 <p:sld xmlns:a="http://schemas.openxmlformats.org/drawingml/2006/main" xmlns:r="http://schemas.openxmlformats.org/officeDocument/2006/relationships" xmlns:p="http://schemas.openxmlformats.org/presentationml/2006/main">
   <p:cSld>
     <p:bg>
@@ -5730,7 +5870,7 @@
 </p:sld>
 </file>
 
-<file path=ppt/slides/slide12.xml><?xml version="1.0" encoding="utf-8"?>
+<file path=ppt/slides/slide13.xml><?xml version="1.0" encoding="utf-8"?>
 <p:sld xmlns:a="http://schemas.openxmlformats.org/drawingml/2006/main" xmlns:r="http://schemas.openxmlformats.org/officeDocument/2006/relationships" xmlns:p="http://schemas.openxmlformats.org/presentationml/2006/main" show="0">
   <p:cSld>
     <p:bg>
@@ -5837,7 +5977,7 @@
 </p:sld>
 </file>
 
-<file path=ppt/slides/slide13.xml><?xml version="1.0" encoding="utf-8"?>
+<file path=ppt/slides/slide14.xml><?xml version="1.0" encoding="utf-8"?>
 <p:sld xmlns:a="http://schemas.openxmlformats.org/drawingml/2006/main" xmlns:r="http://schemas.openxmlformats.org/officeDocument/2006/relationships" xmlns:p="http://schemas.openxmlformats.org/presentationml/2006/main">
   <p:cSld>
     <p:bg>
@@ -5944,7 +6084,7 @@
 </p:sld>
 </file>
 
-<file path=ppt/slides/slide14.xml><?xml version="1.0" encoding="utf-8"?>
+<file path=ppt/slides/slide15.xml><?xml version="1.0" encoding="utf-8"?>
 <p:sld xmlns:a="http://schemas.openxmlformats.org/drawingml/2006/main" xmlns:r="http://schemas.openxmlformats.org/officeDocument/2006/relationships" xmlns:p="http://schemas.openxmlformats.org/presentationml/2006/main">
   <p:cSld>
     <p:bg>
@@ -7729,7 +7869,7 @@
 </file>
 
 <file path=ppt/slides/slide5.xml><?xml version="1.0" encoding="utf-8"?>
-<p:sld xmlns:a="http://schemas.openxmlformats.org/drawingml/2006/main" xmlns:r="http://schemas.openxmlformats.org/officeDocument/2006/relationships" xmlns:p="http://schemas.openxmlformats.org/presentationml/2006/main">
+<p:sld xmlns:a="http://schemas.openxmlformats.org/drawingml/2006/main" xmlns:r="http://schemas.openxmlformats.org/officeDocument/2006/relationships" xmlns:p="http://schemas.openxmlformats.org/presentationml/2006/main" show="0">
   <p:cSld>
     <p:bg>
       <p:bgPr>
@@ -8002,7 +8142,7 @@
           <a:p>
             <a:r>
               <a:rPr lang="en-US" dirty="0"/>
-              <a:t>Methodology Overview</a:t>
+              <a:t>CNN Methodology Overview</a:t>
             </a:r>
           </a:p>
         </p:txBody>
@@ -8097,6 +8237,83 @@
 </file>
 
 <file path=ppt/slides/slide7.xml><?xml version="1.0" encoding="utf-8"?>
+<p:sld xmlns:a="http://schemas.openxmlformats.org/drawingml/2006/main" xmlns:r="http://schemas.openxmlformats.org/officeDocument/2006/relationships" xmlns:p="http://schemas.openxmlformats.org/presentationml/2006/main">
+  <p:cSld>
+    <p:bg>
+      <p:bgPr>
+        <a:solidFill>
+          <a:schemeClr val="accent2"/>
+        </a:solidFill>
+        <a:effectLst/>
+      </p:bgPr>
+    </p:bg>
+    <p:spTree>
+      <p:nvGrpSpPr>
+        <p:cNvPr id="1" name="">
+          <a:extLst>
+            <a:ext uri="{FF2B5EF4-FFF2-40B4-BE49-F238E27FC236}">
+              <a16:creationId xmlns:a16="http://schemas.microsoft.com/office/drawing/2014/main" id="{12D7882F-E38D-55D3-208A-6435749327CE}"/>
+            </a:ext>
+          </a:extLst>
+        </p:cNvPr>
+        <p:cNvGrpSpPr/>
+        <p:nvPr/>
+      </p:nvGrpSpPr>
+      <p:grpSpPr>
+        <a:xfrm>
+          <a:off x="0" y="0"/>
+          <a:ext cx="0" cy="0"/>
+          <a:chOff x="0" y="0"/>
+          <a:chExt cx="0" cy="0"/>
+        </a:xfrm>
+      </p:grpSpPr>
+      <p:sp>
+        <p:nvSpPr>
+          <p:cNvPr id="11" name="Title 1">
+            <a:extLst>
+              <a:ext uri="{FF2B5EF4-FFF2-40B4-BE49-F238E27FC236}">
+                <a16:creationId xmlns:a16="http://schemas.microsoft.com/office/drawing/2014/main" id="{33251C04-4FD7-D89A-3B80-9B50811B8964}"/>
+              </a:ext>
+            </a:extLst>
+          </p:cNvPr>
+          <p:cNvSpPr>
+            <a:spLocks noGrp="1"/>
+          </p:cNvSpPr>
+          <p:nvPr>
+            <p:ph type="title"/>
+          </p:nvPr>
+        </p:nvSpPr>
+        <p:spPr>
+          <a:xfrm>
+            <a:off x="223104" y="0"/>
+            <a:ext cx="10515600" cy="1325563"/>
+          </a:xfrm>
+        </p:spPr>
+        <p:txBody>
+          <a:bodyPr/>
+          <a:lstStyle/>
+          <a:p>
+            <a:r>
+              <a:rPr lang="en-US" dirty="0"/>
+              <a:t>LSTM Methodology Overview</a:t>
+            </a:r>
+          </a:p>
+        </p:txBody>
+      </p:sp>
+    </p:spTree>
+    <p:extLst>
+      <p:ext uri="{BB962C8B-B14F-4D97-AF65-F5344CB8AC3E}">
+        <p14:creationId xmlns:p14="http://schemas.microsoft.com/office/powerpoint/2010/main" val="2077160234"/>
+      </p:ext>
+    </p:extLst>
+  </p:cSld>
+  <p:clrMapOvr>
+    <a:masterClrMapping/>
+  </p:clrMapOvr>
+</p:sld>
+</file>
+
+<file path=ppt/slides/slide8.xml><?xml version="1.0" encoding="utf-8"?>
 <p:sld xmlns:a="http://schemas.openxmlformats.org/drawingml/2006/main" xmlns:r="http://schemas.openxmlformats.org/officeDocument/2006/relationships" xmlns:p="http://schemas.openxmlformats.org/presentationml/2006/main">
   <p:cSld>
     <p:bg>
@@ -8379,7 +8596,7 @@
 </p:sld>
 </file>
 
-<file path=ppt/slides/slide8.xml><?xml version="1.0" encoding="utf-8"?>
+<file path=ppt/slides/slide9.xml><?xml version="1.0" encoding="utf-8"?>
 <p:sld xmlns:a="http://schemas.openxmlformats.org/drawingml/2006/main" xmlns:r="http://schemas.openxmlformats.org/officeDocument/2006/relationships" xmlns:p="http://schemas.openxmlformats.org/presentationml/2006/main">
   <p:cSld>
     <p:bg>
@@ -8644,145 +8861,6 @@
     <p:extLst>
       <p:ext uri="{BB962C8B-B14F-4D97-AF65-F5344CB8AC3E}">
         <p14:creationId xmlns:p14="http://schemas.microsoft.com/office/powerpoint/2010/main" val="3394601628"/>
-      </p:ext>
-    </p:extLst>
-  </p:cSld>
-  <p:clrMapOvr>
-    <a:masterClrMapping/>
-  </p:clrMapOvr>
-</p:sld>
-</file>
-
-<file path=ppt/slides/slide9.xml><?xml version="1.0" encoding="utf-8"?>
-<p:sld xmlns:a="http://schemas.openxmlformats.org/drawingml/2006/main" xmlns:r="http://schemas.openxmlformats.org/officeDocument/2006/relationships" xmlns:p="http://schemas.openxmlformats.org/presentationml/2006/main">
-  <p:cSld>
-    <p:bg>
-      <p:bgPr>
-        <a:solidFill>
-          <a:schemeClr val="bg1"/>
-        </a:solidFill>
-        <a:effectLst/>
-      </p:bgPr>
-    </p:bg>
-    <p:spTree>
-      <p:nvGrpSpPr>
-        <p:cNvPr id="1" name="">
-          <a:extLst>
-            <a:ext uri="{FF2B5EF4-FFF2-40B4-BE49-F238E27FC236}">
-              <a16:creationId xmlns:a16="http://schemas.microsoft.com/office/drawing/2014/main" id="{5351E7BC-B0F2-C3A8-63E2-FBCF0434360E}"/>
-            </a:ext>
-          </a:extLst>
-        </p:cNvPr>
-        <p:cNvGrpSpPr/>
-        <p:nvPr/>
-      </p:nvGrpSpPr>
-      <p:grpSpPr>
-        <a:xfrm>
-          <a:off x="0" y="0"/>
-          <a:ext cx="0" cy="0"/>
-          <a:chOff x="0" y="0"/>
-          <a:chExt cx="0" cy="0"/>
-        </a:xfrm>
-      </p:grpSpPr>
-      <p:sp>
-        <p:nvSpPr>
-          <p:cNvPr id="2" name="Title 1">
-            <a:extLst>
-              <a:ext uri="{FF2B5EF4-FFF2-40B4-BE49-F238E27FC236}">
-                <a16:creationId xmlns:a16="http://schemas.microsoft.com/office/drawing/2014/main" id="{7DD79E17-236A-6E63-F8FF-C80AD64F69E0}"/>
-              </a:ext>
-            </a:extLst>
-          </p:cNvPr>
-          <p:cNvSpPr>
-            <a:spLocks noGrp="1"/>
-          </p:cNvSpPr>
-          <p:nvPr>
-            <p:ph type="title"/>
-          </p:nvPr>
-        </p:nvSpPr>
-        <p:spPr>
-          <a:xfrm>
-            <a:off x="145415" y="-157162"/>
-            <a:ext cx="10515600" cy="1325563"/>
-          </a:xfrm>
-        </p:spPr>
-        <p:txBody>
-          <a:bodyPr>
-            <a:normAutofit/>
-          </a:bodyPr>
-          <a:lstStyle/>
-          <a:p>
-            <a:r>
-              <a:rPr lang="en-US" sz="4000" dirty="0"/>
-              <a:t>Results: Understanding Training Process</a:t>
-            </a:r>
-          </a:p>
-        </p:txBody>
-      </p:sp>
-      <p:pic>
-        <p:nvPicPr>
-          <p:cNvPr id="3" name="Picture 2" descr="A graph of a person and person&#10;&#10;AI-generated content may be incorrect.">
-            <a:extLst>
-              <a:ext uri="{FF2B5EF4-FFF2-40B4-BE49-F238E27FC236}">
-                <a16:creationId xmlns:a16="http://schemas.microsoft.com/office/drawing/2014/main" id="{12963C76-D579-ED1C-E29D-CA93EDF485E0}"/>
-              </a:ext>
-            </a:extLst>
-          </p:cNvPr>
-          <p:cNvPicPr>
-            <a:picLocks noChangeAspect="1"/>
-          </p:cNvPicPr>
-          <p:nvPr/>
-        </p:nvPicPr>
-        <p:blipFill>
-          <a:blip r:embed="rId2"/>
-          <a:stretch>
-            <a:fillRect/>
-          </a:stretch>
-        </p:blipFill>
-        <p:spPr>
-          <a:xfrm>
-            <a:off x="145415" y="698141"/>
-            <a:ext cx="7394823" cy="2982913"/>
-          </a:xfrm>
-          <a:prstGeom prst="rect">
-            <a:avLst/>
-          </a:prstGeom>
-        </p:spPr>
-      </p:pic>
-      <p:pic>
-        <p:nvPicPr>
-          <p:cNvPr id="4" name="Picture 3" descr="A screenshot of a graph&#10;&#10;AI-generated content may be incorrect.">
-            <a:extLst>
-              <a:ext uri="{FF2B5EF4-FFF2-40B4-BE49-F238E27FC236}">
-                <a16:creationId xmlns:a16="http://schemas.microsoft.com/office/drawing/2014/main" id="{B5A393D9-3AE4-E496-CA9F-E0A5A8BA966C}"/>
-              </a:ext>
-            </a:extLst>
-          </p:cNvPr>
-          <p:cNvPicPr>
-            <a:picLocks noChangeAspect="1"/>
-          </p:cNvPicPr>
-          <p:nvPr/>
-        </p:nvPicPr>
-        <p:blipFill>
-          <a:blip r:embed="rId3"/>
-          <a:stretch>
-            <a:fillRect/>
-          </a:stretch>
-        </p:blipFill>
-        <p:spPr>
-          <a:xfrm>
-            <a:off x="4057139" y="3553694"/>
-            <a:ext cx="7262812" cy="3304306"/>
-          </a:xfrm>
-          <a:prstGeom prst="rect">
-            <a:avLst/>
-          </a:prstGeom>
-        </p:spPr>
-      </p:pic>
-    </p:spTree>
-    <p:extLst>
-      <p:ext uri="{BB962C8B-B14F-4D97-AF65-F5344CB8AC3E}">
-        <p14:creationId xmlns:p14="http://schemas.microsoft.com/office/powerpoint/2010/main" val="786601153"/>
       </p:ext>
     </p:extLst>
   </p:cSld>

--- a/Group 3 Seizures Deep Learning Presentation.pptx
+++ b/Group 3 Seizures Deep Learning Presentation.pptx
@@ -5,24 +5,26 @@
     <p:sldMasterId id="2147483756" r:id="rId1"/>
   </p:sldMasterIdLst>
   <p:notesMasterIdLst>
-    <p:notesMasterId r:id="rId17"/>
+    <p:notesMasterId r:id="rId19"/>
   </p:notesMasterIdLst>
   <p:sldIdLst>
     <p:sldId id="256" r:id="rId2"/>
     <p:sldId id="299" r:id="rId3"/>
     <p:sldId id="304" r:id="rId4"/>
     <p:sldId id="263" r:id="rId5"/>
-    <p:sldId id="277" r:id="rId6"/>
-    <p:sldId id="298" r:id="rId7"/>
-    <p:sldId id="308" r:id="rId8"/>
-    <p:sldId id="278" r:id="rId9"/>
+    <p:sldId id="309" r:id="rId6"/>
+    <p:sldId id="277" r:id="rId7"/>
+    <p:sldId id="298" r:id="rId8"/>
+    <p:sldId id="308" r:id="rId9"/>
     <p:sldId id="305" r:id="rId10"/>
-    <p:sldId id="303" r:id="rId11"/>
-    <p:sldId id="285" r:id="rId12"/>
-    <p:sldId id="307" r:id="rId13"/>
-    <p:sldId id="306" r:id="rId14"/>
-    <p:sldId id="288" r:id="rId15"/>
-    <p:sldId id="275" r:id="rId16"/>
+    <p:sldId id="278" r:id="rId11"/>
+    <p:sldId id="310" r:id="rId12"/>
+    <p:sldId id="311" r:id="rId13"/>
+    <p:sldId id="285" r:id="rId14"/>
+    <p:sldId id="307" r:id="rId15"/>
+    <p:sldId id="306" r:id="rId16"/>
+    <p:sldId id="288" r:id="rId17"/>
+    <p:sldId id="312" r:id="rId18"/>
   </p:sldIdLst>
   <p:sldSz cx="12192000" cy="6858000"/>
   <p:notesSz cx="6858000" cy="9144000"/>
@@ -132,7 +134,7 @@
 <file path=ppt/revisionInfo.xml><?xml version="1.0" encoding="utf-8"?>
 <p1510:revInfo xmlns:a="http://schemas.openxmlformats.org/drawingml/2006/main" xmlns:r="http://schemas.openxmlformats.org/officeDocument/2006/relationships" xmlns:p1510="http://schemas.microsoft.com/office/powerpoint/2015/10/main">
   <p1510:revLst>
-    <p1510:client id="{1D27F2A1-4458-C142-8427-E414F0F59EC5}" v="88" dt="2026-03-24T21:36:18.486"/>
+    <p1510:client id="{AFF859B1-FF48-EF48-8911-6B9153A704FB}" v="52" dt="2026-04-27T19:55:11.264"/>
   </p1510:revLst>
 </p1510:revInfo>
 </file>
@@ -141,80 +143,57 @@
 <pc:chgInfo xmlns:a="http://schemas.openxmlformats.org/drawingml/2006/main" xmlns:r="http://schemas.openxmlformats.org/officeDocument/2006/relationships" xmlns:ac="http://schemas.microsoft.com/office/drawing/2013/main/command" xmlns:pc="http://schemas.microsoft.com/office/powerpoint/2013/main/command">
   <pc:docChgLst>
     <pc:chgData name="Enoch Shin" userId="c39a6cce-38ff-4294-b6f2-b2b8f4cccef0" providerId="ADAL" clId="{EFE24D46-2511-5DA4-B14A-5403E002676C}"/>
-    <pc:docChg chg="undo redo custSel addSld delSld modSld sldOrd">
-      <pc:chgData name="Enoch Shin" userId="c39a6cce-38ff-4294-b6f2-b2b8f4cccef0" providerId="ADAL" clId="{EFE24D46-2511-5DA4-B14A-5403E002676C}" dt="2026-03-24T21:36:18.486" v="4516"/>
+    <pc:docChg chg="undo custSel addSld delSld modSld sldOrd">
+      <pc:chgData name="Enoch Shin" userId="c39a6cce-38ff-4294-b6f2-b2b8f4cccef0" providerId="ADAL" clId="{EFE24D46-2511-5DA4-B14A-5403E002676C}" dt="2026-04-27T19:55:11.264" v="1820"/>
       <pc:docMkLst>
         <pc:docMk/>
       </pc:docMkLst>
-      <pc:sldChg chg="setBg">
-        <pc:chgData name="Enoch Shin" userId="c39a6cce-38ff-4294-b6f2-b2b8f4cccef0" providerId="ADAL" clId="{EFE24D46-2511-5DA4-B14A-5403E002676C}" dt="2026-03-24T21:36:18.486" v="4516"/>
+      <pc:sldChg chg="modSp mod">
+        <pc:chgData name="Enoch Shin" userId="c39a6cce-38ff-4294-b6f2-b2b8f4cccef0" providerId="ADAL" clId="{EFE24D46-2511-5DA4-B14A-5403E002676C}" dt="2026-04-27T19:49:21.455" v="1717" actId="207"/>
         <pc:sldMkLst>
           <pc:docMk/>
           <pc:sldMk cId="2360785336" sldId="256"/>
         </pc:sldMkLst>
+        <pc:spChg chg="mod">
+          <ac:chgData name="Enoch Shin" userId="c39a6cce-38ff-4294-b6f2-b2b8f4cccef0" providerId="ADAL" clId="{EFE24D46-2511-5DA4-B14A-5403E002676C}" dt="2026-04-27T19:49:21.455" v="1717" actId="207"/>
+          <ac:spMkLst>
+            <pc:docMk/>
+            <pc:sldMk cId="2360785336" sldId="256"/>
+            <ac:spMk id="3" creationId="{80176A87-D84C-E30A-DC74-6C537B820CA3}"/>
+          </ac:spMkLst>
+        </pc:spChg>
       </pc:sldChg>
-      <pc:sldChg chg="addSp modSp mod setBg">
-        <pc:chgData name="Enoch Shin" userId="c39a6cce-38ff-4294-b6f2-b2b8f4cccef0" providerId="ADAL" clId="{EFE24D46-2511-5DA4-B14A-5403E002676C}" dt="2026-03-24T21:36:18.486" v="4516"/>
+      <pc:sldChg chg="modSp mod">
+        <pc:chgData name="Enoch Shin" userId="c39a6cce-38ff-4294-b6f2-b2b8f4cccef0" providerId="ADAL" clId="{EFE24D46-2511-5DA4-B14A-5403E002676C}" dt="2026-04-27T19:51:27.203" v="1764" actId="114"/>
         <pc:sldMkLst>
           <pc:docMk/>
           <pc:sldMk cId="1686003966" sldId="263"/>
         </pc:sldMkLst>
         <pc:spChg chg="mod">
-          <ac:chgData name="Enoch Shin" userId="c39a6cce-38ff-4294-b6f2-b2b8f4cccef0" providerId="ADAL" clId="{EFE24D46-2511-5DA4-B14A-5403E002676C}" dt="2026-03-24T21:13:27.483" v="2440" actId="20577"/>
+          <ac:chgData name="Enoch Shin" userId="c39a6cce-38ff-4294-b6f2-b2b8f4cccef0" providerId="ADAL" clId="{EFE24D46-2511-5DA4-B14A-5403E002676C}" dt="2026-04-27T19:51:27.203" v="1764" actId="114"/>
           <ac:spMkLst>
             <pc:docMk/>
             <pc:sldMk cId="1686003966" sldId="263"/>
             <ac:spMk id="3" creationId="{7B696EE4-429D-F413-7A3F-AE698B1C4B37}"/>
           </ac:spMkLst>
         </pc:spChg>
-        <pc:spChg chg="add mod">
-          <ac:chgData name="Enoch Shin" userId="c39a6cce-38ff-4294-b6f2-b2b8f4cccef0" providerId="ADAL" clId="{EFE24D46-2511-5DA4-B14A-5403E002676C}" dt="2026-03-19T16:44:42.830" v="1242" actId="1076"/>
-          <ac:spMkLst>
-            <pc:docMk/>
-            <pc:sldMk cId="1686003966" sldId="263"/>
-            <ac:spMk id="4" creationId="{F7999505-AE91-8B1A-FC3A-3E9337785D69}"/>
-          </ac:spMkLst>
-        </pc:spChg>
-        <pc:cxnChg chg="add mod">
-          <ac:chgData name="Enoch Shin" userId="c39a6cce-38ff-4294-b6f2-b2b8f4cccef0" providerId="ADAL" clId="{EFE24D46-2511-5DA4-B14A-5403E002676C}" dt="2026-03-19T16:44:39.791" v="1241" actId="208"/>
-          <ac:cxnSpMkLst>
-            <pc:docMk/>
-            <pc:sldMk cId="1686003966" sldId="263"/>
-            <ac:cxnSpMk id="6" creationId="{54C9B681-D77E-06EA-AA3B-ABC49B67B644}"/>
-          </ac:cxnSpMkLst>
-        </pc:cxnChg>
       </pc:sldChg>
-      <pc:sldChg chg="addSp delSp modSp del mod">
-        <pc:chgData name="Enoch Shin" userId="c39a6cce-38ff-4294-b6f2-b2b8f4cccef0" providerId="ADAL" clId="{EFE24D46-2511-5DA4-B14A-5403E002676C}" dt="2026-03-24T21:02:30.669" v="1935" actId="2696"/>
-        <pc:sldMkLst>
-          <pc:docMk/>
-          <pc:sldMk cId="893231155" sldId="271"/>
-        </pc:sldMkLst>
-        <pc:spChg chg="del">
-          <ac:chgData name="Enoch Shin" userId="c39a6cce-38ff-4294-b6f2-b2b8f4cccef0" providerId="ADAL" clId="{EFE24D46-2511-5DA4-B14A-5403E002676C}" dt="2026-03-24T21:02:03.787" v="1931" actId="478"/>
-          <ac:spMkLst>
-            <pc:docMk/>
-            <pc:sldMk cId="893231155" sldId="271"/>
-            <ac:spMk id="3" creationId="{080EB49A-E361-34FE-B214-216DB6B8B4BB}"/>
-          </ac:spMkLst>
-        </pc:spChg>
-        <pc:spChg chg="add mod">
-          <ac:chgData name="Enoch Shin" userId="c39a6cce-38ff-4294-b6f2-b2b8f4cccef0" providerId="ADAL" clId="{EFE24D46-2511-5DA4-B14A-5403E002676C}" dt="2026-03-24T21:02:03.787" v="1931" actId="478"/>
-          <ac:spMkLst>
-            <pc:docMk/>
-            <pc:sldMk cId="893231155" sldId="271"/>
-            <ac:spMk id="5" creationId="{E3A6604C-38D3-9B9F-D477-797F5008AEE1}"/>
-          </ac:spMkLst>
-        </pc:spChg>
-      </pc:sldChg>
-      <pc:sldChg chg="modSp mod setBg">
-        <pc:chgData name="Enoch Shin" userId="c39a6cce-38ff-4294-b6f2-b2b8f4cccef0" providerId="ADAL" clId="{EFE24D46-2511-5DA4-B14A-5403E002676C}" dt="2026-03-24T21:36:18.486" v="4516"/>
+      <pc:sldChg chg="modSp del mod">
+        <pc:chgData name="Enoch Shin" userId="c39a6cce-38ff-4294-b6f2-b2b8f4cccef0" providerId="ADAL" clId="{EFE24D46-2511-5DA4-B14A-5403E002676C}" dt="2026-04-27T19:35:47.307" v="1304" actId="2696"/>
         <pc:sldMkLst>
           <pc:docMk/>
           <pc:sldMk cId="2736603610" sldId="275"/>
         </pc:sldMkLst>
         <pc:spChg chg="mod">
-          <ac:chgData name="Enoch Shin" userId="c39a6cce-38ff-4294-b6f2-b2b8f4cccef0" providerId="ADAL" clId="{EFE24D46-2511-5DA4-B14A-5403E002676C}" dt="2026-03-24T21:35:58.104" v="4515" actId="255"/>
+          <ac:chgData name="Enoch Shin" userId="c39a6cce-38ff-4294-b6f2-b2b8f4cccef0" providerId="ADAL" clId="{EFE24D46-2511-5DA4-B14A-5403E002676C}" dt="2026-04-27T19:35:18.894" v="1291" actId="1076"/>
+          <ac:spMkLst>
+            <pc:docMk/>
+            <pc:sldMk cId="2736603610" sldId="275"/>
+            <ac:spMk id="2" creationId="{F103D429-0790-28FF-4D0E-FCFD54134165}"/>
+          </ac:spMkLst>
+        </pc:spChg>
+        <pc:spChg chg="mod">
+          <ac:chgData name="Enoch Shin" userId="c39a6cce-38ff-4294-b6f2-b2b8f4cccef0" providerId="ADAL" clId="{EFE24D46-2511-5DA4-B14A-5403E002676C}" dt="2026-04-27T19:35:15.460" v="1290" actId="20577"/>
           <ac:spMkLst>
             <pc:docMk/>
             <pc:sldMk cId="2736603610" sldId="275"/>
@@ -222,347 +201,115 @@
           </ac:spMkLst>
         </pc:spChg>
       </pc:sldChg>
-      <pc:sldChg chg="addSp delSp modSp mod setBg">
-        <pc:chgData name="Enoch Shin" userId="c39a6cce-38ff-4294-b6f2-b2b8f4cccef0" providerId="ADAL" clId="{EFE24D46-2511-5DA4-B14A-5403E002676C}" dt="2026-03-24T21:36:18.486" v="4516"/>
-        <pc:sldMkLst>
-          <pc:docMk/>
-          <pc:sldMk cId="3206771332" sldId="277"/>
-        </pc:sldMkLst>
-        <pc:spChg chg="mod">
-          <ac:chgData name="Enoch Shin" userId="c39a6cce-38ff-4294-b6f2-b2b8f4cccef0" providerId="ADAL" clId="{EFE24D46-2511-5DA4-B14A-5403E002676C}" dt="2026-03-19T16:30:22.010" v="798" actId="20577"/>
-          <ac:spMkLst>
-            <pc:docMk/>
-            <pc:sldMk cId="3206771332" sldId="277"/>
-            <ac:spMk id="2" creationId="{919DBFE2-5B08-5F7E-9C34-4E288038744C}"/>
-          </ac:spMkLst>
-        </pc:spChg>
-        <pc:spChg chg="mod">
-          <ac:chgData name="Enoch Shin" userId="c39a6cce-38ff-4294-b6f2-b2b8f4cccef0" providerId="ADAL" clId="{EFE24D46-2511-5DA4-B14A-5403E002676C}" dt="2026-03-24T21:16:30.165" v="2590" actId="27636"/>
-          <ac:spMkLst>
-            <pc:docMk/>
-            <pc:sldMk cId="3206771332" sldId="277"/>
-            <ac:spMk id="3" creationId="{0A55E001-F8E3-3896-F178-D3FED9B70D43}"/>
-          </ac:spMkLst>
-        </pc:spChg>
-        <pc:picChg chg="add mod">
-          <ac:chgData name="Enoch Shin" userId="c39a6cce-38ff-4294-b6f2-b2b8f4cccef0" providerId="ADAL" clId="{EFE24D46-2511-5DA4-B14A-5403E002676C}" dt="2026-03-24T21:14:44.708" v="2445" actId="1076"/>
-          <ac:picMkLst>
-            <pc:docMk/>
-            <pc:sldMk cId="3206771332" sldId="277"/>
-            <ac:picMk id="5" creationId="{D093D101-6FA7-258E-639D-40383ECF4616}"/>
-          </ac:picMkLst>
-        </pc:picChg>
-      </pc:sldChg>
-      <pc:sldChg chg="addSp delSp modSp mod setBg">
-        <pc:chgData name="Enoch Shin" userId="c39a6cce-38ff-4294-b6f2-b2b8f4cccef0" providerId="ADAL" clId="{EFE24D46-2511-5DA4-B14A-5403E002676C}" dt="2026-03-24T21:36:18.486" v="4516"/>
+      <pc:sldChg chg="setBg">
+        <pc:chgData name="Enoch Shin" userId="c39a6cce-38ff-4294-b6f2-b2b8f4cccef0" providerId="ADAL" clId="{EFE24D46-2511-5DA4-B14A-5403E002676C}" dt="2026-04-27T19:53:50.796" v="1818"/>
         <pc:sldMkLst>
           <pc:docMk/>
           <pc:sldMk cId="2120960596" sldId="278"/>
         </pc:sldMkLst>
-        <pc:spChg chg="mod">
-          <ac:chgData name="Enoch Shin" userId="c39a6cce-38ff-4294-b6f2-b2b8f4cccef0" providerId="ADAL" clId="{EFE24D46-2511-5DA4-B14A-5403E002676C}" dt="2026-03-24T21:01:42.094" v="1896" actId="20577"/>
-          <ac:spMkLst>
-            <pc:docMk/>
-            <pc:sldMk cId="2120960596" sldId="278"/>
-            <ac:spMk id="2" creationId="{EE57B110-D5D4-F42D-4362-9F13761A2AC9}"/>
-          </ac:spMkLst>
-        </pc:spChg>
-        <pc:spChg chg="mod">
-          <ac:chgData name="Enoch Shin" userId="c39a6cce-38ff-4294-b6f2-b2b8f4cccef0" providerId="ADAL" clId="{EFE24D46-2511-5DA4-B14A-5403E002676C}" dt="2026-03-24T21:19:57.398" v="3089" actId="1076"/>
-          <ac:spMkLst>
-            <pc:docMk/>
-            <pc:sldMk cId="2120960596" sldId="278"/>
-            <ac:spMk id="9" creationId="{F37D45D0-81CB-7E09-4D17-7E26DC899661}"/>
-          </ac:spMkLst>
-        </pc:spChg>
-        <pc:picChg chg="del mod">
-          <ac:chgData name="Enoch Shin" userId="c39a6cce-38ff-4294-b6f2-b2b8f4cccef0" providerId="ADAL" clId="{EFE24D46-2511-5DA4-B14A-5403E002676C}" dt="2026-03-24T20:54:40.004" v="1517" actId="478"/>
-          <ac:picMkLst>
-            <pc:docMk/>
-            <pc:sldMk cId="2120960596" sldId="278"/>
-            <ac:picMk id="3" creationId="{8EB5E343-6A95-F818-8652-A4421533E362}"/>
-          </ac:picMkLst>
-        </pc:picChg>
-        <pc:picChg chg="add del mod">
-          <ac:chgData name="Enoch Shin" userId="c39a6cce-38ff-4294-b6f2-b2b8f4cccef0" providerId="ADAL" clId="{EFE24D46-2511-5DA4-B14A-5403E002676C}" dt="2026-03-24T21:01:57.101" v="1930" actId="21"/>
-          <ac:picMkLst>
-            <pc:docMk/>
-            <pc:sldMk cId="2120960596" sldId="278"/>
-            <ac:picMk id="4" creationId="{62403299-8C86-D7DD-139A-E2DA2B9B78DA}"/>
-          </ac:picMkLst>
-        </pc:picChg>
-        <pc:picChg chg="add del mod">
-          <ac:chgData name="Enoch Shin" userId="c39a6cce-38ff-4294-b6f2-b2b8f4cccef0" providerId="ADAL" clId="{EFE24D46-2511-5DA4-B14A-5403E002676C}" dt="2026-03-24T21:12:20.759" v="2428" actId="21"/>
-          <ac:picMkLst>
-            <pc:docMk/>
-            <pc:sldMk cId="2120960596" sldId="278"/>
-            <ac:picMk id="5" creationId="{F38E59E5-C9CB-5BFC-5A13-DD0A4478B4FD}"/>
-          </ac:picMkLst>
-        </pc:picChg>
       </pc:sldChg>
-      <pc:sldChg chg="del">
-        <pc:chgData name="Enoch Shin" userId="c39a6cce-38ff-4294-b6f2-b2b8f4cccef0" providerId="ADAL" clId="{EFE24D46-2511-5DA4-B14A-5403E002676C}" dt="2026-03-24T20:53:52.466" v="1500" actId="2696"/>
-        <pc:sldMkLst>
-          <pc:docMk/>
-          <pc:sldMk cId="767452580" sldId="282"/>
-        </pc:sldMkLst>
-      </pc:sldChg>
-      <pc:sldChg chg="del">
-        <pc:chgData name="Enoch Shin" userId="c39a6cce-38ff-4294-b6f2-b2b8f4cccef0" providerId="ADAL" clId="{EFE24D46-2511-5DA4-B14A-5403E002676C}" dt="2026-03-24T20:53:52.477" v="1501" actId="2696"/>
-        <pc:sldMkLst>
-          <pc:docMk/>
-          <pc:sldMk cId="4109261465" sldId="284"/>
-        </pc:sldMkLst>
-      </pc:sldChg>
-      <pc:sldChg chg="addSp delSp modSp mod setBg modShow">
-        <pc:chgData name="Enoch Shin" userId="c39a6cce-38ff-4294-b6f2-b2b8f4cccef0" providerId="ADAL" clId="{EFE24D46-2511-5DA4-B14A-5403E002676C}" dt="2026-03-24T21:36:18.486" v="4516"/>
-        <pc:sldMkLst>
-          <pc:docMk/>
-          <pc:sldMk cId="2238264942" sldId="285"/>
-        </pc:sldMkLst>
-        <pc:spChg chg="mod">
-          <ac:chgData name="Enoch Shin" userId="c39a6cce-38ff-4294-b6f2-b2b8f4cccef0" providerId="ADAL" clId="{EFE24D46-2511-5DA4-B14A-5403E002676C}" dt="2026-03-24T21:22:32.540" v="3237" actId="20577"/>
-          <ac:spMkLst>
-            <pc:docMk/>
-            <pc:sldMk cId="2238264942" sldId="285"/>
-            <ac:spMk id="2" creationId="{312E1568-1ADF-E14C-5869-6889CFE44164}"/>
-          </ac:spMkLst>
-        </pc:spChg>
-        <pc:spChg chg="del">
-          <ac:chgData name="Enoch Shin" userId="c39a6cce-38ff-4294-b6f2-b2b8f4cccef0" providerId="ADAL" clId="{EFE24D46-2511-5DA4-B14A-5403E002676C}" dt="2026-03-24T21:22:02.625" v="3230" actId="478"/>
-          <ac:spMkLst>
-            <pc:docMk/>
-            <pc:sldMk cId="2238264942" sldId="285"/>
-            <ac:spMk id="3" creationId="{C101DA6A-6684-A24C-0F0C-07BFB9E16E78}"/>
-          </ac:spMkLst>
-        </pc:spChg>
-        <pc:spChg chg="del">
-          <ac:chgData name="Enoch Shin" userId="c39a6cce-38ff-4294-b6f2-b2b8f4cccef0" providerId="ADAL" clId="{EFE24D46-2511-5DA4-B14A-5403E002676C}" dt="2026-03-24T21:21:57.015" v="3227" actId="478"/>
-          <ac:spMkLst>
-            <pc:docMk/>
-            <pc:sldMk cId="2238264942" sldId="285"/>
-            <ac:spMk id="4" creationId="{BEEBFB18-4A43-F10F-8147-3CFC1669BE7F}"/>
-          </ac:spMkLst>
-        </pc:spChg>
-        <pc:spChg chg="del">
-          <ac:chgData name="Enoch Shin" userId="c39a6cce-38ff-4294-b6f2-b2b8f4cccef0" providerId="ADAL" clId="{EFE24D46-2511-5DA4-B14A-5403E002676C}" dt="2026-03-24T21:21:57.015" v="3227" actId="478"/>
-          <ac:spMkLst>
-            <pc:docMk/>
-            <pc:sldMk cId="2238264942" sldId="285"/>
-            <ac:spMk id="6" creationId="{D1FBE12A-1E4F-D416-5783-C1EC90A61264}"/>
-          </ac:spMkLst>
-        </pc:spChg>
-        <pc:spChg chg="add del mod">
-          <ac:chgData name="Enoch Shin" userId="c39a6cce-38ff-4294-b6f2-b2b8f4cccef0" providerId="ADAL" clId="{EFE24D46-2511-5DA4-B14A-5403E002676C}" dt="2026-03-24T21:21:58.476" v="3228" actId="478"/>
-          <ac:spMkLst>
-            <pc:docMk/>
-            <pc:sldMk cId="2238264942" sldId="285"/>
-            <ac:spMk id="9" creationId="{4992F13C-AEDB-4545-7146-096902DE92DF}"/>
-          </ac:spMkLst>
-        </pc:spChg>
-        <pc:spChg chg="del">
-          <ac:chgData name="Enoch Shin" userId="c39a6cce-38ff-4294-b6f2-b2b8f4cccef0" providerId="ADAL" clId="{EFE24D46-2511-5DA4-B14A-5403E002676C}" dt="2026-03-24T21:21:57.015" v="3227" actId="478"/>
-          <ac:spMkLst>
-            <pc:docMk/>
-            <pc:sldMk cId="2238264942" sldId="285"/>
-            <ac:spMk id="10" creationId="{187CB16B-AC01-AA01-D01F-41951B8C1D0E}"/>
-          </ac:spMkLst>
-        </pc:spChg>
-        <pc:picChg chg="del">
-          <ac:chgData name="Enoch Shin" userId="c39a6cce-38ff-4294-b6f2-b2b8f4cccef0" providerId="ADAL" clId="{EFE24D46-2511-5DA4-B14A-5403E002676C}" dt="2026-03-24T21:21:57.015" v="3227" actId="478"/>
-          <ac:picMkLst>
-            <pc:docMk/>
-            <pc:sldMk cId="2238264942" sldId="285"/>
-            <ac:picMk id="5" creationId="{92BCEE66-6E6E-2087-4D1E-EF4A9668C527}"/>
-          </ac:picMkLst>
-        </pc:picChg>
-        <pc:picChg chg="del">
-          <ac:chgData name="Enoch Shin" userId="c39a6cce-38ff-4294-b6f2-b2b8f4cccef0" providerId="ADAL" clId="{EFE24D46-2511-5DA4-B14A-5403E002676C}" dt="2026-03-24T21:21:59.296" v="3229" actId="478"/>
-          <ac:picMkLst>
-            <pc:docMk/>
-            <pc:sldMk cId="2238264942" sldId="285"/>
-            <ac:picMk id="7" creationId="{A7B8CEBF-7759-98F1-3340-BCD62BFA5EFB}"/>
-          </ac:picMkLst>
-        </pc:picChg>
-        <pc:picChg chg="del">
-          <ac:chgData name="Enoch Shin" userId="c39a6cce-38ff-4294-b6f2-b2b8f4cccef0" providerId="ADAL" clId="{EFE24D46-2511-5DA4-B14A-5403E002676C}" dt="2026-03-24T21:21:57.015" v="3227" actId="478"/>
-          <ac:picMkLst>
-            <pc:docMk/>
-            <pc:sldMk cId="2238264942" sldId="285"/>
-            <ac:picMk id="11" creationId="{98DB21B7-64A5-8F4F-E398-790AF03F5B2B}"/>
-          </ac:picMkLst>
-        </pc:picChg>
-        <pc:picChg chg="add mod">
-          <ac:chgData name="Enoch Shin" userId="c39a6cce-38ff-4294-b6f2-b2b8f4cccef0" providerId="ADAL" clId="{EFE24D46-2511-5DA4-B14A-5403E002676C}" dt="2026-03-24T21:22:36.661" v="3239" actId="1076"/>
-          <ac:picMkLst>
-            <pc:docMk/>
-            <pc:sldMk cId="2238264942" sldId="285"/>
-            <ac:picMk id="12" creationId="{ACB8BB64-728C-51D8-F705-6F15774D8C65}"/>
-          </ac:picMkLst>
-        </pc:picChg>
-      </pc:sldChg>
-      <pc:sldChg chg="del">
-        <pc:chgData name="Enoch Shin" userId="c39a6cce-38ff-4294-b6f2-b2b8f4cccef0" providerId="ADAL" clId="{EFE24D46-2511-5DA4-B14A-5403E002676C}" dt="2026-03-24T21:02:32.457" v="1936" actId="2696"/>
-        <pc:sldMkLst>
-          <pc:docMk/>
-          <pc:sldMk cId="2781030190" sldId="287"/>
-        </pc:sldMkLst>
-      </pc:sldChg>
-      <pc:sldChg chg="addSp delSp modSp mod setBg">
-        <pc:chgData name="Enoch Shin" userId="c39a6cce-38ff-4294-b6f2-b2b8f4cccef0" providerId="ADAL" clId="{EFE24D46-2511-5DA4-B14A-5403E002676C}" dt="2026-03-24T21:36:18.486" v="4516"/>
+      <pc:sldChg chg="addSp delSp modSp mod modNotesTx">
+        <pc:chgData name="Enoch Shin" userId="c39a6cce-38ff-4294-b6f2-b2b8f4cccef0" providerId="ADAL" clId="{EFE24D46-2511-5DA4-B14A-5403E002676C}" dt="2026-04-27T19:30:54.292" v="879" actId="1076"/>
         <pc:sldMkLst>
           <pc:docMk/>
           <pc:sldMk cId="1225510391" sldId="288"/>
         </pc:sldMkLst>
         <pc:spChg chg="mod">
-          <ac:chgData name="Enoch Shin" userId="c39a6cce-38ff-4294-b6f2-b2b8f4cccef0" providerId="ADAL" clId="{EFE24D46-2511-5DA4-B14A-5403E002676C}" dt="2026-03-24T21:23:46.671" v="3296" actId="1076"/>
+          <ac:chgData name="Enoch Shin" userId="c39a6cce-38ff-4294-b6f2-b2b8f4cccef0" providerId="ADAL" clId="{EFE24D46-2511-5DA4-B14A-5403E002676C}" dt="2026-04-27T19:14:29.213" v="650" actId="20577"/>
           <ac:spMkLst>
             <pc:docMk/>
             <pc:sldMk cId="1225510391" sldId="288"/>
             <ac:spMk id="2" creationId="{93BA0621-7D01-3D9C-9FBD-76124A0535FB}"/>
           </ac:spMkLst>
         </pc:spChg>
-        <pc:picChg chg="del">
-          <ac:chgData name="Enoch Shin" userId="c39a6cce-38ff-4294-b6f2-b2b8f4cccef0" providerId="ADAL" clId="{EFE24D46-2511-5DA4-B14A-5403E002676C}" dt="2026-03-24T21:23:28.874" v="3290" actId="478"/>
+        <pc:spChg chg="add del mod">
+          <ac:chgData name="Enoch Shin" userId="c39a6cce-38ff-4294-b6f2-b2b8f4cccef0" providerId="ADAL" clId="{EFE24D46-2511-5DA4-B14A-5403E002676C}" dt="2026-04-27T19:23:26.960" v="871" actId="478"/>
+          <ac:spMkLst>
+            <pc:docMk/>
+            <pc:sldMk cId="1225510391" sldId="288"/>
+            <ac:spMk id="14" creationId="{6EB46B36-88EC-47A5-9121-553FCBCEA5D4}"/>
+          </ac:spMkLst>
+        </pc:spChg>
+        <pc:picChg chg="add mod modCrop">
+          <ac:chgData name="Enoch Shin" userId="c39a6cce-38ff-4294-b6f2-b2b8f4cccef0" providerId="ADAL" clId="{EFE24D46-2511-5DA4-B14A-5403E002676C}" dt="2026-04-27T19:30:54.292" v="879" actId="1076"/>
           <ac:picMkLst>
             <pc:docMk/>
             <pc:sldMk cId="1225510391" sldId="288"/>
-            <ac:picMk id="3" creationId="{237C5DB4-6888-6701-1857-EFD8BD5D0E3D}"/>
+            <ac:picMk id="3" creationId="{CAB8E395-4E4F-0960-CDC7-5478E09D5D45}"/>
           </ac:picMkLst>
         </pc:picChg>
-        <pc:picChg chg="add del mod">
-          <ac:chgData name="Enoch Shin" userId="c39a6cce-38ff-4294-b6f2-b2b8f4cccef0" providerId="ADAL" clId="{EFE24D46-2511-5DA4-B14A-5403E002676C}" dt="2026-03-24T21:24:15.782" v="3298" actId="478"/>
+        <pc:picChg chg="add mod modCrop">
+          <ac:chgData name="Enoch Shin" userId="c39a6cce-38ff-4294-b6f2-b2b8f4cccef0" providerId="ADAL" clId="{EFE24D46-2511-5DA4-B14A-5403E002676C}" dt="2026-04-27T19:28:22.074" v="872" actId="1076"/>
           <ac:picMkLst>
             <pc:docMk/>
             <pc:sldMk cId="1225510391" sldId="288"/>
-            <ac:picMk id="4" creationId="{9ACEA784-EDA9-9D44-FE72-B180062C5513}"/>
+            <ac:picMk id="4" creationId="{71D082F4-BF2F-7457-FA4B-08505C7EA210}"/>
           </ac:picMkLst>
         </pc:picChg>
-        <pc:picChg chg="add mod">
-          <ac:chgData name="Enoch Shin" userId="c39a6cce-38ff-4294-b6f2-b2b8f4cccef0" providerId="ADAL" clId="{EFE24D46-2511-5DA4-B14A-5403E002676C}" dt="2026-03-24T21:24:20.257" v="3301" actId="1076"/>
+        <pc:picChg chg="del mod">
+          <ac:chgData name="Enoch Shin" userId="c39a6cce-38ff-4294-b6f2-b2b8f4cccef0" providerId="ADAL" clId="{EFE24D46-2511-5DA4-B14A-5403E002676C}" dt="2026-04-27T19:14:30.525" v="652" actId="478"/>
           <ac:picMkLst>
             <pc:docMk/>
             <pc:sldMk cId="1225510391" sldId="288"/>
             <ac:picMk id="5" creationId="{569108FF-44E1-68AB-AAFB-BD969BF1DA4D}"/>
           </ac:picMkLst>
         </pc:picChg>
-      </pc:sldChg>
-      <pc:sldChg chg="del">
-        <pc:chgData name="Enoch Shin" userId="c39a6cce-38ff-4294-b6f2-b2b8f4cccef0" providerId="ADAL" clId="{EFE24D46-2511-5DA4-B14A-5403E002676C}" dt="2026-03-24T20:57:26.780" v="1882" actId="2696"/>
-        <pc:sldMkLst>
-          <pc:docMk/>
-          <pc:sldMk cId="545851158" sldId="291"/>
-        </pc:sldMkLst>
-      </pc:sldChg>
-      <pc:sldChg chg="del">
-        <pc:chgData name="Enoch Shin" userId="c39a6cce-38ff-4294-b6f2-b2b8f4cccef0" providerId="ADAL" clId="{EFE24D46-2511-5DA4-B14A-5403E002676C}" dt="2026-03-24T21:24:36.055" v="3302" actId="2696"/>
-        <pc:sldMkLst>
-          <pc:docMk/>
-          <pc:sldMk cId="588325595" sldId="296"/>
-        </pc:sldMkLst>
-      </pc:sldChg>
-      <pc:sldChg chg="del">
-        <pc:chgData name="Enoch Shin" userId="c39a6cce-38ff-4294-b6f2-b2b8f4cccef0" providerId="ADAL" clId="{EFE24D46-2511-5DA4-B14A-5403E002676C}" dt="2026-03-24T21:24:36.065" v="3303" actId="2696"/>
-        <pc:sldMkLst>
-          <pc:docMk/>
-          <pc:sldMk cId="3637275730" sldId="297"/>
-        </pc:sldMkLst>
+        <pc:picChg chg="add del mod">
+          <ac:chgData name="Enoch Shin" userId="c39a6cce-38ff-4294-b6f2-b2b8f4cccef0" providerId="ADAL" clId="{EFE24D46-2511-5DA4-B14A-5403E002676C}" dt="2026-04-27T19:19:57.843" v="841" actId="478"/>
+          <ac:picMkLst>
+            <pc:docMk/>
+            <pc:sldMk cId="1225510391" sldId="288"/>
+            <ac:picMk id="6" creationId="{68A6B243-742C-4BCE-28E8-B1156651C1C8}"/>
+          </ac:picMkLst>
+        </pc:picChg>
+        <pc:picChg chg="add del mod">
+          <ac:chgData name="Enoch Shin" userId="c39a6cce-38ff-4294-b6f2-b2b8f4cccef0" providerId="ADAL" clId="{EFE24D46-2511-5DA4-B14A-5403E002676C}" dt="2026-04-27T19:18:44.107" v="819" actId="478"/>
+          <ac:picMkLst>
+            <pc:docMk/>
+            <pc:sldMk cId="1225510391" sldId="288"/>
+            <ac:picMk id="2050" creationId="{FBE627E3-A5D3-4078-EC9E-592E387BD022}"/>
+          </ac:picMkLst>
+        </pc:picChg>
+        <pc:inkChg chg="add del">
+          <ac:chgData name="Enoch Shin" userId="c39a6cce-38ff-4294-b6f2-b2b8f4cccef0" providerId="ADAL" clId="{EFE24D46-2511-5DA4-B14A-5403E002676C}" dt="2026-04-27T19:22:59.098" v="868" actId="34122"/>
+          <ac:inkMkLst>
+            <pc:docMk/>
+            <pc:sldMk cId="1225510391" sldId="288"/>
+            <ac:inkMk id="7" creationId="{467DA5BF-1D30-CC70-95CA-F70B6A89C3B1}"/>
+          </ac:inkMkLst>
+        </pc:inkChg>
       </pc:sldChg>
       <pc:sldChg chg="addSp delSp modSp mod setBg">
-        <pc:chgData name="Enoch Shin" userId="c39a6cce-38ff-4294-b6f2-b2b8f4cccef0" providerId="ADAL" clId="{EFE24D46-2511-5DA4-B14A-5403E002676C}" dt="2026-03-24T21:36:18.486" v="4516"/>
+        <pc:chgData name="Enoch Shin" userId="c39a6cce-38ff-4294-b6f2-b2b8f4cccef0" providerId="ADAL" clId="{EFE24D46-2511-5DA4-B14A-5403E002676C}" dt="2026-04-27T19:50:25.766" v="1724"/>
         <pc:sldMkLst>
           <pc:docMk/>
           <pc:sldMk cId="2634110997" sldId="298"/>
         </pc:sldMkLst>
-        <pc:spChg chg="add mod">
-          <ac:chgData name="Enoch Shin" userId="c39a6cce-38ff-4294-b6f2-b2b8f4cccef0" providerId="ADAL" clId="{EFE24D46-2511-5DA4-B14A-5403E002676C}" dt="2026-03-24T21:16:51.516" v="2626" actId="20577"/>
-          <ac:spMkLst>
-            <pc:docMk/>
-            <pc:sldMk cId="2634110997" sldId="298"/>
-            <ac:spMk id="5" creationId="{6EA17400-C680-8583-2D68-D65FB4ED4FA7}"/>
-          </ac:spMkLst>
-        </pc:spChg>
-        <pc:spChg chg="mod">
-          <ac:chgData name="Enoch Shin" userId="c39a6cce-38ff-4294-b6f2-b2b8f4cccef0" providerId="ADAL" clId="{EFE24D46-2511-5DA4-B14A-5403E002676C}" dt="2026-03-24T20:55:38.457" v="1685" actId="1076"/>
-          <ac:spMkLst>
-            <pc:docMk/>
-            <pc:sldMk cId="2634110997" sldId="298"/>
-            <ac:spMk id="11" creationId="{BB29C28C-A96F-77AF-C659-09438D1FF19A}"/>
-          </ac:spMkLst>
-        </pc:spChg>
-        <pc:spChg chg="del">
-          <ac:chgData name="Enoch Shin" userId="c39a6cce-38ff-4294-b6f2-b2b8f4cccef0" providerId="ADAL" clId="{EFE24D46-2511-5DA4-B14A-5403E002676C}" dt="2026-03-24T20:54:06.816" v="1511" actId="478"/>
-          <ac:spMkLst>
-            <pc:docMk/>
-            <pc:sldMk cId="2634110997" sldId="298"/>
-            <ac:spMk id="14" creationId="{36C38740-2ABC-26C3-F818-C13345218A2C}"/>
-          </ac:spMkLst>
-        </pc:spChg>
-        <pc:spChg chg="del">
-          <ac:chgData name="Enoch Shin" userId="c39a6cce-38ff-4294-b6f2-b2b8f4cccef0" providerId="ADAL" clId="{EFE24D46-2511-5DA4-B14A-5403E002676C}" dt="2026-03-24T20:54:06.816" v="1511" actId="478"/>
-          <ac:spMkLst>
-            <pc:docMk/>
-            <pc:sldMk cId="2634110997" sldId="298"/>
-            <ac:spMk id="15" creationId="{41732842-40C3-AB5B-F563-E596CE4E7D26}"/>
-          </ac:spMkLst>
-        </pc:spChg>
-        <pc:spChg chg="del">
-          <ac:chgData name="Enoch Shin" userId="c39a6cce-38ff-4294-b6f2-b2b8f4cccef0" providerId="ADAL" clId="{EFE24D46-2511-5DA4-B14A-5403E002676C}" dt="2026-03-24T20:54:06.816" v="1511" actId="478"/>
-          <ac:spMkLst>
-            <pc:docMk/>
-            <pc:sldMk cId="2634110997" sldId="298"/>
-            <ac:spMk id="16" creationId="{9B7782B6-A8A4-C346-DCAE-8EB0DB7DB868}"/>
-          </ac:spMkLst>
-        </pc:spChg>
-        <pc:picChg chg="add del mod">
-          <ac:chgData name="Enoch Shin" userId="c39a6cce-38ff-4294-b6f2-b2b8f4cccef0" providerId="ADAL" clId="{EFE24D46-2511-5DA4-B14A-5403E002676C}" dt="2026-03-24T20:54:52.311" v="1518" actId="478"/>
+        <pc:picChg chg="add mod">
+          <ac:chgData name="Enoch Shin" userId="c39a6cce-38ff-4294-b6f2-b2b8f4cccef0" providerId="ADAL" clId="{EFE24D46-2511-5DA4-B14A-5403E002676C}" dt="2026-04-27T19:50:00.155" v="1723" actId="1076"/>
           <ac:picMkLst>
             <pc:docMk/>
             <pc:sldMk cId="2634110997" sldId="298"/>
-            <ac:picMk id="2" creationId="{A5B271E7-6BEF-FD94-F7FB-455FB3353EBF}"/>
+            <ac:picMk id="2" creationId="{CF801994-9DCA-ADD7-E37A-47B8475F1A33}"/>
           </ac:picMkLst>
         </pc:picChg>
-        <pc:picChg chg="add mod">
-          <ac:chgData name="Enoch Shin" userId="c39a6cce-38ff-4294-b6f2-b2b8f4cccef0" providerId="ADAL" clId="{EFE24D46-2511-5DA4-B14A-5403E002676C}" dt="2026-03-24T20:54:55.832" v="1524"/>
-          <ac:picMkLst>
-            <pc:docMk/>
-            <pc:sldMk cId="2634110997" sldId="298"/>
-            <ac:picMk id="3" creationId="{7C9CE280-B294-464D-9FB0-1C42338E7756}"/>
-          </ac:picMkLst>
-        </pc:picChg>
-        <pc:picChg chg="add mod">
-          <ac:chgData name="Enoch Shin" userId="c39a6cce-38ff-4294-b6f2-b2b8f4cccef0" providerId="ADAL" clId="{EFE24D46-2511-5DA4-B14A-5403E002676C}" dt="2026-03-24T21:18:54.025" v="2907" actId="1076"/>
+        <pc:picChg chg="del">
+          <ac:chgData name="Enoch Shin" userId="c39a6cce-38ff-4294-b6f2-b2b8f4cccef0" providerId="ADAL" clId="{EFE24D46-2511-5DA4-B14A-5403E002676C}" dt="2026-04-27T19:49:44.563" v="1719" actId="478"/>
           <ac:picMkLst>
             <pc:docMk/>
             <pc:sldMk cId="2634110997" sldId="298"/>
             <ac:picMk id="4" creationId="{16BF2CBD-9212-C0FE-899F-4385F9CB363B}"/>
           </ac:picMkLst>
         </pc:picChg>
-        <pc:picChg chg="del">
-          <ac:chgData name="Enoch Shin" userId="c39a6cce-38ff-4294-b6f2-b2b8f4cccef0" providerId="ADAL" clId="{EFE24D46-2511-5DA4-B14A-5403E002676C}" dt="2026-03-24T20:54:06.816" v="1511" actId="478"/>
-          <ac:picMkLst>
-            <pc:docMk/>
-            <pc:sldMk cId="2634110997" sldId="298"/>
-            <ac:picMk id="12" creationId="{07245003-0A34-B229-2B21-ECD646B1F721}"/>
-          </ac:picMkLst>
-        </pc:picChg>
-        <pc:picChg chg="del">
-          <ac:chgData name="Enoch Shin" userId="c39a6cce-38ff-4294-b6f2-b2b8f4cccef0" providerId="ADAL" clId="{EFE24D46-2511-5DA4-B14A-5403E002676C}" dt="2026-03-24T20:54:06.816" v="1511" actId="478"/>
-          <ac:picMkLst>
-            <pc:docMk/>
-            <pc:sldMk cId="2634110997" sldId="298"/>
-            <ac:picMk id="13" creationId="{5F84BAAB-24A3-2221-E622-CE1EAB3A159D}"/>
-          </ac:picMkLst>
-        </pc:picChg>
       </pc:sldChg>
-      <pc:sldChg chg="modSp setBg">
-        <pc:chgData name="Enoch Shin" userId="c39a6cce-38ff-4294-b6f2-b2b8f4cccef0" providerId="ADAL" clId="{EFE24D46-2511-5DA4-B14A-5403E002676C}" dt="2026-03-24T21:36:18.486" v="4516"/>
+      <pc:sldChg chg="modSp">
+        <pc:chgData name="Enoch Shin" userId="c39a6cce-38ff-4294-b6f2-b2b8f4cccef0" providerId="ADAL" clId="{EFE24D46-2511-5DA4-B14A-5403E002676C}" dt="2026-04-27T19:47:53.071" v="1703" actId="14100"/>
         <pc:sldMkLst>
           <pc:docMk/>
           <pc:sldMk cId="3862204571" sldId="299"/>
         </pc:sldMkLst>
         <pc:picChg chg="mod">
-          <ac:chgData name="Enoch Shin" userId="c39a6cce-38ff-4294-b6f2-b2b8f4cccef0" providerId="ADAL" clId="{EFE24D46-2511-5DA4-B14A-5403E002676C}" dt="2026-03-17T14:31:04.148" v="0" actId="1076"/>
+          <ac:chgData name="Enoch Shin" userId="c39a6cce-38ff-4294-b6f2-b2b8f4cccef0" providerId="ADAL" clId="{EFE24D46-2511-5DA4-B14A-5403E002676C}" dt="2026-04-27T19:47:53.071" v="1703" actId="14100"/>
           <ac:picMkLst>
             <pc:docMk/>
             <pc:sldMk cId="3862204571" sldId="299"/>
@@ -570,274 +317,283 @@
           </ac:picMkLst>
         </pc:picChg>
       </pc:sldChg>
-      <pc:sldChg chg="del">
-        <pc:chgData name="Enoch Shin" userId="c39a6cce-38ff-4294-b6f2-b2b8f4cccef0" providerId="ADAL" clId="{EFE24D46-2511-5DA4-B14A-5403E002676C}" dt="2026-03-24T20:57:27.523" v="1883" actId="2696"/>
-        <pc:sldMkLst>
-          <pc:docMk/>
-          <pc:sldMk cId="1977856822" sldId="300"/>
-        </pc:sldMkLst>
-      </pc:sldChg>
-      <pc:sldChg chg="del">
-        <pc:chgData name="Enoch Shin" userId="c39a6cce-38ff-4294-b6f2-b2b8f4cccef0" providerId="ADAL" clId="{EFE24D46-2511-5DA4-B14A-5403E002676C}" dt="2026-03-24T21:24:37.249" v="3304" actId="2696"/>
-        <pc:sldMkLst>
-          <pc:docMk/>
-          <pc:sldMk cId="380703218" sldId="301"/>
-        </pc:sldMkLst>
-      </pc:sldChg>
-      <pc:sldChg chg="del">
-        <pc:chgData name="Enoch Shin" userId="c39a6cce-38ff-4294-b6f2-b2b8f4cccef0" providerId="ADAL" clId="{EFE24D46-2511-5DA4-B14A-5403E002676C}" dt="2026-03-24T21:22:44.864" v="3240" actId="2696"/>
-        <pc:sldMkLst>
-          <pc:docMk/>
-          <pc:sldMk cId="2607122922" sldId="302"/>
-        </pc:sldMkLst>
-      </pc:sldChg>
-      <pc:sldChg chg="addSp delSp modSp mod setBg">
-        <pc:chgData name="Enoch Shin" userId="c39a6cce-38ff-4294-b6f2-b2b8f4cccef0" providerId="ADAL" clId="{EFE24D46-2511-5DA4-B14A-5403E002676C}" dt="2026-03-24T21:36:18.486" v="4516"/>
+      <pc:sldChg chg="modSp del mod">
+        <pc:chgData name="Enoch Shin" userId="c39a6cce-38ff-4294-b6f2-b2b8f4cccef0" providerId="ADAL" clId="{EFE24D46-2511-5DA4-B14A-5403E002676C}" dt="2026-04-27T18:57:05.296" v="16" actId="2696"/>
         <pc:sldMkLst>
           <pc:docMk/>
           <pc:sldMk cId="786601153" sldId="303"/>
         </pc:sldMkLst>
         <pc:spChg chg="mod">
-          <ac:chgData name="Enoch Shin" userId="c39a6cce-38ff-4294-b6f2-b2b8f4cccef0" providerId="ADAL" clId="{EFE24D46-2511-5DA4-B14A-5403E002676C}" dt="2026-03-24T21:21:29.002" v="3178" actId="255"/>
+          <ac:chgData name="Enoch Shin" userId="c39a6cce-38ff-4294-b6f2-b2b8f4cccef0" providerId="ADAL" clId="{EFE24D46-2511-5DA4-B14A-5403E002676C}" dt="2026-04-27T18:56:48.146" v="6" actId="20577"/>
           <ac:spMkLst>
             <pc:docMk/>
             <pc:sldMk cId="786601153" sldId="303"/>
             <ac:spMk id="2" creationId="{7DD79E17-236A-6E63-F8FF-C80AD64F69E0}"/>
           </ac:spMkLst>
         </pc:spChg>
-        <pc:spChg chg="del">
-          <ac:chgData name="Enoch Shin" userId="c39a6cce-38ff-4294-b6f2-b2b8f4cccef0" providerId="ADAL" clId="{EFE24D46-2511-5DA4-B14A-5403E002676C}" dt="2026-03-24T21:20:42.057" v="3157" actId="478"/>
-          <ac:spMkLst>
-            <pc:docMk/>
-            <pc:sldMk cId="786601153" sldId="303"/>
-            <ac:spMk id="12" creationId="{21F6ADD1-C86E-0F38-1F4B-1FFDD58EE42E}"/>
-          </ac:spMkLst>
-        </pc:spChg>
-        <pc:spChg chg="del">
-          <ac:chgData name="Enoch Shin" userId="c39a6cce-38ff-4294-b6f2-b2b8f4cccef0" providerId="ADAL" clId="{EFE24D46-2511-5DA4-B14A-5403E002676C}" dt="2026-03-24T21:20:42.057" v="3157" actId="478"/>
-          <ac:spMkLst>
-            <pc:docMk/>
-            <pc:sldMk cId="786601153" sldId="303"/>
-            <ac:spMk id="13" creationId="{AB6F329E-E10C-5431-7B9B-517B25CB80A3}"/>
-          </ac:spMkLst>
-        </pc:spChg>
-        <pc:picChg chg="add mod">
-          <ac:chgData name="Enoch Shin" userId="c39a6cce-38ff-4294-b6f2-b2b8f4cccef0" providerId="ADAL" clId="{EFE24D46-2511-5DA4-B14A-5403E002676C}" dt="2026-03-24T21:21:31.539" v="3179" actId="1076"/>
-          <ac:picMkLst>
-            <pc:docMk/>
-            <pc:sldMk cId="786601153" sldId="303"/>
-            <ac:picMk id="3" creationId="{12963C76-D579-ED1C-E29D-CA93EDF485E0}"/>
-          </ac:picMkLst>
-        </pc:picChg>
-        <pc:picChg chg="add mod">
-          <ac:chgData name="Enoch Shin" userId="c39a6cce-38ff-4294-b6f2-b2b8f4cccef0" providerId="ADAL" clId="{EFE24D46-2511-5DA4-B14A-5403E002676C}" dt="2026-03-24T21:21:24.556" v="3176" actId="1076"/>
-          <ac:picMkLst>
-            <pc:docMk/>
-            <pc:sldMk cId="786601153" sldId="303"/>
-            <ac:picMk id="4" creationId="{B5A393D9-3AE4-E496-CA9F-E0A5A8BA966C}"/>
-          </ac:picMkLst>
-        </pc:picChg>
-        <pc:picChg chg="del">
-          <ac:chgData name="Enoch Shin" userId="c39a6cce-38ff-4294-b6f2-b2b8f4cccef0" providerId="ADAL" clId="{EFE24D46-2511-5DA4-B14A-5403E002676C}" dt="2026-03-24T21:20:42.057" v="3157" actId="478"/>
-          <ac:picMkLst>
-            <pc:docMk/>
-            <pc:sldMk cId="786601153" sldId="303"/>
-            <ac:picMk id="10" creationId="{A80C666B-356A-5D40-B090-6F3C59735D67}"/>
-          </ac:picMkLst>
-        </pc:picChg>
-        <pc:picChg chg="del">
-          <ac:chgData name="Enoch Shin" userId="c39a6cce-38ff-4294-b6f2-b2b8f4cccef0" providerId="ADAL" clId="{EFE24D46-2511-5DA4-B14A-5403E002676C}" dt="2026-03-24T21:20:40.030" v="3156" actId="478"/>
-          <ac:picMkLst>
-            <pc:docMk/>
-            <pc:sldMk cId="786601153" sldId="303"/>
-            <ac:picMk id="11" creationId="{55CF607F-ED73-D8CC-7377-1D8431669086}"/>
-          </ac:picMkLst>
-        </pc:picChg>
       </pc:sldChg>
-      <pc:sldChg chg="addSp delSp modSp add mod setBg">
-        <pc:chgData name="Enoch Shin" userId="c39a6cce-38ff-4294-b6f2-b2b8f4cccef0" providerId="ADAL" clId="{EFE24D46-2511-5DA4-B14A-5403E002676C}" dt="2026-03-24T21:36:18.486" v="4516"/>
-        <pc:sldMkLst>
-          <pc:docMk/>
-          <pc:sldMk cId="1357844401" sldId="304"/>
-        </pc:sldMkLst>
-        <pc:spChg chg="mod">
-          <ac:chgData name="Enoch Shin" userId="c39a6cce-38ff-4294-b6f2-b2b8f4cccef0" providerId="ADAL" clId="{EFE24D46-2511-5DA4-B14A-5403E002676C}" dt="2026-03-17T14:33:08.398" v="18" actId="20577"/>
-          <ac:spMkLst>
-            <pc:docMk/>
-            <pc:sldMk cId="1357844401" sldId="304"/>
-            <ac:spMk id="2" creationId="{880F0AD4-C375-FF7C-1297-03CEE47C7AC2}"/>
-          </ac:spMkLst>
-        </pc:spChg>
-        <pc:spChg chg="mod">
-          <ac:chgData name="Enoch Shin" userId="c39a6cce-38ff-4294-b6f2-b2b8f4cccef0" providerId="ADAL" clId="{EFE24D46-2511-5DA4-B14A-5403E002676C}" dt="2026-03-17T14:43:20.841" v="151" actId="255"/>
-          <ac:spMkLst>
-            <pc:docMk/>
-            <pc:sldMk cId="1357844401" sldId="304"/>
-            <ac:spMk id="3" creationId="{9C676C20-8A22-C157-BEEB-2954CFB837EB}"/>
-          </ac:spMkLst>
-        </pc:spChg>
-        <pc:picChg chg="add mod">
-          <ac:chgData name="Enoch Shin" userId="c39a6cce-38ff-4294-b6f2-b2b8f4cccef0" providerId="ADAL" clId="{EFE24D46-2511-5DA4-B14A-5403E002676C}" dt="2026-03-17T14:42:02.293" v="146" actId="1076"/>
-          <ac:picMkLst>
-            <pc:docMk/>
-            <pc:sldMk cId="1357844401" sldId="304"/>
-            <ac:picMk id="4" creationId="{937DA4E9-1F41-E9B4-949B-0B77107D6DC2}"/>
-          </ac:picMkLst>
-        </pc:picChg>
-      </pc:sldChg>
-      <pc:sldChg chg="addSp modSp add mod setBg">
-        <pc:chgData name="Enoch Shin" userId="c39a6cce-38ff-4294-b6f2-b2b8f4cccef0" providerId="ADAL" clId="{EFE24D46-2511-5DA4-B14A-5403E002676C}" dt="2026-03-24T21:36:18.486" v="4516"/>
+      <pc:sldChg chg="modSp mod ord setBg">
+        <pc:chgData name="Enoch Shin" userId="c39a6cce-38ff-4294-b6f2-b2b8f4cccef0" providerId="ADAL" clId="{EFE24D46-2511-5DA4-B14A-5403E002676C}" dt="2026-04-27T19:55:11.264" v="1820"/>
         <pc:sldMkLst>
           <pc:docMk/>
           <pc:sldMk cId="3394601628" sldId="305"/>
         </pc:sldMkLst>
         <pc:spChg chg="mod">
-          <ac:chgData name="Enoch Shin" userId="c39a6cce-38ff-4294-b6f2-b2b8f4cccef0" providerId="ADAL" clId="{EFE24D46-2511-5DA4-B14A-5403E002676C}" dt="2026-03-24T21:04:37.694" v="2136" actId="1036"/>
-          <ac:spMkLst>
-            <pc:docMk/>
-            <pc:sldMk cId="3394601628" sldId="305"/>
-            <ac:spMk id="2" creationId="{E53C7165-D489-5A46-B643-5518BA348781}"/>
-          </ac:spMkLst>
-        </pc:spChg>
-        <pc:spChg chg="mod">
-          <ac:chgData name="Enoch Shin" userId="c39a6cce-38ff-4294-b6f2-b2b8f4cccef0" providerId="ADAL" clId="{EFE24D46-2511-5DA4-B14A-5403E002676C}" dt="2026-03-24T21:20:00.876" v="3090" actId="113"/>
+          <ac:chgData name="Enoch Shin" userId="c39a6cce-38ff-4294-b6f2-b2b8f4cccef0" providerId="ADAL" clId="{EFE24D46-2511-5DA4-B14A-5403E002676C}" dt="2026-04-27T19:53:24.683" v="1816" actId="113"/>
           <ac:spMkLst>
             <pc:docMk/>
             <pc:sldMk cId="3394601628" sldId="305"/>
             <ac:spMk id="9" creationId="{4853E6AE-7496-D488-61CE-7B6ED6227727}"/>
           </ac:spMkLst>
         </pc:spChg>
-        <pc:picChg chg="add mod">
-          <ac:chgData name="Enoch Shin" userId="c39a6cce-38ff-4294-b6f2-b2b8f4cccef0" providerId="ADAL" clId="{EFE24D46-2511-5DA4-B14A-5403E002676C}" dt="2026-03-24T21:04:28.704" v="2130" actId="1076"/>
-          <ac:picMkLst>
-            <pc:docMk/>
-            <pc:sldMk cId="3394601628" sldId="305"/>
-            <ac:picMk id="3" creationId="{69E516BE-305B-69F1-353E-2CDE850F4018}"/>
-          </ac:picMkLst>
-        </pc:picChg>
       </pc:sldChg>
-      <pc:sldChg chg="addSp delSp add del setBg delDesignElem">
-        <pc:chgData name="Enoch Shin" userId="c39a6cce-38ff-4294-b6f2-b2b8f4cccef0" providerId="ADAL" clId="{EFE24D46-2511-5DA4-B14A-5403E002676C}" dt="2026-03-24T21:02:27.337" v="1934"/>
-        <pc:sldMkLst>
-          <pc:docMk/>
-          <pc:sldMk cId="4011676581" sldId="305"/>
-        </pc:sldMkLst>
-        <pc:spChg chg="add del">
-          <ac:chgData name="Enoch Shin" userId="c39a6cce-38ff-4294-b6f2-b2b8f4cccef0" providerId="ADAL" clId="{EFE24D46-2511-5DA4-B14A-5403E002676C}" dt="2026-03-24T21:02:27.337" v="1934"/>
-          <ac:spMkLst>
-            <pc:docMk/>
-            <pc:sldMk cId="4011676581" sldId="305"/>
-            <ac:spMk id="2074" creationId="{29F6E152-7586-517B-31A8-0BF4626AE23E}"/>
-          </ac:spMkLst>
-        </pc:spChg>
-      </pc:sldChg>
-      <pc:sldChg chg="addSp delSp modSp add mod setBg modShow">
-        <pc:chgData name="Enoch Shin" userId="c39a6cce-38ff-4294-b6f2-b2b8f4cccef0" providerId="ADAL" clId="{EFE24D46-2511-5DA4-B14A-5403E002676C}" dt="2026-03-24T21:36:18.486" v="4516"/>
-        <pc:sldMkLst>
-          <pc:docMk/>
-          <pc:sldMk cId="2460127186" sldId="306"/>
-        </pc:sldMkLst>
-        <pc:spChg chg="mod">
-          <ac:chgData name="Enoch Shin" userId="c39a6cce-38ff-4294-b6f2-b2b8f4cccef0" providerId="ADAL" clId="{EFE24D46-2511-5DA4-B14A-5403E002676C}" dt="2026-03-24T21:22:52.275" v="3250" actId="20577"/>
-          <ac:spMkLst>
-            <pc:docMk/>
-            <pc:sldMk cId="2460127186" sldId="306"/>
-            <ac:spMk id="2" creationId="{6B0EBE99-24D5-9589-E51F-8AB318E64223}"/>
-          </ac:spMkLst>
-        </pc:spChg>
-        <pc:picChg chg="add mod">
-          <ac:chgData name="Enoch Shin" userId="c39a6cce-38ff-4294-b6f2-b2b8f4cccef0" providerId="ADAL" clId="{EFE24D46-2511-5DA4-B14A-5403E002676C}" dt="2026-03-24T21:23:01.156" v="3255" actId="14100"/>
-          <ac:picMkLst>
-            <pc:docMk/>
-            <pc:sldMk cId="2460127186" sldId="306"/>
-            <ac:picMk id="3" creationId="{B30F0460-C559-C112-4D0A-16547E261267}"/>
-          </ac:picMkLst>
-        </pc:picChg>
-        <pc:picChg chg="del">
-          <ac:chgData name="Enoch Shin" userId="c39a6cce-38ff-4294-b6f2-b2b8f4cccef0" providerId="ADAL" clId="{EFE24D46-2511-5DA4-B14A-5403E002676C}" dt="2026-03-24T21:22:56.280" v="3251" actId="478"/>
-          <ac:picMkLst>
-            <pc:docMk/>
-            <pc:sldMk cId="2460127186" sldId="306"/>
-            <ac:picMk id="12" creationId="{A28D1BC1-8B0C-8161-41C4-D18E187DE88F}"/>
-          </ac:picMkLst>
-        </pc:picChg>
-      </pc:sldChg>
-      <pc:sldChg chg="addSp delSp modSp add mod ord setBg modNotesTx">
-        <pc:chgData name="Enoch Shin" userId="c39a6cce-38ff-4294-b6f2-b2b8f4cccef0" providerId="ADAL" clId="{EFE24D46-2511-5DA4-B14A-5403E002676C}" dt="2026-03-24T21:36:18.486" v="4516"/>
+      <pc:sldChg chg="modSp mod setBg">
+        <pc:chgData name="Enoch Shin" userId="c39a6cce-38ff-4294-b6f2-b2b8f4cccef0" providerId="ADAL" clId="{EFE24D46-2511-5DA4-B14A-5403E002676C}" dt="2026-04-27T19:53:44.899" v="1817"/>
         <pc:sldMkLst>
           <pc:docMk/>
           <pc:sldMk cId="2807566719" sldId="307"/>
         </pc:sldMkLst>
         <pc:spChg chg="mod">
-          <ac:chgData name="Enoch Shin" userId="c39a6cce-38ff-4294-b6f2-b2b8f4cccef0" providerId="ADAL" clId="{EFE24D46-2511-5DA4-B14A-5403E002676C}" dt="2026-03-24T21:30:52.310" v="3744" actId="20577"/>
-          <ac:spMkLst>
-            <pc:docMk/>
-            <pc:sldMk cId="2807566719" sldId="307"/>
-            <ac:spMk id="2" creationId="{9B45C7BF-4B36-64E7-61F8-C10ABBE94294}"/>
-          </ac:spMkLst>
-        </pc:spChg>
-        <pc:spChg chg="add mod">
-          <ac:chgData name="Enoch Shin" userId="c39a6cce-38ff-4294-b6f2-b2b8f4cccef0" providerId="ADAL" clId="{EFE24D46-2511-5DA4-B14A-5403E002676C}" dt="2026-03-24T21:32:23.584" v="3905" actId="20577"/>
+          <ac:chgData name="Enoch Shin" userId="c39a6cce-38ff-4294-b6f2-b2b8f4cccef0" providerId="ADAL" clId="{EFE24D46-2511-5DA4-B14A-5403E002676C}" dt="2026-04-27T19:41:41.375" v="1694" actId="20577"/>
           <ac:spMkLst>
             <pc:docMk/>
             <pc:sldMk cId="2807566719" sldId="307"/>
             <ac:spMk id="4" creationId="{6497745E-5C55-AA8E-7E2D-7FC11C596E3F}"/>
           </ac:spMkLst>
         </pc:spChg>
-        <pc:spChg chg="add mod">
-          <ac:chgData name="Enoch Shin" userId="c39a6cce-38ff-4294-b6f2-b2b8f4cccef0" providerId="ADAL" clId="{EFE24D46-2511-5DA4-B14A-5403E002676C}" dt="2026-03-24T21:29:31.900" v="3676" actId="207"/>
+      </pc:sldChg>
+      <pc:sldChg chg="modSp mod ord setBg">
+        <pc:chgData name="Enoch Shin" userId="c39a6cce-38ff-4294-b6f2-b2b8f4cccef0" providerId="ADAL" clId="{EFE24D46-2511-5DA4-B14A-5403E002676C}" dt="2026-04-27T19:53:10.207" v="1815" actId="20578"/>
+        <pc:sldMkLst>
+          <pc:docMk/>
+          <pc:sldMk cId="2077160234" sldId="308"/>
+        </pc:sldMkLst>
+        <pc:spChg chg="mod">
+          <ac:chgData name="Enoch Shin" userId="c39a6cce-38ff-4294-b6f2-b2b8f4cccef0" providerId="ADAL" clId="{EFE24D46-2511-5DA4-B14A-5403E002676C}" dt="2026-04-27T19:46:15.270" v="1702" actId="20577"/>
           <ac:spMkLst>
             <pc:docMk/>
-            <pc:sldMk cId="2807566719" sldId="307"/>
-            <ac:spMk id="6" creationId="{3286AE4C-3B9E-33FE-8FD4-6D11D80FB691}"/>
+            <pc:sldMk cId="2077160234" sldId="308"/>
+            <ac:spMk id="2" creationId="{9657522E-45AF-95BC-A916-6B8F10218B20}"/>
+          </ac:spMkLst>
+        </pc:spChg>
+      </pc:sldChg>
+      <pc:sldChg chg="modSp mod setBg">
+        <pc:chgData name="Enoch Shin" userId="c39a6cce-38ff-4294-b6f2-b2b8f4cccef0" providerId="ADAL" clId="{EFE24D46-2511-5DA4-B14A-5403E002676C}" dt="2026-04-27T19:52:55.164" v="1813" actId="20577"/>
+        <pc:sldMkLst>
+          <pc:docMk/>
+          <pc:sldMk cId="3035042897" sldId="309"/>
+        </pc:sldMkLst>
+        <pc:spChg chg="mod">
+          <ac:chgData name="Enoch Shin" userId="c39a6cce-38ff-4294-b6f2-b2b8f4cccef0" providerId="ADAL" clId="{EFE24D46-2511-5DA4-B14A-5403E002676C}" dt="2026-04-27T19:04:21.933" v="192" actId="20577"/>
+          <ac:spMkLst>
+            <pc:docMk/>
+            <pc:sldMk cId="3035042897" sldId="309"/>
+            <ac:spMk id="2" creationId="{A1377519-4EB2-5067-7326-7C575948EC8C}"/>
+          </ac:spMkLst>
+        </pc:spChg>
+        <pc:spChg chg="mod">
+          <ac:chgData name="Enoch Shin" userId="c39a6cce-38ff-4294-b6f2-b2b8f4cccef0" providerId="ADAL" clId="{EFE24D46-2511-5DA4-B14A-5403E002676C}" dt="2026-04-27T19:52:55.164" v="1813" actId="20577"/>
+          <ac:spMkLst>
+            <pc:docMk/>
+            <pc:sldMk cId="3035042897" sldId="309"/>
+            <ac:spMk id="7" creationId="{3D9D4A76-F63B-3371-9F08-22BE3B9B7612}"/>
+          </ac:spMkLst>
+        </pc:spChg>
+        <pc:picChg chg="mod">
+          <ac:chgData name="Enoch Shin" userId="c39a6cce-38ff-4294-b6f2-b2b8f4cccef0" providerId="ADAL" clId="{EFE24D46-2511-5DA4-B14A-5403E002676C}" dt="2026-04-27T19:04:47.445" v="236" actId="1076"/>
+          <ac:picMkLst>
+            <pc:docMk/>
+            <pc:sldMk cId="3035042897" sldId="309"/>
+            <ac:picMk id="5" creationId="{5A5087AE-5AD0-FE2C-3F25-7C7EEEDB9150}"/>
+          </ac:picMkLst>
+        </pc:picChg>
+      </pc:sldChg>
+      <pc:sldChg chg="addSp modSp mod setBg">
+        <pc:chgData name="Enoch Shin" userId="c39a6cce-38ff-4294-b6f2-b2b8f4cccef0" providerId="ADAL" clId="{EFE24D46-2511-5DA4-B14A-5403E002676C}" dt="2026-04-27T19:53:50.796" v="1818"/>
+        <pc:sldMkLst>
+          <pc:docMk/>
+          <pc:sldMk cId="1774485577" sldId="310"/>
+        </pc:sldMkLst>
+        <pc:spChg chg="mod">
+          <ac:chgData name="Enoch Shin" userId="c39a6cce-38ff-4294-b6f2-b2b8f4cccef0" providerId="ADAL" clId="{EFE24D46-2511-5DA4-B14A-5403E002676C}" dt="2026-04-27T19:07:34.675" v="287" actId="1076"/>
+          <ac:spMkLst>
+            <pc:docMk/>
+            <pc:sldMk cId="1774485577" sldId="310"/>
+            <ac:spMk id="2" creationId="{3D68C637-7452-6E81-2C41-C2C559BB25D8}"/>
+          </ac:spMkLst>
+        </pc:spChg>
+        <pc:spChg chg="add">
+          <ac:chgData name="Enoch Shin" userId="c39a6cce-38ff-4294-b6f2-b2b8f4cccef0" providerId="ADAL" clId="{EFE24D46-2511-5DA4-B14A-5403E002676C}" dt="2026-04-27T19:01:19.264" v="32"/>
+          <ac:spMkLst>
+            <pc:docMk/>
+            <pc:sldMk cId="1774485577" sldId="310"/>
+            <ac:spMk id="3" creationId="{0A9F4F5A-D3D0-1232-5AF4-E02EBE8951FF}"/>
+          </ac:spMkLst>
+        </pc:spChg>
+        <pc:spChg chg="add">
+          <ac:chgData name="Enoch Shin" userId="c39a6cce-38ff-4294-b6f2-b2b8f4cccef0" providerId="ADAL" clId="{EFE24D46-2511-5DA4-B14A-5403E002676C}" dt="2026-04-27T19:01:21.194" v="33"/>
+          <ac:spMkLst>
+            <pc:docMk/>
+            <pc:sldMk cId="1774485577" sldId="310"/>
+            <ac:spMk id="4" creationId="{897DD25E-4772-18B7-DF24-896AFCEEA658}"/>
+          </ac:spMkLst>
+        </pc:spChg>
+        <pc:spChg chg="mod">
+          <ac:chgData name="Enoch Shin" userId="c39a6cce-38ff-4294-b6f2-b2b8f4cccef0" providerId="ADAL" clId="{EFE24D46-2511-5DA4-B14A-5403E002676C}" dt="2026-04-27T19:07:41.122" v="293" actId="1036"/>
+          <ac:spMkLst>
+            <pc:docMk/>
+            <pc:sldMk cId="1774485577" sldId="310"/>
+            <ac:spMk id="9" creationId="{293FD760-BD18-BB13-1AB2-69BA10B529FE}"/>
+          </ac:spMkLst>
+        </pc:spChg>
+      </pc:sldChg>
+      <pc:sldChg chg="addSp delSp modSp add mod">
+        <pc:chgData name="Enoch Shin" userId="c39a6cce-38ff-4294-b6f2-b2b8f4cccef0" providerId="ADAL" clId="{EFE24D46-2511-5DA4-B14A-5403E002676C}" dt="2026-04-27T19:13:04.180" v="463" actId="1076"/>
+        <pc:sldMkLst>
+          <pc:docMk/>
+          <pc:sldMk cId="2560845069" sldId="311"/>
+        </pc:sldMkLst>
+        <pc:spChg chg="mod">
+          <ac:chgData name="Enoch Shin" userId="c39a6cce-38ff-4294-b6f2-b2b8f4cccef0" providerId="ADAL" clId="{EFE24D46-2511-5DA4-B14A-5403E002676C}" dt="2026-04-27T18:56:54.431" v="12" actId="20577"/>
+          <ac:spMkLst>
+            <pc:docMk/>
+            <pc:sldMk cId="2560845069" sldId="311"/>
+            <ac:spMk id="2" creationId="{243854AE-00DA-F028-BC22-254F014BA006}"/>
           </ac:spMkLst>
         </pc:spChg>
         <pc:spChg chg="add mod">
-          <ac:chgData name="Enoch Shin" userId="c39a6cce-38ff-4294-b6f2-b2b8f4cccef0" providerId="ADAL" clId="{EFE24D46-2511-5DA4-B14A-5403E002676C}" dt="2026-03-24T21:29:33.205" v="3677"/>
+          <ac:chgData name="Enoch Shin" userId="c39a6cce-38ff-4294-b6f2-b2b8f4cccef0" providerId="ADAL" clId="{EFE24D46-2511-5DA4-B14A-5403E002676C}" dt="2026-04-27T19:13:04.180" v="463" actId="1076"/>
           <ac:spMkLst>
             <pc:docMk/>
-            <pc:sldMk cId="2807566719" sldId="307"/>
-            <ac:spMk id="7" creationId="{8ABEED01-A238-9999-AECD-938E83B777BD}"/>
+            <pc:sldMk cId="2560845069" sldId="311"/>
+            <ac:spMk id="6" creationId="{11294636-EE96-35A6-7E6C-6381534C69C1}"/>
+          </ac:spMkLst>
+        </pc:spChg>
+        <pc:picChg chg="mod">
+          <ac:chgData name="Enoch Shin" userId="c39a6cce-38ff-4294-b6f2-b2b8f4cccef0" providerId="ADAL" clId="{EFE24D46-2511-5DA4-B14A-5403E002676C}" dt="2026-04-27T18:57:36.499" v="31" actId="1076"/>
+          <ac:picMkLst>
+            <pc:docMk/>
+            <pc:sldMk cId="2560845069" sldId="311"/>
+            <ac:picMk id="3" creationId="{59904094-760E-E983-E30D-23A1462360CD}"/>
+          </ac:picMkLst>
+        </pc:picChg>
+        <pc:picChg chg="del mod">
+          <ac:chgData name="Enoch Shin" userId="c39a6cce-38ff-4294-b6f2-b2b8f4cccef0" providerId="ADAL" clId="{EFE24D46-2511-5DA4-B14A-5403E002676C}" dt="2026-04-27T18:57:25.348" v="24" actId="21"/>
+          <ac:picMkLst>
+            <pc:docMk/>
+            <pc:sldMk cId="2560845069" sldId="311"/>
+            <ac:picMk id="4" creationId="{B024DC5D-D2D8-2308-E6F0-2F350D3429C6}"/>
+          </ac:picMkLst>
+        </pc:picChg>
+        <pc:picChg chg="add mod">
+          <ac:chgData name="Enoch Shin" userId="c39a6cce-38ff-4294-b6f2-b2b8f4cccef0" providerId="ADAL" clId="{EFE24D46-2511-5DA4-B14A-5403E002676C}" dt="2026-04-27T18:57:34.265" v="30" actId="1076"/>
+          <ac:picMkLst>
+            <pc:docMk/>
+            <pc:sldMk cId="2560845069" sldId="311"/>
+            <ac:picMk id="5" creationId="{90BDD98B-F905-FB6D-DC4D-534A0E3DF720}"/>
+          </ac:picMkLst>
+        </pc:picChg>
+      </pc:sldChg>
+      <pc:sldChg chg="addSp delSp modSp add mod setBg modNotesTx">
+        <pc:chgData name="Enoch Shin" userId="c39a6cce-38ff-4294-b6f2-b2b8f4cccef0" providerId="ADAL" clId="{EFE24D46-2511-5DA4-B14A-5403E002676C}" dt="2026-04-27T19:54:42.281" v="1819"/>
+        <pc:sldMkLst>
+          <pc:docMk/>
+          <pc:sldMk cId="209726840" sldId="312"/>
+        </pc:sldMkLst>
+        <pc:spChg chg="del">
+          <ac:chgData name="Enoch Shin" userId="c39a6cce-38ff-4294-b6f2-b2b8f4cccef0" providerId="ADAL" clId="{EFE24D46-2511-5DA4-B14A-5403E002676C}" dt="2026-04-27T19:35:26.071" v="1293" actId="478"/>
+          <ac:spMkLst>
+            <pc:docMk/>
+            <pc:sldMk cId="209726840" sldId="312"/>
+            <ac:spMk id="2" creationId="{5842DA59-04EB-8782-95E9-838FB6928D51}"/>
           </ac:spMkLst>
         </pc:spChg>
         <pc:spChg chg="add mod">
-          <ac:chgData name="Enoch Shin" userId="c39a6cce-38ff-4294-b6f2-b2b8f4cccef0" providerId="ADAL" clId="{EFE24D46-2511-5DA4-B14A-5403E002676C}" dt="2026-03-24T21:29:33.282" v="3678"/>
+          <ac:chgData name="Enoch Shin" userId="c39a6cce-38ff-4294-b6f2-b2b8f4cccef0" providerId="ADAL" clId="{EFE24D46-2511-5DA4-B14A-5403E002676C}" dt="2026-04-27T19:35:26.071" v="1293" actId="478"/>
           <ac:spMkLst>
             <pc:docMk/>
-            <pc:sldMk cId="2807566719" sldId="307"/>
-            <ac:spMk id="8" creationId="{13301B77-82E4-B494-F16C-9CBCFB055E64}"/>
+            <pc:sldMk cId="209726840" sldId="312"/>
+            <ac:spMk id="6" creationId="{9AE18D62-A481-45AF-81BB-3843F670E937}"/>
           </ac:spMkLst>
         </pc:spChg>
         <pc:spChg chg="add mod">
-          <ac:chgData name="Enoch Shin" userId="c39a6cce-38ff-4294-b6f2-b2b8f4cccef0" providerId="ADAL" clId="{EFE24D46-2511-5DA4-B14A-5403E002676C}" dt="2026-03-24T21:29:42.456" v="3680" actId="1076"/>
+          <ac:chgData name="Enoch Shin" userId="c39a6cce-38ff-4294-b6f2-b2b8f4cccef0" providerId="ADAL" clId="{EFE24D46-2511-5DA4-B14A-5403E002676C}" dt="2026-04-27T19:35:32.005" v="1294"/>
           <ac:spMkLst>
             <pc:docMk/>
-            <pc:sldMk cId="2807566719" sldId="307"/>
-            <ac:spMk id="9" creationId="{7648CC76-B1CA-C47C-A333-8D37B46C0E50}"/>
+            <pc:sldMk cId="209726840" sldId="312"/>
+            <ac:spMk id="7" creationId="{0F93C1BA-E160-A5F4-2F23-CE0276724FFF}"/>
           </ac:spMkLst>
         </pc:spChg>
-        <pc:grpChg chg="add mod">
-          <ac:chgData name="Enoch Shin" userId="c39a6cce-38ff-4294-b6f2-b2b8f4cccef0" providerId="ADAL" clId="{EFE24D46-2511-5DA4-B14A-5403E002676C}" dt="2026-03-24T21:31:20.080" v="3755" actId="1076"/>
-          <ac:grpSpMkLst>
+        <pc:spChg chg="add mod">
+          <ac:chgData name="Enoch Shin" userId="c39a6cce-38ff-4294-b6f2-b2b8f4cccef0" providerId="ADAL" clId="{EFE24D46-2511-5DA4-B14A-5403E002676C}" dt="2026-04-27T19:35:34.825" v="1299"/>
+          <ac:spMkLst>
             <pc:docMk/>
-            <pc:sldMk cId="2807566719" sldId="307"/>
-            <ac:grpSpMk id="10" creationId="{B40F1D3D-E845-48C1-8BFB-63A63D661394}"/>
-          </ac:grpSpMkLst>
-        </pc:grpChg>
-        <pc:picChg chg="add mod">
-          <ac:chgData name="Enoch Shin" userId="c39a6cce-38ff-4294-b6f2-b2b8f4cccef0" providerId="ADAL" clId="{EFE24D46-2511-5DA4-B14A-5403E002676C}" dt="2026-03-24T21:25:09.359" v="3372" actId="1076"/>
+            <pc:sldMk cId="209726840" sldId="312"/>
+            <ac:spMk id="8" creationId="{FC02E03C-E270-51F1-C38B-4B887EF7366D}"/>
+          </ac:spMkLst>
+        </pc:spChg>
+        <pc:spChg chg="add mod">
+          <ac:chgData name="Enoch Shin" userId="c39a6cce-38ff-4294-b6f2-b2b8f4cccef0" providerId="ADAL" clId="{EFE24D46-2511-5DA4-B14A-5403E002676C}" dt="2026-04-27T19:35:32.005" v="1294"/>
+          <ac:spMkLst>
+            <pc:docMk/>
+            <pc:sldMk cId="209726840" sldId="312"/>
+            <ac:spMk id="9" creationId="{1F0AC4BB-0FDE-18B5-9F9C-81F2328FAB77}"/>
+          </ac:spMkLst>
+        </pc:spChg>
+        <pc:spChg chg="add mod">
+          <ac:chgData name="Enoch Shin" userId="c39a6cce-38ff-4294-b6f2-b2b8f4cccef0" providerId="ADAL" clId="{EFE24D46-2511-5DA4-B14A-5403E002676C}" dt="2026-04-27T19:35:32.005" v="1294"/>
+          <ac:spMkLst>
+            <pc:docMk/>
+            <pc:sldMk cId="209726840" sldId="312"/>
+            <ac:spMk id="10" creationId="{9425777C-B282-7CE8-9970-BAE69C28BE9C}"/>
+          </ac:spMkLst>
+        </pc:spChg>
+        <pc:spChg chg="add mod">
+          <ac:chgData name="Enoch Shin" userId="c39a6cce-38ff-4294-b6f2-b2b8f4cccef0" providerId="ADAL" clId="{EFE24D46-2511-5DA4-B14A-5403E002676C}" dt="2026-04-27T19:35:34.329" v="1297" actId="767"/>
+          <ac:spMkLst>
+            <pc:docMk/>
+            <pc:sldMk cId="209726840" sldId="312"/>
+            <ac:spMk id="11" creationId="{3675DF54-F0C7-9C5F-B520-0ACCC41114D3}"/>
+          </ac:spMkLst>
+        </pc:spChg>
+        <pc:spChg chg="add mod">
+          <ac:chgData name="Enoch Shin" userId="c39a6cce-38ff-4294-b6f2-b2b8f4cccef0" providerId="ADAL" clId="{EFE24D46-2511-5DA4-B14A-5403E002676C}" dt="2026-04-27T19:35:45.561" v="1303" actId="1076"/>
+          <ac:spMkLst>
+            <pc:docMk/>
+            <pc:sldMk cId="209726840" sldId="312"/>
+            <ac:spMk id="12" creationId="{F64B6237-6963-2FF0-2E0B-A66311716D59}"/>
+          </ac:spMkLst>
+        </pc:spChg>
+        <pc:spChg chg="add mod">
+          <ac:chgData name="Enoch Shin" userId="c39a6cce-38ff-4294-b6f2-b2b8f4cccef0" providerId="ADAL" clId="{EFE24D46-2511-5DA4-B14A-5403E002676C}" dt="2026-04-27T19:36:00.841" v="1320" actId="1076"/>
+          <ac:spMkLst>
+            <pc:docMk/>
+            <pc:sldMk cId="209726840" sldId="312"/>
+            <ac:spMk id="13" creationId="{A471E82F-2587-8617-05D3-13A7D547D965}"/>
+          </ac:spMkLst>
+        </pc:spChg>
+        <pc:spChg chg="add mod">
+          <ac:chgData name="Enoch Shin" userId="c39a6cce-38ff-4294-b6f2-b2b8f4cccef0" providerId="ADAL" clId="{EFE24D46-2511-5DA4-B14A-5403E002676C}" dt="2026-04-27T19:48:53.769" v="1716" actId="20577"/>
+          <ac:spMkLst>
+            <pc:docMk/>
+            <pc:sldMk cId="209726840" sldId="312"/>
+            <ac:spMk id="14" creationId="{47DCF28A-B93F-8E87-7A15-0AF6574F6680}"/>
+          </ac:spMkLst>
+        </pc:spChg>
+        <pc:picChg chg="del">
+          <ac:chgData name="Enoch Shin" userId="c39a6cce-38ff-4294-b6f2-b2b8f4cccef0" providerId="ADAL" clId="{EFE24D46-2511-5DA4-B14A-5403E002676C}" dt="2026-04-27T19:35:26.071" v="1293" actId="478"/>
           <ac:picMkLst>
             <pc:docMk/>
-            <pc:sldMk cId="2807566719" sldId="307"/>
-            <ac:picMk id="3" creationId="{A94405FF-2921-E9B6-D03B-7318034A32E9}"/>
+            <pc:sldMk cId="209726840" sldId="312"/>
+            <ac:picMk id="3" creationId="{4FDD897E-281C-A26B-2764-08E01A899FEF}"/>
           </ac:picMkLst>
         </pc:picChg>
-        <pc:picChg chg="del mod">
-          <ac:chgData name="Enoch Shin" userId="c39a6cce-38ff-4294-b6f2-b2b8f4cccef0" providerId="ADAL" clId="{EFE24D46-2511-5DA4-B14A-5403E002676C}" dt="2026-03-24T21:25:04.535" v="3369" actId="478"/>
+        <pc:picChg chg="del">
+          <ac:chgData name="Enoch Shin" userId="c39a6cce-38ff-4294-b6f2-b2b8f4cccef0" providerId="ADAL" clId="{EFE24D46-2511-5DA4-B14A-5403E002676C}" dt="2026-04-27T19:35:26.071" v="1293" actId="478"/>
           <ac:picMkLst>
             <pc:docMk/>
-            <pc:sldMk cId="2807566719" sldId="307"/>
-            <ac:picMk id="5" creationId="{FA023C6D-467C-EB47-DC0D-69F5E2503814}"/>
+            <pc:sldMk cId="209726840" sldId="312"/>
+            <ac:picMk id="4" creationId="{79E76FC6-C172-6829-9718-4D259EFFEE18}"/>
           </ac:picMkLst>
         </pc:picChg>
       </pc:sldChg>
@@ -928,7 +684,7 @@
           <a:p>
             <a:fld id="{4A3C5CF5-2F08-B740-9061-51D0631E3765}" type="datetimeFigureOut">
               <a:rPr lang="en-US" smtClean="0"/>
-              <a:t>4/24/26</a:t>
+              <a:t>4/27/26</a:t>
             </a:fld>
             <a:endParaRPr lang="en-US"/>
           </a:p>
@@ -1240,26 +996,25 @@
           <a:lstStyle/>
           <a:p>
             <a:r>
-              <a:rPr lang="en-US" dirty="0"/>
+              <a:rPr lang="en-US"/>
               <a:t>https://</a:t>
             </a:r>
             <a:r>
-              <a:rPr lang="en-US" dirty="0" err="1"/>
+              <a:rPr lang="en-US" err="1"/>
               <a:t>www.sciencedirect.com</a:t>
             </a:r>
             <a:r>
-              <a:rPr lang="en-US" dirty="0"/>
+              <a:rPr lang="en-US"/>
               <a:t>/science/article/</a:t>
             </a:r>
             <a:r>
-              <a:rPr lang="en-US" dirty="0" err="1"/>
+              <a:rPr lang="en-US" err="1"/>
               <a:t>pii</a:t>
             </a:r>
             <a:r>
               <a:rPr lang="en-US"/>
               <a:t>/S0969996122000390</a:t>
             </a:r>
-            <a:endParaRPr lang="en-US" dirty="0"/>
           </a:p>
         </p:txBody>
       </p:sp>
@@ -1362,31 +1117,31 @@
           <a:lstStyle/>
           <a:p>
             <a:r>
-              <a:rPr lang="en-US" dirty="0"/>
+              <a:rPr lang="en-US"/>
               <a:t>https://</a:t>
             </a:r>
             <a:r>
-              <a:rPr lang="en-US" dirty="0" err="1"/>
+              <a:rPr lang="en-US" err="1"/>
               <a:t>dravetfoundation.org</a:t>
             </a:r>
             <a:r>
-              <a:rPr lang="en-US" dirty="0"/>
+              <a:rPr lang="en-US"/>
               <a:t>/comprehensive-center/</a:t>
             </a:r>
             <a:r>
-              <a:rPr lang="en-US" dirty="0" err="1"/>
+              <a:rPr lang="en-US" err="1"/>
               <a:t>boston</a:t>
             </a:r>
             <a:r>
-              <a:rPr lang="en-US" dirty="0"/>
+              <a:rPr lang="en-US"/>
               <a:t>-</a:t>
             </a:r>
             <a:r>
-              <a:rPr lang="en-US" dirty="0" err="1"/>
+              <a:rPr lang="en-US" err="1"/>
               <a:t>childrens</a:t>
             </a:r>
             <a:r>
-              <a:rPr lang="en-US" dirty="0"/>
+              <a:rPr lang="en-US"/>
               <a:t>-hospital/</a:t>
             </a:r>
           </a:p>
@@ -1496,7 +1251,7 @@
               <a:defRPr/>
             </a:pPr>
             <a:r>
-              <a:rPr lang="en-US" sz="1200" kern="1200" dirty="0">
+              <a:rPr lang="en-US" sz="1200" kern="1200">
                 <a:solidFill>
                   <a:schemeClr val="tx1"/>
                 </a:solidFill>
@@ -1509,7 +1264,7 @@
             </a:r>
           </a:p>
           <a:p>
-            <a:endParaRPr lang="en-US" dirty="0"/>
+            <a:endParaRPr lang="en-US"/>
           </a:p>
         </p:txBody>
       </p:sp>
@@ -1530,7 +1285,7 @@
           <a:p>
             <a:fld id="{BD0EE75B-EF0F-E245-A34A-06675D448390}" type="slidenum">
               <a:rPr lang="en-US" smtClean="0"/>
-              <a:t>11</a:t>
+              <a:t>13</a:t>
             </a:fld>
             <a:endParaRPr lang="en-US"/>
           </a:p>
@@ -1611,7 +1366,7 @@
           <a:bodyPr/>
           <a:lstStyle/>
           <a:p>
-            <a:endParaRPr lang="en-US" dirty="0"/>
+            <a:endParaRPr lang="en-US"/>
           </a:p>
         </p:txBody>
       </p:sp>
@@ -1638,7 +1393,7 @@
           <a:p>
             <a:fld id="{BD0EE75B-EF0F-E245-A34A-06675D448390}" type="slidenum">
               <a:rPr lang="en-US" smtClean="0"/>
-              <a:t>12</a:t>
+              <a:t>14</a:t>
             </a:fld>
             <a:endParaRPr lang="en-US"/>
           </a:p>
@@ -1719,7 +1474,7 @@
               <a:defRPr/>
             </a:pPr>
             <a:r>
-              <a:rPr lang="en-US" sz="1200" kern="1200" dirty="0">
+              <a:rPr lang="en-US" sz="1200" kern="1200">
                 <a:solidFill>
                   <a:schemeClr val="tx1"/>
                 </a:solidFill>
@@ -1731,7 +1486,7 @@
               <a:t>This figure above reports the mean ROC-AUC for the same protocol and sampling matrix as the previous figure. The ranking pattern is similar to F1, but AUC is more stable. This suggests that the model still preserves useful ranking ability under harder protocols, even when the </a:t>
             </a:r>
             <a:r>
-              <a:rPr lang="en-US" sz="1200" kern="1200" dirty="0" err="1">
+              <a:rPr lang="en-US" sz="1200" kern="1200" err="1">
                 <a:solidFill>
                   <a:schemeClr val="tx1"/>
                 </a:solidFill>
@@ -1743,7 +1498,7 @@
               <a:t>thresholded</a:t>
             </a:r>
             <a:r>
-              <a:rPr lang="en-US" sz="1200" kern="1200" dirty="0">
+              <a:rPr lang="en-US" sz="1200" kern="1200">
                 <a:solidFill>
                   <a:schemeClr val="tx1"/>
                 </a:solidFill>
@@ -1756,7 +1511,7 @@
             </a:r>
           </a:p>
           <a:p>
-            <a:endParaRPr lang="en-US" dirty="0"/>
+            <a:endParaRPr lang="en-US"/>
           </a:p>
         </p:txBody>
       </p:sp>
@@ -1777,7 +1532,7 @@
           <a:p>
             <a:fld id="{BD0EE75B-EF0F-E245-A34A-06675D448390}" type="slidenum">
               <a:rPr lang="en-US" smtClean="0"/>
-              <a:t>13</a:t>
+              <a:t>15</a:t>
             </a:fld>
             <a:endParaRPr lang="en-US"/>
           </a:p>
@@ -1840,49 +1595,106 @@
           <a:bodyPr/>
           <a:lstStyle/>
           <a:p>
-            <a:r>
-              <a:rPr lang="en-US" sz="1200" kern="1200" dirty="0">
-                <a:solidFill>
-                  <a:schemeClr val="tx1"/>
-                </a:solidFill>
-                <a:effectLst/>
-                <a:latin typeface="+mn-lt"/>
-                <a:ea typeface="+mn-ea"/>
-                <a:cs typeface="+mn-cs"/>
-              </a:rPr>
-              <a:t>Above, we see a comparison of confusion matrices for both balanced and unbalanced (80/20) test sets. </a:t>
-            </a:r>
-          </a:p>
-          <a:p>
-            <a:r>
-              <a:rPr lang="en-US" sz="1200" kern="1200" dirty="0">
-                <a:solidFill>
-                  <a:schemeClr val="tx1"/>
-                </a:solidFill>
-                <a:effectLst/>
-                <a:latin typeface="+mn-lt"/>
-                <a:ea typeface="+mn-ea"/>
-                <a:cs typeface="+mn-cs"/>
-              </a:rPr>
-              <a:t>Under the balanced 50/50 testing setting, this figure selects the best train setting for each protocol and aggregates the confusion matrices across all outer folds. Each cell reports both the total count and the row-normalized proportion. Window holdout has the strongest diagonal, indicating the easiest generalization setting; seizure holdout is intermediate; patient holdout is hardest and mainly loses performance through reduced positive recall. This matches the intended challenge hierarchy of window &gt; seizure &gt; patient.</a:t>
-            </a:r>
-          </a:p>
-          <a:p>
-            <a:r>
-              <a:rPr lang="en-US" sz="1200" kern="1200" dirty="0">
-                <a:solidFill>
-                  <a:schemeClr val="tx1"/>
-                </a:solidFill>
-                <a:effectLst/>
-                <a:latin typeface="+mn-lt"/>
-                <a:ea typeface="+mn-ea"/>
-                <a:cs typeface="+mn-cs"/>
-              </a:rPr>
-              <a:t>For the 80/20 unbalanced setting, because the negative class dominates, high specificity becomes visually tied to a large true-negative block, while the recall-versus-false-positive trade-off becomes more deployment-relevant. For seizure and patient holdout especially, this view better exposes trustworthiness under realistic class ratios.</a:t>
-            </a:r>
-          </a:p>
-          <a:p>
-            <a:endParaRPr lang="en-US" dirty="0"/>
+            <a:endParaRPr lang="en-US"/>
+          </a:p>
+          <a:p>
+            <a:r>
+              <a:rPr lang="en-US"/>
+              <a:t>Suggested Summary Paragraph for your Report:</a:t>
+            </a:r>
+          </a:p>
+          <a:p>
+            <a:r>
+              <a:rPr lang="en-US"/>
+              <a:t>"Comparing the aggregated confusion matrices reveals that the baseline CNN suffers from a severe generalization gap; while it performs adequately on familiar patients (78.2% recall on window-level), its sensitivity collapses to 44.5% when evaluated on unseen patients. In stark contrast, the End-to-End CNN-LSTM maintains a remarkable 93.6% recall and 98.7% specificity even in the strictest Leave-One-Subject-Out protocol. This proves that while static spatial features (CNN) are highly patient-specific, the sequential progression of these features over time (LSTM) provides a universal signature for epilepsy, drastically improving cross-patient robustness.</a:t>
+            </a:r>
+          </a:p>
+          <a:p>
+            <a:endParaRPr lang="en-US"/>
+          </a:p>
+          <a:p>
+            <a:br>
+              <a:rPr lang="en-US"/>
+            </a:br>
+            <a:br>
+              <a:rPr lang="en-US"/>
+            </a:br>
+            <a:r>
+              <a:rPr lang="en-US"/>
+              <a:t>1. The "Generalization Gap" (The Biggest Story)</a:t>
+            </a:r>
+          </a:p>
+          <a:p>
+            <a:r>
+              <a:rPr lang="en-US"/>
+              <a:t>The CNN struggles with unseen data: Look at the bottom-right quadrant (True Positives / Recall) of the CNN. As the evaluation gets harder, its performance collapses: 78.2% (Window) ➔ 65.0% (Seizure) ➔ 44.5% (Patient). Because the CNN only looks at 1-second spatial snapshots, it memorizes patient-specific brainwaves. When forced to evaluate an entirely unseen patient, it acts worse than a coin flip at detecting seizures.</a:t>
+            </a:r>
+          </a:p>
+          <a:p>
+            <a:endParaRPr lang="en-US"/>
+          </a:p>
+          <a:p>
+            <a:r>
+              <a:rPr lang="en-US"/>
+              <a:t>The LSTM bridges the gap: Look at the LSTM. Its True Positive rate remains incredibly stable and high across all protocols: 86.0% ➔ 94.7% ➔ 93.6%. By tracking how brainwaves evolve over time (sequences of 8 windows), the LSTM learns the universal temporal signature of a seizure, allowing it to generalize almost perfectly to completely unseen patients.</a:t>
+            </a:r>
+          </a:p>
+          <a:p>
+            <a:endParaRPr lang="en-US"/>
+          </a:p>
+          <a:p>
+            <a:r>
+              <a:rPr lang="en-US"/>
+              <a:t>2. Clinical Sensitivity (Catching the Seizures)</a:t>
+            </a:r>
+          </a:p>
+          <a:p>
+            <a:r>
+              <a:rPr lang="en-US"/>
+              <a:t>In medical models, False Negatives (bottom-left quadrant) are dangerous because they represent missed seizures.</a:t>
+            </a:r>
+          </a:p>
+          <a:p>
+            <a:endParaRPr lang="en-US"/>
+          </a:p>
+          <a:p>
+            <a:r>
+              <a:rPr lang="en-US"/>
+              <a:t>In the strictest protocol (Patient), the CNN misses 55.5% of all seizure windows.</a:t>
+            </a:r>
+          </a:p>
+          <a:p>
+            <a:endParaRPr lang="en-US"/>
+          </a:p>
+          <a:p>
+            <a:r>
+              <a:rPr lang="en-US"/>
+              <a:t>The LSTM slashes this miss rate down to just 6.4%. It successfully identifies 93.6% of seizure states in brains it has never trained on.</a:t>
+            </a:r>
+          </a:p>
+          <a:p>
+            <a:endParaRPr lang="en-US"/>
+          </a:p>
+          <a:p>
+            <a:r>
+              <a:rPr lang="en-US"/>
+              <a:t>3. Specificity and False Alarms (Top Row)</a:t>
+            </a:r>
+          </a:p>
+          <a:p>
+            <a:r>
+              <a:rPr lang="en-US"/>
+              <a:t>The CNN actually had decent Specificity (True Negative rate) to begin with, correctly identifying normal brainwaves ~94% to 98% of the time.</a:t>
+            </a:r>
+          </a:p>
+          <a:p>
+            <a:endParaRPr lang="en-US"/>
+          </a:p>
+          <a:p>
+            <a:r>
+              <a:rPr lang="en-US"/>
+              <a:t>However, the LSTM tightens this up even further. Across all three protocols, the LSTM maintains a Specificity of 98.3% to 98.7%. This means the LSTM achieves its massive boost in seizure detection without increasing the false alarm rate.</a:t>
+            </a:r>
           </a:p>
         </p:txBody>
       </p:sp>
@@ -1903,7 +1715,7 @@
           <a:p>
             <a:fld id="{BD0EE75B-EF0F-E245-A34A-06675D448390}" type="slidenum">
               <a:rPr lang="en-US" smtClean="0"/>
-              <a:t>14</a:t>
+              <a:t>16</a:t>
             </a:fld>
             <a:endParaRPr lang="en-US"/>
           </a:p>
@@ -1913,6 +1725,114 @@
     <p:extLst>
       <p:ext uri="{BB962C8B-B14F-4D97-AF65-F5344CB8AC3E}">
         <p14:creationId xmlns:p14="http://schemas.microsoft.com/office/powerpoint/2010/main" val="2957328908"/>
+      </p:ext>
+    </p:extLst>
+  </p:cSld>
+  <p:clrMapOvr>
+    <a:masterClrMapping/>
+  </p:clrMapOvr>
+</p:notes>
+</file>
+
+<file path=ppt/notesSlides/notesSlide7.xml><?xml version="1.0" encoding="utf-8"?>
+<p:notes xmlns:a="http://schemas.openxmlformats.org/drawingml/2006/main" xmlns:r="http://schemas.openxmlformats.org/officeDocument/2006/relationships" xmlns:p="http://schemas.openxmlformats.org/presentationml/2006/main">
+  <p:cSld>
+    <p:spTree>
+      <p:nvGrpSpPr>
+        <p:cNvPr id="1" name="">
+          <a:extLst>
+            <a:ext uri="{FF2B5EF4-FFF2-40B4-BE49-F238E27FC236}">
+              <a16:creationId xmlns:a16="http://schemas.microsoft.com/office/drawing/2014/main" id="{065A8F7D-9FB9-96B8-BCC6-E221425FD333}"/>
+            </a:ext>
+          </a:extLst>
+        </p:cNvPr>
+        <p:cNvGrpSpPr/>
+        <p:nvPr/>
+      </p:nvGrpSpPr>
+      <p:grpSpPr>
+        <a:xfrm>
+          <a:off x="0" y="0"/>
+          <a:ext cx="0" cy="0"/>
+          <a:chOff x="0" y="0"/>
+          <a:chExt cx="0" cy="0"/>
+        </a:xfrm>
+      </p:grpSpPr>
+      <p:sp>
+        <p:nvSpPr>
+          <p:cNvPr id="2" name="Slide Image Placeholder 1">
+            <a:extLst>
+              <a:ext uri="{FF2B5EF4-FFF2-40B4-BE49-F238E27FC236}">
+                <a16:creationId xmlns:a16="http://schemas.microsoft.com/office/drawing/2014/main" id="{3720E69E-1828-3A31-F400-DFDFD88E4906}"/>
+              </a:ext>
+            </a:extLst>
+          </p:cNvPr>
+          <p:cNvSpPr>
+            <a:spLocks noGrp="1" noRot="1" noChangeAspect="1"/>
+          </p:cNvSpPr>
+          <p:nvPr>
+            <p:ph type="sldImg"/>
+          </p:nvPr>
+        </p:nvSpPr>
+        <p:spPr/>
+      </p:sp>
+      <p:sp>
+        <p:nvSpPr>
+          <p:cNvPr id="3" name="Notes Placeholder 2">
+            <a:extLst>
+              <a:ext uri="{FF2B5EF4-FFF2-40B4-BE49-F238E27FC236}">
+                <a16:creationId xmlns:a16="http://schemas.microsoft.com/office/drawing/2014/main" id="{D0E7EA66-C7A4-2463-6EBF-109A504812D1}"/>
+              </a:ext>
+            </a:extLst>
+          </p:cNvPr>
+          <p:cNvSpPr>
+            <a:spLocks noGrp="1"/>
+          </p:cNvSpPr>
+          <p:nvPr>
+            <p:ph type="body" idx="1"/>
+          </p:nvPr>
+        </p:nvSpPr>
+        <p:spPr/>
+        <p:txBody>
+          <a:bodyPr/>
+          <a:lstStyle/>
+          <a:p>
+            <a:endParaRPr lang="en-US"/>
+          </a:p>
+        </p:txBody>
+      </p:sp>
+      <p:sp>
+        <p:nvSpPr>
+          <p:cNvPr id="4" name="Slide Number Placeholder 3">
+            <a:extLst>
+              <a:ext uri="{FF2B5EF4-FFF2-40B4-BE49-F238E27FC236}">
+                <a16:creationId xmlns:a16="http://schemas.microsoft.com/office/drawing/2014/main" id="{39CA8004-646A-FEFB-0ACE-9F915B58E463}"/>
+              </a:ext>
+            </a:extLst>
+          </p:cNvPr>
+          <p:cNvSpPr>
+            <a:spLocks noGrp="1"/>
+          </p:cNvSpPr>
+          <p:nvPr>
+            <p:ph type="sldNum" sz="quarter" idx="5"/>
+          </p:nvPr>
+        </p:nvSpPr>
+        <p:spPr/>
+        <p:txBody>
+          <a:bodyPr/>
+          <a:lstStyle/>
+          <a:p>
+            <a:fld id="{BD0EE75B-EF0F-E245-A34A-06675D448390}" type="slidenum">
+              <a:rPr lang="en-US" smtClean="0"/>
+              <a:t>17</a:t>
+            </a:fld>
+            <a:endParaRPr lang="en-US"/>
+          </a:p>
+        </p:txBody>
+      </p:sp>
+    </p:spTree>
+    <p:extLst>
+      <p:ext uri="{BB962C8B-B14F-4D97-AF65-F5344CB8AC3E}">
+        <p14:creationId xmlns:p14="http://schemas.microsoft.com/office/powerpoint/2010/main" val="1943087597"/>
       </p:ext>
     </p:extLst>
   </p:cSld>
@@ -2069,7 +1989,7 @@
           <a:p>
             <a:fld id="{947FBD62-AA3B-E74B-8A60-7E8626BB6760}" type="datetimeFigureOut">
               <a:rPr lang="en-US" smtClean="0"/>
-              <a:t>4/24/26</a:t>
+              <a:t>4/27/26</a:t>
             </a:fld>
             <a:endParaRPr lang="en-US"/>
           </a:p>
@@ -2267,7 +2187,7 @@
           <a:p>
             <a:fld id="{947FBD62-AA3B-E74B-8A60-7E8626BB6760}" type="datetimeFigureOut">
               <a:rPr lang="en-US" smtClean="0"/>
-              <a:t>4/24/26</a:t>
+              <a:t>4/27/26</a:t>
             </a:fld>
             <a:endParaRPr lang="en-US"/>
           </a:p>
@@ -2475,7 +2395,7 @@
           <a:p>
             <a:fld id="{947FBD62-AA3B-E74B-8A60-7E8626BB6760}" type="datetimeFigureOut">
               <a:rPr lang="en-US" smtClean="0"/>
-              <a:t>4/24/26</a:t>
+              <a:t>4/27/26</a:t>
             </a:fld>
             <a:endParaRPr lang="en-US"/>
           </a:p>
@@ -2673,7 +2593,7 @@
           <a:p>
             <a:fld id="{947FBD62-AA3B-E74B-8A60-7E8626BB6760}" type="datetimeFigureOut">
               <a:rPr lang="en-US" smtClean="0"/>
-              <a:t>4/24/26</a:t>
+              <a:t>4/27/26</a:t>
             </a:fld>
             <a:endParaRPr lang="en-US"/>
           </a:p>
@@ -2948,7 +2868,7 @@
           <a:p>
             <a:fld id="{947FBD62-AA3B-E74B-8A60-7E8626BB6760}" type="datetimeFigureOut">
               <a:rPr lang="en-US" smtClean="0"/>
-              <a:t>4/24/26</a:t>
+              <a:t>4/27/26</a:t>
             </a:fld>
             <a:endParaRPr lang="en-US"/>
           </a:p>
@@ -3213,7 +3133,7 @@
           <a:p>
             <a:fld id="{947FBD62-AA3B-E74B-8A60-7E8626BB6760}" type="datetimeFigureOut">
               <a:rPr lang="en-US" smtClean="0"/>
-              <a:t>4/24/26</a:t>
+              <a:t>4/27/26</a:t>
             </a:fld>
             <a:endParaRPr lang="en-US"/>
           </a:p>
@@ -3625,7 +3545,7 @@
           <a:p>
             <a:fld id="{947FBD62-AA3B-E74B-8A60-7E8626BB6760}" type="datetimeFigureOut">
               <a:rPr lang="en-US" smtClean="0"/>
-              <a:t>4/24/26</a:t>
+              <a:t>4/27/26</a:t>
             </a:fld>
             <a:endParaRPr lang="en-US"/>
           </a:p>
@@ -3766,7 +3686,7 @@
           <a:p>
             <a:fld id="{947FBD62-AA3B-E74B-8A60-7E8626BB6760}" type="datetimeFigureOut">
               <a:rPr lang="en-US" smtClean="0"/>
-              <a:t>4/24/26</a:t>
+              <a:t>4/27/26</a:t>
             </a:fld>
             <a:endParaRPr lang="en-US"/>
           </a:p>
@@ -3879,7 +3799,7 @@
           <a:p>
             <a:fld id="{947FBD62-AA3B-E74B-8A60-7E8626BB6760}" type="datetimeFigureOut">
               <a:rPr lang="en-US" smtClean="0"/>
-              <a:t>4/24/26</a:t>
+              <a:t>4/27/26</a:t>
             </a:fld>
             <a:endParaRPr lang="en-US"/>
           </a:p>
@@ -4190,7 +4110,7 @@
           <a:p>
             <a:fld id="{947FBD62-AA3B-E74B-8A60-7E8626BB6760}" type="datetimeFigureOut">
               <a:rPr lang="en-US" smtClean="0"/>
-              <a:t>4/24/26</a:t>
+              <a:t>4/27/26</a:t>
             </a:fld>
             <a:endParaRPr lang="en-US"/>
           </a:p>
@@ -4478,7 +4398,7 @@
           <a:p>
             <a:fld id="{947FBD62-AA3B-E74B-8A60-7E8626BB6760}" type="datetimeFigureOut">
               <a:rPr lang="en-US" smtClean="0"/>
-              <a:t>4/24/26</a:t>
+              <a:t>4/27/26</a:t>
             </a:fld>
             <a:endParaRPr lang="en-US"/>
           </a:p>
@@ -4719,7 +4639,7 @@
           <a:p>
             <a:fld id="{947FBD62-AA3B-E74B-8A60-7E8626BB6760}" type="datetimeFigureOut">
               <a:rPr lang="en-US" smtClean="0"/>
-              <a:t>4/24/26</a:t>
+              <a:t>4/27/26</a:t>
             </a:fld>
             <a:endParaRPr lang="en-US"/>
           </a:p>
@@ -5208,7 +5128,7 @@
           <a:lstStyle/>
           <a:p>
             <a:r>
-              <a:rPr lang="en-GB" sz="2000" b="1"/>
+              <a:rPr lang="en-GB" sz="2000" b="1" dirty="0"/>
               <a:t>Group 3</a:t>
             </a:r>
           </a:p>
@@ -5250,10 +5170,22 @@
           </a:p>
           <a:p>
             <a:r>
-              <a:rPr lang="en-GB" sz="2000" dirty="0"/>
+              <a:rPr lang="en-GB" sz="2000" dirty="0">
+                <a:solidFill>
+                  <a:schemeClr val="accent2">
+                    <a:lumMod val="75000"/>
+                  </a:schemeClr>
+                </a:solidFill>
+              </a:rPr>
               <a:t>Enoch Shin, 1767565</a:t>
             </a:r>
-            <a:endParaRPr lang="en-US" sz="2000" dirty="0"/>
+            <a:endParaRPr lang="en-US" sz="2000" dirty="0">
+              <a:solidFill>
+                <a:schemeClr val="accent2">
+                  <a:lumMod val="75000"/>
+                </a:schemeClr>
+              </a:solidFill>
+            </a:endParaRPr>
           </a:p>
           <a:p>
             <a:r>
@@ -5318,7 +5250,572 @@
         <p:cNvPr id="1" name="">
           <a:extLst>
             <a:ext uri="{FF2B5EF4-FFF2-40B4-BE49-F238E27FC236}">
-              <a16:creationId xmlns:a16="http://schemas.microsoft.com/office/drawing/2014/main" id="{5351E7BC-B0F2-C3A8-63E2-FBCF0434360E}"/>
+              <a16:creationId xmlns:a16="http://schemas.microsoft.com/office/drawing/2014/main" id="{E8F7927C-1793-BE87-48EB-73E8FA9DCC0F}"/>
+            </a:ext>
+          </a:extLst>
+        </p:cNvPr>
+        <p:cNvGrpSpPr/>
+        <p:nvPr/>
+      </p:nvGrpSpPr>
+      <p:grpSpPr>
+        <a:xfrm>
+          <a:off x="0" y="0"/>
+          <a:ext cx="0" cy="0"/>
+          <a:chOff x="0" y="0"/>
+          <a:chExt cx="0" cy="0"/>
+        </a:xfrm>
+      </p:grpSpPr>
+      <p:sp useBgFill="1">
+        <p:nvSpPr>
+          <p:cNvPr id="2074" name="Rectangle 2073">
+            <a:extLst>
+              <a:ext uri="{FF2B5EF4-FFF2-40B4-BE49-F238E27FC236}">
+                <a16:creationId xmlns:a16="http://schemas.microsoft.com/office/drawing/2014/main" id="{99ED5833-B85B-4103-8A3B-CAB0308E6C15}"/>
+              </a:ext>
+              <a:ext uri="{C183D7F6-B498-43B3-948B-1728B52AA6E4}">
+                <adec:decorative xmlns:adec="http://schemas.microsoft.com/office/drawing/2017/decorative" val="1"/>
+              </a:ext>
+            </a:extLst>
+          </p:cNvPr>
+          <p:cNvSpPr>
+            <a:spLocks noGrp="1" noRot="1" noChangeAspect="1" noMove="1" noResize="1" noEditPoints="1" noAdjustHandles="1" noChangeArrowheads="1" noChangeShapeType="1" noTextEdit="1"/>
+          </p:cNvSpPr>
+          <p:nvPr>
+            <p:extLst>
+              <p:ext uri="{386F3935-93C4-4BCD-93E2-E3B085C9AB24}">
+                <p16:designElem xmlns:p16="http://schemas.microsoft.com/office/powerpoint/2015/main" val="1"/>
+              </p:ext>
+            </p:extLst>
+          </p:nvPr>
+        </p:nvSpPr>
+        <p:spPr>
+          <a:xfrm>
+            <a:off x="-1" y="0"/>
+            <a:ext cx="12188952" cy="6858000"/>
+          </a:xfrm>
+          <a:prstGeom prst="rect">
+            <a:avLst/>
+          </a:prstGeom>
+          <a:ln>
+            <a:noFill/>
+          </a:ln>
+        </p:spPr>
+        <p:style>
+          <a:lnRef idx="2">
+            <a:schemeClr val="accent1">
+              <a:shade val="50000"/>
+            </a:schemeClr>
+          </a:lnRef>
+          <a:fillRef idx="1">
+            <a:schemeClr val="accent1"/>
+          </a:fillRef>
+          <a:effectRef idx="0">
+            <a:schemeClr val="accent1"/>
+          </a:effectRef>
+          <a:fontRef idx="minor">
+            <a:schemeClr val="lt1"/>
+          </a:fontRef>
+        </p:style>
+        <p:txBody>
+          <a:bodyPr rtlCol="0" anchor="ctr"/>
+          <a:lstStyle/>
+          <a:p>
+            <a:pPr algn="ctr"/>
+            <a:endParaRPr lang="en-US"/>
+          </a:p>
+        </p:txBody>
+      </p:sp>
+      <p:sp>
+        <p:nvSpPr>
+          <p:cNvPr id="2" name="Title 1">
+            <a:extLst>
+              <a:ext uri="{FF2B5EF4-FFF2-40B4-BE49-F238E27FC236}">
+                <a16:creationId xmlns:a16="http://schemas.microsoft.com/office/drawing/2014/main" id="{EE57B110-D5D4-F42D-4362-9F13761A2AC9}"/>
+              </a:ext>
+            </a:extLst>
+          </p:cNvPr>
+          <p:cNvSpPr>
+            <a:spLocks noGrp="1"/>
+          </p:cNvSpPr>
+          <p:nvPr>
+            <p:ph type="title"/>
+          </p:nvPr>
+        </p:nvSpPr>
+        <p:spPr>
+          <a:xfrm>
+            <a:off x="282256" y="-16373"/>
+            <a:ext cx="9795638" cy="1114380"/>
+          </a:xfrm>
+        </p:spPr>
+        <p:txBody>
+          <a:bodyPr vert="horz" lIns="91440" tIns="45720" rIns="91440" bIns="45720" rtlCol="0" anchor="b">
+            <a:normAutofit/>
+          </a:bodyPr>
+          <a:lstStyle/>
+          <a:p>
+            <a:r>
+              <a:rPr lang="en-US" sz="5200"/>
+              <a:t>CNN Steps</a:t>
+            </a:r>
+          </a:p>
+        </p:txBody>
+      </p:sp>
+      <p:sp>
+        <p:nvSpPr>
+          <p:cNvPr id="9" name="TextBox 8">
+            <a:extLst>
+              <a:ext uri="{FF2B5EF4-FFF2-40B4-BE49-F238E27FC236}">
+                <a16:creationId xmlns:a16="http://schemas.microsoft.com/office/drawing/2014/main" id="{F37D45D0-81CB-7E09-4D17-7E26DC899661}"/>
+              </a:ext>
+            </a:extLst>
+          </p:cNvPr>
+          <p:cNvSpPr txBox="1"/>
+          <p:nvPr/>
+        </p:nvSpPr>
+        <p:spPr>
+          <a:xfrm>
+            <a:off x="561022" y="1114380"/>
+            <a:ext cx="11066906" cy="5863144"/>
+          </a:xfrm>
+          <a:prstGeom prst="rect">
+            <a:avLst/>
+          </a:prstGeom>
+          <a:noFill/>
+        </p:spPr>
+        <p:txBody>
+          <a:bodyPr wrap="square" lIns="91440" tIns="45720" rIns="91440" bIns="45720" rtlCol="0" anchor="t">
+            <a:spAutoFit/>
+          </a:bodyPr>
+          <a:lstStyle/>
+          <a:p>
+            <a:pPr marL="457200" indent="-457200">
+              <a:buFont typeface="Arial" panose="020B0604020202020204" pitchFamily="34" charset="0"/>
+              <a:buChar char="•"/>
+            </a:pPr>
+            <a:r>
+              <a:rPr lang="en-US" sz="2500" b="1" dirty="0"/>
+              <a:t>Step 1: Pre-process </a:t>
+            </a:r>
+          </a:p>
+          <a:p>
+            <a:pPr marL="914400" lvl="1" indent="-457200">
+              <a:buFont typeface="Arial" panose="020B0604020202020204" pitchFamily="34" charset="0"/>
+              <a:buChar char="•"/>
+            </a:pPr>
+            <a:r>
+              <a:rPr lang="en-US" sz="2500" dirty="0"/>
+              <a:t>Z-score normalization: dynamically per fold rather than globally (avoids leakage)</a:t>
+            </a:r>
+          </a:p>
+          <a:p>
+            <a:pPr marL="914400" lvl="1" indent="-457200">
+              <a:buFont typeface="Arial" panose="020B0604020202020204" pitchFamily="34" charset="0"/>
+              <a:buChar char="•"/>
+            </a:pPr>
+            <a:r>
+              <a:rPr lang="en-US" sz="2500" dirty="0"/>
+              <a:t>Class balancing for both train and test </a:t>
+            </a:r>
+          </a:p>
+          <a:p>
+            <a:pPr marL="914400" lvl="1" indent="-457200">
+              <a:buFont typeface="Arial" panose="020B0604020202020204" pitchFamily="34" charset="0"/>
+              <a:buChar char="•"/>
+            </a:pPr>
+            <a:endParaRPr lang="en-US" sz="2500" dirty="0"/>
+          </a:p>
+          <a:p>
+            <a:pPr marL="457200" indent="-457200">
+              <a:buFont typeface="Arial" panose="020B0604020202020204" pitchFamily="34" charset="0"/>
+              <a:buChar char="•"/>
+            </a:pPr>
+            <a:r>
+              <a:rPr lang="en-US" sz="2500" b="1" dirty="0"/>
+              <a:t>Step 2: Training	</a:t>
+            </a:r>
+          </a:p>
+          <a:p>
+            <a:pPr marL="914400" lvl="1" indent="-457200">
+              <a:buFont typeface="Arial" panose="020B0604020202020204" pitchFamily="34" charset="0"/>
+              <a:buChar char="•"/>
+            </a:pPr>
+            <a:r>
+              <a:rPr lang="en-US" sz="2500" dirty="0"/>
+              <a:t>Conv1d: “early channel fusion” – looks 1-dimensionally at all 21 EEG electrodes simultaneously</a:t>
+            </a:r>
+          </a:p>
+          <a:p>
+            <a:pPr marL="914400" lvl="1" indent="-457200">
+              <a:buFont typeface="Arial" panose="020B0604020202020204" pitchFamily="34" charset="0"/>
+              <a:buChar char="•"/>
+            </a:pPr>
+            <a:r>
+              <a:rPr lang="en-US" sz="2500" dirty="0"/>
+              <a:t>2 training modes (50-50 Balanced vs. 80-20 Unbalanced) </a:t>
+            </a:r>
+          </a:p>
+          <a:p>
+            <a:pPr marL="914400" lvl="1" indent="-457200">
+              <a:buFont typeface="Arial" panose="020B0604020202020204" pitchFamily="34" charset="0"/>
+              <a:buChar char="•"/>
+            </a:pPr>
+            <a:r>
+              <a:rPr lang="en-US" sz="2500" dirty="0"/>
+              <a:t>Split data over 10 shards due to size</a:t>
+            </a:r>
+          </a:p>
+          <a:p>
+            <a:pPr lvl="1"/>
+            <a:endParaRPr lang="en-US" sz="2500" dirty="0"/>
+          </a:p>
+          <a:p>
+            <a:pPr marL="457200" indent="-457200">
+              <a:buFont typeface="Arial" panose="020B0604020202020204" pitchFamily="34" charset="0"/>
+              <a:buChar char="•"/>
+            </a:pPr>
+            <a:r>
+              <a:rPr lang="en-US" sz="2500" b="1" dirty="0"/>
+              <a:t>Step 3: Classification (window, seizure, patient)</a:t>
+            </a:r>
+          </a:p>
+          <a:p>
+            <a:pPr marL="914400" lvl="1" indent="-457200">
+              <a:buFont typeface="Arial" panose="020B0604020202020204" pitchFamily="34" charset="0"/>
+              <a:buChar char="•"/>
+            </a:pPr>
+            <a:r>
+              <a:rPr lang="en-US" sz="2500" dirty="0"/>
+              <a:t>Test with both balanced and unbalanced sets</a:t>
+            </a:r>
+          </a:p>
+          <a:p>
+            <a:pPr marL="457200" indent="-457200">
+              <a:buFont typeface="Arial" panose="020B0604020202020204" pitchFamily="34" charset="0"/>
+              <a:buChar char="•"/>
+            </a:pPr>
+            <a:endParaRPr lang="en-US" sz="2500" dirty="0"/>
+          </a:p>
+          <a:p>
+            <a:pPr marL="457200" indent="-457200">
+              <a:buFont typeface="Arial" panose="020B0604020202020204" pitchFamily="34" charset="0"/>
+              <a:buChar char="•"/>
+            </a:pPr>
+            <a:endParaRPr lang="en-US" sz="2500" dirty="0"/>
+          </a:p>
+        </p:txBody>
+      </p:sp>
+    </p:spTree>
+    <p:extLst>
+      <p:ext uri="{BB962C8B-B14F-4D97-AF65-F5344CB8AC3E}">
+        <p14:creationId xmlns:p14="http://schemas.microsoft.com/office/powerpoint/2010/main" val="2120960596"/>
+      </p:ext>
+    </p:extLst>
+  </p:cSld>
+  <p:clrMapOvr>
+    <a:masterClrMapping/>
+  </p:clrMapOvr>
+</p:sld>
+</file>
+
+<file path=ppt/slides/slide11.xml><?xml version="1.0" encoding="utf-8"?>
+<p:sld xmlns:a="http://schemas.openxmlformats.org/drawingml/2006/main" xmlns:r="http://schemas.openxmlformats.org/officeDocument/2006/relationships" xmlns:p="http://schemas.openxmlformats.org/presentationml/2006/main">
+  <p:cSld>
+    <p:bg>
+      <p:bgPr>
+        <a:solidFill>
+          <a:schemeClr val="bg1"/>
+        </a:solidFill>
+        <a:effectLst/>
+      </p:bgPr>
+    </p:bg>
+    <p:spTree>
+      <p:nvGrpSpPr>
+        <p:cNvPr id="1" name="">
+          <a:extLst>
+            <a:ext uri="{FF2B5EF4-FFF2-40B4-BE49-F238E27FC236}">
+              <a16:creationId xmlns:a16="http://schemas.microsoft.com/office/drawing/2014/main" id="{7DB76860-8150-C912-F325-FF693B9E3E5E}"/>
+            </a:ext>
+          </a:extLst>
+        </p:cNvPr>
+        <p:cNvGrpSpPr/>
+        <p:nvPr/>
+      </p:nvGrpSpPr>
+      <p:grpSpPr>
+        <a:xfrm>
+          <a:off x="0" y="0"/>
+          <a:ext cx="0" cy="0"/>
+          <a:chOff x="0" y="0"/>
+          <a:chExt cx="0" cy="0"/>
+        </a:xfrm>
+      </p:grpSpPr>
+      <p:sp useBgFill="1">
+        <p:nvSpPr>
+          <p:cNvPr id="2074" name="Rectangle 2073">
+            <a:extLst>
+              <a:ext uri="{FF2B5EF4-FFF2-40B4-BE49-F238E27FC236}">
+                <a16:creationId xmlns:a16="http://schemas.microsoft.com/office/drawing/2014/main" id="{D78620D4-9757-4387-E662-CCE83F9BBD53}"/>
+              </a:ext>
+              <a:ext uri="{C183D7F6-B498-43B3-948B-1728B52AA6E4}">
+                <adec:decorative xmlns:adec="http://schemas.microsoft.com/office/drawing/2017/decorative" val="1"/>
+              </a:ext>
+            </a:extLst>
+          </p:cNvPr>
+          <p:cNvSpPr>
+            <a:spLocks noGrp="1" noRot="1" noChangeAspect="1" noMove="1" noResize="1" noEditPoints="1" noAdjustHandles="1" noChangeArrowheads="1" noChangeShapeType="1" noTextEdit="1"/>
+          </p:cNvSpPr>
+          <p:nvPr>
+            <p:extLst>
+              <p:ext uri="{386F3935-93C4-4BCD-93E2-E3B085C9AB24}">
+                <p16:designElem xmlns:p16="http://schemas.microsoft.com/office/powerpoint/2015/main" val="1"/>
+              </p:ext>
+            </p:extLst>
+          </p:nvPr>
+        </p:nvSpPr>
+        <p:spPr>
+          <a:xfrm>
+            <a:off x="-1" y="0"/>
+            <a:ext cx="12188952" cy="6858000"/>
+          </a:xfrm>
+          <a:prstGeom prst="rect">
+            <a:avLst/>
+          </a:prstGeom>
+          <a:ln>
+            <a:noFill/>
+          </a:ln>
+        </p:spPr>
+        <p:style>
+          <a:lnRef idx="2">
+            <a:schemeClr val="accent1">
+              <a:shade val="50000"/>
+            </a:schemeClr>
+          </a:lnRef>
+          <a:fillRef idx="1">
+            <a:schemeClr val="accent1"/>
+          </a:fillRef>
+          <a:effectRef idx="0">
+            <a:schemeClr val="accent1"/>
+          </a:effectRef>
+          <a:fontRef idx="minor">
+            <a:schemeClr val="lt1"/>
+          </a:fontRef>
+        </p:style>
+        <p:txBody>
+          <a:bodyPr rtlCol="0" anchor="ctr"/>
+          <a:lstStyle/>
+          <a:p>
+            <a:pPr algn="ctr"/>
+            <a:endParaRPr lang="en-US"/>
+          </a:p>
+        </p:txBody>
+      </p:sp>
+      <p:sp>
+        <p:nvSpPr>
+          <p:cNvPr id="2" name="Title 1">
+            <a:extLst>
+              <a:ext uri="{FF2B5EF4-FFF2-40B4-BE49-F238E27FC236}">
+                <a16:creationId xmlns:a16="http://schemas.microsoft.com/office/drawing/2014/main" id="{3D68C637-7452-6E81-2C41-C2C559BB25D8}"/>
+              </a:ext>
+            </a:extLst>
+          </p:cNvPr>
+          <p:cNvSpPr>
+            <a:spLocks noGrp="1"/>
+          </p:cNvSpPr>
+          <p:nvPr>
+            <p:ph type="title"/>
+          </p:nvPr>
+        </p:nvSpPr>
+        <p:spPr>
+          <a:xfrm>
+            <a:off x="282256" y="-232273"/>
+            <a:ext cx="9795638" cy="1114380"/>
+          </a:xfrm>
+        </p:spPr>
+        <p:txBody>
+          <a:bodyPr vert="horz" lIns="91440" tIns="45720" rIns="91440" bIns="45720" rtlCol="0" anchor="b">
+            <a:normAutofit/>
+          </a:bodyPr>
+          <a:lstStyle/>
+          <a:p>
+            <a:r>
+              <a:rPr lang="en-US" sz="5200"/>
+              <a:t>LSTM Steps</a:t>
+            </a:r>
+          </a:p>
+        </p:txBody>
+      </p:sp>
+      <p:sp>
+        <p:nvSpPr>
+          <p:cNvPr id="9" name="TextBox 8">
+            <a:extLst>
+              <a:ext uri="{FF2B5EF4-FFF2-40B4-BE49-F238E27FC236}">
+                <a16:creationId xmlns:a16="http://schemas.microsoft.com/office/drawing/2014/main" id="{293FD760-BD18-BB13-1AB2-69BA10B529FE}"/>
+              </a:ext>
+            </a:extLst>
+          </p:cNvPr>
+          <p:cNvSpPr txBox="1"/>
+          <p:nvPr/>
+        </p:nvSpPr>
+        <p:spPr>
+          <a:xfrm>
+            <a:off x="751522" y="835022"/>
+            <a:ext cx="11066906" cy="6247864"/>
+          </a:xfrm>
+          <a:prstGeom prst="rect">
+            <a:avLst/>
+          </a:prstGeom>
+          <a:noFill/>
+        </p:spPr>
+        <p:txBody>
+          <a:bodyPr wrap="square" lIns="91440" tIns="45720" rIns="91440" bIns="45720" rtlCol="0" anchor="t">
+            <a:spAutoFit/>
+          </a:bodyPr>
+          <a:lstStyle/>
+          <a:p>
+            <a:pPr marL="457200" indent="-457200">
+              <a:buFont typeface="Arial" panose="020B0604020202020204" pitchFamily="34" charset="0"/>
+              <a:buChar char="•"/>
+            </a:pPr>
+            <a:r>
+              <a:rPr lang="en-US" sz="2500" b="1"/>
+              <a:t>Step 1: Pre-process (Sequence Generation)</a:t>
+            </a:r>
+          </a:p>
+          <a:p>
+            <a:pPr marL="914400" lvl="1" indent="-457200">
+              <a:buFont typeface="Arial" panose="020B0604020202020204" pitchFamily="34" charset="0"/>
+              <a:buChar char="•"/>
+            </a:pPr>
+            <a:r>
+              <a:rPr lang="en-US" sz="2500"/>
+              <a:t>Temporal sequencing: data grouped into chronological sequences of 8 consecutive sliding windows</a:t>
+            </a:r>
+          </a:p>
+          <a:p>
+            <a:pPr lvl="1"/>
+            <a:endParaRPr lang="en-US" sz="2500"/>
+          </a:p>
+          <a:p>
+            <a:pPr marL="457200" indent="-457200">
+              <a:buFont typeface="Arial" panose="020B0604020202020204" pitchFamily="34" charset="0"/>
+              <a:buChar char="•"/>
+            </a:pPr>
+            <a:r>
+              <a:rPr lang="en-US" sz="2500" b="1"/>
+              <a:t>Step 2: Training	</a:t>
+            </a:r>
+          </a:p>
+          <a:p>
+            <a:pPr marL="914400" lvl="1" indent="-457200">
+              <a:buFont typeface="Arial" panose="020B0604020202020204" pitchFamily="34" charset="0"/>
+              <a:buChar char="•"/>
+            </a:pPr>
+            <a:r>
+              <a:rPr lang="en-US" sz="2500" b="1"/>
+              <a:t>CNN Feature Extraction</a:t>
+            </a:r>
+            <a:r>
+              <a:rPr lang="en-US" sz="2500"/>
+              <a:t>: uses same Conv1d method to compress 21 electrodes into spatial feature vector.</a:t>
+            </a:r>
+          </a:p>
+          <a:p>
+            <a:pPr marL="914400" lvl="1" indent="-457200">
+              <a:buFont typeface="Arial" panose="020B0604020202020204" pitchFamily="34" charset="0"/>
+              <a:buChar char="•"/>
+            </a:pPr>
+            <a:r>
+              <a:rPr lang="en-US" sz="2500" b="1"/>
+              <a:t>Temporal Aggregation (LSTM): </a:t>
+            </a:r>
+            <a:r>
+              <a:rPr lang="en-US" sz="2500"/>
+              <a:t>reads sequence of 8 feature vectors to model brainwave evolution over time.</a:t>
+            </a:r>
+          </a:p>
+          <a:p>
+            <a:pPr marL="914400" lvl="1" indent="-457200">
+              <a:buFont typeface="Arial" panose="020B0604020202020204" pitchFamily="34" charset="0"/>
+              <a:buChar char="•"/>
+            </a:pPr>
+            <a:r>
+              <a:rPr lang="en-US" sz="2500" b="1"/>
+              <a:t>Joint Optimization: </a:t>
+            </a:r>
+            <a:r>
+              <a:rPr lang="en-US" sz="2500"/>
+              <a:t>CNN and LSTM are trained simultaneously (end-to-end) across 2 training modes (Balanced vs. 20-80)</a:t>
+            </a:r>
+          </a:p>
+          <a:p>
+            <a:pPr lvl="1"/>
+            <a:endParaRPr lang="en-US" sz="2500"/>
+          </a:p>
+          <a:p>
+            <a:pPr marL="457200" indent="-457200">
+              <a:buFont typeface="Arial" panose="020B0604020202020204" pitchFamily="34" charset="0"/>
+              <a:buChar char="•"/>
+            </a:pPr>
+            <a:r>
+              <a:rPr lang="en-US" sz="2500" b="1"/>
+              <a:t>Step 3: Classification (window, seizure, patient)</a:t>
+            </a:r>
+          </a:p>
+          <a:p>
+            <a:pPr marL="914400" lvl="1" indent="-457200">
+              <a:buFont typeface="Arial" panose="020B0604020202020204" pitchFamily="34" charset="0"/>
+              <a:buChar char="•"/>
+            </a:pPr>
+            <a:r>
+              <a:rPr lang="en-US" sz="2500"/>
+              <a:t>Test with both balanced and unbalanced sets</a:t>
+            </a:r>
+          </a:p>
+          <a:p>
+            <a:pPr marL="457200" indent="-457200">
+              <a:buFont typeface="Arial" panose="020B0604020202020204" pitchFamily="34" charset="0"/>
+              <a:buChar char="•"/>
+            </a:pPr>
+            <a:endParaRPr lang="en-US" sz="2500"/>
+          </a:p>
+          <a:p>
+            <a:pPr marL="457200" indent="-457200">
+              <a:buFont typeface="Arial" panose="020B0604020202020204" pitchFamily="34" charset="0"/>
+              <a:buChar char="•"/>
+            </a:pPr>
+            <a:endParaRPr lang="en-US" sz="2500"/>
+          </a:p>
+        </p:txBody>
+      </p:sp>
+    </p:spTree>
+    <p:extLst>
+      <p:ext uri="{BB962C8B-B14F-4D97-AF65-F5344CB8AC3E}">
+        <p14:creationId xmlns:p14="http://schemas.microsoft.com/office/powerpoint/2010/main" val="1774485577"/>
+      </p:ext>
+    </p:extLst>
+  </p:cSld>
+  <p:clrMapOvr>
+    <a:masterClrMapping/>
+  </p:clrMapOvr>
+</p:sld>
+</file>
+
+<file path=ppt/slides/slide12.xml><?xml version="1.0" encoding="utf-8"?>
+<p:sld xmlns:a="http://schemas.openxmlformats.org/drawingml/2006/main" xmlns:r="http://schemas.openxmlformats.org/officeDocument/2006/relationships" xmlns:p="http://schemas.openxmlformats.org/presentationml/2006/main">
+  <p:cSld>
+    <p:bg>
+      <p:bgPr>
+        <a:solidFill>
+          <a:schemeClr val="bg1"/>
+        </a:solidFill>
+        <a:effectLst/>
+      </p:bgPr>
+    </p:bg>
+    <p:spTree>
+      <p:nvGrpSpPr>
+        <p:cNvPr id="1" name="">
+          <a:extLst>
+            <a:ext uri="{FF2B5EF4-FFF2-40B4-BE49-F238E27FC236}">
+              <a16:creationId xmlns:a16="http://schemas.microsoft.com/office/drawing/2014/main" id="{52564C54-8C2D-11BA-AC0A-535DE9F3953E}"/>
             </a:ext>
           </a:extLst>
         </p:cNvPr>
@@ -5338,7 +5835,7 @@
           <p:cNvPr id="3" name="Picture 2" descr="A graph of a person and person&#10;&#10;AI-generated content may be incorrect.">
             <a:extLst>
               <a:ext uri="{FF2B5EF4-FFF2-40B4-BE49-F238E27FC236}">
-                <a16:creationId xmlns:a16="http://schemas.microsoft.com/office/drawing/2014/main" id="{12963C76-D579-ED1C-E29D-CA93EDF485E0}"/>
+                <a16:creationId xmlns:a16="http://schemas.microsoft.com/office/drawing/2014/main" id="{59904094-760E-E983-E30D-23A1462360CD}"/>
               </a:ext>
             </a:extLst>
           </p:cNvPr>
@@ -5355,7 +5852,7 @@
         </p:blipFill>
         <p:spPr>
           <a:xfrm>
-            <a:off x="295044" y="698141"/>
+            <a:off x="605022" y="789938"/>
             <a:ext cx="7394823" cy="2982913"/>
           </a:xfrm>
           <a:prstGeom prst="rect">
@@ -5363,12 +5860,47 @@
           </a:prstGeom>
         </p:spPr>
       </p:pic>
+      <p:sp>
+        <p:nvSpPr>
+          <p:cNvPr id="2" name="Title 1">
+            <a:extLst>
+              <a:ext uri="{FF2B5EF4-FFF2-40B4-BE49-F238E27FC236}">
+                <a16:creationId xmlns:a16="http://schemas.microsoft.com/office/drawing/2014/main" id="{243854AE-00DA-F028-BC22-254F014BA006}"/>
+              </a:ext>
+            </a:extLst>
+          </p:cNvPr>
+          <p:cNvSpPr>
+            <a:spLocks noGrp="1"/>
+          </p:cNvSpPr>
+          <p:nvPr>
+            <p:ph type="title"/>
+          </p:nvPr>
+        </p:nvSpPr>
+        <p:spPr>
+          <a:xfrm>
+            <a:off x="145415" y="-157162"/>
+            <a:ext cx="10515600" cy="1325563"/>
+          </a:xfrm>
+        </p:spPr>
+        <p:txBody>
+          <a:bodyPr>
+            <a:normAutofit/>
+          </a:bodyPr>
+          <a:lstStyle/>
+          <a:p>
+            <a:r>
+              <a:rPr lang="en-US" sz="4000"/>
+              <a:t>Results: Training Process</a:t>
+            </a:r>
+          </a:p>
+        </p:txBody>
+      </p:sp>
       <p:pic>
         <p:nvPicPr>
-          <p:cNvPr id="4" name="Picture 3" descr="A screenshot of a graph&#10;&#10;AI-generated content may be incorrect.">
-            <a:extLst>
-              <a:ext uri="{FF2B5EF4-FFF2-40B4-BE49-F238E27FC236}">
-                <a16:creationId xmlns:a16="http://schemas.microsoft.com/office/drawing/2014/main" id="{B5A393D9-3AE4-E496-CA9F-E0A5A8BA966C}"/>
+          <p:cNvPr id="5" name="Picture 4" descr="A graph of a line and a line&#10;&#10;AI-generated content may be incorrect.">
+            <a:extLst>
+              <a:ext uri="{FF2B5EF4-FFF2-40B4-BE49-F238E27FC236}">
+                <a16:creationId xmlns:a16="http://schemas.microsoft.com/office/drawing/2014/main" id="{90BDD98B-F905-FB6D-DC4D-534A0E3DF720}"/>
               </a:ext>
             </a:extLst>
           </p:cNvPr>
@@ -5385,8 +5917,8 @@
         </p:blipFill>
         <p:spPr>
           <a:xfrm>
-            <a:off x="4762933" y="3429000"/>
-            <a:ext cx="7262812" cy="3304306"/>
+            <a:off x="516121" y="3772851"/>
+            <a:ext cx="7394823" cy="2958278"/>
           </a:xfrm>
           <a:prstGeom prst="rect">
             <a:avLst/>
@@ -5395,43 +5927,60 @@
       </p:pic>
       <p:sp>
         <p:nvSpPr>
-          <p:cNvPr id="2" name="Title 1">
-            <a:extLst>
-              <a:ext uri="{FF2B5EF4-FFF2-40B4-BE49-F238E27FC236}">
-                <a16:creationId xmlns:a16="http://schemas.microsoft.com/office/drawing/2014/main" id="{7DD79E17-236A-6E63-F8FF-C80AD64F69E0}"/>
-              </a:ext>
-            </a:extLst>
-          </p:cNvPr>
-          <p:cNvSpPr>
-            <a:spLocks noGrp="1"/>
-          </p:cNvSpPr>
-          <p:nvPr>
-            <p:ph type="title"/>
-          </p:nvPr>
+          <p:cNvPr id="6" name="TextBox 5">
+            <a:extLst>
+              <a:ext uri="{FF2B5EF4-FFF2-40B4-BE49-F238E27FC236}">
+                <a16:creationId xmlns:a16="http://schemas.microsoft.com/office/drawing/2014/main" id="{11294636-EE96-35A6-7E6C-6381534C69C1}"/>
+              </a:ext>
+            </a:extLst>
+          </p:cNvPr>
+          <p:cNvSpPr txBox="1"/>
+          <p:nvPr/>
         </p:nvSpPr>
         <p:spPr>
           <a:xfrm>
-            <a:off x="145415" y="-157162"/>
-            <a:ext cx="10515600" cy="1325563"/>
+            <a:off x="7910944" y="1857629"/>
+            <a:ext cx="4164349" cy="2862322"/>
           </a:xfrm>
+          <a:prstGeom prst="rect">
+            <a:avLst/>
+          </a:prstGeom>
+          <a:noFill/>
         </p:spPr>
         <p:txBody>
-          <a:bodyPr>
-            <a:normAutofit/>
+          <a:bodyPr wrap="square" lIns="91440" tIns="45720" rIns="91440" bIns="45720" rtlCol="0" anchor="t">
+            <a:spAutoFit/>
           </a:bodyPr>
           <a:lstStyle/>
           <a:p>
-            <a:r>
-              <a:rPr lang="en-US" sz="4000" dirty="0"/>
-              <a:t>Results: Understanding Training Process</a:t>
-            </a:r>
+            <a:pPr marL="457200" indent="-457200">
+              <a:buFont typeface="Arial" panose="020B0604020202020204" pitchFamily="34" charset="0"/>
+              <a:buChar char="•"/>
+            </a:pPr>
+            <a:r>
+              <a:rPr lang="en-US" sz="3000"/>
+              <a:t>CNN: peak AUC ~0.79  </a:t>
+            </a:r>
+          </a:p>
+          <a:p>
+            <a:pPr marL="457200" indent="-457200">
+              <a:buFont typeface="Arial" panose="020B0604020202020204" pitchFamily="34" charset="0"/>
+              <a:buChar char="•"/>
+            </a:pPr>
+            <a:r>
+              <a:rPr lang="en-US" sz="3000"/>
+              <a:t>LSTM: Training loss reduction much faster</a:t>
+            </a:r>
+          </a:p>
+          <a:p>
+            <a:endParaRPr lang="en-US" sz="3000"/>
           </a:p>
         </p:txBody>
       </p:sp>
     </p:spTree>
     <p:extLst>
       <p:ext uri="{BB962C8B-B14F-4D97-AF65-F5344CB8AC3E}">
-        <p14:creationId xmlns:p14="http://schemas.microsoft.com/office/powerpoint/2010/main" val="786601153"/>
+        <p14:creationId xmlns:p14="http://schemas.microsoft.com/office/powerpoint/2010/main" val="2560845069"/>
       </p:ext>
     </p:extLst>
   </p:cSld>
@@ -5441,7 +5990,7 @@
 </p:sld>
 </file>
 
-<file path=ppt/slides/slide11.xml><?xml version="1.0" encoding="utf-8"?>
+<file path=ppt/slides/slide13.xml><?xml version="1.0" encoding="utf-8"?>
 <p:sld xmlns:a="http://schemas.openxmlformats.org/drawingml/2006/main" xmlns:r="http://schemas.openxmlformats.org/officeDocument/2006/relationships" xmlns:p="http://schemas.openxmlformats.org/presentationml/2006/main" show="0">
   <p:cSld>
     <p:bg>
@@ -5493,7 +6042,7 @@
           <a:lstStyle/>
           <a:p>
             <a:r>
-              <a:rPr lang="en-US" dirty="0"/>
+              <a:rPr lang="en-US"/>
               <a:t>F1 Scores – 3 × 2 × 2 Scenario Comparison</a:t>
             </a:r>
           </a:p>
@@ -5542,7 +6091,7 @@
 </p:sld>
 </file>
 
-<file path=ppt/slides/slide12.xml><?xml version="1.0" encoding="utf-8"?>
+<file path=ppt/slides/slide14.xml><?xml version="1.0" encoding="utf-8"?>
 <p:sld xmlns:a="http://schemas.openxmlformats.org/drawingml/2006/main" xmlns:r="http://schemas.openxmlformats.org/officeDocument/2006/relationships" xmlns:p="http://schemas.openxmlformats.org/presentationml/2006/main">
   <p:cSld>
     <p:bg>
@@ -5573,6 +6122,37 @@
           <a:chExt cx="0" cy="0"/>
         </a:xfrm>
       </p:grpSpPr>
+      <p:pic>
+        <p:nvPicPr>
+          <p:cNvPr id="5" name="Picture 4" descr="A screenshot of a computer&#10;&#10;AI-generated content may be incorrect.">
+            <a:extLst>
+              <a:ext uri="{FF2B5EF4-FFF2-40B4-BE49-F238E27FC236}">
+                <a16:creationId xmlns:a16="http://schemas.microsoft.com/office/drawing/2014/main" id="{D1B8C3A7-3AB0-7918-D4FB-B395E05236E4}"/>
+              </a:ext>
+            </a:extLst>
+          </p:cNvPr>
+          <p:cNvPicPr>
+            <a:picLocks noChangeAspect="1"/>
+          </p:cNvPicPr>
+          <p:nvPr/>
+        </p:nvPicPr>
+        <p:blipFill>
+          <a:blip r:embed="rId3"/>
+          <a:srcRect r="8328"/>
+          <a:stretch>
+            <a:fillRect/>
+          </a:stretch>
+        </p:blipFill>
+        <p:spPr>
+          <a:xfrm>
+            <a:off x="21654" y="639199"/>
+            <a:ext cx="11629582" cy="3077526"/>
+          </a:xfrm>
+          <a:prstGeom prst="rect">
+            <a:avLst/>
+          </a:prstGeom>
+        </p:spPr>
+      </p:pic>
       <p:sp>
         <p:nvSpPr>
           <p:cNvPr id="2" name="Title 1">
@@ -5600,7 +6180,7 @@
           <a:lstStyle/>
           <a:p>
             <a:r>
-              <a:rPr lang="en-US" dirty="0"/>
+              <a:rPr lang="en-US"/>
               <a:t>F1 and ROC AUC: Key Insights</a:t>
             </a:r>
           </a:p>
@@ -5620,8 +6200,8 @@
         </p:nvSpPr>
         <p:spPr>
           <a:xfrm>
-            <a:off x="499047" y="4114970"/>
-            <a:ext cx="11066906" cy="2862322"/>
+            <a:off x="499047" y="3810170"/>
+            <a:ext cx="11066906" cy="3170099"/>
           </a:xfrm>
           <a:prstGeom prst="rect">
             <a:avLst/>
@@ -5636,7 +6216,7 @@
           <a:p>
             <a:r>
               <a:rPr lang="en-US" sz="2000" b="1" dirty="0"/>
-              <a:t>Surprising:</a:t>
+              <a:t>Interesting:</a:t>
             </a:r>
           </a:p>
           <a:p>
@@ -5646,7 +6226,29 @@
             </a:pPr>
             <a:r>
               <a:rPr lang="en-US" sz="2000" dirty="0"/>
-              <a:t>Training with balanced classes slightly worse than training on unbalancing!</a:t>
+              <a:t>Training with </a:t>
+            </a:r>
+            <a:r>
+              <a:rPr lang="en-US" sz="2000" b="1" dirty="0"/>
+              <a:t>balanced</a:t>
+            </a:r>
+            <a:r>
+              <a:rPr lang="en-US" sz="2000" dirty="0"/>
+              <a:t> classes was slightly worse than training on </a:t>
+            </a:r>
+            <a:r>
+              <a:rPr lang="en-US" sz="2000" b="1" dirty="0"/>
+              <a:t>unbalanced </a:t>
+            </a:r>
+          </a:p>
+          <a:p>
+            <a:pPr marL="800100" lvl="1" indent="-342900">
+              <a:buFont typeface="Arial" panose="020B0604020202020204" pitchFamily="34" charset="0"/>
+              <a:buChar char="•"/>
+            </a:pPr>
+            <a:r>
+              <a:rPr lang="en-US" sz="2000" dirty="0"/>
+              <a:t>Contrary to common deep learning practices</a:t>
             </a:r>
           </a:p>
           <a:p>
@@ -5665,7 +6267,7 @@
             </a:pPr>
             <a:r>
               <a:rPr lang="en-US" sz="2000" dirty="0"/>
-              <a:t>Window split – highest scores due to leakage of 80% overlap</a:t>
+              <a:t>Fixing leakage led to consistently lower F1 and ROC AUC, but not statistically significant</a:t>
             </a:r>
           </a:p>
           <a:p>
@@ -5675,7 +6277,7 @@
             </a:pPr>
             <a:r>
               <a:rPr lang="en-US" sz="2000" dirty="0"/>
-              <a:t>For the same training mode: ROC AUC stays stable across unbalanced vs balanced test, but F1 score drops on unbalanced  test (this is expected)</a:t>
+              <a:t>For the same training mode: ROC AUC is relatively stable across unbalanced vs balanced test, but F1 score drops on unbalanced test (this is expected)</a:t>
             </a:r>
           </a:p>
           <a:p>
@@ -5708,42 +6310,12 @@
         </p:nvGrpSpPr>
         <p:grpSpPr>
           <a:xfrm>
-            <a:off x="565265" y="573605"/>
-            <a:ext cx="10738765" cy="3451205"/>
-            <a:chOff x="389206" y="703897"/>
-            <a:chExt cx="11413588" cy="3668078"/>
+            <a:off x="21653" y="2361600"/>
+            <a:ext cx="11651235" cy="970439"/>
+            <a:chOff x="-118187" y="1259795"/>
+            <a:chExt cx="12383397" cy="1031421"/>
           </a:xfrm>
         </p:grpSpPr>
-        <p:pic>
-          <p:nvPicPr>
-            <p:cNvPr id="3" name="Picture 2" descr="A screenshot of a computer&#10;&#10;AI-generated content may be incorrect.">
-              <a:extLst>
-                <a:ext uri="{FF2B5EF4-FFF2-40B4-BE49-F238E27FC236}">
-                  <a16:creationId xmlns:a16="http://schemas.microsoft.com/office/drawing/2014/main" id="{A94405FF-2921-E9B6-D03B-7318034A32E9}"/>
-                </a:ext>
-              </a:extLst>
-            </p:cNvPr>
-            <p:cNvPicPr>
-              <a:picLocks noChangeAspect="1"/>
-            </p:cNvPicPr>
-            <p:nvPr/>
-          </p:nvPicPr>
-          <p:blipFill>
-            <a:blip r:embed="rId3"/>
-            <a:stretch>
-              <a:fillRect/>
-            </a:stretch>
-          </p:blipFill>
-          <p:spPr>
-            <a:xfrm>
-              <a:off x="389206" y="703897"/>
-              <a:ext cx="11413588" cy="3668078"/>
-            </a:xfrm>
-            <a:prstGeom prst="rect">
-              <a:avLst/>
-            </a:prstGeom>
-          </p:spPr>
-        </p:pic>
         <p:sp>
           <p:nvSpPr>
             <p:cNvPr id="6" name="Rectangle 5">
@@ -5758,8 +6330,8 @@
           </p:nvSpPr>
           <p:spPr>
             <a:xfrm>
-              <a:off x="389206" y="1828800"/>
-              <a:ext cx="11413588" cy="315686"/>
+              <a:off x="-118187" y="1975532"/>
+              <a:ext cx="12383397" cy="315684"/>
             </a:xfrm>
             <a:prstGeom prst="rect">
               <a:avLst/>
@@ -5814,8 +6386,141 @@
           </p:nvSpPr>
           <p:spPr>
             <a:xfrm>
-              <a:off x="389206" y="1259795"/>
-              <a:ext cx="11413588" cy="315686"/>
+              <a:off x="-118187" y="1259795"/>
+              <a:ext cx="12383397" cy="315684"/>
+            </a:xfrm>
+            <a:prstGeom prst="rect">
+              <a:avLst/>
+            </a:prstGeom>
+            <a:solidFill>
+              <a:srgbClr val="FFFF00">
+                <a:alpha val="32941"/>
+              </a:srgbClr>
+            </a:solidFill>
+            <a:ln>
+              <a:solidFill>
+                <a:srgbClr val="FF0000"/>
+              </a:solidFill>
+            </a:ln>
+          </p:spPr>
+          <p:style>
+            <a:lnRef idx="2">
+              <a:schemeClr val="accent1">
+                <a:shade val="15000"/>
+              </a:schemeClr>
+            </a:lnRef>
+            <a:fillRef idx="1">
+              <a:schemeClr val="accent1"/>
+            </a:fillRef>
+            <a:effectRef idx="0">
+              <a:schemeClr val="accent1"/>
+            </a:effectRef>
+            <a:fontRef idx="minor">
+              <a:schemeClr val="lt1"/>
+            </a:fontRef>
+          </p:style>
+          <p:txBody>
+            <a:bodyPr rtlCol="0" anchor="ctr"/>
+            <a:lstStyle/>
+            <a:p>
+              <a:pPr algn="ctr"/>
+              <a:endParaRPr lang="en-US"/>
+            </a:p>
+          </p:txBody>
+        </p:sp>
+      </p:grpSp>
+      <p:grpSp>
+        <p:nvGrpSpPr>
+          <p:cNvPr id="12" name="Group 11">
+            <a:extLst>
+              <a:ext uri="{FF2B5EF4-FFF2-40B4-BE49-F238E27FC236}">
+                <a16:creationId xmlns:a16="http://schemas.microsoft.com/office/drawing/2014/main" id="{D24B314D-0DD7-0B09-5850-22A20B6AED65}"/>
+              </a:ext>
+            </a:extLst>
+          </p:cNvPr>
+          <p:cNvGrpSpPr/>
+          <p:nvPr/>
+        </p:nvGrpSpPr>
+        <p:grpSpPr>
+          <a:xfrm>
+            <a:off x="0" y="1006476"/>
+            <a:ext cx="11651235" cy="970439"/>
+            <a:chOff x="-118187" y="1259795"/>
+            <a:chExt cx="12383397" cy="1031421"/>
+          </a:xfrm>
+        </p:grpSpPr>
+        <p:sp>
+          <p:nvSpPr>
+            <p:cNvPr id="13" name="Rectangle 12">
+              <a:extLst>
+                <a:ext uri="{FF2B5EF4-FFF2-40B4-BE49-F238E27FC236}">
+                  <a16:creationId xmlns:a16="http://schemas.microsoft.com/office/drawing/2014/main" id="{65BCAADE-B793-9EAC-C939-FFB41FF91EBB}"/>
+                </a:ext>
+              </a:extLst>
+            </p:cNvPr>
+            <p:cNvSpPr/>
+            <p:nvPr/>
+          </p:nvSpPr>
+          <p:spPr>
+            <a:xfrm>
+              <a:off x="-118187" y="1975532"/>
+              <a:ext cx="12383397" cy="315684"/>
+            </a:xfrm>
+            <a:prstGeom prst="rect">
+              <a:avLst/>
+            </a:prstGeom>
+            <a:solidFill>
+              <a:srgbClr val="FFFF00">
+                <a:alpha val="32941"/>
+              </a:srgbClr>
+            </a:solidFill>
+            <a:ln>
+              <a:solidFill>
+                <a:srgbClr val="FF0000"/>
+              </a:solidFill>
+            </a:ln>
+          </p:spPr>
+          <p:style>
+            <a:lnRef idx="2">
+              <a:schemeClr val="accent1">
+                <a:shade val="15000"/>
+              </a:schemeClr>
+            </a:lnRef>
+            <a:fillRef idx="1">
+              <a:schemeClr val="accent1"/>
+            </a:fillRef>
+            <a:effectRef idx="0">
+              <a:schemeClr val="accent1"/>
+            </a:effectRef>
+            <a:fontRef idx="minor">
+              <a:schemeClr val="lt1"/>
+            </a:fontRef>
+          </p:style>
+          <p:txBody>
+            <a:bodyPr rtlCol="0" anchor="ctr"/>
+            <a:lstStyle/>
+            <a:p>
+              <a:pPr algn="ctr"/>
+              <a:endParaRPr lang="en-US"/>
+            </a:p>
+          </p:txBody>
+        </p:sp>
+        <p:sp>
+          <p:nvSpPr>
+            <p:cNvPr id="14" name="Rectangle 13">
+              <a:extLst>
+                <a:ext uri="{FF2B5EF4-FFF2-40B4-BE49-F238E27FC236}">
+                  <a16:creationId xmlns:a16="http://schemas.microsoft.com/office/drawing/2014/main" id="{A95C0E5F-9B72-0B20-32C6-1549662EFD49}"/>
+                </a:ext>
+              </a:extLst>
+            </p:cNvPr>
+            <p:cNvSpPr/>
+            <p:nvPr/>
+          </p:nvSpPr>
+          <p:spPr>
+            <a:xfrm>
+              <a:off x="-118187" y="1259795"/>
+              <a:ext cx="12383397" cy="315684"/>
             </a:xfrm>
             <a:prstGeom prst="rect">
               <a:avLst/>
@@ -5870,7 +6575,7 @@
 </p:sld>
 </file>
 
-<file path=ppt/slides/slide13.xml><?xml version="1.0" encoding="utf-8"?>
+<file path=ppt/slides/slide15.xml><?xml version="1.0" encoding="utf-8"?>
 <p:sld xmlns:a="http://schemas.openxmlformats.org/drawingml/2006/main" xmlns:r="http://schemas.openxmlformats.org/officeDocument/2006/relationships" xmlns:p="http://schemas.openxmlformats.org/presentationml/2006/main" show="0">
   <p:cSld>
     <p:bg>
@@ -5928,7 +6633,7 @@
           <a:lstStyle/>
           <a:p>
             <a:r>
-              <a:rPr lang="en-US" dirty="0"/>
+              <a:rPr lang="en-US"/>
               <a:t>ROC-AUC Scores – 3 × 2 × 2 Scenarios</a:t>
             </a:r>
           </a:p>
@@ -5977,7 +6682,7 @@
 </p:sld>
 </file>
 
-<file path=ppt/slides/slide14.xml><?xml version="1.0" encoding="utf-8"?>
+<file path=ppt/slides/slide16.xml><?xml version="1.0" encoding="utf-8"?>
 <p:sld xmlns:a="http://schemas.openxmlformats.org/drawingml/2006/main" xmlns:r="http://schemas.openxmlformats.org/officeDocument/2006/relationships" xmlns:p="http://schemas.openxmlformats.org/presentationml/2006/main">
   <p:cSld>
     <p:bg>
@@ -6035,18 +6740,18 @@
           <a:lstStyle/>
           <a:p>
             <a:r>
-              <a:rPr lang="en-US" dirty="0"/>
-              <a:t>Confusion Matrices</a:t>
+              <a:rPr lang="en-US"/>
+              <a:t>Confusion Matrices: CNN vs LSTM</a:t>
             </a:r>
           </a:p>
         </p:txBody>
       </p:sp>
       <p:pic>
         <p:nvPicPr>
-          <p:cNvPr id="5" name="Picture 4">
-            <a:extLst>
-              <a:ext uri="{FF2B5EF4-FFF2-40B4-BE49-F238E27FC236}">
-                <a16:creationId xmlns:a16="http://schemas.microsoft.com/office/drawing/2014/main" id="{569108FF-44E1-68AB-AAFB-BD969BF1DA4D}"/>
+          <p:cNvPr id="3" name="Picture 2" descr="A screenshot of a graph&#10;&#10;AI-generated content may be incorrect.">
+            <a:extLst>
+              <a:ext uri="{FF2B5EF4-FFF2-40B4-BE49-F238E27FC236}">
+                <a16:creationId xmlns:a16="http://schemas.microsoft.com/office/drawing/2014/main" id="{CAB8E395-4E4F-0960-CDC7-5478E09D5D45}"/>
               </a:ext>
             </a:extLst>
           </p:cNvPr>
@@ -6056,15 +6761,57 @@
           <p:nvPr/>
         </p:nvPicPr>
         <p:blipFill>
-          <a:blip r:embed="rId3"/>
+          <a:blip r:embed="rId3" cstate="print">
+            <a:extLst>
+              <a:ext uri="{28A0092B-C50C-407E-A947-70E740481C1C}">
+                <a14:useLocalDpi xmlns:a14="http://schemas.microsoft.com/office/drawing/2010/main" val="0"/>
+              </a:ext>
+            </a:extLst>
+          </a:blip>
+          <a:srcRect b="7028"/>
+          <a:stretch>
+            <a:fillRect/>
+          </a:stretch>
+        </p:blipFill>
+        <p:spPr bwMode="auto">
+          <a:xfrm>
+            <a:off x="20733" y="3534347"/>
+            <a:ext cx="11501455" cy="3429000"/>
+          </a:xfrm>
+          <a:prstGeom prst="rect">
+            <a:avLst/>
+          </a:prstGeom>
+          <a:noFill/>
+          <a:ln>
+            <a:noFill/>
+          </a:ln>
+        </p:spPr>
+      </p:pic>
+      <p:pic>
+        <p:nvPicPr>
+          <p:cNvPr id="4" name="Picture 3">
+            <a:extLst>
+              <a:ext uri="{FF2B5EF4-FFF2-40B4-BE49-F238E27FC236}">
+                <a16:creationId xmlns:a16="http://schemas.microsoft.com/office/drawing/2014/main" id="{71D082F4-BF2F-7457-FA4B-08505C7EA210}"/>
+              </a:ext>
+            </a:extLst>
+          </p:cNvPr>
+          <p:cNvPicPr>
+            <a:picLocks noChangeAspect="1"/>
+          </p:cNvPicPr>
+          <p:nvPr/>
+        </p:nvPicPr>
+        <p:blipFill>
+          <a:blip r:embed="rId4"/>
+          <a:srcRect t="5040" b="4265"/>
           <a:stretch>
             <a:fillRect/>
           </a:stretch>
         </p:blipFill>
         <p:spPr>
           <a:xfrm>
-            <a:off x="890587" y="546572"/>
-            <a:ext cx="10410825" cy="6152518"/>
+            <a:off x="261910" y="519546"/>
+            <a:ext cx="11019103" cy="3111336"/>
           </a:xfrm>
           <a:prstGeom prst="rect">
             <a:avLst/>
@@ -6084,20 +6831,29 @@
 </p:sld>
 </file>
 
-<file path=ppt/slides/slide15.xml><?xml version="1.0" encoding="utf-8"?>
+<file path=ppt/slides/slide17.xml><?xml version="1.0" encoding="utf-8"?>
 <p:sld xmlns:a="http://schemas.openxmlformats.org/drawingml/2006/main" xmlns:r="http://schemas.openxmlformats.org/officeDocument/2006/relationships" xmlns:p="http://schemas.openxmlformats.org/presentationml/2006/main">
   <p:cSld>
     <p:bg>
       <p:bgPr>
         <a:solidFill>
-          <a:schemeClr val="bg1"/>
+          <a:schemeClr val="accent2">
+            <a:lumMod val="20000"/>
+            <a:lumOff val="80000"/>
+          </a:schemeClr>
         </a:solidFill>
         <a:effectLst/>
       </p:bgPr>
     </p:bg>
     <p:spTree>
       <p:nvGrpSpPr>
-        <p:cNvPr id="1" name=""/>
+        <p:cNvPr id="1" name="">
+          <a:extLst>
+            <a:ext uri="{FF2B5EF4-FFF2-40B4-BE49-F238E27FC236}">
+              <a16:creationId xmlns:a16="http://schemas.microsoft.com/office/drawing/2014/main" id="{7853BB9C-D3D6-AA92-7DE0-9656595F6D2A}"/>
+            </a:ext>
+          </a:extLst>
+        </p:cNvPr>
         <p:cNvGrpSpPr/>
         <p:nvPr/>
       </p:nvGrpSpPr>
@@ -6109,21 +6865,44 @@
           <a:chExt cx="0" cy="0"/>
         </a:xfrm>
       </p:grpSpPr>
+      <p:sp>
+        <p:nvSpPr>
+          <p:cNvPr id="6" name="Title 5">
+            <a:extLst>
+              <a:ext uri="{FF2B5EF4-FFF2-40B4-BE49-F238E27FC236}">
+                <a16:creationId xmlns:a16="http://schemas.microsoft.com/office/drawing/2014/main" id="{9AE18D62-A481-45AF-81BB-3843F670E937}"/>
+              </a:ext>
+            </a:extLst>
+          </p:cNvPr>
+          <p:cNvSpPr>
+            <a:spLocks noGrp="1"/>
+          </p:cNvSpPr>
+          <p:nvPr>
+            <p:ph type="title"/>
+          </p:nvPr>
+        </p:nvSpPr>
+        <p:spPr/>
+        <p:txBody>
+          <a:bodyPr/>
+          <a:lstStyle/>
+          <a:p>
+            <a:endParaRPr lang="en-US"/>
+          </a:p>
+        </p:txBody>
+      </p:sp>
       <p:sp useBgFill="1">
         <p:nvSpPr>
-          <p:cNvPr id="13" name="Rectangle 12">
-            <a:extLst>
-              <a:ext uri="{FF2B5EF4-FFF2-40B4-BE49-F238E27FC236}">
-                <a16:creationId xmlns:a16="http://schemas.microsoft.com/office/drawing/2014/main" id="{743AA782-23D1-4521-8CAD-47662984AA08}"/>
+          <p:cNvPr id="12" name="Rectangle 11">
+            <a:extLst>
+              <a:ext uri="{FF2B5EF4-FFF2-40B4-BE49-F238E27FC236}">
+                <a16:creationId xmlns:a16="http://schemas.microsoft.com/office/drawing/2014/main" id="{F64B6237-6963-2FF0-2E0B-A66311716D59}"/>
               </a:ext>
               <a:ext uri="{C183D7F6-B498-43B3-948B-1728B52AA6E4}">
                 <adec:decorative xmlns:adec="http://schemas.microsoft.com/office/drawing/2017/decorative" val="1"/>
               </a:ext>
             </a:extLst>
           </p:cNvPr>
-          <p:cNvSpPr>
-            <a:spLocks noGrp="1" noRot="1" noChangeAspect="1" noMove="1" noResize="1" noEditPoints="1" noAdjustHandles="1" noChangeArrowheads="1" noChangeShapeType="1" noTextEdit="1"/>
-          </p:cNvSpPr>
+          <p:cNvSpPr/>
           <p:nvPr>
             <p:extLst>
               <p:ext uri="{386F3935-93C4-4BCD-93E2-E3B085C9AB24}">
@@ -6171,31 +6950,50 @@
       </p:sp>
       <p:sp>
         <p:nvSpPr>
-          <p:cNvPr id="2" name="Title 1">
-            <a:extLst>
-              <a:ext uri="{FF2B5EF4-FFF2-40B4-BE49-F238E27FC236}">
-                <a16:creationId xmlns:a16="http://schemas.microsoft.com/office/drawing/2014/main" id="{F103D429-0790-28FF-4D0E-FCFD54134165}"/>
-              </a:ext>
-            </a:extLst>
-          </p:cNvPr>
-          <p:cNvSpPr>
-            <a:spLocks noGrp="1"/>
-          </p:cNvSpPr>
-          <p:nvPr>
-            <p:ph type="title"/>
-          </p:nvPr>
+          <p:cNvPr id="13" name="Title 1">
+            <a:extLst>
+              <a:ext uri="{FF2B5EF4-FFF2-40B4-BE49-F238E27FC236}">
+                <a16:creationId xmlns:a16="http://schemas.microsoft.com/office/drawing/2014/main" id="{A471E82F-2587-8617-05D3-13A7D547D965}"/>
+              </a:ext>
+            </a:extLst>
+          </p:cNvPr>
+          <p:cNvSpPr txBox="1">
+            <a:spLocks/>
+          </p:cNvSpPr>
+          <p:nvPr/>
         </p:nvSpPr>
         <p:spPr>
           <a:xfrm>
-            <a:off x="630936" y="640080"/>
-            <a:ext cx="6791840" cy="1481328"/>
+            <a:off x="167294" y="108118"/>
+            <a:ext cx="9478981" cy="919788"/>
           </a:xfrm>
+          <a:prstGeom prst="rect">
+            <a:avLst/>
+          </a:prstGeom>
         </p:spPr>
         <p:txBody>
-          <a:bodyPr anchor="b">
-            <a:normAutofit fontScale="90000"/>
+          <a:bodyPr vert="horz" lIns="91440" tIns="45720" rIns="91440" bIns="45720" rtlCol="0" anchor="b">
+            <a:normAutofit fontScale="97500"/>
           </a:bodyPr>
-          <a:lstStyle/>
+          <a:lstStyle>
+            <a:lvl1pPr algn="l" defTabSz="914400" rtl="0" eaLnBrk="1" latinLnBrk="0" hangingPunct="1">
+              <a:lnSpc>
+                <a:spcPct val="90000"/>
+              </a:lnSpc>
+              <a:spcBef>
+                <a:spcPct val="0"/>
+              </a:spcBef>
+              <a:buNone/>
+              <a:defRPr sz="4400" kern="1200">
+                <a:solidFill>
+                  <a:schemeClr val="tx1"/>
+                </a:solidFill>
+                <a:latin typeface="+mj-lt"/>
+                <a:ea typeface="+mj-ea"/>
+                <a:cs typeface="+mj-cs"/>
+              </a:defRPr>
+            </a:lvl1pPr>
+          </a:lstStyle>
           <a:p>
             <a:r>
               <a:rPr lang="en-GB" sz="5400"/>
@@ -6206,297 +7004,24 @@
       </p:sp>
       <p:sp>
         <p:nvSpPr>
-          <p:cNvPr id="14" name="sketch line">
-            <a:extLst>
-              <a:ext uri="{FF2B5EF4-FFF2-40B4-BE49-F238E27FC236}">
-                <a16:creationId xmlns:a16="http://schemas.microsoft.com/office/drawing/2014/main" id="{71877DBC-BB60-40F0-AC93-2ACDBAAE60CE}"/>
-              </a:ext>
-              <a:ext uri="{C183D7F6-B498-43B3-948B-1728B52AA6E4}">
-                <adec:decorative xmlns:adec="http://schemas.microsoft.com/office/drawing/2017/decorative" val="1"/>
-              </a:ext>
-            </a:extLst>
-          </p:cNvPr>
-          <p:cNvSpPr>
-            <a:spLocks noGrp="1" noRot="1" noChangeAspect="1" noMove="1" noResize="1" noEditPoints="1" noAdjustHandles="1" noChangeArrowheads="1" noChangeShapeType="1" noTextEdit="1"/>
-          </p:cNvSpPr>
-          <p:nvPr>
-            <p:extLst>
-              <p:ext uri="{386F3935-93C4-4BCD-93E2-E3B085C9AB24}">
-                <p16:designElem xmlns:p16="http://schemas.microsoft.com/office/powerpoint/2015/main" val="1"/>
-              </p:ext>
-            </p:extLst>
+          <p:cNvPr id="14" name="Content Placeholder 2">
+            <a:extLst>
+              <a:ext uri="{FF2B5EF4-FFF2-40B4-BE49-F238E27FC236}">
+                <a16:creationId xmlns:a16="http://schemas.microsoft.com/office/drawing/2014/main" id="{47DCF28A-B93F-8E87-7A15-0AF6574F6680}"/>
+              </a:ext>
+            </a:extLst>
+          </p:cNvPr>
+          <p:cNvSpPr>
+            <a:spLocks noGrp="1"/>
+          </p:cNvSpPr>
+          <p:nvPr>
+            <p:ph idx="1"/>
           </p:nvPr>
         </p:nvSpPr>
         <p:spPr>
           <a:xfrm>
-            <a:off x="643278" y="2372868"/>
-            <a:ext cx="3255095" cy="18288"/>
-          </a:xfrm>
-          <a:custGeom>
-            <a:avLst/>
-            <a:gdLst>
-              <a:gd name="csX0" fmla="*/ 0 w 3255095"/>
-              <a:gd name="csY0" fmla="*/ 0 h 18288"/>
-              <a:gd name="csX1" fmla="*/ 618468 w 3255095"/>
-              <a:gd name="csY1" fmla="*/ 0 h 18288"/>
-              <a:gd name="csX2" fmla="*/ 1269487 w 3255095"/>
-              <a:gd name="csY2" fmla="*/ 0 h 18288"/>
-              <a:gd name="csX3" fmla="*/ 1953057 w 3255095"/>
-              <a:gd name="csY3" fmla="*/ 0 h 18288"/>
-              <a:gd name="csX4" fmla="*/ 2636627 w 3255095"/>
-              <a:gd name="csY4" fmla="*/ 0 h 18288"/>
-              <a:gd name="csX5" fmla="*/ 3255095 w 3255095"/>
-              <a:gd name="csY5" fmla="*/ 0 h 18288"/>
-              <a:gd name="csX6" fmla="*/ 3255095 w 3255095"/>
-              <a:gd name="csY6" fmla="*/ 18288 h 18288"/>
-              <a:gd name="csX7" fmla="*/ 2538974 w 3255095"/>
-              <a:gd name="csY7" fmla="*/ 18288 h 18288"/>
-              <a:gd name="csX8" fmla="*/ 1822853 w 3255095"/>
-              <a:gd name="csY8" fmla="*/ 18288 h 18288"/>
-              <a:gd name="csX9" fmla="*/ 1171834 w 3255095"/>
-              <a:gd name="csY9" fmla="*/ 18288 h 18288"/>
-              <a:gd name="csX10" fmla="*/ 0 w 3255095"/>
-              <a:gd name="csY10" fmla="*/ 18288 h 18288"/>
-              <a:gd name="csX11" fmla="*/ 0 w 3255095"/>
-              <a:gd name="csY11" fmla="*/ 0 h 18288"/>
-            </a:gdLst>
-            <a:ahLst/>
-            <a:cxnLst>
-              <a:cxn ang="0">
-                <a:pos x="csX0" y="csY0"/>
-              </a:cxn>
-              <a:cxn ang="0">
-                <a:pos x="csX1" y="csY1"/>
-              </a:cxn>
-              <a:cxn ang="0">
-                <a:pos x="csX2" y="csY2"/>
-              </a:cxn>
-              <a:cxn ang="0">
-                <a:pos x="csX3" y="csY3"/>
-              </a:cxn>
-              <a:cxn ang="0">
-                <a:pos x="csX4" y="csY4"/>
-              </a:cxn>
-              <a:cxn ang="0">
-                <a:pos x="csX5" y="csY5"/>
-              </a:cxn>
-              <a:cxn ang="0">
-                <a:pos x="csX6" y="csY6"/>
-              </a:cxn>
-              <a:cxn ang="0">
-                <a:pos x="csX7" y="csY7"/>
-              </a:cxn>
-              <a:cxn ang="0">
-                <a:pos x="csX8" y="csY8"/>
-              </a:cxn>
-              <a:cxn ang="0">
-                <a:pos x="csX9" y="csY9"/>
-              </a:cxn>
-              <a:cxn ang="0">
-                <a:pos x="csX10" y="csY10"/>
-              </a:cxn>
-              <a:cxn ang="0">
-                <a:pos x="csX11" y="csY11"/>
-              </a:cxn>
-            </a:cxnLst>
-            <a:rect l="l" t="t" r="r" b="b"/>
-            <a:pathLst>
-              <a:path w="3255095" h="18288" fill="none" extrusionOk="0">
-                <a:moveTo>
-                  <a:pt x="0" y="0"/>
-                </a:moveTo>
-                <a:cubicBezTo>
-                  <a:pt x="240201" y="-22123"/>
-                  <a:pt x="462021" y="-19623"/>
-                  <a:pt x="618468" y="0"/>
-                </a:cubicBezTo>
-                <a:cubicBezTo>
-                  <a:pt x="774915" y="19623"/>
-                  <a:pt x="974734" y="2035"/>
-                  <a:pt x="1269487" y="0"/>
-                </a:cubicBezTo>
-                <a:cubicBezTo>
-                  <a:pt x="1564240" y="-2035"/>
-                  <a:pt x="1733579" y="10639"/>
-                  <a:pt x="1953057" y="0"/>
-                </a:cubicBezTo>
-                <a:cubicBezTo>
-                  <a:pt x="2172535" y="-10639"/>
-                  <a:pt x="2453962" y="14018"/>
-                  <a:pt x="2636627" y="0"/>
-                </a:cubicBezTo>
-                <a:cubicBezTo>
-                  <a:pt x="2819292" y="-14018"/>
-                  <a:pt x="3121375" y="5399"/>
-                  <a:pt x="3255095" y="0"/>
-                </a:cubicBezTo>
-                <a:cubicBezTo>
-                  <a:pt x="3254386" y="8157"/>
-                  <a:pt x="3254682" y="12125"/>
-                  <a:pt x="3255095" y="18288"/>
-                </a:cubicBezTo>
-                <a:cubicBezTo>
-                  <a:pt x="3088545" y="23203"/>
-                  <a:pt x="2687475" y="7419"/>
-                  <a:pt x="2538974" y="18288"/>
-                </a:cubicBezTo>
-                <a:cubicBezTo>
-                  <a:pt x="2390473" y="29157"/>
-                  <a:pt x="2137381" y="-8959"/>
-                  <a:pt x="1822853" y="18288"/>
-                </a:cubicBezTo>
-                <a:cubicBezTo>
-                  <a:pt x="1508325" y="45535"/>
-                  <a:pt x="1466437" y="20385"/>
-                  <a:pt x="1171834" y="18288"/>
-                </a:cubicBezTo>
-                <a:cubicBezTo>
-                  <a:pt x="877231" y="16191"/>
-                  <a:pt x="561097" y="37643"/>
-                  <a:pt x="0" y="18288"/>
-                </a:cubicBezTo>
-                <a:cubicBezTo>
-                  <a:pt x="-46" y="12483"/>
-                  <a:pt x="-203" y="6491"/>
-                  <a:pt x="0" y="0"/>
-                </a:cubicBezTo>
-                <a:close/>
-              </a:path>
-              <a:path w="3255095" h="18288" stroke="0" extrusionOk="0">
-                <a:moveTo>
-                  <a:pt x="0" y="0"/>
-                </a:moveTo>
-                <a:cubicBezTo>
-                  <a:pt x="291965" y="19429"/>
-                  <a:pt x="363155" y="8568"/>
-                  <a:pt x="618468" y="0"/>
-                </a:cubicBezTo>
-                <a:cubicBezTo>
-                  <a:pt x="873781" y="-8568"/>
-                  <a:pt x="904459" y="-19505"/>
-                  <a:pt x="1171834" y="0"/>
-                </a:cubicBezTo>
-                <a:cubicBezTo>
-                  <a:pt x="1439209" y="19505"/>
-                  <a:pt x="1744369" y="9790"/>
-                  <a:pt x="1887955" y="0"/>
-                </a:cubicBezTo>
-                <a:cubicBezTo>
-                  <a:pt x="2031541" y="-9790"/>
-                  <a:pt x="2346378" y="21240"/>
-                  <a:pt x="2506423" y="0"/>
-                </a:cubicBezTo>
-                <a:cubicBezTo>
-                  <a:pt x="2666468" y="-21240"/>
-                  <a:pt x="2990257" y="30414"/>
-                  <a:pt x="3255095" y="0"/>
-                </a:cubicBezTo>
-                <a:cubicBezTo>
-                  <a:pt x="3254831" y="4493"/>
-                  <a:pt x="3255479" y="9472"/>
-                  <a:pt x="3255095" y="18288"/>
-                </a:cubicBezTo>
-                <a:cubicBezTo>
-                  <a:pt x="3120743" y="16690"/>
-                  <a:pt x="2759628" y="42462"/>
-                  <a:pt x="2604076" y="18288"/>
-                </a:cubicBezTo>
-                <a:cubicBezTo>
-                  <a:pt x="2448524" y="-5886"/>
-                  <a:pt x="2184336" y="19599"/>
-                  <a:pt x="1887955" y="18288"/>
-                </a:cubicBezTo>
-                <a:cubicBezTo>
-                  <a:pt x="1591574" y="16977"/>
-                  <a:pt x="1548845" y="6870"/>
-                  <a:pt x="1334589" y="18288"/>
-                </a:cubicBezTo>
-                <a:cubicBezTo>
-                  <a:pt x="1120333" y="29706"/>
-                  <a:pt x="996014" y="9662"/>
-                  <a:pt x="683570" y="18288"/>
-                </a:cubicBezTo>
-                <a:cubicBezTo>
-                  <a:pt x="371126" y="26914"/>
-                  <a:pt x="198687" y="16167"/>
-                  <a:pt x="0" y="18288"/>
-                </a:cubicBezTo>
-                <a:cubicBezTo>
-                  <a:pt x="843" y="9577"/>
-                  <a:pt x="371" y="6900"/>
-                  <a:pt x="0" y="0"/>
-                </a:cubicBezTo>
-                <a:close/>
-              </a:path>
-            </a:pathLst>
-          </a:custGeom>
-          <a:solidFill>
-            <a:schemeClr val="accent2"/>
-          </a:solidFill>
-          <a:ln w="38100" cap="rnd">
-            <a:solidFill>
-              <a:schemeClr val="accent2"/>
-            </a:solidFill>
-            <a:round/>
-            <a:extLst>
-              <a:ext uri="{C807C97D-BFC1-408E-A445-0C87EB9F89A2}">
-                <ask:lineSketchStyleProps xmlns:ask="http://schemas.microsoft.com/office/drawing/2018/sketchyshapes" sd="1219033472">
-                  <a:prstGeom prst="rect">
-                    <a:avLst/>
-                  </a:prstGeom>
-                  <ask:type>
-                    <ask:lineSketchFreehand/>
-                  </ask:type>
-                </ask:lineSketchStyleProps>
-              </a:ext>
-            </a:extLst>
-          </a:ln>
-        </p:spPr>
-        <p:style>
-          <a:lnRef idx="2">
-            <a:schemeClr val="accent1">
-              <a:shade val="50000"/>
-            </a:schemeClr>
-          </a:lnRef>
-          <a:fillRef idx="1">
-            <a:schemeClr val="accent1"/>
-          </a:fillRef>
-          <a:effectRef idx="0">
-            <a:schemeClr val="accent1"/>
-          </a:effectRef>
-          <a:fontRef idx="minor">
-            <a:schemeClr val="lt1"/>
-          </a:fontRef>
-        </p:style>
-        <p:txBody>
-          <a:bodyPr rtlCol="0" anchor="ctr"/>
-          <a:lstStyle/>
-          <a:p>
-            <a:pPr algn="ctr"/>
-            <a:endParaRPr lang="en-US"/>
-          </a:p>
-        </p:txBody>
-      </p:sp>
-      <p:sp>
-        <p:nvSpPr>
-          <p:cNvPr id="3" name="Content Placeholder 2">
-            <a:extLst>
-              <a:ext uri="{FF2B5EF4-FFF2-40B4-BE49-F238E27FC236}">
-                <a16:creationId xmlns:a16="http://schemas.microsoft.com/office/drawing/2014/main" id="{70762040-9254-2FCA-5342-F274ECBFDDC1}"/>
-              </a:ext>
-            </a:extLst>
-          </p:cNvPr>
-          <p:cNvSpPr>
-            <a:spLocks noGrp="1"/>
-          </p:cNvSpPr>
-          <p:nvPr>
-            <p:ph idx="1"/>
-          </p:nvPr>
-        </p:nvSpPr>
-        <p:spPr>
-          <a:xfrm>
-            <a:off x="630935" y="2660904"/>
-            <a:ext cx="11156511" cy="3547872"/>
+            <a:off x="517744" y="1136024"/>
+            <a:ext cx="11156511" cy="5470838"/>
           </a:xfrm>
         </p:spPr>
         <p:txBody>
@@ -6506,81 +7031,81 @@
           <a:lstStyle/>
           <a:p>
             <a:r>
-              <a:rPr lang="es-ES" sz="2400" b="1" dirty="0" err="1">
-                <a:ea typeface="+mn-lt"/>
-                <a:cs typeface="+mn-lt"/>
-              </a:rPr>
-              <a:t>Importance</a:t>
-            </a:r>
-            <a:r>
               <a:rPr lang="es-ES" sz="2400" b="1" dirty="0">
                 <a:ea typeface="+mn-lt"/>
                 <a:cs typeface="+mn-lt"/>
               </a:rPr>
+              <a:t>LSTM </a:t>
+            </a:r>
+            <a:r>
+              <a:rPr lang="es-ES" sz="2400" dirty="0" err="1">
+                <a:ea typeface="+mn-lt"/>
+                <a:cs typeface="+mn-lt"/>
+              </a:rPr>
+              <a:t>performs</a:t>
+            </a:r>
+            <a:r>
+              <a:rPr lang="es-ES" sz="2400" dirty="0">
+                <a:ea typeface="+mn-lt"/>
+                <a:cs typeface="+mn-lt"/>
+              </a:rPr>
               <a:t> </a:t>
             </a:r>
             <a:r>
-              <a:rPr lang="es-ES" sz="2400" b="1" dirty="0" err="1">
-                <a:ea typeface="+mn-lt"/>
-                <a:cs typeface="+mn-lt"/>
-              </a:rPr>
-              <a:t>of</a:t>
-            </a:r>
-            <a:r>
-              <a:rPr lang="es-ES" sz="2400" b="1" dirty="0">
-                <a:ea typeface="+mn-lt"/>
-                <a:cs typeface="+mn-lt"/>
-              </a:rPr>
-              <a:t> data </a:t>
-            </a:r>
-            <a:r>
-              <a:rPr lang="es-ES" sz="2400" b="1" dirty="0" err="1">
-                <a:ea typeface="+mn-lt"/>
-                <a:cs typeface="+mn-lt"/>
-              </a:rPr>
-              <a:t>splits</a:t>
-            </a:r>
-            <a:r>
-              <a:rPr lang="es-ES" sz="2400" b="1" dirty="0">
-                <a:ea typeface="+mn-lt"/>
-                <a:cs typeface="+mn-lt"/>
-              </a:rPr>
-              <a:t>: </a:t>
-            </a:r>
-            <a:r>
-              <a:rPr lang="es-ES" sz="2400" b="1" dirty="0" err="1">
-                <a:ea typeface="+mn-lt"/>
-                <a:cs typeface="+mn-lt"/>
-              </a:rPr>
-              <a:t>implications</a:t>
-            </a:r>
-            <a:r>
-              <a:rPr lang="es-ES" sz="2400" b="1" dirty="0">
+              <a:rPr lang="es-ES" sz="2400" dirty="0" err="1">
+                <a:ea typeface="+mn-lt"/>
+                <a:cs typeface="+mn-lt"/>
+              </a:rPr>
+              <a:t>substantially</a:t>
+            </a:r>
+            <a:r>
+              <a:rPr lang="es-ES" sz="2400" dirty="0">
                 <a:ea typeface="+mn-lt"/>
                 <a:cs typeface="+mn-lt"/>
               </a:rPr>
               <a:t> </a:t>
             </a:r>
             <a:r>
-              <a:rPr lang="es-ES" sz="2400" b="1" dirty="0" err="1">
-                <a:ea typeface="+mn-lt"/>
-                <a:cs typeface="+mn-lt"/>
-              </a:rPr>
-              <a:t>for</a:t>
-            </a:r>
-            <a:r>
-              <a:rPr lang="es-ES" sz="2400" b="1" dirty="0">
-                <a:ea typeface="+mn-lt"/>
-                <a:cs typeface="+mn-lt"/>
-              </a:rPr>
-              <a:t> </a:t>
-            </a:r>
-            <a:r>
-              <a:rPr lang="es-ES" sz="2400" b="1" dirty="0" err="1">
-                <a:ea typeface="+mn-lt"/>
-                <a:cs typeface="+mn-lt"/>
-              </a:rPr>
-              <a:t>generalizability</a:t>
+              <a:rPr lang="es-ES" sz="2400" dirty="0" err="1">
+                <a:ea typeface="+mn-lt"/>
+                <a:cs typeface="+mn-lt"/>
+              </a:rPr>
+              <a:t>better</a:t>
+            </a:r>
+            <a:r>
+              <a:rPr lang="es-ES" sz="2400" dirty="0">
+                <a:ea typeface="+mn-lt"/>
+                <a:cs typeface="+mn-lt"/>
+              </a:rPr>
+              <a:t>, at </a:t>
+            </a:r>
+            <a:r>
+              <a:rPr lang="es-ES" sz="2400" dirty="0" err="1">
+                <a:ea typeface="+mn-lt"/>
+                <a:cs typeface="+mn-lt"/>
+              </a:rPr>
+              <a:t>cost</a:t>
+            </a:r>
+            <a:r>
+              <a:rPr lang="es-ES" sz="2400" dirty="0">
+                <a:ea typeface="+mn-lt"/>
+                <a:cs typeface="+mn-lt"/>
+              </a:rPr>
+              <a:t> (</a:t>
+            </a:r>
+            <a:r>
+              <a:rPr lang="es-ES" sz="2400" dirty="0" err="1">
+                <a:ea typeface="+mn-lt"/>
+                <a:cs typeface="+mn-lt"/>
+              </a:rPr>
+              <a:t>computational</a:t>
+            </a:r>
+            <a:r>
+              <a:rPr lang="es-ES" sz="2400" dirty="0">
+                <a:ea typeface="+mn-lt"/>
+                <a:cs typeface="+mn-lt"/>
+              </a:rPr>
+              <a:t>)</a:t>
             </a:r>
             <a:endParaRPr lang="es-ES" sz="2400" b="1" dirty="0">
               <a:ea typeface="+mn-lt"/>
@@ -6588,226 +7113,138 @@
             </a:endParaRPr>
           </a:p>
           <a:p>
+            <a:r>
+              <a:rPr lang="es-ES" sz="2400" b="1" dirty="0">
+                <a:ea typeface="+mn-lt"/>
+                <a:cs typeface="+mn-lt"/>
+              </a:rPr>
+              <a:t>Next </a:t>
+            </a:r>
+            <a:r>
+              <a:rPr lang="es-ES" sz="2400" b="1" dirty="0" err="1">
+                <a:ea typeface="+mn-lt"/>
+                <a:cs typeface="+mn-lt"/>
+              </a:rPr>
+              <a:t>steps</a:t>
+            </a:r>
+            <a:r>
+              <a:rPr lang="es-ES" sz="2400" b="1" dirty="0">
+                <a:ea typeface="+mn-lt"/>
+                <a:cs typeface="+mn-lt"/>
+              </a:rPr>
+              <a:t>: </a:t>
+            </a:r>
+            <a:r>
+              <a:rPr lang="es-ES" sz="2400" b="1" dirty="0" err="1">
+                <a:ea typeface="+mn-lt"/>
+                <a:cs typeface="+mn-lt"/>
+              </a:rPr>
+              <a:t>transformer</a:t>
+            </a:r>
+            <a:r>
+              <a:rPr lang="es-ES" sz="2400" b="1" dirty="0">
+                <a:ea typeface="+mn-lt"/>
+                <a:cs typeface="+mn-lt"/>
+              </a:rPr>
+              <a:t> </a:t>
+            </a:r>
+            <a:r>
+              <a:rPr lang="es-ES" sz="2400" b="1" dirty="0" err="1">
+                <a:ea typeface="+mn-lt"/>
+                <a:cs typeface="+mn-lt"/>
+              </a:rPr>
+              <a:t>model</a:t>
+            </a:r>
+            <a:endParaRPr lang="es-ES" sz="2400" b="1" dirty="0">
+              <a:ea typeface="+mn-lt"/>
+              <a:cs typeface="+mn-lt"/>
+            </a:endParaRPr>
+          </a:p>
+          <a:p>
             <a:pPr lvl="1"/>
             <a:r>
+              <a:rPr lang="es-ES" b="1" dirty="0">
+                <a:ea typeface="+mn-lt"/>
+                <a:cs typeface="+mn-lt"/>
+              </a:rPr>
+              <a:t>LSTM = </a:t>
+            </a:r>
+            <a:r>
               <a:rPr lang="es-ES" b="1" dirty="0" err="1">
                 <a:ea typeface="+mn-lt"/>
                 <a:cs typeface="+mn-lt"/>
               </a:rPr>
-              <a:t>Window-level</a:t>
+              <a:t>detection</a:t>
             </a:r>
             <a:r>
               <a:rPr lang="es-ES" b="1" dirty="0">
                 <a:ea typeface="+mn-lt"/>
                 <a:cs typeface="+mn-lt"/>
               </a:rPr>
-              <a:t>: </a:t>
+              <a:t>, </a:t>
+            </a:r>
+            <a:r>
+              <a:rPr lang="es-ES" b="1" dirty="0" err="1">
+                <a:ea typeface="+mn-lt"/>
+                <a:cs typeface="+mn-lt"/>
+              </a:rPr>
+              <a:t>transformer</a:t>
+            </a:r>
+            <a:r>
+              <a:rPr lang="es-ES" b="1" dirty="0">
+                <a:ea typeface="+mn-lt"/>
+                <a:cs typeface="+mn-lt"/>
+              </a:rPr>
+              <a:t> = </a:t>
+            </a:r>
+            <a:r>
+              <a:rPr lang="es-ES" b="1" dirty="0" err="1">
+                <a:ea typeface="+mn-lt"/>
+                <a:cs typeface="+mn-lt"/>
+              </a:rPr>
+              <a:t>prediction</a:t>
+            </a:r>
+            <a:endParaRPr lang="es-ES" b="1" dirty="0">
+              <a:ea typeface="+mn-lt"/>
+              <a:cs typeface="+mn-lt"/>
+            </a:endParaRPr>
+          </a:p>
+          <a:p>
+            <a:pPr lvl="1"/>
+            <a:r>
+              <a:rPr lang="es-ES" dirty="0" err="1">
+                <a:ea typeface="+mn-lt"/>
+                <a:cs typeface="+mn-lt"/>
+              </a:rPr>
+              <a:t>Nonlinear</a:t>
             </a:r>
             <a:r>
               <a:rPr lang="es-ES" dirty="0">
                 <a:ea typeface="+mn-lt"/>
                 <a:cs typeface="+mn-lt"/>
               </a:rPr>
-              <a:t>80% </a:t>
+              <a:t> and </a:t>
             </a:r>
             <a:r>
               <a:rPr lang="es-ES" dirty="0" err="1">
                 <a:ea typeface="+mn-lt"/>
                 <a:cs typeface="+mn-lt"/>
               </a:rPr>
-              <a:t>overlap</a:t>
+              <a:t>longer-window</a:t>
             </a:r>
             <a:r>
               <a:rPr lang="es-ES" dirty="0">
                 <a:ea typeface="+mn-lt"/>
                 <a:cs typeface="+mn-lt"/>
               </a:rPr>
-              <a:t> = </a:t>
+              <a:t> </a:t>
             </a:r>
             <a:r>
               <a:rPr lang="es-ES" dirty="0" err="1">
                 <a:ea typeface="+mn-lt"/>
                 <a:cs typeface="+mn-lt"/>
               </a:rPr>
-              <a:t>falsely</a:t>
-            </a:r>
-            <a:r>
-              <a:rPr lang="es-ES" dirty="0">
-                <a:ea typeface="+mn-lt"/>
-                <a:cs typeface="+mn-lt"/>
-              </a:rPr>
-              <a:t> </a:t>
-            </a:r>
-            <a:r>
-              <a:rPr lang="es-ES" dirty="0" err="1">
-                <a:ea typeface="+mn-lt"/>
-                <a:cs typeface="+mn-lt"/>
-              </a:rPr>
-              <a:t>high</a:t>
-            </a:r>
-            <a:r>
-              <a:rPr lang="es-ES" dirty="0">
-                <a:ea typeface="+mn-lt"/>
-                <a:cs typeface="+mn-lt"/>
-              </a:rPr>
-              <a:t> performance</a:t>
-            </a:r>
-          </a:p>
-          <a:p>
-            <a:pPr lvl="1"/>
-            <a:r>
-              <a:rPr lang="es-ES" b="1" dirty="0" err="1">
-                <a:ea typeface="+mn-lt"/>
-                <a:cs typeface="+mn-lt"/>
-              </a:rPr>
-              <a:t>Seizure-level</a:t>
-            </a:r>
-            <a:r>
-              <a:rPr lang="es-ES" b="1" dirty="0">
-                <a:ea typeface="+mn-lt"/>
-                <a:cs typeface="+mn-lt"/>
-              </a:rPr>
-              <a:t>:</a:t>
-            </a:r>
-            <a:r>
-              <a:rPr lang="es-ES" dirty="0">
-                <a:ea typeface="+mn-lt"/>
-                <a:cs typeface="+mn-lt"/>
-              </a:rPr>
-              <a:t> </a:t>
-            </a:r>
-            <a:r>
-              <a:rPr lang="es-ES" dirty="0" err="1">
-                <a:ea typeface="+mn-lt"/>
-                <a:cs typeface="+mn-lt"/>
-              </a:rPr>
-              <a:t>useful</a:t>
-            </a:r>
-            <a:r>
-              <a:rPr lang="es-ES" dirty="0">
-                <a:ea typeface="+mn-lt"/>
-                <a:cs typeface="+mn-lt"/>
-              </a:rPr>
-              <a:t> </a:t>
-            </a:r>
-            <a:r>
-              <a:rPr lang="es-ES" dirty="0" err="1">
-                <a:ea typeface="+mn-lt"/>
-                <a:cs typeface="+mn-lt"/>
-              </a:rPr>
-              <a:t>for</a:t>
-            </a:r>
-            <a:r>
-              <a:rPr lang="es-ES" dirty="0">
-                <a:ea typeface="+mn-lt"/>
-                <a:cs typeface="+mn-lt"/>
-              </a:rPr>
-              <a:t> </a:t>
-            </a:r>
-            <a:r>
-              <a:rPr lang="es-ES" dirty="0" err="1">
-                <a:ea typeface="+mn-lt"/>
-                <a:cs typeface="+mn-lt"/>
-              </a:rPr>
-              <a:t>personalized</a:t>
-            </a:r>
-            <a:r>
-              <a:rPr lang="es-ES" dirty="0">
-                <a:ea typeface="+mn-lt"/>
-                <a:cs typeface="+mn-lt"/>
-              </a:rPr>
-              <a:t> </a:t>
-            </a:r>
-            <a:r>
-              <a:rPr lang="es-ES" dirty="0" err="1">
-                <a:ea typeface="+mn-lt"/>
-                <a:cs typeface="+mn-lt"/>
-              </a:rPr>
-              <a:t>settings</a:t>
-            </a:r>
-            <a:r>
-              <a:rPr lang="es-ES" dirty="0">
-                <a:ea typeface="+mn-lt"/>
-                <a:cs typeface="+mn-lt"/>
-              </a:rPr>
-              <a:t> </a:t>
-            </a:r>
-            <a:r>
-              <a:rPr lang="es-ES" dirty="0" err="1">
-                <a:ea typeface="+mn-lt"/>
-                <a:cs typeface="+mn-lt"/>
-              </a:rPr>
-              <a:t>to</a:t>
-            </a:r>
-            <a:r>
-              <a:rPr lang="es-ES" dirty="0">
-                <a:ea typeface="+mn-lt"/>
-                <a:cs typeface="+mn-lt"/>
-              </a:rPr>
-              <a:t> </a:t>
-            </a:r>
-            <a:r>
-              <a:rPr lang="es-ES" dirty="0" err="1">
-                <a:ea typeface="+mn-lt"/>
-                <a:cs typeface="+mn-lt"/>
-              </a:rPr>
-              <a:t>classify</a:t>
-            </a:r>
-            <a:r>
-              <a:rPr lang="es-ES" dirty="0">
-                <a:ea typeface="+mn-lt"/>
-                <a:cs typeface="+mn-lt"/>
-              </a:rPr>
-              <a:t> </a:t>
-            </a:r>
-            <a:r>
-              <a:rPr lang="es-ES" dirty="0" err="1">
-                <a:ea typeface="+mn-lt"/>
-                <a:cs typeface="+mn-lt"/>
-              </a:rPr>
-              <a:t>seizures</a:t>
-            </a:r>
-            <a:r>
-              <a:rPr lang="es-ES" dirty="0">
-                <a:ea typeface="+mn-lt"/>
-                <a:cs typeface="+mn-lt"/>
-              </a:rPr>
-              <a:t> </a:t>
-            </a:r>
-            <a:r>
-              <a:rPr lang="es-ES" dirty="0" err="1">
-                <a:ea typeface="+mn-lt"/>
-                <a:cs typeface="+mn-lt"/>
-              </a:rPr>
-              <a:t>within</a:t>
-            </a:r>
-            <a:r>
-              <a:rPr lang="es-ES" dirty="0">
-                <a:ea typeface="+mn-lt"/>
-                <a:cs typeface="+mn-lt"/>
-              </a:rPr>
-              <a:t> </a:t>
-            </a:r>
-            <a:r>
-              <a:rPr lang="es-ES" dirty="0" err="1">
-                <a:ea typeface="+mn-lt"/>
-                <a:cs typeface="+mn-lt"/>
-              </a:rPr>
-              <a:t>same</a:t>
-            </a:r>
-            <a:r>
-              <a:rPr lang="es-ES" dirty="0">
-                <a:ea typeface="+mn-lt"/>
-                <a:cs typeface="+mn-lt"/>
-              </a:rPr>
-              <a:t> </a:t>
-            </a:r>
-            <a:r>
-              <a:rPr lang="es-ES" dirty="0" err="1">
-                <a:ea typeface="+mn-lt"/>
-                <a:cs typeface="+mn-lt"/>
-              </a:rPr>
-              <a:t>patient</a:t>
+              <a:t>segments</a:t>
             </a:r>
             <a:endParaRPr lang="es-ES" dirty="0">
               <a:ea typeface="+mn-lt"/>
@@ -6817,67 +7254,116 @@
           <a:p>
             <a:pPr lvl="1"/>
             <a:r>
-              <a:rPr lang="es-ES" b="1" dirty="0" err="1">
-                <a:ea typeface="+mn-lt"/>
-                <a:cs typeface="+mn-lt"/>
-              </a:rPr>
-              <a:t>Patient-level</a:t>
+              <a:rPr lang="es-ES" dirty="0" err="1">
+                <a:ea typeface="+mn-lt"/>
+                <a:cs typeface="+mn-lt"/>
+              </a:rPr>
+              <a:t>Well-suited</a:t>
             </a:r>
             <a:r>
               <a:rPr lang="es-ES" dirty="0">
                 <a:ea typeface="+mn-lt"/>
                 <a:cs typeface="+mn-lt"/>
               </a:rPr>
-              <a:t>: </a:t>
+              <a:t> </a:t>
             </a:r>
             <a:r>
               <a:rPr lang="es-ES" dirty="0" err="1">
                 <a:ea typeface="+mn-lt"/>
                 <a:cs typeface="+mn-lt"/>
               </a:rPr>
-              <a:t>hardest</a:t>
+              <a:t>for</a:t>
             </a:r>
             <a:r>
               <a:rPr lang="es-ES" dirty="0">
                 <a:ea typeface="+mn-lt"/>
                 <a:cs typeface="+mn-lt"/>
               </a:rPr>
-              <a:t> case, </a:t>
+              <a:t> </a:t>
+            </a:r>
+            <a:r>
+              <a:rPr lang="es-ES" i="1" dirty="0" err="1">
+                <a:ea typeface="+mn-lt"/>
+                <a:cs typeface="+mn-lt"/>
+              </a:rPr>
+              <a:t>early</a:t>
+            </a:r>
+            <a:r>
+              <a:rPr lang="es-ES" i="1" dirty="0">
+                <a:ea typeface="+mn-lt"/>
+                <a:cs typeface="+mn-lt"/>
+              </a:rPr>
+              <a:t> </a:t>
+            </a:r>
+            <a:r>
+              <a:rPr lang="es-ES" i="1" dirty="0" err="1">
+                <a:ea typeface="+mn-lt"/>
+                <a:cs typeface="+mn-lt"/>
+              </a:rPr>
+              <a:t>seizure</a:t>
+            </a:r>
+            <a:r>
+              <a:rPr lang="es-ES" i="1" dirty="0">
+                <a:ea typeface="+mn-lt"/>
+                <a:cs typeface="+mn-lt"/>
+              </a:rPr>
+              <a:t> </a:t>
+            </a:r>
+            <a:r>
+              <a:rPr lang="es-ES" i="1" dirty="0" err="1">
+                <a:ea typeface="+mn-lt"/>
+                <a:cs typeface="+mn-lt"/>
+              </a:rPr>
+              <a:t>warning</a:t>
+            </a:r>
+            <a:r>
+              <a:rPr lang="es-ES" i="1" dirty="0">
+                <a:ea typeface="+mn-lt"/>
+                <a:cs typeface="+mn-lt"/>
+              </a:rPr>
+              <a:t> </a:t>
+            </a:r>
+            <a:r>
+              <a:rPr lang="es-ES" dirty="0">
+                <a:ea typeface="+mn-lt"/>
+                <a:cs typeface="+mn-lt"/>
+              </a:rPr>
+              <a:t>(minutes </a:t>
             </a:r>
             <a:r>
               <a:rPr lang="es-ES" dirty="0" err="1">
                 <a:ea typeface="+mn-lt"/>
                 <a:cs typeface="+mn-lt"/>
               </a:rPr>
-              <a:t>but</a:t>
+              <a:t>or</a:t>
             </a:r>
             <a:r>
               <a:rPr lang="es-ES" dirty="0">
                 <a:ea typeface="+mn-lt"/>
                 <a:cs typeface="+mn-lt"/>
               </a:rPr>
-              <a:t> generalizable </a:t>
+              <a:t> </a:t>
             </a:r>
             <a:r>
               <a:rPr lang="es-ES" dirty="0" err="1">
                 <a:ea typeface="+mn-lt"/>
                 <a:cs typeface="+mn-lt"/>
               </a:rPr>
-              <a:t>to</a:t>
+              <a:t>hours</a:t>
             </a:r>
             <a:r>
               <a:rPr lang="es-ES" dirty="0">
                 <a:ea typeface="+mn-lt"/>
                 <a:cs typeface="+mn-lt"/>
               </a:rPr>
-              <a:t> new </a:t>
+              <a:t> </a:t>
             </a:r>
             <a:r>
               <a:rPr lang="es-ES" dirty="0" err="1">
                 <a:ea typeface="+mn-lt"/>
                 <a:cs typeface="+mn-lt"/>
               </a:rPr>
-              <a:t>unseen</a:t>
+              <a:t>before</a:t>
             </a:r>
             <a:r>
               <a:rPr lang="es-ES" dirty="0">
@@ -6891,7 +7377,52 @@
                 <a:ea typeface="+mn-lt"/>
                 <a:cs typeface="+mn-lt"/>
               </a:rPr>
-              <a:t>patients</a:t>
+              <a:t>seizure</a:t>
+            </a:r>
+            <a:r>
+              <a:rPr lang="es-ES" dirty="0">
+                <a:ea typeface="+mn-lt"/>
+                <a:cs typeface="+mn-lt"/>
+              </a:rPr>
+              <a:t>)</a:t>
+            </a:r>
+          </a:p>
+          <a:p>
+            <a:pPr lvl="1"/>
+            <a:r>
+              <a:rPr lang="es-ES" dirty="0" err="1">
+                <a:ea typeface="+mn-lt"/>
+                <a:cs typeface="+mn-lt"/>
+              </a:rPr>
+              <a:t>Overfitting</a:t>
+            </a:r>
+            <a:r>
+              <a:rPr lang="es-ES" dirty="0">
+                <a:ea typeface="+mn-lt"/>
+                <a:cs typeface="+mn-lt"/>
+              </a:rPr>
+              <a:t> and </a:t>
+            </a:r>
+            <a:r>
+              <a:rPr lang="es-ES" dirty="0" err="1">
+                <a:ea typeface="+mn-lt"/>
+                <a:cs typeface="+mn-lt"/>
+              </a:rPr>
+              <a:t>computational</a:t>
+            </a:r>
+            <a:r>
+              <a:rPr lang="es-ES" dirty="0">
+                <a:ea typeface="+mn-lt"/>
+                <a:cs typeface="+mn-lt"/>
+              </a:rPr>
+              <a:t> </a:t>
+            </a:r>
+            <a:r>
+              <a:rPr lang="es-ES" dirty="0" err="1">
+                <a:ea typeface="+mn-lt"/>
+                <a:cs typeface="+mn-lt"/>
+              </a:rPr>
+              <a:t>cost</a:t>
             </a:r>
             <a:endParaRPr lang="es-ES" dirty="0">
               <a:ea typeface="+mn-lt"/>
@@ -6900,62 +7431,174 @@
           </a:p>
           <a:p>
             <a:r>
+              <a:rPr lang="es-ES" sz="2400" b="1" dirty="0" err="1">
+                <a:ea typeface="+mn-lt"/>
+                <a:cs typeface="+mn-lt"/>
+              </a:rPr>
+              <a:t>Importance</a:t>
+            </a:r>
+            <a:r>
               <a:rPr lang="es-ES" sz="2400" b="1" dirty="0">
                 <a:ea typeface="+mn-lt"/>
                 <a:cs typeface="+mn-lt"/>
               </a:rPr>
-              <a:t>Next</a:t>
-            </a:r>
-            <a:r>
-              <a:rPr lang="es-ES" sz="2400" dirty="0">
+              <a:t> </a:t>
+            </a:r>
+            <a:r>
+              <a:rPr lang="es-ES" sz="2400" b="1" dirty="0" err="1">
+                <a:ea typeface="+mn-lt"/>
+                <a:cs typeface="+mn-lt"/>
+              </a:rPr>
+              <a:t>of</a:t>
+            </a:r>
+            <a:r>
+              <a:rPr lang="es-ES" sz="2400" b="1" dirty="0">
+                <a:ea typeface="+mn-lt"/>
+                <a:cs typeface="+mn-lt"/>
+              </a:rPr>
+              <a:t> data </a:t>
+            </a:r>
+            <a:r>
+              <a:rPr lang="es-ES" sz="2400" b="1" dirty="0" err="1">
+                <a:ea typeface="+mn-lt"/>
+                <a:cs typeface="+mn-lt"/>
+              </a:rPr>
+              <a:t>splits</a:t>
+            </a:r>
+            <a:r>
+              <a:rPr lang="es-ES" sz="2400" b="1" dirty="0">
+                <a:ea typeface="+mn-lt"/>
+                <a:cs typeface="+mn-lt"/>
+              </a:rPr>
+              <a:t> and </a:t>
+            </a:r>
+            <a:r>
+              <a:rPr lang="es-ES" sz="2400" b="1" dirty="0" err="1">
+                <a:ea typeface="+mn-lt"/>
+                <a:cs typeface="+mn-lt"/>
+              </a:rPr>
+              <a:t>generalizability</a:t>
+            </a:r>
+            <a:endParaRPr lang="es-ES" sz="2400" b="1" dirty="0">
+              <a:ea typeface="+mn-lt"/>
+              <a:cs typeface="+mn-lt"/>
+            </a:endParaRPr>
+          </a:p>
+          <a:p>
+            <a:pPr lvl="1"/>
+            <a:r>
+              <a:rPr lang="es-ES" b="1" dirty="0" err="1">
+                <a:ea typeface="+mn-lt"/>
+                <a:cs typeface="+mn-lt"/>
+              </a:rPr>
+              <a:t>Window-level</a:t>
+            </a:r>
+            <a:r>
+              <a:rPr lang="es-ES" b="1" dirty="0">
                 <a:ea typeface="+mn-lt"/>
                 <a:cs typeface="+mn-lt"/>
               </a:rPr>
               <a:t>: </a:t>
             </a:r>
             <a:r>
-              <a:rPr lang="es-ES" sz="2400" dirty="0" err="1">
-                <a:ea typeface="+mn-lt"/>
-                <a:cs typeface="+mn-lt"/>
-              </a:rPr>
-              <a:t>incorporate</a:t>
-            </a:r>
-            <a:r>
-              <a:rPr lang="es-ES" sz="2400" dirty="0">
-                <a:ea typeface="+mn-lt"/>
-                <a:cs typeface="+mn-lt"/>
-              </a:rPr>
-              <a:t> temporal </a:t>
-            </a:r>
-            <a:r>
-              <a:rPr lang="es-ES" sz="2400" dirty="0" err="1">
-                <a:ea typeface="+mn-lt"/>
-                <a:cs typeface="+mn-lt"/>
-              </a:rPr>
-              <a:t>information</a:t>
-            </a:r>
-            <a:r>
-              <a:rPr lang="es-ES" sz="2400" dirty="0">
+              <a:rPr lang="es-ES" dirty="0">
+                <a:ea typeface="+mn-lt"/>
+                <a:cs typeface="+mn-lt"/>
+              </a:rPr>
+              <a:t>80% </a:t>
+            </a:r>
+            <a:r>
+              <a:rPr lang="es-ES" dirty="0" err="1">
+                <a:ea typeface="+mn-lt"/>
+                <a:cs typeface="+mn-lt"/>
+              </a:rPr>
+              <a:t>overlap</a:t>
+            </a:r>
+            <a:r>
+              <a:rPr lang="es-ES" dirty="0">
+                <a:ea typeface="+mn-lt"/>
+                <a:cs typeface="+mn-lt"/>
+              </a:rPr>
+              <a:t> = </a:t>
+            </a:r>
+            <a:r>
+              <a:rPr lang="es-ES" dirty="0" err="1">
+                <a:ea typeface="+mn-lt"/>
+                <a:cs typeface="+mn-lt"/>
+              </a:rPr>
+              <a:t>falsely</a:t>
+            </a:r>
+            <a:r>
+              <a:rPr lang="es-ES" dirty="0">
                 <a:ea typeface="+mn-lt"/>
                 <a:cs typeface="+mn-lt"/>
               </a:rPr>
               <a:t> </a:t>
             </a:r>
+            <a:r>
+              <a:rPr lang="es-ES" dirty="0" err="1">
+                <a:ea typeface="+mn-lt"/>
+                <a:cs typeface="+mn-lt"/>
+              </a:rPr>
+              <a:t>high</a:t>
+            </a:r>
+            <a:r>
+              <a:rPr lang="es-ES" dirty="0">
+                <a:ea typeface="+mn-lt"/>
+                <a:cs typeface="+mn-lt"/>
+              </a:rPr>
+              <a:t> performance</a:t>
+            </a:r>
           </a:p>
           <a:p>
             <a:pPr lvl="1"/>
             <a:r>
+              <a:rPr lang="es-ES" b="1" dirty="0" err="1">
+                <a:ea typeface="+mn-lt"/>
+                <a:cs typeface="+mn-lt"/>
+              </a:rPr>
+              <a:t>Seizure-level</a:t>
+            </a:r>
+            <a:r>
+              <a:rPr lang="es-ES" b="1" dirty="0">
+                <a:ea typeface="+mn-lt"/>
+                <a:cs typeface="+mn-lt"/>
+              </a:rPr>
+              <a:t>:</a:t>
+            </a:r>
+            <a:r>
+              <a:rPr lang="es-ES" dirty="0">
+                <a:ea typeface="+mn-lt"/>
+                <a:cs typeface="+mn-lt"/>
+              </a:rPr>
+              <a:t> </a:t>
+            </a:r>
+            <a:r>
               <a:rPr lang="es-ES" dirty="0" err="1">
                 <a:ea typeface="+mn-lt"/>
                 <a:cs typeface="+mn-lt"/>
               </a:rPr>
-              <a:t>Allows</a:t>
+              <a:t>useful</a:t>
             </a:r>
             <a:r>
               <a:rPr lang="es-ES" dirty="0">
                 <a:ea typeface="+mn-lt"/>
                 <a:cs typeface="+mn-lt"/>
               </a:rPr>
+              <a:t> in </a:t>
+            </a:r>
+            <a:r>
+              <a:rPr lang="es-ES" dirty="0" err="1">
+                <a:ea typeface="+mn-lt"/>
+                <a:cs typeface="+mn-lt"/>
+              </a:rPr>
+              <a:t>personalized</a:t>
+            </a:r>
+            <a:r>
+              <a:rPr lang="es-ES" dirty="0">
+                <a:ea typeface="+mn-lt"/>
+                <a:cs typeface="+mn-lt"/>
+              </a:rPr>
               <a:t> </a:t>
             </a:r>
             <a:r>
@@ -6963,7 +7606,7 @@
                 <a:ea typeface="+mn-lt"/>
                 <a:cs typeface="+mn-lt"/>
               </a:rPr>
-              <a:t>for</a:t>
+              <a:t>settings</a:t>
             </a:r>
             <a:r>
               <a:rPr lang="es-ES" dirty="0">
@@ -6977,7 +7620,7 @@
                 <a:ea typeface="+mn-lt"/>
                 <a:cs typeface="+mn-lt"/>
               </a:rPr>
-              <a:t>model</a:t>
+              <a:t>to</a:t>
             </a:r>
             <a:r>
               <a:rPr lang="es-ES" dirty="0">
@@ -6991,6 +7634,118 @@
                 <a:ea typeface="+mn-lt"/>
                 <a:cs typeface="+mn-lt"/>
               </a:rPr>
+              <a:t>classify</a:t>
+            </a:r>
+            <a:r>
+              <a:rPr lang="es-ES" dirty="0">
+                <a:ea typeface="+mn-lt"/>
+                <a:cs typeface="+mn-lt"/>
+              </a:rPr>
+              <a:t> </a:t>
+            </a:r>
+            <a:r>
+              <a:rPr lang="es-ES" dirty="0" err="1">
+                <a:ea typeface="+mn-lt"/>
+                <a:cs typeface="+mn-lt"/>
+              </a:rPr>
+              <a:t>seizures</a:t>
+            </a:r>
+            <a:r>
+              <a:rPr lang="es-ES" dirty="0">
+                <a:ea typeface="+mn-lt"/>
+                <a:cs typeface="+mn-lt"/>
+              </a:rPr>
+              <a:t> </a:t>
+            </a:r>
+            <a:r>
+              <a:rPr lang="es-ES" dirty="0" err="1">
+                <a:ea typeface="+mn-lt"/>
+                <a:cs typeface="+mn-lt"/>
+              </a:rPr>
+              <a:t>of</a:t>
+            </a:r>
+            <a:r>
+              <a:rPr lang="es-ES" dirty="0">
+                <a:ea typeface="+mn-lt"/>
+                <a:cs typeface="+mn-lt"/>
+              </a:rPr>
+              <a:t> </a:t>
+            </a:r>
+            <a:r>
+              <a:rPr lang="es-ES" dirty="0" err="1">
+                <a:ea typeface="+mn-lt"/>
+                <a:cs typeface="+mn-lt"/>
+              </a:rPr>
+              <a:t>same</a:t>
+            </a:r>
+            <a:r>
+              <a:rPr lang="es-ES" dirty="0">
+                <a:ea typeface="+mn-lt"/>
+                <a:cs typeface="+mn-lt"/>
+              </a:rPr>
+              <a:t> </a:t>
+            </a:r>
+            <a:r>
+              <a:rPr lang="es-ES" dirty="0" err="1">
+                <a:ea typeface="+mn-lt"/>
+                <a:cs typeface="+mn-lt"/>
+              </a:rPr>
+              <a:t>patient</a:t>
+            </a:r>
+            <a:endParaRPr lang="es-ES" dirty="0">
+              <a:ea typeface="+mn-lt"/>
+              <a:cs typeface="+mn-lt"/>
+            </a:endParaRPr>
+          </a:p>
+          <a:p>
+            <a:pPr lvl="1"/>
+            <a:r>
+              <a:rPr lang="es-ES" b="1" dirty="0" err="1">
+                <a:ea typeface="+mn-lt"/>
+                <a:cs typeface="+mn-lt"/>
+              </a:rPr>
+              <a:t>Patient-level</a:t>
+            </a:r>
+            <a:r>
+              <a:rPr lang="es-ES" dirty="0">
+                <a:ea typeface="+mn-lt"/>
+                <a:cs typeface="+mn-lt"/>
+              </a:rPr>
+              <a:t>: </a:t>
+            </a:r>
+            <a:r>
+              <a:rPr lang="es-ES" dirty="0" err="1">
+                <a:ea typeface="+mn-lt"/>
+                <a:cs typeface="+mn-lt"/>
+              </a:rPr>
+              <a:t>hardest</a:t>
+            </a:r>
+            <a:r>
+              <a:rPr lang="es-ES" dirty="0">
+                <a:ea typeface="+mn-lt"/>
+                <a:cs typeface="+mn-lt"/>
+              </a:rPr>
+              <a:t>, </a:t>
+            </a:r>
+            <a:r>
+              <a:rPr lang="es-ES" dirty="0" err="1">
+                <a:ea typeface="+mn-lt"/>
+                <a:cs typeface="+mn-lt"/>
+              </a:rPr>
+              <a:t>but</a:t>
+            </a:r>
+            <a:r>
+              <a:rPr lang="es-ES" dirty="0">
+                <a:ea typeface="+mn-lt"/>
+                <a:cs typeface="+mn-lt"/>
+              </a:rPr>
+              <a:t> generalizable </a:t>
+            </a:r>
+            <a:r>
+              <a:rPr lang="es-ES" dirty="0" err="1">
+                <a:ea typeface="+mn-lt"/>
+                <a:cs typeface="+mn-lt"/>
+              </a:rPr>
               <a:t>to</a:t>
             </a:r>
             <a:r>
@@ -6998,6 +7753,20 @@
                 <a:ea typeface="+mn-lt"/>
                 <a:cs typeface="+mn-lt"/>
               </a:rPr>
+              <a:t> new </a:t>
+            </a:r>
+            <a:r>
+              <a:rPr lang="es-ES" dirty="0" err="1">
+                <a:ea typeface="+mn-lt"/>
+                <a:cs typeface="+mn-lt"/>
+              </a:rPr>
+              <a:t>unseen</a:t>
+            </a:r>
+            <a:r>
+              <a:rPr lang="es-ES" dirty="0">
+                <a:ea typeface="+mn-lt"/>
+                <a:cs typeface="+mn-lt"/>
+              </a:rPr>
               <a:t> </a:t>
             </a:r>
             <a:r>
@@ -7005,85 +7774,19 @@
                 <a:ea typeface="+mn-lt"/>
                 <a:cs typeface="+mn-lt"/>
               </a:rPr>
-              <a:t>track</a:t>
-            </a:r>
-            <a:r>
-              <a:rPr lang="es-ES" dirty="0">
-                <a:ea typeface="+mn-lt"/>
-                <a:cs typeface="+mn-lt"/>
-              </a:rPr>
-              <a:t> </a:t>
-            </a:r>
-            <a:r>
-              <a:rPr lang="es-ES" dirty="0" err="1">
-                <a:ea typeface="+mn-lt"/>
-                <a:cs typeface="+mn-lt"/>
-              </a:rPr>
-              <a:t>evolution</a:t>
-            </a:r>
-            <a:r>
-              <a:rPr lang="es-ES" dirty="0">
-                <a:ea typeface="+mn-lt"/>
-                <a:cs typeface="+mn-lt"/>
-              </a:rPr>
-              <a:t> </a:t>
-            </a:r>
-            <a:r>
-              <a:rPr lang="es-ES" dirty="0" err="1">
-                <a:ea typeface="+mn-lt"/>
-                <a:cs typeface="+mn-lt"/>
-              </a:rPr>
-              <a:t>over</a:t>
-            </a:r>
-            <a:r>
-              <a:rPr lang="es-ES" dirty="0">
-                <a:ea typeface="+mn-lt"/>
-                <a:cs typeface="+mn-lt"/>
-              </a:rPr>
-              <a:t> time, </a:t>
-            </a:r>
-            <a:r>
-              <a:rPr lang="es-ES" dirty="0" err="1">
-                <a:ea typeface="+mn-lt"/>
-                <a:cs typeface="+mn-lt"/>
-              </a:rPr>
-              <a:t>gives</a:t>
-            </a:r>
-            <a:r>
-              <a:rPr lang="es-ES" dirty="0">
-                <a:ea typeface="+mn-lt"/>
-                <a:cs typeface="+mn-lt"/>
-              </a:rPr>
-              <a:t> </a:t>
-            </a:r>
-            <a:r>
-              <a:rPr lang="es-ES" dirty="0" err="1">
-                <a:ea typeface="+mn-lt"/>
-                <a:cs typeface="+mn-lt"/>
-              </a:rPr>
-              <a:t>it</a:t>
-            </a:r>
-            <a:r>
-              <a:rPr lang="es-ES" dirty="0">
-                <a:ea typeface="+mn-lt"/>
-                <a:cs typeface="+mn-lt"/>
-              </a:rPr>
-              <a:t> “</a:t>
-            </a:r>
-            <a:r>
-              <a:rPr lang="es-ES" dirty="0" err="1">
-                <a:ea typeface="+mn-lt"/>
-                <a:cs typeface="+mn-lt"/>
-              </a:rPr>
-              <a:t>memory</a:t>
-            </a:r>
-            <a:r>
-              <a:rPr lang="es-ES" dirty="0">
-                <a:ea typeface="+mn-lt"/>
-                <a:cs typeface="+mn-lt"/>
-              </a:rPr>
-              <a:t>” </a:t>
-            </a:r>
+              <a:t>patients</a:t>
+            </a:r>
+            <a:endParaRPr lang="es-ES" dirty="0">
+              <a:ea typeface="+mn-lt"/>
+              <a:cs typeface="+mn-lt"/>
+            </a:endParaRPr>
+          </a:p>
+          <a:p>
+            <a:pPr lvl="1"/>
+            <a:endParaRPr lang="es-ES" dirty="0">
+              <a:ea typeface="+mn-lt"/>
+              <a:cs typeface="+mn-lt"/>
+            </a:endParaRPr>
           </a:p>
           <a:p>
             <a:endParaRPr lang="es-ES" sz="2400" dirty="0">
@@ -7108,7 +7811,7 @@
     </p:spTree>
     <p:extLst>
       <p:ext uri="{BB962C8B-B14F-4D97-AF65-F5344CB8AC3E}">
-        <p14:creationId xmlns:p14="http://schemas.microsoft.com/office/powerpoint/2010/main" val="2736603610"/>
+        <p14:creationId xmlns:p14="http://schemas.microsoft.com/office/powerpoint/2010/main" val="209726840"/>
       </p:ext>
     </p:extLst>
   </p:cSld>
@@ -7209,7 +7912,7 @@
           <a:lstStyle/>
           <a:p>
             <a:r>
-              <a:rPr lang="en-GB" sz="2500" dirty="0">
+              <a:rPr lang="en-GB" sz="2500">
                 <a:ea typeface="+mn-lt"/>
                 <a:cs typeface="+mn-lt"/>
               </a:rPr>
@@ -7219,35 +7922,35 @@
           <a:p>
             <a:pPr lvl="1"/>
             <a:r>
-              <a:rPr lang="en-GB" sz="2500" dirty="0">
+              <a:rPr lang="en-GB" sz="2500">
                 <a:ea typeface="+mn-lt"/>
                 <a:cs typeface="+mn-lt"/>
               </a:rPr>
               <a:t>“It is estimated that up to 70% of people living with epilepsy could live </a:t>
             </a:r>
             <a:r>
-              <a:rPr lang="en-GB" sz="2500" b="1" dirty="0">
+              <a:rPr lang="en-GB" sz="2500" b="1">
                 <a:ea typeface="+mn-lt"/>
                 <a:cs typeface="+mn-lt"/>
               </a:rPr>
               <a:t>seizure-free </a:t>
             </a:r>
             <a:r>
-              <a:rPr lang="en-GB" sz="2500" dirty="0">
+              <a:rPr lang="en-GB" sz="2500">
                 <a:ea typeface="+mn-lt"/>
                 <a:cs typeface="+mn-lt"/>
               </a:rPr>
               <a:t>if </a:t>
             </a:r>
             <a:r>
-              <a:rPr lang="en-GB" sz="2500" b="1" dirty="0">
+              <a:rPr lang="en-GB" sz="2500" b="1">
                 <a:ea typeface="+mn-lt"/>
                 <a:cs typeface="+mn-lt"/>
               </a:rPr>
               <a:t>properly diagnosed and treated</a:t>
             </a:r>
             <a:r>
-              <a:rPr lang="en-GB" sz="2500" dirty="0">
+              <a:rPr lang="en-GB" sz="2500">
                 <a:ea typeface="+mn-lt"/>
                 <a:cs typeface="+mn-lt"/>
               </a:rPr>
@@ -7256,7 +7959,7 @@
           </a:p>
           <a:p>
             <a:r>
-              <a:rPr lang="en-GB" sz="2500" dirty="0">
+              <a:rPr lang="en-GB" sz="2500">
                 <a:ea typeface="+mn-lt"/>
                 <a:cs typeface="+mn-lt"/>
               </a:rPr>
@@ -7264,13 +7967,13 @@
             </a:r>
           </a:p>
           <a:p>
-            <a:endParaRPr lang="en-GB" sz="2500" dirty="0">
+            <a:endParaRPr lang="en-GB" sz="2500">
               <a:ea typeface="+mn-lt"/>
               <a:cs typeface="+mn-lt"/>
             </a:endParaRPr>
           </a:p>
           <a:p>
-            <a:endParaRPr lang="en-GB" sz="2500" dirty="0">
+            <a:endParaRPr lang="en-GB" sz="2500">
               <a:ea typeface="+mn-lt"/>
               <a:cs typeface="+mn-lt"/>
             </a:endParaRPr>
@@ -7306,8 +8009,8 @@
         </p:blipFill>
         <p:spPr bwMode="auto">
           <a:xfrm>
-            <a:off x="3394982" y="2662000"/>
-            <a:ext cx="5402036" cy="4196000"/>
+            <a:off x="3696236" y="2662000"/>
+            <a:ext cx="5100781" cy="3962002"/>
           </a:xfrm>
           <a:prstGeom prst="rect">
             <a:avLst/>
@@ -7395,13 +8098,13 @@
           <a:lstStyle/>
           <a:p>
             <a:r>
-              <a:rPr lang="en-GB" dirty="0">
+              <a:rPr lang="en-GB">
                 <a:ea typeface="+mj-lt"/>
                 <a:cs typeface="+mj-lt"/>
               </a:rPr>
               <a:t>Dataset</a:t>
             </a:r>
-            <a:endParaRPr lang="en-US" dirty="0"/>
+            <a:endParaRPr lang="en-US"/>
           </a:p>
         </p:txBody>
       </p:sp>
@@ -7434,13 +8137,13 @@
           <a:lstStyle/>
           <a:p>
             <a:r>
-              <a:rPr lang="en-US" sz="2500" dirty="0"/>
+              <a:rPr lang="en-US" sz="2500"/>
               <a:t>Children’s Hospital Boston – MIT EEG recordings from 23 pediatric and one adult patient</a:t>
             </a:r>
           </a:p>
           <a:p>
             <a:r>
-              <a:rPr lang="en-GB" sz="2500" dirty="0">
+              <a:rPr lang="en-GB" sz="2500">
                 <a:ea typeface="+mn-lt"/>
                 <a:cs typeface="+mn-lt"/>
               </a:rPr>
@@ -7449,7 +8152,7 @@
           </a:p>
           <a:p>
             <a:r>
-              <a:rPr lang="en-US" sz="2500" dirty="0"/>
+              <a:rPr lang="en-US" sz="2500"/>
               <a:t>Segmented into 1-second temporal windows</a:t>
             </a:r>
           </a:p>
@@ -7457,13 +8160,13 @@
             <a:pPr marL="0" indent="0">
               <a:buNone/>
             </a:pPr>
-            <a:endParaRPr lang="en-GB" sz="2500" dirty="0">
+            <a:endParaRPr lang="en-GB" sz="2500">
               <a:ea typeface="+mn-lt"/>
               <a:cs typeface="+mn-lt"/>
             </a:endParaRPr>
           </a:p>
           <a:p>
-            <a:endParaRPr lang="en-GB" sz="2500" dirty="0">
+            <a:endParaRPr lang="en-GB" sz="2500">
               <a:ea typeface="+mn-lt"/>
               <a:cs typeface="+mn-lt"/>
             </a:endParaRPr>
@@ -7590,7 +8293,7 @@
           <a:lstStyle/>
           <a:p>
             <a:r>
-              <a:rPr lang="en-US" sz="5400" dirty="0"/>
+              <a:rPr lang="en-US" sz="5400"/>
               <a:t>Goals</a:t>
             </a:r>
           </a:p>
@@ -7620,7 +8323,7 @@
         </p:spPr>
         <p:txBody>
           <a:bodyPr vert="horz" lIns="91440" tIns="45720" rIns="91440" bIns="45720" rtlCol="0" anchor="t">
-            <a:normAutofit/>
+            <a:normAutofit lnSpcReduction="10000"/>
           </a:bodyPr>
           <a:lstStyle/>
           <a:p>
@@ -7677,6 +8380,19 @@
                 <a:cs typeface="+mn-lt"/>
               </a:rPr>
               <a:t> each unit of time. Represents upper bound of performance (because train and test windows can be from same seizure episode) </a:t>
+            </a:r>
+          </a:p>
+          <a:p>
+            <a:pPr lvl="2"/>
+            <a:r>
+              <a:rPr lang="en-US" b="1" i="1" dirty="0">
+                <a:solidFill>
+                  <a:srgbClr val="FF0000"/>
+                </a:solidFill>
+                <a:ea typeface="+mn-lt"/>
+                <a:cs typeface="+mn-lt"/>
+              </a:rPr>
+              <a:t>Fix window leakage and same-person patient</a:t>
             </a:r>
           </a:p>
           <a:p>
@@ -7743,11 +8459,18 @@
           <a:p>
             <a:pPr lvl="1"/>
             <a:r>
+              <a:rPr lang="en-US" b="1" dirty="0">
+                <a:ea typeface="+mn-lt"/>
+                <a:cs typeface="+mn-lt"/>
+              </a:rPr>
+              <a:t>LSTM</a:t>
+            </a:r>
+            <a:r>
               <a:rPr lang="en-US" dirty="0">
                 <a:ea typeface="+mn-lt"/>
                 <a:cs typeface="+mn-lt"/>
               </a:rPr>
-              <a:t>LSTM methods to incorporate temporal data</a:t>
+              <a:t> methods to incorporate temporal data</a:t>
             </a:r>
             <a:endParaRPr lang="en-US" dirty="0"/>
           </a:p>
@@ -7803,7 +8526,7 @@
           <a:p>
             <a:pPr algn="ctr"/>
             <a:r>
-              <a:rPr lang="en-US" dirty="0">
+              <a:rPr lang="en-US">
                 <a:solidFill>
                   <a:srgbClr val="FF0000"/>
                 </a:solidFill>
@@ -7869,6 +8592,411 @@
 </file>
 
 <file path=ppt/slides/slide5.xml><?xml version="1.0" encoding="utf-8"?>
+<p:sld xmlns:a="http://schemas.openxmlformats.org/drawingml/2006/main" xmlns:r="http://schemas.openxmlformats.org/officeDocument/2006/relationships" xmlns:p="http://schemas.openxmlformats.org/presentationml/2006/main">
+  <p:cSld>
+    <p:bg>
+      <p:bgPr>
+        <a:solidFill>
+          <a:schemeClr val="accent2">
+            <a:lumMod val="20000"/>
+            <a:lumOff val="80000"/>
+          </a:schemeClr>
+        </a:solidFill>
+        <a:effectLst/>
+      </p:bgPr>
+    </p:bg>
+    <p:spTree>
+      <p:nvGrpSpPr>
+        <p:cNvPr id="1" name="">
+          <a:extLst>
+            <a:ext uri="{FF2B5EF4-FFF2-40B4-BE49-F238E27FC236}">
+              <a16:creationId xmlns:a16="http://schemas.microsoft.com/office/drawing/2014/main" id="{C22EC6A8-7F6F-DEE4-19E5-675126C639F7}"/>
+            </a:ext>
+          </a:extLst>
+        </p:cNvPr>
+        <p:cNvGrpSpPr/>
+        <p:nvPr/>
+      </p:nvGrpSpPr>
+      <p:grpSpPr>
+        <a:xfrm>
+          <a:off x="0" y="0"/>
+          <a:ext cx="0" cy="0"/>
+          <a:chOff x="0" y="0"/>
+          <a:chExt cx="0" cy="0"/>
+        </a:xfrm>
+      </p:grpSpPr>
+      <p:sp>
+        <p:nvSpPr>
+          <p:cNvPr id="2" name="Title 1">
+            <a:extLst>
+              <a:ext uri="{FF2B5EF4-FFF2-40B4-BE49-F238E27FC236}">
+                <a16:creationId xmlns:a16="http://schemas.microsoft.com/office/drawing/2014/main" id="{A1377519-4EB2-5067-7326-7C575948EC8C}"/>
+              </a:ext>
+            </a:extLst>
+          </p:cNvPr>
+          <p:cNvSpPr>
+            <a:spLocks noGrp="1"/>
+          </p:cNvSpPr>
+          <p:nvPr>
+            <p:ph type="title"/>
+          </p:nvPr>
+        </p:nvSpPr>
+        <p:spPr>
+          <a:xfrm>
+            <a:off x="258065" y="0"/>
+            <a:ext cx="10515600" cy="1325563"/>
+          </a:xfrm>
+        </p:spPr>
+        <p:txBody>
+          <a:bodyPr>
+            <a:normAutofit/>
+          </a:bodyPr>
+          <a:lstStyle/>
+          <a:p>
+            <a:r>
+              <a:rPr lang="en-US" sz="5400"/>
+              <a:t>Additional data splitting / cleaning </a:t>
+            </a:r>
+          </a:p>
+        </p:txBody>
+      </p:sp>
+      <p:sp>
+        <p:nvSpPr>
+          <p:cNvPr id="3" name="Content Placeholder 2">
+            <a:extLst>
+              <a:ext uri="{FF2B5EF4-FFF2-40B4-BE49-F238E27FC236}">
+                <a16:creationId xmlns:a16="http://schemas.microsoft.com/office/drawing/2014/main" id="{6D6D182B-E987-55B9-E50C-BB93AA6273A4}"/>
+              </a:ext>
+            </a:extLst>
+          </p:cNvPr>
+          <p:cNvSpPr>
+            <a:spLocks noGrp="1"/>
+          </p:cNvSpPr>
+          <p:nvPr>
+            <p:ph idx="1"/>
+          </p:nvPr>
+        </p:nvSpPr>
+        <p:spPr>
+          <a:xfrm>
+            <a:off x="838200" y="1325563"/>
+            <a:ext cx="10515600" cy="4351338"/>
+          </a:xfrm>
+        </p:spPr>
+        <p:txBody>
+          <a:bodyPr vert="horz" lIns="91440" tIns="45720" rIns="91440" bIns="45720" rtlCol="0" anchor="t">
+            <a:normAutofit/>
+          </a:bodyPr>
+          <a:lstStyle/>
+          <a:p>
+            <a:pPr marL="0" indent="0">
+              <a:buNone/>
+            </a:pPr>
+            <a:endParaRPr lang="en-US"/>
+          </a:p>
+          <a:p>
+            <a:pPr marL="457200" lvl="1" indent="0">
+              <a:buNone/>
+            </a:pPr>
+            <a:endParaRPr lang="en-US"/>
+          </a:p>
+          <a:p>
+            <a:pPr lvl="1"/>
+            <a:endParaRPr lang="en-US"/>
+          </a:p>
+          <a:p>
+            <a:pPr lvl="1"/>
+            <a:endParaRPr lang="en-US"/>
+          </a:p>
+          <a:p>
+            <a:endParaRPr lang="en-US"/>
+          </a:p>
+          <a:p>
+            <a:endParaRPr lang="en-US"/>
+          </a:p>
+        </p:txBody>
+      </p:sp>
+      <p:pic>
+        <p:nvPicPr>
+          <p:cNvPr id="5" name="Picture 4">
+            <a:extLst>
+              <a:ext uri="{FF2B5EF4-FFF2-40B4-BE49-F238E27FC236}">
+                <a16:creationId xmlns:a16="http://schemas.microsoft.com/office/drawing/2014/main" id="{5A5087AE-5AD0-FE2C-3F25-7C7EEEDB9150}"/>
+              </a:ext>
+            </a:extLst>
+          </p:cNvPr>
+          <p:cNvPicPr>
+            <a:picLocks noChangeAspect="1"/>
+          </p:cNvPicPr>
+          <p:nvPr/>
+        </p:nvPicPr>
+        <p:blipFill>
+          <a:blip r:embed="rId2"/>
+          <a:stretch>
+            <a:fillRect/>
+          </a:stretch>
+        </p:blipFill>
+        <p:spPr>
+          <a:xfrm>
+            <a:off x="2832100" y="2728921"/>
+            <a:ext cx="7010400" cy="4027479"/>
+          </a:xfrm>
+          <a:prstGeom prst="rect">
+            <a:avLst/>
+          </a:prstGeom>
+        </p:spPr>
+      </p:pic>
+      <p:sp>
+        <p:nvSpPr>
+          <p:cNvPr id="7" name="Content Placeholder 2">
+            <a:extLst>
+              <a:ext uri="{FF2B5EF4-FFF2-40B4-BE49-F238E27FC236}">
+                <a16:creationId xmlns:a16="http://schemas.microsoft.com/office/drawing/2014/main" id="{3D9D4A76-F63B-3371-9F08-22BE3B9B7612}"/>
+              </a:ext>
+            </a:extLst>
+          </p:cNvPr>
+          <p:cNvSpPr txBox="1">
+            <a:spLocks/>
+          </p:cNvSpPr>
+          <p:nvPr/>
+        </p:nvSpPr>
+        <p:spPr>
+          <a:xfrm>
+            <a:off x="838200" y="1181099"/>
+            <a:ext cx="10515600" cy="4241801"/>
+          </a:xfrm>
+          <a:prstGeom prst="rect">
+            <a:avLst/>
+          </a:prstGeom>
+        </p:spPr>
+        <p:txBody>
+          <a:bodyPr vert="horz" lIns="91440" tIns="45720" rIns="91440" bIns="45720" rtlCol="0" anchor="t">
+            <a:normAutofit/>
+          </a:bodyPr>
+          <a:lstStyle>
+            <a:lvl1pPr marL="228600" indent="-228600" algn="l" defTabSz="914400" rtl="0" eaLnBrk="1" latinLnBrk="0" hangingPunct="1">
+              <a:lnSpc>
+                <a:spcPct val="90000"/>
+              </a:lnSpc>
+              <a:spcBef>
+                <a:spcPts val="1000"/>
+              </a:spcBef>
+              <a:buFont typeface="Arial" panose="020B0604020202020204" pitchFamily="34" charset="0"/>
+              <a:buChar char="•"/>
+              <a:defRPr sz="2800" kern="1200">
+                <a:solidFill>
+                  <a:schemeClr val="tx1"/>
+                </a:solidFill>
+                <a:latin typeface="+mn-lt"/>
+                <a:ea typeface="+mn-ea"/>
+                <a:cs typeface="+mn-cs"/>
+              </a:defRPr>
+            </a:lvl1pPr>
+            <a:lvl2pPr marL="685800" indent="-228600" algn="l" defTabSz="914400" rtl="0" eaLnBrk="1" latinLnBrk="0" hangingPunct="1">
+              <a:lnSpc>
+                <a:spcPct val="90000"/>
+              </a:lnSpc>
+              <a:spcBef>
+                <a:spcPts val="500"/>
+              </a:spcBef>
+              <a:buFont typeface="Arial" panose="020B0604020202020204" pitchFamily="34" charset="0"/>
+              <a:buChar char="•"/>
+              <a:defRPr sz="2400" kern="1200">
+                <a:solidFill>
+                  <a:schemeClr val="tx1"/>
+                </a:solidFill>
+                <a:latin typeface="+mn-lt"/>
+                <a:ea typeface="+mn-ea"/>
+                <a:cs typeface="+mn-cs"/>
+              </a:defRPr>
+            </a:lvl2pPr>
+            <a:lvl3pPr marL="1143000" indent="-228600" algn="l" defTabSz="914400" rtl="0" eaLnBrk="1" latinLnBrk="0" hangingPunct="1">
+              <a:lnSpc>
+                <a:spcPct val="90000"/>
+              </a:lnSpc>
+              <a:spcBef>
+                <a:spcPts val="500"/>
+              </a:spcBef>
+              <a:buFont typeface="Arial" panose="020B0604020202020204" pitchFamily="34" charset="0"/>
+              <a:buChar char="•"/>
+              <a:defRPr sz="2000" kern="1200">
+                <a:solidFill>
+                  <a:schemeClr val="tx1"/>
+                </a:solidFill>
+                <a:latin typeface="+mn-lt"/>
+                <a:ea typeface="+mn-ea"/>
+                <a:cs typeface="+mn-cs"/>
+              </a:defRPr>
+            </a:lvl3pPr>
+            <a:lvl4pPr marL="1600200" indent="-228600" algn="l" defTabSz="914400" rtl="0" eaLnBrk="1" latinLnBrk="0" hangingPunct="1">
+              <a:lnSpc>
+                <a:spcPct val="90000"/>
+              </a:lnSpc>
+              <a:spcBef>
+                <a:spcPts val="500"/>
+              </a:spcBef>
+              <a:buFont typeface="Arial" panose="020B0604020202020204" pitchFamily="34" charset="0"/>
+              <a:buChar char="•"/>
+              <a:defRPr sz="1800" kern="1200">
+                <a:solidFill>
+                  <a:schemeClr val="tx1"/>
+                </a:solidFill>
+                <a:latin typeface="+mn-lt"/>
+                <a:ea typeface="+mn-ea"/>
+                <a:cs typeface="+mn-cs"/>
+              </a:defRPr>
+            </a:lvl4pPr>
+            <a:lvl5pPr marL="2057400" indent="-228600" algn="l" defTabSz="914400" rtl="0" eaLnBrk="1" latinLnBrk="0" hangingPunct="1">
+              <a:lnSpc>
+                <a:spcPct val="90000"/>
+              </a:lnSpc>
+              <a:spcBef>
+                <a:spcPts val="500"/>
+              </a:spcBef>
+              <a:buFont typeface="Arial" panose="020B0604020202020204" pitchFamily="34" charset="0"/>
+              <a:buChar char="•"/>
+              <a:defRPr sz="1800" kern="1200">
+                <a:solidFill>
+                  <a:schemeClr val="tx1"/>
+                </a:solidFill>
+                <a:latin typeface="+mn-lt"/>
+                <a:ea typeface="+mn-ea"/>
+                <a:cs typeface="+mn-cs"/>
+              </a:defRPr>
+            </a:lvl5pPr>
+            <a:lvl6pPr marL="2514600" indent="-228600" algn="l" defTabSz="914400" rtl="0" eaLnBrk="1" latinLnBrk="0" hangingPunct="1">
+              <a:lnSpc>
+                <a:spcPct val="90000"/>
+              </a:lnSpc>
+              <a:spcBef>
+                <a:spcPts val="500"/>
+              </a:spcBef>
+              <a:buFont typeface="Arial" panose="020B0604020202020204" pitchFamily="34" charset="0"/>
+              <a:buChar char="•"/>
+              <a:defRPr sz="1800" kern="1200">
+                <a:solidFill>
+                  <a:schemeClr val="tx1"/>
+                </a:solidFill>
+                <a:latin typeface="+mn-lt"/>
+                <a:ea typeface="+mn-ea"/>
+                <a:cs typeface="+mn-cs"/>
+              </a:defRPr>
+            </a:lvl6pPr>
+            <a:lvl7pPr marL="2971800" indent="-228600" algn="l" defTabSz="914400" rtl="0" eaLnBrk="1" latinLnBrk="0" hangingPunct="1">
+              <a:lnSpc>
+                <a:spcPct val="90000"/>
+              </a:lnSpc>
+              <a:spcBef>
+                <a:spcPts val="500"/>
+              </a:spcBef>
+              <a:buFont typeface="Arial" panose="020B0604020202020204" pitchFamily="34" charset="0"/>
+              <a:buChar char="•"/>
+              <a:defRPr sz="1800" kern="1200">
+                <a:solidFill>
+                  <a:schemeClr val="tx1"/>
+                </a:solidFill>
+                <a:latin typeface="+mn-lt"/>
+                <a:ea typeface="+mn-ea"/>
+                <a:cs typeface="+mn-cs"/>
+              </a:defRPr>
+            </a:lvl7pPr>
+            <a:lvl8pPr marL="3429000" indent="-228600" algn="l" defTabSz="914400" rtl="0" eaLnBrk="1" latinLnBrk="0" hangingPunct="1">
+              <a:lnSpc>
+                <a:spcPct val="90000"/>
+              </a:lnSpc>
+              <a:spcBef>
+                <a:spcPts val="500"/>
+              </a:spcBef>
+              <a:buFont typeface="Arial" panose="020B0604020202020204" pitchFamily="34" charset="0"/>
+              <a:buChar char="•"/>
+              <a:defRPr sz="1800" kern="1200">
+                <a:solidFill>
+                  <a:schemeClr val="tx1"/>
+                </a:solidFill>
+                <a:latin typeface="+mn-lt"/>
+                <a:ea typeface="+mn-ea"/>
+                <a:cs typeface="+mn-cs"/>
+              </a:defRPr>
+            </a:lvl8pPr>
+            <a:lvl9pPr marL="3886200" indent="-228600" algn="l" defTabSz="914400" rtl="0" eaLnBrk="1" latinLnBrk="0" hangingPunct="1">
+              <a:lnSpc>
+                <a:spcPct val="90000"/>
+              </a:lnSpc>
+              <a:spcBef>
+                <a:spcPts val="500"/>
+              </a:spcBef>
+              <a:buFont typeface="Arial" panose="020B0604020202020204" pitchFamily="34" charset="0"/>
+              <a:buChar char="•"/>
+              <a:defRPr sz="1800" kern="1200">
+                <a:solidFill>
+                  <a:schemeClr val="tx1"/>
+                </a:solidFill>
+                <a:latin typeface="+mn-lt"/>
+                <a:ea typeface="+mn-ea"/>
+                <a:cs typeface="+mn-cs"/>
+              </a:defRPr>
+            </a:lvl9pPr>
+          </a:lstStyle>
+          <a:p>
+            <a:r>
+              <a:rPr lang="en-US" dirty="0">
+                <a:ea typeface="+mn-lt"/>
+                <a:cs typeface="+mn-lt"/>
+              </a:rPr>
+              <a:t>Combine chb01 and chb21 (same person)</a:t>
+            </a:r>
+          </a:p>
+          <a:p>
+            <a:r>
+              <a:rPr lang="en-US" dirty="0">
+                <a:ea typeface="+mn-lt"/>
+                <a:cs typeface="+mn-lt"/>
+              </a:rPr>
+              <a:t>Window leakage: artificially high performance</a:t>
+            </a:r>
+          </a:p>
+          <a:p>
+            <a:r>
+              <a:rPr lang="en-US" dirty="0"/>
+              <a:t>Ensure no overlapping data across train and test</a:t>
+            </a:r>
+          </a:p>
+          <a:p>
+            <a:pPr marL="457200" lvl="1" indent="0">
+              <a:buFont typeface="Arial" panose="020B0604020202020204" pitchFamily="34" charset="0"/>
+              <a:buNone/>
+            </a:pPr>
+            <a:endParaRPr lang="en-US" dirty="0"/>
+          </a:p>
+          <a:p>
+            <a:pPr lvl="1"/>
+            <a:endParaRPr lang="en-US" dirty="0"/>
+          </a:p>
+          <a:p>
+            <a:pPr lvl="1"/>
+            <a:endParaRPr lang="en-US" dirty="0"/>
+          </a:p>
+          <a:p>
+            <a:endParaRPr lang="en-US" dirty="0"/>
+          </a:p>
+          <a:p>
+            <a:endParaRPr lang="en-US" dirty="0"/>
+          </a:p>
+        </p:txBody>
+      </p:sp>
+    </p:spTree>
+    <p:extLst>
+      <p:ext uri="{BB962C8B-B14F-4D97-AF65-F5344CB8AC3E}">
+        <p14:creationId xmlns:p14="http://schemas.microsoft.com/office/powerpoint/2010/main" val="3035042897"/>
+      </p:ext>
+    </p:extLst>
+  </p:cSld>
+  <p:clrMapOvr>
+    <a:masterClrMapping/>
+  </p:clrMapOvr>
+</p:sld>
+</file>
+
+<file path=ppt/slides/slide6.xml><?xml version="1.0" encoding="utf-8"?>
 <p:sld xmlns:a="http://schemas.openxmlformats.org/drawingml/2006/main" xmlns:r="http://schemas.openxmlformats.org/officeDocument/2006/relationships" xmlns:p="http://schemas.openxmlformats.org/presentationml/2006/main" show="0">
   <p:cSld>
     <p:bg>
@@ -7926,7 +9054,7 @@
           <a:lstStyle/>
           <a:p>
             <a:r>
-              <a:rPr lang="en-US" dirty="0"/>
+              <a:rPr lang="en-US"/>
               <a:t>Methodology: Architecture Selection</a:t>
             </a:r>
           </a:p>
@@ -7962,14 +9090,14 @@
           <a:p>
             <a:pPr lvl="1"/>
             <a:r>
-              <a:rPr lang="en-US" dirty="0">
+              <a:rPr lang="en-US">
                 <a:ea typeface="+mn-lt"/>
                 <a:cs typeface="+mn-lt"/>
               </a:rPr>
               <a:t>Classification (not temporal) </a:t>
             </a:r>
             <a:r>
-              <a:rPr lang="en-US" dirty="0">
+              <a:rPr lang="en-US">
                 <a:ea typeface="+mn-lt"/>
                 <a:cs typeface="+mn-lt"/>
                 <a:sym typeface="Wingdings" pitchFamily="2" charset="2"/>
@@ -7980,7 +9108,7 @@
           <a:p>
             <a:pPr lvl="2"/>
             <a:r>
-              <a:rPr lang="en-US" dirty="0">
+              <a:rPr lang="en-US">
                 <a:ea typeface="+mn-lt"/>
                 <a:cs typeface="+mn-lt"/>
                 <a:sym typeface="Wingdings" pitchFamily="2" charset="2"/>
@@ -7991,14 +9119,14 @@
           <a:p>
             <a:pPr lvl="2"/>
             <a:r>
-              <a:rPr lang="en-US" dirty="0">
+              <a:rPr lang="en-US">
                 <a:ea typeface="+mn-lt"/>
                 <a:cs typeface="+mn-lt"/>
                 <a:sym typeface="Wingdings" pitchFamily="2" charset="2"/>
               </a:rPr>
               <a:t>Serves as baseline because it doesn’t use sequential context</a:t>
             </a:r>
-            <a:endParaRPr lang="en-US" dirty="0">
+            <a:endParaRPr lang="en-US">
               <a:ea typeface="+mn-lt"/>
               <a:cs typeface="+mn-lt"/>
             </a:endParaRPr>
@@ -8006,14 +9134,14 @@
           <a:p>
             <a:pPr lvl="1"/>
             <a:r>
-              <a:rPr lang="en-US" dirty="0">
+              <a:rPr lang="en-US">
                 <a:ea typeface="+mn-lt"/>
                 <a:cs typeface="+mn-lt"/>
               </a:rPr>
               <a:t>With temporal data </a:t>
             </a:r>
             <a:r>
-              <a:rPr lang="en-US" dirty="0">
+              <a:rPr lang="en-US">
                 <a:ea typeface="+mn-lt"/>
                 <a:cs typeface="+mn-lt"/>
                 <a:sym typeface="Wingdings" pitchFamily="2" charset="2"/>
@@ -8024,7 +9152,7 @@
           <a:p>
             <a:pPr lvl="2"/>
             <a:r>
-              <a:rPr lang="en-US" dirty="0">
+              <a:rPr lang="en-US">
                 <a:ea typeface="+mn-lt"/>
                 <a:cs typeface="+mn-lt"/>
                 <a:sym typeface="Wingdings" pitchFamily="2" charset="2"/>
@@ -8035,14 +9163,14 @@
           <a:p>
             <a:pPr lvl="2"/>
             <a:r>
-              <a:rPr lang="en-US" i="1" dirty="0">
+              <a:rPr lang="en-US" i="1">
                 <a:ea typeface="+mn-lt"/>
                 <a:cs typeface="+mn-lt"/>
                 <a:sym typeface="Wingdings" pitchFamily="2" charset="2"/>
               </a:rPr>
               <a:t>We will discuss this later in the final submission.</a:t>
             </a:r>
-            <a:endParaRPr lang="en-US" i="1" dirty="0"/>
+            <a:endParaRPr lang="en-US" i="1"/>
           </a:p>
         </p:txBody>
       </p:sp>
@@ -8089,13 +9217,16 @@
 </p:sld>
 </file>
 
-<file path=ppt/slides/slide6.xml><?xml version="1.0" encoding="utf-8"?>
+<file path=ppt/slides/slide7.xml><?xml version="1.0" encoding="utf-8"?>
 <p:sld xmlns:a="http://schemas.openxmlformats.org/drawingml/2006/main" xmlns:r="http://schemas.openxmlformats.org/officeDocument/2006/relationships" xmlns:p="http://schemas.openxmlformats.org/presentationml/2006/main">
   <p:cSld>
     <p:bg>
       <p:bgPr>
         <a:solidFill>
-          <a:schemeClr val="bg1"/>
+          <a:schemeClr val="accent2">
+            <a:lumMod val="20000"/>
+            <a:lumOff val="80000"/>
+          </a:schemeClr>
         </a:solidFill>
         <a:effectLst/>
       </p:bgPr>
@@ -8141,18 +9272,64 @@
           <a:lstStyle/>
           <a:p>
             <a:r>
-              <a:rPr lang="en-US" dirty="0"/>
+              <a:rPr lang="en-US"/>
               <a:t>CNN Methodology Overview</a:t>
             </a:r>
+          </a:p>
+        </p:txBody>
+      </p:sp>
+      <p:sp>
+        <p:nvSpPr>
+          <p:cNvPr id="5" name="TextBox 4">
+            <a:extLst>
+              <a:ext uri="{FF2B5EF4-FFF2-40B4-BE49-F238E27FC236}">
+                <a16:creationId xmlns:a16="http://schemas.microsoft.com/office/drawing/2014/main" id="{6EA17400-C680-8583-2D68-D65FB4ED4FA7}"/>
+              </a:ext>
+            </a:extLst>
+          </p:cNvPr>
+          <p:cNvSpPr txBox="1"/>
+          <p:nvPr/>
+        </p:nvSpPr>
+        <p:spPr>
+          <a:xfrm>
+            <a:off x="646843" y="1211786"/>
+            <a:ext cx="10898313" cy="1477328"/>
+          </a:xfrm>
+          <a:prstGeom prst="rect">
+            <a:avLst/>
+          </a:prstGeom>
+          <a:noFill/>
+        </p:spPr>
+        <p:txBody>
+          <a:bodyPr wrap="square" lIns="91440" tIns="45720" rIns="91440" bIns="45720" rtlCol="0" anchor="t">
+            <a:spAutoFit/>
+          </a:bodyPr>
+          <a:lstStyle/>
+          <a:p>
+            <a:pPr marL="457200" indent="-457200">
+              <a:buFont typeface="Arial" panose="020B0604020202020204" pitchFamily="34" charset="0"/>
+              <a:buChar char="•"/>
+            </a:pPr>
+            <a:r>
+              <a:rPr lang="en-US" sz="3000"/>
+              <a:t>CNN is a simple baseline to help us see difference in data splits (patient, seizure, window)</a:t>
+            </a:r>
+          </a:p>
+          <a:p>
+            <a:pPr marL="457200" indent="-457200">
+              <a:buFont typeface="Arial" panose="020B0604020202020204" pitchFamily="34" charset="0"/>
+              <a:buChar char="•"/>
+            </a:pPr>
+            <a:endParaRPr lang="en-US" sz="3000"/>
           </a:p>
         </p:txBody>
       </p:sp>
       <p:pic>
         <p:nvPicPr>
-          <p:cNvPr id="4" name="Picture 3" descr="A diagram of a computer program&#10;&#10;AI-generated content may be incorrect.">
-            <a:extLst>
-              <a:ext uri="{FF2B5EF4-FFF2-40B4-BE49-F238E27FC236}">
-                <a16:creationId xmlns:a16="http://schemas.microsoft.com/office/drawing/2014/main" id="{16BF2CBD-9212-C0FE-899F-4385F9CB363B}"/>
+          <p:cNvPr id="2" name="Picture 1">
+            <a:extLst>
+              <a:ext uri="{FF2B5EF4-FFF2-40B4-BE49-F238E27FC236}">
+                <a16:creationId xmlns:a16="http://schemas.microsoft.com/office/drawing/2014/main" id="{CF801994-9DCA-ADD7-E37A-47B8475F1A33}"/>
               </a:ext>
             </a:extLst>
           </p:cNvPr>
@@ -8169,60 +9346,14 @@
         </p:blipFill>
         <p:spPr>
           <a:xfrm>
-            <a:off x="1803083" y="2275300"/>
-            <a:ext cx="9047480" cy="4052428"/>
+            <a:off x="1999076" y="2290368"/>
+            <a:ext cx="8393924" cy="4020279"/>
           </a:xfrm>
           <a:prstGeom prst="rect">
             <a:avLst/>
           </a:prstGeom>
         </p:spPr>
       </p:pic>
-      <p:sp>
-        <p:nvSpPr>
-          <p:cNvPr id="5" name="TextBox 4">
-            <a:extLst>
-              <a:ext uri="{FF2B5EF4-FFF2-40B4-BE49-F238E27FC236}">
-                <a16:creationId xmlns:a16="http://schemas.microsoft.com/office/drawing/2014/main" id="{6EA17400-C680-8583-2D68-D65FB4ED4FA7}"/>
-              </a:ext>
-            </a:extLst>
-          </p:cNvPr>
-          <p:cNvSpPr txBox="1"/>
-          <p:nvPr/>
-        </p:nvSpPr>
-        <p:spPr>
-          <a:xfrm>
-            <a:off x="646843" y="1211786"/>
-            <a:ext cx="10898313" cy="1477328"/>
-          </a:xfrm>
-          <a:prstGeom prst="rect">
-            <a:avLst/>
-          </a:prstGeom>
-          <a:noFill/>
-        </p:spPr>
-        <p:txBody>
-          <a:bodyPr wrap="square" lIns="91440" tIns="45720" rIns="91440" bIns="45720" rtlCol="0" anchor="t">
-            <a:spAutoFit/>
-          </a:bodyPr>
-          <a:lstStyle/>
-          <a:p>
-            <a:pPr marL="457200" indent="-457200">
-              <a:buFont typeface="Arial" panose="020B0604020202020204" pitchFamily="34" charset="0"/>
-              <a:buChar char="•"/>
-            </a:pPr>
-            <a:r>
-              <a:rPr lang="en-US" sz="3000" dirty="0"/>
-              <a:t>CNN is a simple baseline to help us see difference in data splits (patient, seizure, window)</a:t>
-            </a:r>
-          </a:p>
-          <a:p>
-            <a:pPr marL="457200" indent="-457200">
-              <a:buFont typeface="Arial" panose="020B0604020202020204" pitchFamily="34" charset="0"/>
-              <a:buChar char="•"/>
-            </a:pPr>
-            <a:endParaRPr lang="en-US" sz="3000" dirty="0"/>
-          </a:p>
-        </p:txBody>
-      </p:sp>
     </p:spTree>
     <p:extLst>
       <p:ext uri="{BB962C8B-B14F-4D97-AF65-F5344CB8AC3E}">
@@ -8236,13 +9367,16 @@
 </p:sld>
 </file>
 
-<file path=ppt/slides/slide7.xml><?xml version="1.0" encoding="utf-8"?>
+<file path=ppt/slides/slide8.xml><?xml version="1.0" encoding="utf-8"?>
 <p:sld xmlns:a="http://schemas.openxmlformats.org/drawingml/2006/main" xmlns:r="http://schemas.openxmlformats.org/officeDocument/2006/relationships" xmlns:p="http://schemas.openxmlformats.org/presentationml/2006/main">
   <p:cSld>
     <p:bg>
       <p:bgPr>
         <a:solidFill>
-          <a:schemeClr val="accent2"/>
+          <a:schemeClr val="accent2">
+            <a:lumMod val="20000"/>
+            <a:lumOff val="80000"/>
+          </a:schemeClr>
         </a:solidFill>
         <a:effectLst/>
       </p:bgPr>
@@ -8294,167 +9428,28 @@
           <a:lstStyle/>
           <a:p>
             <a:r>
-              <a:rPr lang="en-US" dirty="0"/>
+              <a:rPr lang="en-US"/>
               <a:t>LSTM Methodology Overview</a:t>
             </a:r>
           </a:p>
         </p:txBody>
       </p:sp>
-    </p:spTree>
-    <p:extLst>
-      <p:ext uri="{BB962C8B-B14F-4D97-AF65-F5344CB8AC3E}">
-        <p14:creationId xmlns:p14="http://schemas.microsoft.com/office/powerpoint/2010/main" val="2077160234"/>
-      </p:ext>
-    </p:extLst>
-  </p:cSld>
-  <p:clrMapOvr>
-    <a:masterClrMapping/>
-  </p:clrMapOvr>
-</p:sld>
-</file>
-
-<file path=ppt/slides/slide8.xml><?xml version="1.0" encoding="utf-8"?>
-<p:sld xmlns:a="http://schemas.openxmlformats.org/drawingml/2006/main" xmlns:r="http://schemas.openxmlformats.org/officeDocument/2006/relationships" xmlns:p="http://schemas.openxmlformats.org/presentationml/2006/main">
-  <p:cSld>
-    <p:bg>
-      <p:bgPr>
-        <a:solidFill>
-          <a:schemeClr val="bg1"/>
-        </a:solidFill>
-        <a:effectLst/>
-      </p:bgPr>
-    </p:bg>
-    <p:spTree>
-      <p:nvGrpSpPr>
-        <p:cNvPr id="1" name="">
-          <a:extLst>
-            <a:ext uri="{FF2B5EF4-FFF2-40B4-BE49-F238E27FC236}">
-              <a16:creationId xmlns:a16="http://schemas.microsoft.com/office/drawing/2014/main" id="{E8F7927C-1793-BE87-48EB-73E8FA9DCC0F}"/>
-            </a:ext>
-          </a:extLst>
-        </p:cNvPr>
-        <p:cNvGrpSpPr/>
-        <p:nvPr/>
-      </p:nvGrpSpPr>
-      <p:grpSpPr>
-        <a:xfrm>
-          <a:off x="0" y="0"/>
-          <a:ext cx="0" cy="0"/>
-          <a:chOff x="0" y="0"/>
-          <a:chExt cx="0" cy="0"/>
-        </a:xfrm>
-      </p:grpSpPr>
-      <p:sp useBgFill="1">
-        <p:nvSpPr>
-          <p:cNvPr id="2074" name="Rectangle 2073">
-            <a:extLst>
-              <a:ext uri="{FF2B5EF4-FFF2-40B4-BE49-F238E27FC236}">
-                <a16:creationId xmlns:a16="http://schemas.microsoft.com/office/drawing/2014/main" id="{99ED5833-B85B-4103-8A3B-CAB0308E6C15}"/>
-              </a:ext>
-              <a:ext uri="{C183D7F6-B498-43B3-948B-1728B52AA6E4}">
-                <adec:decorative xmlns:adec="http://schemas.microsoft.com/office/drawing/2017/decorative" val="1"/>
-              </a:ext>
-            </a:extLst>
-          </p:cNvPr>
-          <p:cNvSpPr>
-            <a:spLocks noGrp="1" noRot="1" noChangeAspect="1" noMove="1" noResize="1" noEditPoints="1" noAdjustHandles="1" noChangeArrowheads="1" noChangeShapeType="1" noTextEdit="1"/>
-          </p:cNvSpPr>
-          <p:nvPr>
-            <p:extLst>
-              <p:ext uri="{386F3935-93C4-4BCD-93E2-E3B085C9AB24}">
-                <p16:designElem xmlns:p16="http://schemas.microsoft.com/office/powerpoint/2015/main" val="1"/>
-              </p:ext>
-            </p:extLst>
-          </p:nvPr>
+      <p:sp>
+        <p:nvSpPr>
+          <p:cNvPr id="2" name="TextBox 1">
+            <a:extLst>
+              <a:ext uri="{FF2B5EF4-FFF2-40B4-BE49-F238E27FC236}">
+                <a16:creationId xmlns:a16="http://schemas.microsoft.com/office/drawing/2014/main" id="{9657522E-45AF-95BC-A916-6B8F10218B20}"/>
+              </a:ext>
+            </a:extLst>
+          </p:cNvPr>
+          <p:cNvSpPr txBox="1"/>
+          <p:nvPr/>
         </p:nvSpPr>
         <p:spPr>
           <a:xfrm>
-            <a:off x="-1" y="0"/>
-            <a:ext cx="12188952" cy="6858000"/>
-          </a:xfrm>
-          <a:prstGeom prst="rect">
-            <a:avLst/>
-          </a:prstGeom>
-          <a:ln>
-            <a:noFill/>
-          </a:ln>
-        </p:spPr>
-        <p:style>
-          <a:lnRef idx="2">
-            <a:schemeClr val="accent1">
-              <a:shade val="50000"/>
-            </a:schemeClr>
-          </a:lnRef>
-          <a:fillRef idx="1">
-            <a:schemeClr val="accent1"/>
-          </a:fillRef>
-          <a:effectRef idx="0">
-            <a:schemeClr val="accent1"/>
-          </a:effectRef>
-          <a:fontRef idx="minor">
-            <a:schemeClr val="lt1"/>
-          </a:fontRef>
-        </p:style>
-        <p:txBody>
-          <a:bodyPr rtlCol="0" anchor="ctr"/>
-          <a:lstStyle/>
-          <a:p>
-            <a:pPr algn="ctr"/>
-            <a:endParaRPr lang="en-US"/>
-          </a:p>
-        </p:txBody>
-      </p:sp>
-      <p:sp>
-        <p:nvSpPr>
-          <p:cNvPr id="2" name="Title 1">
-            <a:extLst>
-              <a:ext uri="{FF2B5EF4-FFF2-40B4-BE49-F238E27FC236}">
-                <a16:creationId xmlns:a16="http://schemas.microsoft.com/office/drawing/2014/main" id="{EE57B110-D5D4-F42D-4362-9F13761A2AC9}"/>
-              </a:ext>
-            </a:extLst>
-          </p:cNvPr>
-          <p:cNvSpPr>
-            <a:spLocks noGrp="1"/>
-          </p:cNvSpPr>
-          <p:nvPr>
-            <p:ph type="title"/>
-          </p:nvPr>
-        </p:nvSpPr>
-        <p:spPr>
-          <a:xfrm>
-            <a:off x="282256" y="-16373"/>
-            <a:ext cx="9795638" cy="1114380"/>
-          </a:xfrm>
-        </p:spPr>
-        <p:txBody>
-          <a:bodyPr vert="horz" lIns="91440" tIns="45720" rIns="91440" bIns="45720" rtlCol="0" anchor="b">
-            <a:normAutofit/>
-          </a:bodyPr>
-          <a:lstStyle/>
-          <a:p>
-            <a:r>
-              <a:rPr lang="en-US" sz="5200" dirty="0"/>
-              <a:t>CNN Steps</a:t>
-            </a:r>
-          </a:p>
-        </p:txBody>
-      </p:sp>
-      <p:sp>
-        <p:nvSpPr>
-          <p:cNvPr id="9" name="TextBox 8">
-            <a:extLst>
-              <a:ext uri="{FF2B5EF4-FFF2-40B4-BE49-F238E27FC236}">
-                <a16:creationId xmlns:a16="http://schemas.microsoft.com/office/drawing/2014/main" id="{F37D45D0-81CB-7E09-4D17-7E26DC899661}"/>
-              </a:ext>
-            </a:extLst>
-          </p:cNvPr>
-          <p:cNvSpPr txBox="1"/>
-          <p:nvPr/>
-        </p:nvSpPr>
-        <p:spPr>
-          <a:xfrm>
-            <a:off x="561022" y="1114380"/>
-            <a:ext cx="11066906" cy="5863144"/>
+            <a:off x="646843" y="1211786"/>
+            <a:ext cx="10898313" cy="5170646"/>
           </a:xfrm>
           <a:prstGeom prst="rect">
             <a:avLst/>
@@ -8467,13 +9462,36 @@
           </a:bodyPr>
           <a:lstStyle/>
           <a:p>
+            <a:r>
+              <a:rPr lang="en-US" sz="3000" i="1"/>
+              <a:t>Selectively preserve or discard information across time steps via learned input, forget, and output gates</a:t>
+            </a:r>
+          </a:p>
+          <a:p>
+            <a:endParaRPr lang="en-US" sz="3000" b="1"/>
+          </a:p>
+          <a:p>
+            <a:r>
+              <a:rPr lang="en-US" sz="3000" b="1"/>
+              <a:t>Two types of LSTM</a:t>
+            </a:r>
+          </a:p>
+          <a:p>
             <a:pPr marL="457200" indent="-457200">
               <a:buFont typeface="Arial" panose="020B0604020202020204" pitchFamily="34" charset="0"/>
               <a:buChar char="•"/>
             </a:pPr>
             <a:r>
-              <a:rPr lang="en-US" sz="2500" b="1" dirty="0"/>
-              <a:t>Step 1: Pre-process </a:t>
+              <a:rPr lang="en-US" sz="3000" b="1" u="sng"/>
+              <a:t>Sequential</a:t>
+            </a:r>
+            <a:r>
+              <a:rPr lang="en-US" sz="3000" b="1"/>
+              <a:t>:</a:t>
+            </a:r>
+            <a:r>
+              <a:rPr lang="en-US" sz="3000"/>
+              <a:t> train CNN, freeze weights, use it as a feature extractor</a:t>
             </a:r>
           </a:p>
           <a:p>
@@ -8482,8 +9500,26 @@
               <a:buChar char="•"/>
             </a:pPr>
             <a:r>
-              <a:rPr lang="en-US" sz="2500" dirty="0"/>
-              <a:t>Z-score normalization: dynamically per fold rather than globally (avoids leakage)</a:t>
+              <a:rPr lang="en-US" sz="3000" b="1"/>
+              <a:t>Problem:</a:t>
+            </a:r>
+            <a:r>
+              <a:rPr lang="en-US" sz="3000"/>
+              <a:t> CNN extracts from single 1-second window, might miss temporal patterns</a:t>
+            </a:r>
+          </a:p>
+          <a:p>
+            <a:pPr marL="457200" indent="-457200">
+              <a:buFont typeface="Arial" panose="020B0604020202020204" pitchFamily="34" charset="0"/>
+              <a:buChar char="•"/>
+            </a:pPr>
+            <a:r>
+              <a:rPr lang="en-US" sz="3000" b="1" u="sng"/>
+              <a:t>End-to-end:</a:t>
+            </a:r>
+            <a:r>
+              <a:rPr lang="en-US" sz="3000"/>
+              <a:t> train CNN and LSTM at same time</a:t>
             </a:r>
           </a:p>
           <a:p>
@@ -8492,8 +9528,12 @@
               <a:buChar char="•"/>
             </a:pPr>
             <a:r>
-              <a:rPr lang="en-US" sz="2500" dirty="0"/>
-              <a:t>Class balancing for both train and test </a:t>
+              <a:rPr lang="en-US" sz="3000" b="1"/>
+              <a:t>Benefit:</a:t>
+            </a:r>
+            <a:r>
+              <a:rPr lang="en-US" sz="3000"/>
+              <a:t> back propagation can give feedback to CNN </a:t>
             </a:r>
           </a:p>
           <a:p>
@@ -8501,92 +9541,17 @@
               <a:buFont typeface="Arial" panose="020B0604020202020204" pitchFamily="34" charset="0"/>
               <a:buChar char="•"/>
             </a:pPr>
-            <a:endParaRPr lang="en-US" sz="2500" dirty="0"/>
-          </a:p>
-          <a:p>
-            <a:pPr marL="457200" indent="-457200">
-              <a:buFont typeface="Arial" panose="020B0604020202020204" pitchFamily="34" charset="0"/>
-              <a:buChar char="•"/>
-            </a:pPr>
-            <a:r>
-              <a:rPr lang="en-US" sz="2500" b="1" dirty="0"/>
-              <a:t>Step 2: Training	</a:t>
-            </a:r>
-          </a:p>
-          <a:p>
-            <a:pPr marL="914400" lvl="1" indent="-457200">
-              <a:buFont typeface="Arial" panose="020B0604020202020204" pitchFamily="34" charset="0"/>
-              <a:buChar char="•"/>
-            </a:pPr>
-            <a:r>
-              <a:rPr lang="en-US" sz="2500" dirty="0"/>
-              <a:t>Conv1d: “early channel fusion” – looks 1-dimensionally at all 21 EEG electrodes simultaneously</a:t>
-            </a:r>
-          </a:p>
-          <a:p>
-            <a:pPr marL="914400" lvl="1" indent="-457200">
-              <a:buFont typeface="Arial" panose="020B0604020202020204" pitchFamily="34" charset="0"/>
-              <a:buChar char="•"/>
-            </a:pPr>
-            <a:r>
-              <a:rPr lang="en-US" sz="2500" dirty="0"/>
-              <a:t>2 training modes (50-50 Balanced vs. 80-20 Unbalanced) </a:t>
-            </a:r>
-          </a:p>
-          <a:p>
-            <a:pPr marL="914400" lvl="1" indent="-457200">
-              <a:buFont typeface="Arial" panose="020B0604020202020204" pitchFamily="34" charset="0"/>
-              <a:buChar char="•"/>
-            </a:pPr>
-            <a:r>
-              <a:rPr lang="en-US" sz="2500" dirty="0"/>
-              <a:t>Split data over 10 shards due to size</a:t>
-            </a:r>
-          </a:p>
-          <a:p>
-            <a:pPr lvl="1"/>
-            <a:endParaRPr lang="en-US" sz="2500" dirty="0"/>
-          </a:p>
-          <a:p>
-            <a:pPr marL="457200" indent="-457200">
-              <a:buFont typeface="Arial" panose="020B0604020202020204" pitchFamily="34" charset="0"/>
-              <a:buChar char="•"/>
-            </a:pPr>
-            <a:r>
-              <a:rPr lang="en-US" sz="2500" b="1" dirty="0"/>
-              <a:t>Step 3: Classification (window, seizure, patient)</a:t>
-            </a:r>
-          </a:p>
-          <a:p>
-            <a:pPr marL="914400" lvl="1" indent="-457200">
-              <a:buFont typeface="Arial" panose="020B0604020202020204" pitchFamily="34" charset="0"/>
-              <a:buChar char="•"/>
-            </a:pPr>
-            <a:r>
-              <a:rPr lang="en-US" sz="2500" dirty="0"/>
-              <a:t>Test with both balanced and unbalanced sets</a:t>
-            </a:r>
-          </a:p>
-          <a:p>
-            <a:pPr marL="457200" indent="-457200">
-              <a:buFont typeface="Arial" panose="020B0604020202020204" pitchFamily="34" charset="0"/>
-              <a:buChar char="•"/>
-            </a:pPr>
-            <a:endParaRPr lang="en-US" sz="2500" dirty="0"/>
-          </a:p>
-          <a:p>
-            <a:pPr marL="457200" indent="-457200">
-              <a:buFont typeface="Arial" panose="020B0604020202020204" pitchFamily="34" charset="0"/>
-              <a:buChar char="•"/>
-            </a:pPr>
-            <a:endParaRPr lang="en-US" sz="2500" dirty="0"/>
+            <a:r>
+              <a:rPr lang="en-US" sz="3000" b="1"/>
+              <a:t>We picked this one.</a:t>
+            </a:r>
           </a:p>
         </p:txBody>
       </p:sp>
     </p:spTree>
     <p:extLst>
       <p:ext uri="{BB962C8B-B14F-4D97-AF65-F5344CB8AC3E}">
-        <p14:creationId xmlns:p14="http://schemas.microsoft.com/office/powerpoint/2010/main" val="2120960596"/>
+        <p14:creationId xmlns:p14="http://schemas.microsoft.com/office/powerpoint/2010/main" val="2077160234"/>
       </p:ext>
     </p:extLst>
   </p:cSld>
@@ -8716,7 +9681,7 @@
           <a:lstStyle/>
           <a:p>
             <a:r>
-              <a:rPr lang="en-US" sz="5200" dirty="0"/>
+              <a:rPr lang="en-US" sz="5200"/>
               <a:t>Experimental Design</a:t>
             </a:r>
           </a:p>
@@ -8756,15 +9721,7 @@
             </a:pPr>
             <a:r>
               <a:rPr lang="en-US" sz="3000" dirty="0"/>
-              <a:t>Dataset is </a:t>
-            </a:r>
-            <a:r>
-              <a:rPr lang="en-US" sz="3000" b="1" dirty="0"/>
-              <a:t>very</a:t>
-            </a:r>
-            <a:r>
-              <a:rPr lang="en-US" sz="3000" dirty="0"/>
-              <a:t> unbalanced (~85% normal vs. 15% seizure) </a:t>
+              <a:t>Dataset is very unbalanced (~85% normal vs. 15% seizure) </a:t>
             </a:r>
           </a:p>
           <a:p>
@@ -8774,7 +9731,7 @@
             </a:pPr>
             <a:r>
               <a:rPr lang="en-US" sz="3000" dirty="0"/>
-              <a:t>3 × 2 × 2 design for different stress testing of CNN performance</a:t>
+              <a:t>3 × 2 × 2 design for different stress testing</a:t>
             </a:r>
           </a:p>
           <a:p>
